--- a/folien/05-docker-einfuehrung.pptx
+++ b/folien/05-docker-einfuehrung.pptx
@@ -21,9 +21,12 @@
     <p:sldId id="269" r:id="rId15"/>
     <p:sldId id="270" r:id="rId16"/>
     <p:sldId id="271" r:id="rId17"/>
+    <p:sldId id="272" r:id="rId18"/>
+    <p:sldId id="273" r:id="rId19"/>
+    <p:sldId id="274" r:id="rId20"/>
   </p:sldIdLst>
   <p:notesMasterIdLst>
-    <p:notesMasterId r:id="rId18"/>
+    <p:notesMasterId r:id="rId21"/>
   </p:notesMasterIdLst>
   <p:sldSz cx="9144000" cy="5143500"/>
   <p:notesSz cx="5143500" cy="9144000"/>
@@ -1157,6 +1160,270 @@
             <a:fld id="{F7021451-1387-4CA6-816F-3879F97B5CBC}" type="slidenum">
               <a:rPr lang="en-US"/>
               <a:t>16</a:t>
+            </a:fld>
+            <a:endParaRPr lang="en-US"/>
+          </a:p>
+        </p:txBody>
+      </p:sp>
+    </p:spTree>
+    <p:extLst>
+      <p:ext uri="{BB962C8B-B14F-4D97-AF65-F5344CB8AC3E}">
+        <p14:creationId xmlns:p14="http://schemas.microsoft.com/office/powerpoint/2010/main" val="1024086991"/>
+      </p:ext>
+    </p:extLst>
+  </p:cSld>
+  <p:clrMapOvr>
+    <a:masterClrMapping/>
+  </p:clrMapOvr>
+</p:notes>
+</file>
+
+<file path=ppt/notesSlides/notesSlide17.xml><?xml version="1.0" encoding="utf-8"?>
+<p:notes xmlns:a="http://schemas.openxmlformats.org/drawingml/2006/main" xmlns:r="http://schemas.openxmlformats.org/officeDocument/2006/relationships" xmlns:p="http://schemas.openxmlformats.org/presentationml/2006/main">
+  <p:cSld>
+    <p:spTree>
+      <p:nvGrpSpPr>
+        <p:cNvPr id="1" name=""/>
+        <p:cNvGrpSpPr/>
+        <p:nvPr/>
+      </p:nvGrpSpPr>
+      <p:grpSpPr>
+        <a:xfrm>
+          <a:off x="0" y="0"/>
+          <a:ext cx="0" cy="0"/>
+          <a:chOff x="0" y="0"/>
+          <a:chExt cx="0" cy="0"/>
+        </a:xfrm>
+      </p:grpSpPr>
+      <p:sp>
+        <p:nvSpPr>
+          <p:cNvPr id="2" name="Slide Image Placeholder 1"/>
+          <p:cNvSpPr>
+            <a:spLocks noGrp="1" noRot="1" noChangeAspect="1"/>
+          </p:cNvSpPr>
+          <p:nvPr>
+            <p:ph type="sldImg"/>
+          </p:nvPr>
+        </p:nvSpPr>
+        <p:spPr/>
+      </p:sp>
+      <p:sp>
+        <p:nvSpPr>
+          <p:cNvPr id="3" name="Notes Placeholder 2"/>
+          <p:cNvSpPr>
+            <a:spLocks noGrp="1"/>
+          </p:cNvSpPr>
+          <p:nvPr>
+            <p:ph type="body" idx="1"/>
+          </p:nvPr>
+        </p:nvSpPr>
+        <p:spPr/>
+        <p:txBody>
+          <a:bodyPr/>
+          <a:lstStyle/>
+          <a:p>
+            <a:r>
+              <a:rPr lang="en-US" dirty="0"/>
+              <a:t/>
+            </a:r>
+            <a:endParaRPr lang="en-US" dirty="0"/>
+          </a:p>
+        </p:txBody>
+      </p:sp>
+      <p:sp>
+        <p:nvSpPr>
+          <p:cNvPr id="4" name="Slide Number Placeholder 3"/>
+          <p:cNvSpPr>
+            <a:spLocks noGrp="1"/>
+          </p:cNvSpPr>
+          <p:nvPr>
+            <p:ph type="sldNum" sz="quarter" idx="10"/>
+          </p:nvPr>
+        </p:nvSpPr>
+        <p:spPr/>
+        <p:txBody>
+          <a:bodyPr/>
+          <a:lstStyle/>
+          <a:p>
+            <a:fld id="{F7021451-1387-4CA6-816F-3879F97B5CBC}" type="slidenum">
+              <a:rPr lang="en-US"/>
+              <a:t>17</a:t>
+            </a:fld>
+            <a:endParaRPr lang="en-US"/>
+          </a:p>
+        </p:txBody>
+      </p:sp>
+    </p:spTree>
+    <p:extLst>
+      <p:ext uri="{BB962C8B-B14F-4D97-AF65-F5344CB8AC3E}">
+        <p14:creationId xmlns:p14="http://schemas.microsoft.com/office/powerpoint/2010/main" val="1024086991"/>
+      </p:ext>
+    </p:extLst>
+  </p:cSld>
+  <p:clrMapOvr>
+    <a:masterClrMapping/>
+  </p:clrMapOvr>
+</p:notes>
+</file>
+
+<file path=ppt/notesSlides/notesSlide18.xml><?xml version="1.0" encoding="utf-8"?>
+<p:notes xmlns:a="http://schemas.openxmlformats.org/drawingml/2006/main" xmlns:r="http://schemas.openxmlformats.org/officeDocument/2006/relationships" xmlns:p="http://schemas.openxmlformats.org/presentationml/2006/main">
+  <p:cSld>
+    <p:spTree>
+      <p:nvGrpSpPr>
+        <p:cNvPr id="1" name=""/>
+        <p:cNvGrpSpPr/>
+        <p:nvPr/>
+      </p:nvGrpSpPr>
+      <p:grpSpPr>
+        <a:xfrm>
+          <a:off x="0" y="0"/>
+          <a:ext cx="0" cy="0"/>
+          <a:chOff x="0" y="0"/>
+          <a:chExt cx="0" cy="0"/>
+        </a:xfrm>
+      </p:grpSpPr>
+      <p:sp>
+        <p:nvSpPr>
+          <p:cNvPr id="2" name="Slide Image Placeholder 1"/>
+          <p:cNvSpPr>
+            <a:spLocks noGrp="1" noRot="1" noChangeAspect="1"/>
+          </p:cNvSpPr>
+          <p:nvPr>
+            <p:ph type="sldImg"/>
+          </p:nvPr>
+        </p:nvSpPr>
+        <p:spPr/>
+      </p:sp>
+      <p:sp>
+        <p:nvSpPr>
+          <p:cNvPr id="3" name="Notes Placeholder 2"/>
+          <p:cNvSpPr>
+            <a:spLocks noGrp="1"/>
+          </p:cNvSpPr>
+          <p:nvPr>
+            <p:ph type="body" idx="1"/>
+          </p:nvPr>
+        </p:nvSpPr>
+        <p:spPr/>
+        <p:txBody>
+          <a:bodyPr/>
+          <a:lstStyle/>
+          <a:p>
+            <a:r>
+              <a:rPr lang="en-US" dirty="0"/>
+              <a:t/>
+            </a:r>
+            <a:endParaRPr lang="en-US" dirty="0"/>
+          </a:p>
+        </p:txBody>
+      </p:sp>
+      <p:sp>
+        <p:nvSpPr>
+          <p:cNvPr id="4" name="Slide Number Placeholder 3"/>
+          <p:cNvSpPr>
+            <a:spLocks noGrp="1"/>
+          </p:cNvSpPr>
+          <p:nvPr>
+            <p:ph type="sldNum" sz="quarter" idx="10"/>
+          </p:nvPr>
+        </p:nvSpPr>
+        <p:spPr/>
+        <p:txBody>
+          <a:bodyPr/>
+          <a:lstStyle/>
+          <a:p>
+            <a:fld id="{F7021451-1387-4CA6-816F-3879F97B5CBC}" type="slidenum">
+              <a:rPr lang="en-US"/>
+              <a:t>18</a:t>
+            </a:fld>
+            <a:endParaRPr lang="en-US"/>
+          </a:p>
+        </p:txBody>
+      </p:sp>
+    </p:spTree>
+    <p:extLst>
+      <p:ext uri="{BB962C8B-B14F-4D97-AF65-F5344CB8AC3E}">
+        <p14:creationId xmlns:p14="http://schemas.microsoft.com/office/powerpoint/2010/main" val="1024086991"/>
+      </p:ext>
+    </p:extLst>
+  </p:cSld>
+  <p:clrMapOvr>
+    <a:masterClrMapping/>
+  </p:clrMapOvr>
+</p:notes>
+</file>
+
+<file path=ppt/notesSlides/notesSlide19.xml><?xml version="1.0" encoding="utf-8"?>
+<p:notes xmlns:a="http://schemas.openxmlformats.org/drawingml/2006/main" xmlns:r="http://schemas.openxmlformats.org/officeDocument/2006/relationships" xmlns:p="http://schemas.openxmlformats.org/presentationml/2006/main">
+  <p:cSld>
+    <p:spTree>
+      <p:nvGrpSpPr>
+        <p:cNvPr id="1" name=""/>
+        <p:cNvGrpSpPr/>
+        <p:nvPr/>
+      </p:nvGrpSpPr>
+      <p:grpSpPr>
+        <a:xfrm>
+          <a:off x="0" y="0"/>
+          <a:ext cx="0" cy="0"/>
+          <a:chOff x="0" y="0"/>
+          <a:chExt cx="0" cy="0"/>
+        </a:xfrm>
+      </p:grpSpPr>
+      <p:sp>
+        <p:nvSpPr>
+          <p:cNvPr id="2" name="Slide Image Placeholder 1"/>
+          <p:cNvSpPr>
+            <a:spLocks noGrp="1" noRot="1" noChangeAspect="1"/>
+          </p:cNvSpPr>
+          <p:nvPr>
+            <p:ph type="sldImg"/>
+          </p:nvPr>
+        </p:nvSpPr>
+        <p:spPr/>
+      </p:sp>
+      <p:sp>
+        <p:nvSpPr>
+          <p:cNvPr id="3" name="Notes Placeholder 2"/>
+          <p:cNvSpPr>
+            <a:spLocks noGrp="1"/>
+          </p:cNvSpPr>
+          <p:nvPr>
+            <p:ph type="body" idx="1"/>
+          </p:nvPr>
+        </p:nvSpPr>
+        <p:spPr/>
+        <p:txBody>
+          <a:bodyPr/>
+          <a:lstStyle/>
+          <a:p>
+            <a:r>
+              <a:rPr lang="en-US" dirty="0"/>
+              <a:t/>
+            </a:r>
+            <a:endParaRPr lang="en-US" dirty="0"/>
+          </a:p>
+        </p:txBody>
+      </p:sp>
+      <p:sp>
+        <p:nvSpPr>
+          <p:cNvPr id="4" name="Slide Number Placeholder 3"/>
+          <p:cNvSpPr>
+            <a:spLocks noGrp="1"/>
+          </p:cNvSpPr>
+          <p:nvPr>
+            <p:ph type="sldNum" sz="quarter" idx="10"/>
+          </p:nvPr>
+        </p:nvSpPr>
+        <p:spPr/>
+        <p:txBody>
+          <a:bodyPr/>
+          <a:lstStyle/>
+          <a:p>
+            <a:fld id="{F7021451-1387-4CA6-816F-3879F97B5CBC}" type="slidenum">
+              <a:rPr lang="en-US"/>
+              <a:t>19</a:t>
             </a:fld>
             <a:endParaRPr lang="en-US"/>
           </a:p>
@@ -2473,48 +2740,150 @@
         </p:nvSpPr>
         <p:spPr>
           <a:xfrm>
-            <a:off x="6355080" y="0"/>
-            <a:ext cx="2788920" cy="5143500"/>
+            <a:off x="566928" y="201168"/>
+            <a:ext cx="475488" cy="50292"/>
           </a:xfrm>
           <a:prstGeom prst="rect">
             <a:avLst/>
           </a:prstGeom>
           <a:solidFill>
-            <a:srgbClr val="FBF2E3"/>
+            <a:srgbClr val="0F7C86"/>
           </a:solidFill>
           <a:ln/>
         </p:spPr>
       </p:sp>
       <p:sp>
         <p:nvSpPr>
-          <p:cNvPr id="3" name="Shape 1"/>
-          <p:cNvSpPr/>
-          <p:nvPr/>
-        </p:nvSpPr>
-        <p:spPr>
-          <a:xfrm>
-            <a:off x="6355080" y="0"/>
-            <a:ext cx="45720" cy="5143500"/>
+          <p:cNvPr id="3" name="Text 1"/>
+          <p:cNvSpPr/>
+          <p:nvPr/>
+        </p:nvSpPr>
+        <p:spPr>
+          <a:xfrm>
+            <a:off x="566928" y="384048"/>
+            <a:ext cx="8010144" cy="237744"/>
+          </a:xfrm>
+          <a:prstGeom prst="rect">
+            <a:avLst/>
+          </a:prstGeom>
+          <a:noFill/>
+          <a:ln/>
+        </p:spPr>
+        <p:txBody>
+          <a:bodyPr wrap="square" lIns="0" tIns="0" rIns="0" bIns="0" rtlCol="0" anchor="ctr"/>
+          <a:lstStyle/>
+          <a:p>
+            <a:pPr indent="0" marL="0">
+              <a:buNone/>
+            </a:pPr>
+            <a:r>
+              <a:rPr lang="en-US" sz="1150" b="1" spc="180" kern="0" dirty="0">
+                <a:solidFill>
+                  <a:srgbClr val="0F7C86"/>
+                </a:solidFill>
+                <a:latin typeface="Arial" pitchFamily="34" charset="0"/>
+                <a:ea typeface="Arial" pitchFamily="34" charset="-122"/>
+                <a:cs typeface="Arial" pitchFamily="34" charset="-120"/>
+              </a:rPr>
+              <a:t>DER LEBENSZYKLUS</a:t>
+            </a:r>
+            <a:endParaRPr lang="en-US" sz="1150" dirty="0"/>
+          </a:p>
+        </p:txBody>
+      </p:sp>
+      <p:sp>
+        <p:nvSpPr>
+          <p:cNvPr id="4" name="Text 2"/>
+          <p:cNvSpPr/>
+          <p:nvPr/>
+        </p:nvSpPr>
+        <p:spPr>
+          <a:xfrm>
+            <a:off x="566928" y="731520"/>
+            <a:ext cx="8010144" cy="603504"/>
+          </a:xfrm>
+          <a:prstGeom prst="rect">
+            <a:avLst/>
+          </a:prstGeom>
+          <a:noFill/>
+          <a:ln/>
+        </p:spPr>
+        <p:txBody>
+          <a:bodyPr wrap="square" lIns="0" tIns="0" rIns="0" bIns="0" rtlCol="0" anchor="t"/>
+          <a:lstStyle/>
+          <a:p>
+            <a:pPr indent="0" marL="0">
+              <a:buNone/>
+            </a:pPr>
+            <a:r>
+              <a:rPr lang="en-US" sz="2600" b="1" dirty="0">
+                <a:solidFill>
+                  <a:srgbClr val="272E52"/>
+                </a:solidFill>
+                <a:latin typeface="Arial" pitchFamily="34" charset="0"/>
+                <a:ea typeface="Arial" pitchFamily="34" charset="-122"/>
+                <a:cs typeface="Arial" pitchFamily="34" charset="-120"/>
+              </a:rPr>
+              <a:t>Wo ist mein Container hin?</a:t>
+            </a:r>
+            <a:endParaRPr lang="en-US" sz="2600" dirty="0"/>
+          </a:p>
+        </p:txBody>
+      </p:sp>
+      <p:pic>
+        <p:nvPicPr>
+          <p:cNvPr id="5" name="Image 0" descr="/Users/jacobmenge/Desktop/kurs-26.2b-orga/folienwerkstatt/assets/diagramme/container-leben.png">    </p:cNvPr>
+          <p:cNvPicPr>
+            <a:picLocks noChangeAspect="1"/>
+          </p:cNvPicPr>
+          <p:nvPr/>
+        </p:nvPicPr>
+        <p:blipFill>
+          <a:blip r:embed="rId1"/>
+          <a:stretch>
+            <a:fillRect/>
+          </a:stretch>
+        </p:blipFill>
+        <p:spPr>
+          <a:xfrm>
+            <a:off x="566928" y="1554480"/>
+            <a:ext cx="8010144" cy="2194560"/>
+          </a:xfrm>
+          <a:prstGeom prst="rect">
+            <a:avLst/>
+          </a:prstGeom>
+        </p:spPr>
+      </p:pic>
+      <p:sp>
+        <p:nvSpPr>
+          <p:cNvPr id="6" name="Shape 3"/>
+          <p:cNvSpPr/>
+          <p:nvPr/>
+        </p:nvSpPr>
+        <p:spPr>
+          <a:xfrm>
+            <a:off x="566928" y="4023360"/>
+            <a:ext cx="32004" cy="256032"/>
           </a:xfrm>
           <a:prstGeom prst="rect">
             <a:avLst/>
           </a:prstGeom>
           <a:solidFill>
-            <a:srgbClr val="9A6310"/>
+            <a:srgbClr val="0F7C86"/>
           </a:solidFill>
           <a:ln/>
         </p:spPr>
       </p:sp>
       <p:sp>
         <p:nvSpPr>
-          <p:cNvPr id="4" name="Text 2"/>
-          <p:cNvSpPr/>
-          <p:nvPr/>
-        </p:nvSpPr>
-        <p:spPr>
-          <a:xfrm>
-            <a:off x="6629400" y="1463040"/>
-            <a:ext cx="2194560" cy="1737360"/>
+          <p:cNvPr id="7" name="Text 4"/>
+          <p:cNvSpPr/>
+          <p:nvPr/>
+        </p:nvSpPr>
+        <p:spPr>
+          <a:xfrm>
+            <a:off x="749808" y="3977640"/>
+            <a:ext cx="7827264" cy="402336"/>
           </a:xfrm>
           <a:prstGeom prst="rect">
             <a:avLst/>
@@ -2526,109 +2895,73 @@
           <a:bodyPr wrap="square" lIns="0" tIns="0" rIns="0" bIns="0" rtlCol="0" anchor="ctr"/>
           <a:lstStyle/>
           <a:p>
-            <a:pPr algn="ctr" indent="0" marL="0">
-              <a:buNone/>
-            </a:pPr>
-            <a:r>
-              <a:rPr lang="en-US" sz="8400" b="1" dirty="0">
-                <a:solidFill>
-                  <a:srgbClr val="9A6310"/>
-                </a:solidFill>
-                <a:latin typeface="Arial" pitchFamily="34" charset="0"/>
-                <a:ea typeface="Arial" pitchFamily="34" charset="-122"/>
-                <a:cs typeface="Arial" pitchFamily="34" charset="-120"/>
-              </a:rPr>
-              <a:t>02</a:t>
-            </a:r>
-            <a:endParaRPr lang="en-US" sz="8400" dirty="0"/>
-          </a:p>
-        </p:txBody>
-      </p:sp>
-      <p:sp>
-        <p:nvSpPr>
-          <p:cNvPr id="5" name="Shape 3"/>
-          <p:cNvSpPr/>
-          <p:nvPr/>
-        </p:nvSpPr>
-        <p:spPr>
-          <a:xfrm>
-            <a:off x="566928" y="1883664"/>
-            <a:ext cx="475488" cy="50292"/>
-          </a:xfrm>
-          <a:prstGeom prst="rect">
-            <a:avLst/>
-          </a:prstGeom>
-          <a:solidFill>
-            <a:srgbClr val="9A6310"/>
-          </a:solidFill>
-          <a:ln/>
-        </p:spPr>
-      </p:sp>
-      <p:sp>
-        <p:nvSpPr>
-          <p:cNvPr id="6" name="Text 4"/>
-          <p:cNvSpPr/>
-          <p:nvPr/>
-        </p:nvSpPr>
-        <p:spPr>
-          <a:xfrm>
-            <a:off x="566928" y="2084832"/>
-            <a:ext cx="5394960" cy="868680"/>
-          </a:xfrm>
-          <a:prstGeom prst="rect">
-            <a:avLst/>
-          </a:prstGeom>
-          <a:noFill/>
-          <a:ln/>
-        </p:spPr>
-        <p:txBody>
-          <a:bodyPr wrap="square" lIns="0" tIns="0" rIns="0" bIns="0" rtlCol="0" anchor="t"/>
-          <a:lstStyle/>
-          <a:p>
-            <a:pPr indent="0" marL="0">
-              <a:buNone/>
-            </a:pPr>
-            <a:r>
-              <a:rPr lang="en-US" sz="3000" b="1" dirty="0">
-                <a:solidFill>
-                  <a:srgbClr val="272E52"/>
-                </a:solidFill>
-                <a:latin typeface="Arial" pitchFamily="34" charset="0"/>
-                <a:ea typeface="Arial" pitchFamily="34" charset="-122"/>
-                <a:cs typeface="Arial" pitchFamily="34" charset="-120"/>
-              </a:rPr>
-              <a:t>Erster Container, eigenes Image</a:t>
-            </a:r>
-            <a:endParaRPr lang="en-US" sz="3000" dirty="0"/>
-          </a:p>
-        </p:txBody>
-      </p:sp>
-      <p:sp>
-        <p:nvSpPr>
-          <p:cNvPr id="7" name="Text 5"/>
-          <p:cNvSpPr/>
-          <p:nvPr/>
-        </p:nvSpPr>
-        <p:spPr>
-          <a:xfrm>
-            <a:off x="566928" y="3017520"/>
-            <a:ext cx="5394960" cy="548640"/>
-          </a:xfrm>
-          <a:prstGeom prst="rect">
-            <a:avLst/>
-          </a:prstGeom>
-          <a:noFill/>
-          <a:ln/>
-        </p:spPr>
-        <p:txBody>
-          <a:bodyPr wrap="square" lIns="0" tIns="0" rIns="0" bIns="0" rtlCol="0" anchor="t"/>
-          <a:lstStyle/>
-          <a:p>
-            <a:pPr indent="0" marL="0">
-              <a:buNone/>
-            </a:pPr>
-            <a:r>
-              <a:rPr lang="en-US" sz="1350" dirty="0">
+            <a:pPr indent="0" marL="0">
+              <a:buNone/>
+            </a:pPr>
+            <a:r>
+              <a:rPr lang="en-US" sz="1200" b="1" dirty="0">
+                <a:solidFill>
+                  <a:srgbClr val="434A63"/>
+                </a:solidFill>
+                <a:latin typeface="Arial" pitchFamily="34" charset="0"/>
+                <a:ea typeface="Arial" pitchFamily="34" charset="-122"/>
+                <a:cs typeface="Arial" pitchFamily="34" charset="-120"/>
+              </a:rPr>
+              <a:t>Diese Frage kommt gleich in der Übung garantiert – jetzt kennt ihr die Antwort schon.</a:t>
+            </a:r>
+            <a:endParaRPr lang="en-US" sz="1200" dirty="0"/>
+          </a:p>
+        </p:txBody>
+      </p:sp>
+      <p:sp>
+        <p:nvSpPr>
+          <p:cNvPr id="8" name="Shape 5"/>
+          <p:cNvSpPr/>
+          <p:nvPr/>
+        </p:nvSpPr>
+        <p:spPr>
+          <a:xfrm>
+            <a:off x="566928" y="4631436"/>
+            <a:ext cx="8010144" cy="0"/>
+          </a:xfrm>
+          <a:prstGeom prst="line">
+            <a:avLst/>
+          </a:prstGeom>
+          <a:noFill/>
+          <a:ln w="9525">
+            <a:solidFill>
+              <a:srgbClr val="DFE3F0"/>
+            </a:solidFill>
+            <a:prstDash val="solid"/>
+          </a:ln>
+        </p:spPr>
+      </p:sp>
+      <p:sp>
+        <p:nvSpPr>
+          <p:cNvPr id="9" name="Text 6"/>
+          <p:cNvSpPr/>
+          <p:nvPr/>
+        </p:nvSpPr>
+        <p:spPr>
+          <a:xfrm>
+            <a:off x="566928" y="4722876"/>
+            <a:ext cx="5029200" cy="237744"/>
+          </a:xfrm>
+          <a:prstGeom prst="rect">
+            <a:avLst/>
+          </a:prstGeom>
+          <a:noFill/>
+          <a:ln/>
+        </p:spPr>
+        <p:txBody>
+          <a:bodyPr wrap="square" lIns="0" tIns="0" rIns="0" bIns="0" rtlCol="0" anchor="ctr"/>
+          <a:lstStyle/>
+          <a:p>
+            <a:pPr indent="0" marL="0">
+              <a:buNone/>
+            </a:pPr>
+            <a:r>
+              <a:rPr lang="en-US" sz="1050" spc="30" kern="0" dirty="0">
                 <a:solidFill>
                   <a:srgbClr val="5C6377"/>
                 </a:solidFill>
@@ -2636,9 +2969,48 @@
                 <a:ea typeface="Arial" pitchFamily="34" charset="-122"/>
                 <a:cs typeface="Arial" pitchFamily="34" charset="-120"/>
               </a:rPr>
-              <a:t>50 Minuten in Gruppen</a:t>
-            </a:r>
-            <a:endParaRPr lang="en-US" sz="1350" dirty="0"/>
+              <a:t>Warum Docker?</a:t>
+            </a:r>
+            <a:endParaRPr lang="en-US" sz="1050" dirty="0"/>
+          </a:p>
+        </p:txBody>
+      </p:sp>
+      <p:sp>
+        <p:nvSpPr>
+          <p:cNvPr id="10" name="Text 7"/>
+          <p:cNvSpPr/>
+          <p:nvPr/>
+        </p:nvSpPr>
+        <p:spPr>
+          <a:xfrm>
+            <a:off x="8028432" y="4722876"/>
+            <a:ext cx="548640" cy="237744"/>
+          </a:xfrm>
+          <a:prstGeom prst="rect">
+            <a:avLst/>
+          </a:prstGeom>
+          <a:noFill/>
+          <a:ln/>
+        </p:spPr>
+        <p:txBody>
+          <a:bodyPr wrap="square" lIns="0" tIns="0" rIns="0" bIns="0" rtlCol="0" anchor="ctr"/>
+          <a:lstStyle/>
+          <a:p>
+            <a:pPr algn="r" indent="0" marL="0">
+              <a:buNone/>
+            </a:pPr>
+            <a:r>
+              <a:rPr lang="en-US" sz="1050" dirty="0">
+                <a:solidFill>
+                  <a:srgbClr val="5C6377"/>
+                </a:solidFill>
+                <a:latin typeface="Arial" pitchFamily="34" charset="0"/>
+                <a:ea typeface="Arial" pitchFamily="34" charset="-122"/>
+                <a:cs typeface="Arial" pitchFamily="34" charset="-120"/>
+              </a:rPr>
+              <a:t>8/15</a:t>
+            </a:r>
+            <a:endParaRPr lang="en-US" sz="1050" dirty="0"/>
           </a:p>
         </p:txBody>
       </p:sp>
@@ -2689,7 +3061,7 @@
             <a:avLst/>
           </a:prstGeom>
           <a:solidFill>
-            <a:srgbClr val="9A6310"/>
+            <a:srgbClr val="0F7C86"/>
           </a:solidFill>
           <a:ln/>
         </p:spPr>
@@ -2721,13 +3093,13 @@
             <a:r>
               <a:rPr lang="en-US" sz="1150" b="1" spc="180" kern="0" dirty="0">
                 <a:solidFill>
-                  <a:srgbClr val="9A6310"/>
-                </a:solidFill>
-                <a:latin typeface="Arial" pitchFamily="34" charset="0"/>
-                <a:ea typeface="Arial" pitchFamily="34" charset="-122"/>
-                <a:cs typeface="Arial" pitchFamily="34" charset="-120"/>
-              </a:rPr>
-              <a:t>BREAKOUT · 50 MINUTEN</a:t>
+                  <a:srgbClr val="0F7C86"/>
+                </a:solidFill>
+                <a:latin typeface="Arial" pitchFamily="34" charset="0"/>
+                <a:ea typeface="Arial" pitchFamily="34" charset="-122"/>
+                <a:cs typeface="Arial" pitchFamily="34" charset="-120"/>
+              </a:rPr>
+              <a:t>DAS DOCKERFILE</a:t>
             </a:r>
             <a:endParaRPr lang="en-US" sz="1150" dirty="0"/>
           </a:p>
@@ -2766,42 +3138,66 @@
                 <a:ea typeface="Arial" pitchFamily="34" charset="-122"/>
                 <a:cs typeface="Arial" pitchFamily="34" charset="-120"/>
               </a:rPr>
-              <a:t>Der Auftrag</a:t>
+              <a:t>Ein eigenes Image bauen</a:t>
             </a:r>
             <a:endParaRPr lang="en-US" sz="2600" dirty="0"/>
           </a:p>
         </p:txBody>
       </p:sp>
-      <p:sp>
-        <p:nvSpPr>
-          <p:cNvPr id="5" name="Shape 3"/>
-          <p:cNvSpPr/>
-          <p:nvPr/>
-        </p:nvSpPr>
-        <p:spPr>
-          <a:xfrm>
-            <a:off x="438912" y="1828800"/>
-            <a:ext cx="8266176" cy="402336"/>
+      <p:pic>
+        <p:nvPicPr>
+          <p:cNvPr id="5" name="Image 0" descr="/Users/jacobmenge/Desktop/kurs-26.2b-orga/folienwerkstatt/assets/diagramme/dockerfile-weg.png">    </p:cNvPr>
+          <p:cNvPicPr>
+            <a:picLocks noChangeAspect="1"/>
+          </p:cNvPicPr>
+          <p:nvPr/>
+        </p:nvPicPr>
+        <p:blipFill>
+          <a:blip r:embed="rId1"/>
+          <a:stretch>
+            <a:fillRect/>
+          </a:stretch>
+        </p:blipFill>
+        <p:spPr>
+          <a:xfrm>
+            <a:off x="566928" y="1463040"/>
+            <a:ext cx="8010144" cy="2450592"/>
+          </a:xfrm>
+          <a:prstGeom prst="rect">
+            <a:avLst/>
+          </a:prstGeom>
+        </p:spPr>
+      </p:pic>
+      <p:sp>
+        <p:nvSpPr>
+          <p:cNvPr id="6" name="Shape 3"/>
+          <p:cNvSpPr/>
+          <p:nvPr/>
+        </p:nvSpPr>
+        <p:spPr>
+          <a:xfrm>
+            <a:off x="566928" y="4114800"/>
+            <a:ext cx="32004" cy="256032"/>
           </a:xfrm>
           <a:prstGeom prst="rect">
             <a:avLst/>
           </a:prstGeom>
           <a:solidFill>
-            <a:srgbClr val="F5F6FC"/>
+            <a:srgbClr val="0F7C86"/>
           </a:solidFill>
           <a:ln/>
         </p:spPr>
       </p:sp>
       <p:sp>
         <p:nvSpPr>
-          <p:cNvPr id="6" name="Text 4"/>
-          <p:cNvSpPr/>
-          <p:nvPr/>
-        </p:nvSpPr>
-        <p:spPr>
-          <a:xfrm>
-            <a:off x="566928" y="1828800"/>
-            <a:ext cx="914400" cy="402336"/>
+          <p:cNvPr id="7" name="Text 4"/>
+          <p:cNvSpPr/>
+          <p:nvPr/>
+        </p:nvSpPr>
+        <p:spPr>
+          <a:xfrm>
+            <a:off x="749808" y="4069080"/>
+            <a:ext cx="7827264" cy="402336"/>
           </a:xfrm>
           <a:prstGeom prst="rect">
             <a:avLst/>
@@ -2817,46 +3213,7 @@
               <a:buNone/>
             </a:pPr>
             <a:r>
-              <a:rPr lang="en-US" sz="1150" b="1" dirty="0">
-                <a:solidFill>
-                  <a:srgbClr val="9A6310"/>
-                </a:solidFill>
-                <a:latin typeface="Courier New" pitchFamily="34" charset="0"/>
-                <a:ea typeface="Courier New" pitchFamily="34" charset="-122"/>
-                <a:cs typeface="Courier New" pitchFamily="34" charset="-120"/>
-              </a:rPr>
-              <a:t>Teil 1</a:t>
-            </a:r>
-            <a:endParaRPr lang="en-US" sz="1150" dirty="0"/>
-          </a:p>
-        </p:txBody>
-      </p:sp>
-      <p:sp>
-        <p:nvSpPr>
-          <p:cNvPr id="7" name="Text 5"/>
-          <p:cNvSpPr/>
-          <p:nvPr/>
-        </p:nvSpPr>
-        <p:spPr>
-          <a:xfrm>
-            <a:off x="1481328" y="1828800"/>
-            <a:ext cx="7095744" cy="402336"/>
-          </a:xfrm>
-          <a:prstGeom prst="rect">
-            <a:avLst/>
-          </a:prstGeom>
-          <a:noFill/>
-          <a:ln/>
-        </p:spPr>
-        <p:txBody>
-          <a:bodyPr wrap="square" lIns="0" tIns="0" rIns="0" bIns="0" rtlCol="0" anchor="ctr"/>
-          <a:lstStyle/>
-          <a:p>
-            <a:pPr indent="0" marL="0">
-              <a:buNone/>
-            </a:pPr>
-            <a:r>
-              <a:rPr lang="en-US" sz="1150" dirty="0">
+              <a:rPr lang="en-US" sz="1200" b="1" dirty="0">
                 <a:solidFill>
                   <a:srgbClr val="434A63"/>
                 </a:solidFill>
@@ -2864,338 +3221,15 @@
                 <a:ea typeface="Arial" pitchFamily="34" charset="-122"/>
                 <a:cs typeface="Arial" pitchFamily="34" charset="-120"/>
               </a:rPr>
-              <a:t>Erste Schritte: hello-world, dann nginx mit Port – Container starten, ansehen, aufräumen</a:t>
-            </a:r>
-            <a:endParaRPr lang="en-US" sz="1150" dirty="0"/>
-          </a:p>
-        </p:txBody>
-      </p:sp>
-      <p:sp>
-        <p:nvSpPr>
-          <p:cNvPr id="8" name="Text 6"/>
-          <p:cNvSpPr/>
-          <p:nvPr/>
-        </p:nvSpPr>
-        <p:spPr>
-          <a:xfrm>
-            <a:off x="566928" y="2231136"/>
-            <a:ext cx="914400" cy="402336"/>
-          </a:xfrm>
-          <a:prstGeom prst="rect">
-            <a:avLst/>
-          </a:prstGeom>
-          <a:noFill/>
-          <a:ln/>
-        </p:spPr>
-        <p:txBody>
-          <a:bodyPr wrap="square" lIns="0" tIns="0" rIns="0" bIns="0" rtlCol="0" anchor="ctr"/>
-          <a:lstStyle/>
-          <a:p>
-            <a:pPr indent="0" marL="0">
-              <a:buNone/>
-            </a:pPr>
-            <a:r>
-              <a:rPr lang="en-US" sz="1150" b="1" dirty="0">
-                <a:solidFill>
-                  <a:srgbClr val="9A6310"/>
-                </a:solidFill>
-                <a:latin typeface="Courier New" pitchFamily="34" charset="0"/>
-                <a:ea typeface="Courier New" pitchFamily="34" charset="-122"/>
-                <a:cs typeface="Courier New" pitchFamily="34" charset="-120"/>
-              </a:rPr>
-              <a:t>Teil 2</a:t>
-            </a:r>
-            <a:endParaRPr lang="en-US" sz="1150" dirty="0"/>
-          </a:p>
-        </p:txBody>
-      </p:sp>
-      <p:sp>
-        <p:nvSpPr>
-          <p:cNvPr id="9" name="Text 7"/>
-          <p:cNvSpPr/>
-          <p:nvPr/>
-        </p:nvSpPr>
-        <p:spPr>
-          <a:xfrm>
-            <a:off x="1481328" y="2231136"/>
-            <a:ext cx="7095744" cy="402336"/>
-          </a:xfrm>
-          <a:prstGeom prst="rect">
-            <a:avLst/>
-          </a:prstGeom>
-          <a:noFill/>
-          <a:ln/>
-        </p:spPr>
-        <p:txBody>
-          <a:bodyPr wrap="square" lIns="0" tIns="0" rIns="0" bIns="0" rtlCol="0" anchor="ctr"/>
-          <a:lstStyle/>
-          <a:p>
-            <a:pPr indent="0" marL="0">
-              <a:buNone/>
-            </a:pPr>
-            <a:r>
-              <a:rPr lang="en-US" sz="1150" dirty="0">
-                <a:solidFill>
-                  <a:srgbClr val="434A63"/>
-                </a:solidFill>
-                <a:latin typeface="Arial" pitchFamily="34" charset="0"/>
-                <a:ea typeface="Arial" pitchFamily="34" charset="-122"/>
-                <a:cs typeface="Arial" pitchFamily="34" charset="-120"/>
-              </a:rPr>
-              <a:t>Kür: ein eigenes Image – kleine Webseite, Dockerfile, bauen, starten</a:t>
-            </a:r>
-            <a:endParaRPr lang="en-US" sz="1150" dirty="0"/>
-          </a:p>
-        </p:txBody>
-      </p:sp>
-      <p:sp>
-        <p:nvSpPr>
-          <p:cNvPr id="10" name="Shape 8"/>
-          <p:cNvSpPr/>
-          <p:nvPr/>
-        </p:nvSpPr>
-        <p:spPr>
-          <a:xfrm>
-            <a:off x="438912" y="2633472"/>
-            <a:ext cx="8266176" cy="402336"/>
-          </a:xfrm>
-          <a:prstGeom prst="rect">
-            <a:avLst/>
-          </a:prstGeom>
-          <a:solidFill>
-            <a:srgbClr val="F5F6FC"/>
-          </a:solidFill>
-          <a:ln/>
-        </p:spPr>
-      </p:sp>
-      <p:sp>
-        <p:nvSpPr>
-          <p:cNvPr id="11" name="Text 9"/>
-          <p:cNvSpPr/>
-          <p:nvPr/>
-        </p:nvSpPr>
-        <p:spPr>
-          <a:xfrm>
-            <a:off x="566928" y="2633472"/>
-            <a:ext cx="914400" cy="402336"/>
-          </a:xfrm>
-          <a:prstGeom prst="rect">
-            <a:avLst/>
-          </a:prstGeom>
-          <a:noFill/>
-          <a:ln/>
-        </p:spPr>
-        <p:txBody>
-          <a:bodyPr wrap="square" lIns="0" tIns="0" rIns="0" bIns="0" rtlCol="0" anchor="ctr"/>
-          <a:lstStyle/>
-          <a:p>
-            <a:pPr indent="0" marL="0">
-              <a:buNone/>
-            </a:pPr>
-            <a:r>
-              <a:rPr lang="en-US" sz="1150" b="1" dirty="0">
-                <a:solidFill>
-                  <a:srgbClr val="9A6310"/>
-                </a:solidFill>
-                <a:latin typeface="Courier New" pitchFamily="34" charset="0"/>
-                <a:ea typeface="Courier New" pitchFamily="34" charset="-122"/>
-                <a:cs typeface="Courier New" pitchFamily="34" charset="-120"/>
-              </a:rPr>
-              <a:t>Notieren</a:t>
-            </a:r>
-            <a:endParaRPr lang="en-US" sz="1150" dirty="0"/>
-          </a:p>
-        </p:txBody>
-      </p:sp>
-      <p:sp>
-        <p:nvSpPr>
-          <p:cNvPr id="12" name="Text 10"/>
-          <p:cNvSpPr/>
-          <p:nvPr/>
-        </p:nvSpPr>
-        <p:spPr>
-          <a:xfrm>
-            <a:off x="1481328" y="2633472"/>
-            <a:ext cx="7095744" cy="402336"/>
-          </a:xfrm>
-          <a:prstGeom prst="rect">
-            <a:avLst/>
-          </a:prstGeom>
-          <a:noFill/>
-          <a:ln/>
-        </p:spPr>
-        <p:txBody>
-          <a:bodyPr wrap="square" lIns="0" tIns="0" rIns="0" bIns="0" rtlCol="0" anchor="ctr"/>
-          <a:lstStyle/>
-          <a:p>
-            <a:pPr indent="0" marL="0">
-              <a:buNone/>
-            </a:pPr>
-            <a:r>
-              <a:rPr lang="en-US" sz="1150" dirty="0">
-                <a:solidFill>
-                  <a:srgbClr val="434A63"/>
-                </a:solidFill>
-                <a:latin typeface="Arial" pitchFamily="34" charset="0"/>
-                <a:ea typeface="Arial" pitchFamily="34" charset="-122"/>
-                <a:cs typeface="Arial" pitchFamily="34" charset="-120"/>
-              </a:rPr>
-              <a:t>Euren docker-ps-Stand nach Teil 1 – und aus der Kür: eure Image-Größe</a:t>
-            </a:r>
-            <a:endParaRPr lang="en-US" sz="1150" dirty="0"/>
-          </a:p>
-        </p:txBody>
-      </p:sp>
-      <p:sp>
-        <p:nvSpPr>
-          <p:cNvPr id="13" name="Shape 11"/>
-          <p:cNvSpPr/>
-          <p:nvPr/>
-        </p:nvSpPr>
-        <p:spPr>
-          <a:xfrm>
-            <a:off x="566928" y="3511296"/>
-            <a:ext cx="8010144" cy="969264"/>
-          </a:xfrm>
-          <a:prstGeom prst="rect">
-            <a:avLst/>
-          </a:prstGeom>
-          <a:solidFill>
-            <a:srgbClr val="EEF0FB"/>
-          </a:solidFill>
-          <a:ln/>
-        </p:spPr>
-      </p:sp>
-      <p:sp>
-        <p:nvSpPr>
-          <p:cNvPr id="14" name="Shape 12"/>
-          <p:cNvSpPr/>
-          <p:nvPr/>
-        </p:nvSpPr>
-        <p:spPr>
-          <a:xfrm>
-            <a:off x="566928" y="3511296"/>
-            <a:ext cx="41148" cy="969264"/>
-          </a:xfrm>
-          <a:prstGeom prst="rect">
-            <a:avLst/>
-          </a:prstGeom>
-          <a:solidFill>
-            <a:srgbClr val="9A6310"/>
-          </a:solidFill>
-          <a:ln/>
-        </p:spPr>
-      </p:sp>
-      <p:sp>
-        <p:nvSpPr>
-          <p:cNvPr id="15" name="Text 13"/>
-          <p:cNvSpPr/>
-          <p:nvPr/>
-        </p:nvSpPr>
-        <p:spPr>
-          <a:xfrm>
-            <a:off x="804672" y="3657600"/>
-            <a:ext cx="7607808" cy="242062"/>
-          </a:xfrm>
-          <a:prstGeom prst="rect">
-            <a:avLst/>
-          </a:prstGeom>
-          <a:noFill/>
-          <a:ln/>
-        </p:spPr>
-        <p:txBody>
-          <a:bodyPr wrap="square" lIns="0" tIns="0" rIns="0" bIns="0" rtlCol="0" anchor="t"/>
-          <a:lstStyle/>
-          <a:p>
-            <a:pPr indent="0" marL="0">
-              <a:buNone/>
-            </a:pPr>
-            <a:r>
-              <a:rPr lang="en-US" sz="1300" b="1" dirty="0">
-                <a:solidFill>
-                  <a:srgbClr val="272E52"/>
-                </a:solidFill>
-                <a:latin typeface="Arial" pitchFamily="34" charset="0"/>
-                <a:ea typeface="Arial" pitchFamily="34" charset="-122"/>
-                <a:cs typeface="Arial" pitchFamily="34" charset="-120"/>
-              </a:rPr>
-              <a:t>Jetzt öffnen – alles braucht ihr gleich im Raum</a:t>
-            </a:r>
-            <a:endParaRPr lang="en-US" sz="1300" dirty="0"/>
-          </a:p>
-        </p:txBody>
-      </p:sp>
-      <p:sp>
-        <p:nvSpPr>
-          <p:cNvPr id="16" name="Text 14"/>
-          <p:cNvSpPr/>
-          <p:nvPr/>
-        </p:nvSpPr>
-        <p:spPr>
-          <a:xfrm>
-            <a:off x="804672" y="3945382"/>
-            <a:ext cx="7607808" cy="416306"/>
-          </a:xfrm>
-          <a:prstGeom prst="rect">
-            <a:avLst/>
-          </a:prstGeom>
-          <a:noFill/>
-          <a:ln/>
-        </p:spPr>
-        <p:txBody>
-          <a:bodyPr wrap="square" lIns="0" tIns="0" rIns="0" bIns="0" rtlCol="0" anchor="t"/>
-          <a:lstStyle/>
-          <a:p>
-            <a:pPr indent="0" marL="0">
-              <a:lnSpc>
-                <a:spcPct val="92000"/>
-              </a:lnSpc>
-              <a:spcAft>
-                <a:spcPts val="500"/>
-              </a:spcAft>
-              <a:buNone/>
-            </a:pPr>
-            <a:r>
-              <a:rPr lang="en-US" sz="1000" dirty="0">
-                <a:solidFill>
-                  <a:srgbClr val="434A63"/>
-                </a:solidFill>
-                <a:latin typeface="Arial" pitchFamily="34" charset="0"/>
-                <a:ea typeface="Arial" pitchFamily="34" charset="-122"/>
-                <a:cs typeface="Arial" pitchFamily="34" charset="-120"/>
-              </a:rPr>
-              <a:t>Teil 1:  jacobmenge.github.io/kurs-unterlagen/docker/erste-schritte/   ·   Teil 2 (Kür):  jacobmenge.github.io/kurs-unterlagen/docker/praxis-eigenes-image/</a:t>
-            </a:r>
-            <a:endParaRPr lang="en-US" sz="1000" dirty="0"/>
-          </a:p>
-          <a:p>
-            <a:pPr indent="0" marL="0">
-              <a:lnSpc>
-                <a:spcPct val="92000"/>
-              </a:lnSpc>
-              <a:spcAft>
-                <a:spcPts val="500"/>
-              </a:spcAft>
-              <a:buNone/>
-            </a:pPr>
-            <a:r>
-              <a:rPr lang="en-US" sz="1000" dirty="0">
-                <a:solidFill>
-                  <a:srgbClr val="434A63"/>
-                </a:solidFill>
-                <a:latin typeface="Arial" pitchFamily="34" charset="0"/>
-                <a:ea typeface="Arial" pitchFamily="34" charset="-122"/>
-                <a:cs typeface="Arial" pitchFamily="34" charset="-120"/>
-              </a:rPr>
-              <a:t>Ergebnisse eintragen:  &lt;Link zum Ergebnis-Dokument hier eintragen&gt;</a:t>
-            </a:r>
-            <a:endParaRPr lang="en-US" sz="1000" dirty="0"/>
-          </a:p>
-        </p:txBody>
-      </p:sp>
-      <p:sp>
-        <p:nvSpPr>
-          <p:cNvPr id="17" name="Shape 15"/>
+              <a:t>Das Dockerfile ist der Bauplan für euren Bauplan – nur damit wird aus fremden Images etwas Eigenes.</a:t>
+            </a:r>
+            <a:endParaRPr lang="en-US" sz="1200" dirty="0"/>
+          </a:p>
+        </p:txBody>
+      </p:sp>
+      <p:sp>
+        <p:nvSpPr>
+          <p:cNvPr id="8" name="Shape 5"/>
           <p:cNvSpPr/>
           <p:nvPr/>
         </p:nvSpPr>
@@ -3218,7 +3252,7 @@
       </p:sp>
       <p:sp>
         <p:nvSpPr>
-          <p:cNvPr id="18" name="Text 16"/>
+          <p:cNvPr id="9" name="Text 6"/>
           <p:cNvSpPr/>
           <p:nvPr/>
         </p:nvSpPr>
@@ -3249,7 +3283,7 @@
                 <a:ea typeface="Arial" pitchFamily="34" charset="-122"/>
                 <a:cs typeface="Arial" pitchFamily="34" charset="-120"/>
               </a:rPr>
-              <a:t>Breakout</a:t>
+              <a:t>Warum Docker?</a:t>
             </a:r>
             <a:endParaRPr lang="en-US" sz="1050" dirty="0"/>
           </a:p>
@@ -3257,7 +3291,7 @@
       </p:sp>
       <p:sp>
         <p:nvSpPr>
-          <p:cNvPr id="19" name="Text 17"/>
+          <p:cNvPr id="10" name="Text 7"/>
           <p:cNvSpPr/>
           <p:nvPr/>
         </p:nvSpPr>
@@ -3288,7 +3322,7 @@
                 <a:ea typeface="Arial" pitchFamily="34" charset="-122"/>
                 <a:cs typeface="Arial" pitchFamily="34" charset="-120"/>
               </a:rPr>
-              <a:t>8/12</a:t>
+              <a:t>9/15</a:t>
             </a:r>
             <a:endParaRPr lang="en-US" sz="1050" dirty="0"/>
           </a:p>
@@ -3341,7 +3375,7 @@
             <a:avLst/>
           </a:prstGeom>
           <a:solidFill>
-            <a:srgbClr val="9A6310"/>
+            <a:srgbClr val="3843AF"/>
           </a:solidFill>
           <a:ln/>
         </p:spPr>
@@ -3373,13 +3407,13 @@
             <a:r>
               <a:rPr lang="en-US" sz="1150" b="1" spc="180" kern="0" dirty="0">
                 <a:solidFill>
-                  <a:srgbClr val="9A6310"/>
-                </a:solidFill>
-                <a:latin typeface="Arial" pitchFamily="34" charset="0"/>
-                <a:ea typeface="Arial" pitchFamily="34" charset="-122"/>
-                <a:cs typeface="Arial" pitchFamily="34" charset="-120"/>
-              </a:rPr>
-              <a:t>SPIELREGELN</a:t>
+                  <a:srgbClr val="3843AF"/>
+                </a:solidFill>
+                <a:latin typeface="Arial" pitchFamily="34" charset="0"/>
+                <a:ea typeface="Arial" pitchFamily="34" charset="-122"/>
+                <a:cs typeface="Arial" pitchFamily="34" charset="-120"/>
+              </a:rPr>
+              <a:t>ALLE ZUSAMMEN, JETZT</a:t>
             </a:r>
             <a:endParaRPr lang="en-US" sz="1150" dirty="0"/>
           </a:p>
@@ -3418,7 +3452,7 @@
                 <a:ea typeface="Arial" pitchFamily="34" charset="-122"/>
                 <a:cs typeface="Arial" pitchFamily="34" charset="-120"/>
               </a:rPr>
-              <a:t>So arbeitet ihr</a:t>
+              <a:t>Docker Desktop einrichten – gemeinsam</a:t>
             </a:r>
             <a:endParaRPr lang="en-US" sz="2600" dirty="0"/>
           </a:p>
@@ -3432,8 +3466,126 @@
         </p:nvSpPr>
         <p:spPr>
           <a:xfrm>
-            <a:off x="566928" y="1700784"/>
-            <a:ext cx="8010144" cy="2011680"/>
+            <a:off x="566928" y="1444752"/>
+            <a:ext cx="8010144" cy="274320"/>
+          </a:xfrm>
+          <a:prstGeom prst="rect">
+            <a:avLst/>
+          </a:prstGeom>
+          <a:noFill/>
+          <a:ln/>
+        </p:spPr>
+        <p:txBody>
+          <a:bodyPr wrap="square" lIns="0" tIns="0" rIns="0" bIns="0" rtlCol="0" anchor="t"/>
+          <a:lstStyle/>
+          <a:p>
+            <a:pPr indent="0" marL="0">
+              <a:buNone/>
+            </a:pPr>
+            <a:r>
+              <a:rPr lang="en-US" sz="1300" dirty="0">
+                <a:solidFill>
+                  <a:srgbClr val="5C6377"/>
+                </a:solidFill>
+                <a:latin typeface="Arial" pitchFamily="34" charset="0"/>
+                <a:ea typeface="Arial" pitchFamily="34" charset="-122"/>
+                <a:cs typeface="Arial" pitchFamily="34" charset="-120"/>
+              </a:rPr>
+              <a:t>Wir installieren jetzt gemeinsam – die Anleitung führt euch je Betriebssystem durch:</a:t>
+            </a:r>
+            <a:endParaRPr lang="en-US" sz="1300" dirty="0"/>
+          </a:p>
+        </p:txBody>
+      </p:sp>
+      <p:sp>
+        <p:nvSpPr>
+          <p:cNvPr id="6" name="Shape 4"/>
+          <p:cNvSpPr/>
+          <p:nvPr/>
+        </p:nvSpPr>
+        <p:spPr>
+          <a:xfrm>
+            <a:off x="566928" y="1920240"/>
+            <a:ext cx="8010144" cy="713232"/>
+          </a:xfrm>
+          <a:prstGeom prst="rect">
+            <a:avLst/>
+          </a:prstGeom>
+          <a:solidFill>
+            <a:srgbClr val="EEF0FB"/>
+          </a:solidFill>
+          <a:ln/>
+        </p:spPr>
+      </p:sp>
+      <p:sp>
+        <p:nvSpPr>
+          <p:cNvPr id="7" name="Shape 5"/>
+          <p:cNvSpPr/>
+          <p:nvPr/>
+        </p:nvSpPr>
+        <p:spPr>
+          <a:xfrm>
+            <a:off x="566928" y="1920240"/>
+            <a:ext cx="41148" cy="713232"/>
+          </a:xfrm>
+          <a:prstGeom prst="rect">
+            <a:avLst/>
+          </a:prstGeom>
+          <a:solidFill>
+            <a:srgbClr val="3843AF"/>
+          </a:solidFill>
+          <a:ln/>
+        </p:spPr>
+      </p:sp>
+      <p:sp>
+        <p:nvSpPr>
+          <p:cNvPr id="8" name="Text 6"/>
+          <p:cNvSpPr/>
+          <p:nvPr/>
+        </p:nvSpPr>
+        <p:spPr>
+          <a:xfrm>
+            <a:off x="804672" y="2066544"/>
+            <a:ext cx="7607808" cy="242062"/>
+          </a:xfrm>
+          <a:prstGeom prst="rect">
+            <a:avLst/>
+          </a:prstGeom>
+          <a:noFill/>
+          <a:ln/>
+        </p:spPr>
+        <p:txBody>
+          <a:bodyPr wrap="square" lIns="0" tIns="0" rIns="0" bIns="0" rtlCol="0" anchor="t"/>
+          <a:lstStyle/>
+          <a:p>
+            <a:pPr indent="0" marL="0">
+              <a:buNone/>
+            </a:pPr>
+            <a:r>
+              <a:rPr lang="en-US" sz="1300" b="1" dirty="0">
+                <a:solidFill>
+                  <a:srgbClr val="272E52"/>
+                </a:solidFill>
+                <a:latin typeface="Arial" pitchFamily="34" charset="0"/>
+                <a:ea typeface="Arial" pitchFamily="34" charset="-122"/>
+                <a:cs typeface="Arial" pitchFamily="34" charset="-120"/>
+              </a:rPr>
+              <a:t>Anleitung öffnen</a:t>
+            </a:r>
+            <a:endParaRPr lang="en-US" sz="1300" dirty="0"/>
+          </a:p>
+        </p:txBody>
+      </p:sp>
+      <p:sp>
+        <p:nvSpPr>
+          <p:cNvPr id="9" name="Text 7"/>
+          <p:cNvSpPr/>
+          <p:nvPr/>
+        </p:nvSpPr>
+        <p:spPr>
+          <a:xfrm>
+            <a:off x="804672" y="2354326"/>
+            <a:ext cx="7607808" cy="160274"/>
           </a:xfrm>
           <a:prstGeom prst="rect">
             <a:avLst/>
@@ -3452,9 +3604,51 @@
               <a:buNone/>
             </a:pPr>
             <a:r>
-              <a:rPr lang="en-US" sz="1250" b="1" dirty="0">
-                <a:solidFill>
-                  <a:srgbClr val="9A6310"/>
+              <a:rPr lang="en-US" sz="1200" dirty="0">
+                <a:solidFill>
+                  <a:srgbClr val="434A63"/>
+                </a:solidFill>
+                <a:latin typeface="Arial" pitchFamily="34" charset="0"/>
+                <a:ea typeface="Arial" pitchFamily="34" charset="-122"/>
+                <a:cs typeface="Arial" pitchFamily="34" charset="-120"/>
+              </a:rPr>
+              <a:t>jacobmenge.github.io/kurs-unterlagen/docker/installation/</a:t>
+            </a:r>
+            <a:endParaRPr lang="en-US" sz="1200" dirty="0"/>
+          </a:p>
+        </p:txBody>
+      </p:sp>
+      <p:sp>
+        <p:nvSpPr>
+          <p:cNvPr id="10" name="Text 8"/>
+          <p:cNvSpPr/>
+          <p:nvPr/>
+        </p:nvSpPr>
+        <p:spPr>
+          <a:xfrm>
+            <a:off x="566928" y="2834640"/>
+            <a:ext cx="8010144" cy="1188720"/>
+          </a:xfrm>
+          <a:prstGeom prst="rect">
+            <a:avLst/>
+          </a:prstGeom>
+          <a:noFill/>
+          <a:ln/>
+        </p:spPr>
+        <p:txBody>
+          <a:bodyPr wrap="square" lIns="0" tIns="0" rIns="0" bIns="0" rtlCol="0" anchor="t"/>
+          <a:lstStyle/>
+          <a:p>
+            <a:pPr indent="0" marL="0">
+              <a:lnSpc>
+                <a:spcPct val="92000"/>
+              </a:lnSpc>
+              <a:buNone/>
+            </a:pPr>
+            <a:r>
+              <a:rPr lang="en-US" sz="1150" b="1" dirty="0">
+                <a:solidFill>
+                  <a:srgbClr val="3843AF"/>
                 </a:solidFill>
                 <a:latin typeface="Arial" pitchFamily="34" charset="0"/>
                 <a:ea typeface="Arial" pitchFamily="34" charset="-122"/>
@@ -3472,7 +3666,7 @@
               <a:buNone/>
             </a:pPr>
             <a:r>
-              <a:rPr lang="en-US" sz="1250" dirty="0">
+              <a:rPr lang="en-US" sz="1150" dirty="0">
                 <a:solidFill>
                   <a:srgbClr val="434A63"/>
                 </a:solidFill>
@@ -3480,9 +3674,9 @@
                 <a:ea typeface="Arial" pitchFamily="34" charset="-122"/>
                 <a:cs typeface="Arial" pitchFamily="34" charset="-120"/>
               </a:rPr>
-              <a:t>Gleiche Gruppen, eine Person teilt den Bildschirm – alle tippen auf dem eigenen Rechner mit.</a:t>
-            </a:r>
-            <a:endParaRPr lang="en-US" sz="1250" dirty="0"/>
+              <a:t>Windows: Docker Desktop lädt WSL2 als Unterbau – ein Neustart kann dazugehören.</a:t>
+            </a:r>
+            <a:endParaRPr lang="en-US" sz="1150" dirty="0"/>
           </a:p>
           <a:p>
             <a:pPr indent="0" marL="0">
@@ -3492,9 +3686,9 @@
               <a:buNone/>
             </a:pPr>
             <a:r>
-              <a:rPr lang="en-US" sz="1250" b="1" dirty="0">
-                <a:solidFill>
-                  <a:srgbClr val="9A6310"/>
+              <a:rPr lang="en-US" sz="1150" b="1" dirty="0">
+                <a:solidFill>
+                  <a:srgbClr val="3843AF"/>
                 </a:solidFill>
                 <a:latin typeface="Arial" pitchFamily="34" charset="0"/>
                 <a:ea typeface="Arial" pitchFamily="34" charset="-122"/>
@@ -3512,7 +3706,7 @@
               <a:buNone/>
             </a:pPr>
             <a:r>
-              <a:rPr lang="en-US" sz="1250" dirty="0">
+              <a:rPr lang="en-US" sz="1150" dirty="0">
                 <a:solidFill>
                   <a:srgbClr val="434A63"/>
                 </a:solidFill>
@@ -3520,9 +3714,9 @@
                 <a:ea typeface="Arial" pitchFamily="34" charset="-122"/>
                 <a:cs typeface="Arial" pitchFamily="34" charset="-120"/>
               </a:rPr>
-              <a:t>Die Anleitung zeigt jeden Befehl mit erwarteter Ausgabe – vergleicht, was bei euch anders aussieht.</a:t>
-            </a:r>
-            <a:endParaRPr lang="en-US" sz="1250" dirty="0"/>
+              <a:t>macOS: Installer ziehen, starten – fertig.</a:t>
+            </a:r>
+            <a:endParaRPr lang="en-US" sz="1150" dirty="0"/>
           </a:p>
           <a:p>
             <a:pPr indent="0" marL="0">
@@ -3532,9 +3726,9 @@
               <a:buNone/>
             </a:pPr>
             <a:r>
-              <a:rPr lang="en-US" sz="1250" b="1" dirty="0">
-                <a:solidFill>
-                  <a:srgbClr val="9A6310"/>
+              <a:rPr lang="en-US" sz="1150" b="1" dirty="0">
+                <a:solidFill>
+                  <a:srgbClr val="3843AF"/>
                 </a:solidFill>
                 <a:latin typeface="Arial" pitchFamily="34" charset="0"/>
                 <a:ea typeface="Arial" pitchFamily="34" charset="-122"/>
@@ -3552,7 +3746,7 @@
               <a:buNone/>
             </a:pPr>
             <a:r>
-              <a:rPr lang="en-US" sz="1250" dirty="0">
+              <a:rPr lang="en-US" sz="1150" dirty="0">
                 <a:solidFill>
                   <a:srgbClr val="434A63"/>
                 </a:solidFill>
@@ -3560,9 +3754,9 @@
                 <a:ea typeface="Arial" pitchFamily="34" charset="-122"/>
                 <a:cs typeface="Arial" pitchFamily="34" charset="-120"/>
               </a:rPr>
-              <a:t>Teil 1 ist Pflicht bis einschließlich Aufräumen. Die Kür beginnt erst, wenn Teil 1 sauber durch ist.</a:t>
-            </a:r>
-            <a:endParaRPr lang="en-US" sz="1250" dirty="0"/>
+              <a:t>Linux: Docker Engine reicht („docker“ aus der Paketverwaltung).</a:t>
+            </a:r>
+            <a:endParaRPr lang="en-US" sz="1150" dirty="0"/>
           </a:p>
           <a:p>
             <a:pPr indent="0" marL="0">
@@ -3572,9 +3766,9 @@
               <a:buNone/>
             </a:pPr>
             <a:r>
-              <a:rPr lang="en-US" sz="1250" b="1" dirty="0">
-                <a:solidFill>
-                  <a:srgbClr val="9A6310"/>
+              <a:rPr lang="en-US" sz="1150" b="1" dirty="0">
+                <a:solidFill>
+                  <a:srgbClr val="3843AF"/>
                 </a:solidFill>
                 <a:latin typeface="Arial" pitchFamily="34" charset="0"/>
                 <a:ea typeface="Arial" pitchFamily="34" charset="-122"/>
@@ -3592,7 +3786,7 @@
               <a:buNone/>
             </a:pPr>
             <a:r>
-              <a:rPr lang="en-US" sz="1250" dirty="0">
+              <a:rPr lang="en-US" sz="1150" dirty="0">
                 <a:solidFill>
                   <a:srgbClr val="434A63"/>
                 </a:solidFill>
@@ -3600,39 +3794,58 @@
                 <a:ea typeface="Arial" pitchFamily="34" charset="-122"/>
                 <a:cs typeface="Arial" pitchFamily="34" charset="-120"/>
               </a:rPr>
-              <a:t>Wer ohne Docker dasteht: in der Gruppe mitarbeiten und zu Hause nachziehen – Installation läuft notfalls nebenher.</a:t>
-            </a:r>
-            <a:endParaRPr lang="en-US" sz="1250" dirty="0"/>
-          </a:p>
-          <a:p>
-            <a:pPr indent="0" marL="0">
-              <a:lnSpc>
-                <a:spcPct val="92000"/>
-              </a:lnSpc>
-              <a:buNone/>
-            </a:pPr>
-            <a:r>
-              <a:rPr lang="en-US" sz="1250" b="1" dirty="0">
-                <a:solidFill>
-                  <a:srgbClr val="9A6310"/>
-                </a:solidFill>
-                <a:latin typeface="Arial" pitchFamily="34" charset="0"/>
-                <a:ea typeface="Arial" pitchFamily="34" charset="-122"/>
-                <a:cs typeface="Arial" pitchFamily="34" charset="-120"/>
-              </a:rPr>
-              <a:t>▸   </a:t>
-            </a:r>
-            <a:pPr indent="0" marL="0">
-              <a:lnSpc>
-                <a:spcPct val="92000"/>
-              </a:lnSpc>
-              <a:spcAft>
-                <a:spcPts val="900"/>
-              </a:spcAft>
-              <a:buNone/>
-            </a:pPr>
-            <a:r>
-              <a:rPr lang="en-US" sz="1250" dirty="0">
+              <a:t>Test bei allen gleich: „docker version“ meldet Client UND Server.</a:t>
+            </a:r>
+            <a:endParaRPr lang="en-US" sz="1150" dirty="0"/>
+          </a:p>
+        </p:txBody>
+      </p:sp>
+      <p:sp>
+        <p:nvSpPr>
+          <p:cNvPr id="11" name="Shape 9"/>
+          <p:cNvSpPr/>
+          <p:nvPr/>
+        </p:nvSpPr>
+        <p:spPr>
+          <a:xfrm>
+            <a:off x="566928" y="4206240"/>
+            <a:ext cx="32004" cy="256032"/>
+          </a:xfrm>
+          <a:prstGeom prst="rect">
+            <a:avLst/>
+          </a:prstGeom>
+          <a:solidFill>
+            <a:srgbClr val="3843AF"/>
+          </a:solidFill>
+          <a:ln/>
+        </p:spPr>
+      </p:sp>
+      <p:sp>
+        <p:nvSpPr>
+          <p:cNvPr id="12" name="Text 10"/>
+          <p:cNvSpPr/>
+          <p:nvPr/>
+        </p:nvSpPr>
+        <p:spPr>
+          <a:xfrm>
+            <a:off x="749808" y="4160520"/>
+            <a:ext cx="7827264" cy="402336"/>
+          </a:xfrm>
+          <a:prstGeom prst="rect">
+            <a:avLst/>
+          </a:prstGeom>
+          <a:noFill/>
+          <a:ln/>
+        </p:spPr>
+        <p:txBody>
+          <a:bodyPr wrap="square" lIns="0" tIns="0" rIns="0" bIns="0" rtlCol="0" anchor="ctr"/>
+          <a:lstStyle/>
+          <a:p>
+            <a:pPr indent="0" marL="0">
+              <a:buNone/>
+            </a:pPr>
+            <a:r>
+              <a:rPr lang="en-US" sz="1200" b="1" dirty="0">
                 <a:solidFill>
                   <a:srgbClr val="434A63"/>
                 </a:solidFill>
@@ -3640,136 +3853,15 @@
                 <a:ea typeface="Arial" pitchFamily="34" charset="-122"/>
                 <a:cs typeface="Arial" pitchFamily="34" charset="-120"/>
               </a:rPr>
-              <a:t>Wenn es klemmt: Stolpersteine-Seite, dann „Um Hilfe bitten“.</a:t>
-            </a:r>
-            <a:endParaRPr lang="en-US" sz="1250" dirty="0"/>
-          </a:p>
-        </p:txBody>
-      </p:sp>
-      <p:sp>
-        <p:nvSpPr>
-          <p:cNvPr id="6" name="Shape 4"/>
-          <p:cNvSpPr/>
-          <p:nvPr/>
-        </p:nvSpPr>
-        <p:spPr>
-          <a:xfrm>
-            <a:off x="566928" y="3602736"/>
-            <a:ext cx="8010144" cy="822960"/>
-          </a:xfrm>
-          <a:prstGeom prst="rect">
-            <a:avLst/>
-          </a:prstGeom>
-          <a:solidFill>
-            <a:srgbClr val="F5F6FC"/>
-          </a:solidFill>
-          <a:ln/>
-        </p:spPr>
-      </p:sp>
-      <p:sp>
-        <p:nvSpPr>
-          <p:cNvPr id="7" name="Shape 5"/>
-          <p:cNvSpPr/>
-          <p:nvPr/>
-        </p:nvSpPr>
-        <p:spPr>
-          <a:xfrm>
-            <a:off x="566928" y="3602736"/>
-            <a:ext cx="41148" cy="822960"/>
-          </a:xfrm>
-          <a:prstGeom prst="rect">
-            <a:avLst/>
-          </a:prstGeom>
-          <a:solidFill>
-            <a:srgbClr val="9A6310"/>
-          </a:solidFill>
-          <a:ln/>
-        </p:spPr>
-      </p:sp>
-      <p:sp>
-        <p:nvSpPr>
-          <p:cNvPr id="8" name="Text 6"/>
-          <p:cNvSpPr/>
-          <p:nvPr/>
-        </p:nvSpPr>
-        <p:spPr>
-          <a:xfrm>
-            <a:off x="804672" y="3749040"/>
-            <a:ext cx="7607808" cy="242062"/>
-          </a:xfrm>
-          <a:prstGeom prst="rect">
-            <a:avLst/>
-          </a:prstGeom>
-          <a:noFill/>
-          <a:ln/>
-        </p:spPr>
-        <p:txBody>
-          <a:bodyPr wrap="square" lIns="0" tIns="0" rIns="0" bIns="0" rtlCol="0" anchor="t"/>
-          <a:lstStyle/>
-          <a:p>
-            <a:pPr indent="0" marL="0">
-              <a:buNone/>
-            </a:pPr>
-            <a:r>
-              <a:rPr lang="en-US" sz="1300" b="1" dirty="0">
-                <a:solidFill>
-                  <a:srgbClr val="272E52"/>
-                </a:solidFill>
-                <a:latin typeface="Arial" pitchFamily="34" charset="0"/>
-                <a:ea typeface="Arial" pitchFamily="34" charset="-122"/>
-                <a:cs typeface="Arial" pitchFamily="34" charset="-120"/>
-              </a:rPr>
-              <a:t>Um 20:15 sind alle wieder hier</a:t>
-            </a:r>
-            <a:endParaRPr lang="en-US" sz="1300" dirty="0"/>
-          </a:p>
-        </p:txBody>
-      </p:sp>
-      <p:sp>
-        <p:nvSpPr>
-          <p:cNvPr id="9" name="Text 7"/>
-          <p:cNvSpPr/>
-          <p:nvPr/>
-        </p:nvSpPr>
-        <p:spPr>
-          <a:xfrm>
-            <a:off x="804672" y="4036822"/>
-            <a:ext cx="7607808" cy="270002"/>
-          </a:xfrm>
-          <a:prstGeom prst="rect">
-            <a:avLst/>
-          </a:prstGeom>
-          <a:noFill/>
-          <a:ln/>
-        </p:spPr>
-        <p:txBody>
-          <a:bodyPr wrap="square" lIns="0" tIns="0" rIns="0" bIns="0" rtlCol="0" anchor="t"/>
-          <a:lstStyle/>
-          <a:p>
-            <a:pPr indent="0" marL="0">
-              <a:lnSpc>
-                <a:spcPct val="92000"/>
-              </a:lnSpc>
-              <a:buNone/>
-            </a:pPr>
-            <a:r>
-              <a:rPr lang="en-US" sz="1150" dirty="0">
-                <a:solidFill>
-                  <a:srgbClr val="434A63"/>
-                </a:solidFill>
-                <a:latin typeface="Arial" pitchFamily="34" charset="0"/>
-                <a:ea typeface="Arial" pitchFamily="34" charset="-122"/>
-                <a:cs typeface="Arial" pitchFamily="34" charset="-120"/>
-              </a:rPr>
-              <a:t>Jede Gruppe zeigt kurz ihr docker ps – und wer die Kür geschafft hat, seine eigene Seite im Browser.</a:t>
-            </a:r>
-            <a:endParaRPr lang="en-US" sz="1150" dirty="0"/>
-          </a:p>
-        </p:txBody>
-      </p:sp>
-      <p:sp>
-        <p:nvSpPr>
-          <p:cNvPr id="10" name="Shape 8"/>
+              <a:t>Kleiner Gruß von Montag: Docker Desktop startet dafür intern eine eigene VM – Typ 2, ihr wisst Bescheid.</a:t>
+            </a:r>
+            <a:endParaRPr lang="en-US" sz="1200" dirty="0"/>
+          </a:p>
+        </p:txBody>
+      </p:sp>
+      <p:sp>
+        <p:nvSpPr>
+          <p:cNvPr id="13" name="Shape 11"/>
           <p:cNvSpPr/>
           <p:nvPr/>
         </p:nvSpPr>
@@ -3792,7 +3884,7 @@
       </p:sp>
       <p:sp>
         <p:nvSpPr>
-          <p:cNvPr id="11" name="Text 9"/>
+          <p:cNvPr id="14" name="Text 12"/>
           <p:cNvSpPr/>
           <p:nvPr/>
         </p:nvSpPr>
@@ -3823,7 +3915,7 @@
                 <a:ea typeface="Arial" pitchFamily="34" charset="-122"/>
                 <a:cs typeface="Arial" pitchFamily="34" charset="-120"/>
               </a:rPr>
-              <a:t>Breakout</a:t>
+              <a:t>Werkzeug</a:t>
             </a:r>
             <a:endParaRPr lang="en-US" sz="1050" dirty="0"/>
           </a:p>
@@ -3831,7 +3923,7 @@
       </p:sp>
       <p:sp>
         <p:nvSpPr>
-          <p:cNvPr id="12" name="Text 10"/>
+          <p:cNvPr id="15" name="Text 13"/>
           <p:cNvSpPr/>
           <p:nvPr/>
         </p:nvSpPr>
@@ -3862,7 +3954,7 @@
                 <a:ea typeface="Arial" pitchFamily="34" charset="-122"/>
                 <a:cs typeface="Arial" pitchFamily="34" charset="-120"/>
               </a:rPr>
-              <a:t>9/12</a:t>
+              <a:t>10/15</a:t>
             </a:r>
             <a:endParaRPr lang="en-US" sz="1050" dirty="0"/>
           </a:p>
@@ -3908,67 +4000,107 @@
         </p:nvSpPr>
         <p:spPr>
           <a:xfrm>
-            <a:off x="566928" y="201168"/>
+            <a:off x="6355080" y="0"/>
+            <a:ext cx="2788920" cy="5143500"/>
+          </a:xfrm>
+          <a:prstGeom prst="rect">
+            <a:avLst/>
+          </a:prstGeom>
+          <a:solidFill>
+            <a:srgbClr val="FBF2E3"/>
+          </a:solidFill>
+          <a:ln/>
+        </p:spPr>
+      </p:sp>
+      <p:sp>
+        <p:nvSpPr>
+          <p:cNvPr id="3" name="Shape 1"/>
+          <p:cNvSpPr/>
+          <p:nvPr/>
+        </p:nvSpPr>
+        <p:spPr>
+          <a:xfrm>
+            <a:off x="6355080" y="0"/>
+            <a:ext cx="45720" cy="5143500"/>
+          </a:xfrm>
+          <a:prstGeom prst="rect">
+            <a:avLst/>
+          </a:prstGeom>
+          <a:solidFill>
+            <a:srgbClr val="9A6310"/>
+          </a:solidFill>
+          <a:ln/>
+        </p:spPr>
+      </p:sp>
+      <p:sp>
+        <p:nvSpPr>
+          <p:cNvPr id="4" name="Text 2"/>
+          <p:cNvSpPr/>
+          <p:nvPr/>
+        </p:nvSpPr>
+        <p:spPr>
+          <a:xfrm>
+            <a:off x="6629400" y="1463040"/>
+            <a:ext cx="2194560" cy="1737360"/>
+          </a:xfrm>
+          <a:prstGeom prst="rect">
+            <a:avLst/>
+          </a:prstGeom>
+          <a:noFill/>
+          <a:ln/>
+        </p:spPr>
+        <p:txBody>
+          <a:bodyPr wrap="square" lIns="0" tIns="0" rIns="0" bIns="0" rtlCol="0" anchor="ctr"/>
+          <a:lstStyle/>
+          <a:p>
+            <a:pPr algn="ctr" indent="0" marL="0">
+              <a:buNone/>
+            </a:pPr>
+            <a:r>
+              <a:rPr lang="en-US" sz="8400" b="1" dirty="0">
+                <a:solidFill>
+                  <a:srgbClr val="9A6310"/>
+                </a:solidFill>
+                <a:latin typeface="Arial" pitchFamily="34" charset="0"/>
+                <a:ea typeface="Arial" pitchFamily="34" charset="-122"/>
+                <a:cs typeface="Arial" pitchFamily="34" charset="-120"/>
+              </a:rPr>
+              <a:t>02</a:t>
+            </a:r>
+            <a:endParaRPr lang="en-US" sz="8400" dirty="0"/>
+          </a:p>
+        </p:txBody>
+      </p:sp>
+      <p:sp>
+        <p:nvSpPr>
+          <p:cNvPr id="5" name="Shape 3"/>
+          <p:cNvSpPr/>
+          <p:nvPr/>
+        </p:nvSpPr>
+        <p:spPr>
+          <a:xfrm>
+            <a:off x="566928" y="1883664"/>
             <a:ext cx="475488" cy="50292"/>
           </a:xfrm>
           <a:prstGeom prst="rect">
             <a:avLst/>
           </a:prstGeom>
           <a:solidFill>
-            <a:srgbClr val="0F7C86"/>
+            <a:srgbClr val="9A6310"/>
           </a:solidFill>
           <a:ln/>
         </p:spPr>
       </p:sp>
       <p:sp>
         <p:nvSpPr>
-          <p:cNvPr id="3" name="Text 1"/>
-          <p:cNvSpPr/>
-          <p:nvPr/>
-        </p:nvSpPr>
-        <p:spPr>
-          <a:xfrm>
-            <a:off x="566928" y="384048"/>
-            <a:ext cx="8010144" cy="237744"/>
-          </a:xfrm>
-          <a:prstGeom prst="rect">
-            <a:avLst/>
-          </a:prstGeom>
-          <a:noFill/>
-          <a:ln/>
-        </p:spPr>
-        <p:txBody>
-          <a:bodyPr wrap="square" lIns="0" tIns="0" rIns="0" bIns="0" rtlCol="0" anchor="ctr"/>
-          <a:lstStyle/>
-          <a:p>
-            <a:pPr indent="0" marL="0">
-              <a:buNone/>
-            </a:pPr>
-            <a:r>
-              <a:rPr lang="en-US" sz="1150" b="1" spc="180" kern="0" dirty="0">
-                <a:solidFill>
-                  <a:srgbClr val="0F7C86"/>
-                </a:solidFill>
-                <a:latin typeface="Arial" pitchFamily="34" charset="0"/>
-                <a:ea typeface="Arial" pitchFamily="34" charset="-122"/>
-                <a:cs typeface="Arial" pitchFamily="34" charset="-120"/>
-              </a:rPr>
-              <a:t>AUSWERTUNG · 25 MINUTEN</a:t>
-            </a:r>
-            <a:endParaRPr lang="en-US" sz="1150" dirty="0"/>
-          </a:p>
-        </p:txBody>
-      </p:sp>
-      <p:sp>
-        <p:nvSpPr>
-          <p:cNvPr id="4" name="Text 2"/>
-          <p:cNvSpPr/>
-          <p:nvPr/>
-        </p:nvSpPr>
-        <p:spPr>
-          <a:xfrm>
-            <a:off x="566928" y="731520"/>
-            <a:ext cx="8010144" cy="603504"/>
+          <p:cNvPr id="6" name="Text 4"/>
+          <p:cNvSpPr/>
+          <p:nvPr/>
+        </p:nvSpPr>
+        <p:spPr>
+          <a:xfrm>
+            <a:off x="566928" y="2084832"/>
+            <a:ext cx="5394960" cy="868680"/>
           </a:xfrm>
           <a:prstGeom prst="rect">
             <a:avLst/>
@@ -3984,7 +4116,7 @@
               <a:buNone/>
             </a:pPr>
             <a:r>
-              <a:rPr lang="en-US" sz="2600" b="1" dirty="0">
+              <a:rPr lang="en-US" sz="3000" b="1" dirty="0">
                 <a:solidFill>
                   <a:srgbClr val="272E52"/>
                 </a:solidFill>
@@ -3992,68 +4124,9 @@
                 <a:ea typeface="Arial" pitchFamily="34" charset="-122"/>
                 <a:cs typeface="Arial" pitchFamily="34" charset="-120"/>
               </a:rPr>
-              <a:t>Eure Container</a:t>
-            </a:r>
-            <a:endParaRPr lang="en-US" sz="2600" dirty="0"/>
-          </a:p>
-        </p:txBody>
-      </p:sp>
-      <p:sp>
-        <p:nvSpPr>
-          <p:cNvPr id="5" name="Shape 3"/>
-          <p:cNvSpPr/>
-          <p:nvPr/>
-        </p:nvSpPr>
-        <p:spPr>
-          <a:xfrm>
-            <a:off x="438912" y="1810512"/>
-            <a:ext cx="8266176" cy="365760"/>
-          </a:xfrm>
-          <a:prstGeom prst="rect">
-            <a:avLst/>
-          </a:prstGeom>
-          <a:solidFill>
-            <a:srgbClr val="F5F6FC"/>
-          </a:solidFill>
-          <a:ln/>
-        </p:spPr>
-      </p:sp>
-      <p:sp>
-        <p:nvSpPr>
-          <p:cNvPr id="6" name="Text 4"/>
-          <p:cNvSpPr/>
-          <p:nvPr/>
-        </p:nvSpPr>
-        <p:spPr>
-          <a:xfrm>
-            <a:off x="566928" y="1810512"/>
-            <a:ext cx="548640" cy="365760"/>
-          </a:xfrm>
-          <a:prstGeom prst="rect">
-            <a:avLst/>
-          </a:prstGeom>
-          <a:noFill/>
-          <a:ln/>
-        </p:spPr>
-        <p:txBody>
-          <a:bodyPr wrap="square" lIns="0" tIns="0" rIns="0" bIns="0" rtlCol="0" anchor="ctr"/>
-          <a:lstStyle/>
-          <a:p>
-            <a:pPr indent="0" marL="0">
-              <a:buNone/>
-            </a:pPr>
-            <a:r>
-              <a:rPr lang="en-US" sz="1200" b="1" dirty="0">
-                <a:solidFill>
-                  <a:srgbClr val="0F7C86"/>
-                </a:solidFill>
-                <a:latin typeface="Courier New" pitchFamily="34" charset="0"/>
-                <a:ea typeface="Courier New" pitchFamily="34" charset="-122"/>
-                <a:cs typeface="Courier New" pitchFamily="34" charset="-120"/>
-              </a:rPr>
-              <a:t>1</a:t>
-            </a:r>
-            <a:endParaRPr lang="en-US" sz="1200" dirty="0"/>
+              <a:t>Der erste Container</a:t>
+            </a:r>
+            <a:endParaRPr lang="en-US" sz="3000" dirty="0"/>
           </a:p>
         </p:txBody>
       </p:sp>
@@ -4065,399 +4138,24 @@
         </p:nvSpPr>
         <p:spPr>
           <a:xfrm>
-            <a:off x="1115568" y="1810512"/>
-            <a:ext cx="7461504" cy="365760"/>
-          </a:xfrm>
-          <a:prstGeom prst="rect">
-            <a:avLst/>
-          </a:prstGeom>
-          <a:noFill/>
-          <a:ln/>
-        </p:spPr>
-        <p:txBody>
-          <a:bodyPr wrap="square" lIns="0" tIns="0" rIns="0" bIns="0" rtlCol="0" anchor="ctr"/>
-          <a:lstStyle/>
-          <a:p>
-            <a:pPr indent="0" marL="0">
-              <a:buNone/>
-            </a:pPr>
-            <a:r>
-              <a:rPr lang="en-US" sz="1200" dirty="0">
-                <a:solidFill>
-                  <a:srgbClr val="434A63"/>
-                </a:solidFill>
-                <a:latin typeface="Arial" pitchFamily="34" charset="0"/>
-                <a:ea typeface="Arial" pitchFamily="34" charset="-122"/>
-                <a:cs typeface="Arial" pitchFamily="34" charset="-120"/>
-              </a:rPr>
-              <a:t>Jede Gruppe: docker ps zeigen – was läuft, was ist gestoppt, was wurde aufgeräumt?</a:t>
-            </a:r>
-            <a:endParaRPr lang="en-US" sz="1200" dirty="0"/>
-          </a:p>
-        </p:txBody>
-      </p:sp>
-      <p:sp>
-        <p:nvSpPr>
-          <p:cNvPr id="8" name="Text 6"/>
-          <p:cNvSpPr/>
-          <p:nvPr/>
-        </p:nvSpPr>
-        <p:spPr>
-          <a:xfrm>
-            <a:off x="566928" y="2176272"/>
-            <a:ext cx="548640" cy="365760"/>
-          </a:xfrm>
-          <a:prstGeom prst="rect">
-            <a:avLst/>
-          </a:prstGeom>
-          <a:noFill/>
-          <a:ln/>
-        </p:spPr>
-        <p:txBody>
-          <a:bodyPr wrap="square" lIns="0" tIns="0" rIns="0" bIns="0" rtlCol="0" anchor="ctr"/>
-          <a:lstStyle/>
-          <a:p>
-            <a:pPr indent="0" marL="0">
-              <a:buNone/>
-            </a:pPr>
-            <a:r>
-              <a:rPr lang="en-US" sz="1200" b="1" dirty="0">
-                <a:solidFill>
-                  <a:srgbClr val="0F7C86"/>
-                </a:solidFill>
-                <a:latin typeface="Courier New" pitchFamily="34" charset="0"/>
-                <a:ea typeface="Courier New" pitchFamily="34" charset="-122"/>
-                <a:cs typeface="Courier New" pitchFamily="34" charset="-120"/>
-              </a:rPr>
-              <a:t>2</a:t>
-            </a:r>
-            <a:endParaRPr lang="en-US" sz="1200" dirty="0"/>
-          </a:p>
-        </p:txBody>
-      </p:sp>
-      <p:sp>
-        <p:nvSpPr>
-          <p:cNvPr id="9" name="Text 7"/>
-          <p:cNvSpPr/>
-          <p:nvPr/>
-        </p:nvSpPr>
-        <p:spPr>
-          <a:xfrm>
-            <a:off x="1115568" y="2176272"/>
-            <a:ext cx="7461504" cy="365760"/>
-          </a:xfrm>
-          <a:prstGeom prst="rect">
-            <a:avLst/>
-          </a:prstGeom>
-          <a:noFill/>
-          <a:ln/>
-        </p:spPr>
-        <p:txBody>
-          <a:bodyPr wrap="square" lIns="0" tIns="0" rIns="0" bIns="0" rtlCol="0" anchor="ctr"/>
-          <a:lstStyle/>
-          <a:p>
-            <a:pPr indent="0" marL="0">
-              <a:buNone/>
-            </a:pPr>
-            <a:r>
-              <a:rPr lang="en-US" sz="1200" dirty="0">
-                <a:solidFill>
-                  <a:srgbClr val="434A63"/>
-                </a:solidFill>
-                <a:latin typeface="Arial" pitchFamily="34" charset="0"/>
-                <a:ea typeface="Arial" pitchFamily="34" charset="-122"/>
-                <a:cs typeface="Arial" pitchFamily="34" charset="-120"/>
-              </a:rPr>
-              <a:t>Die Port-Frage: Wie kam nginx in euren Browser – wer hat da worauf weitergeleitet?</a:t>
-            </a:r>
-            <a:endParaRPr lang="en-US" sz="1200" dirty="0"/>
-          </a:p>
-        </p:txBody>
-      </p:sp>
-      <p:sp>
-        <p:nvSpPr>
-          <p:cNvPr id="10" name="Shape 8"/>
-          <p:cNvSpPr/>
-          <p:nvPr/>
-        </p:nvSpPr>
-        <p:spPr>
-          <a:xfrm>
-            <a:off x="438912" y="2542032"/>
-            <a:ext cx="8266176" cy="365760"/>
-          </a:xfrm>
-          <a:prstGeom prst="rect">
-            <a:avLst/>
-          </a:prstGeom>
-          <a:solidFill>
-            <a:srgbClr val="F5F6FC"/>
-          </a:solidFill>
-          <a:ln/>
-        </p:spPr>
-      </p:sp>
-      <p:sp>
-        <p:nvSpPr>
-          <p:cNvPr id="11" name="Text 9"/>
-          <p:cNvSpPr/>
-          <p:nvPr/>
-        </p:nvSpPr>
-        <p:spPr>
-          <a:xfrm>
-            <a:off x="566928" y="2542032"/>
-            <a:ext cx="548640" cy="365760"/>
-          </a:xfrm>
-          <a:prstGeom prst="rect">
-            <a:avLst/>
-          </a:prstGeom>
-          <a:noFill/>
-          <a:ln/>
-        </p:spPr>
-        <p:txBody>
-          <a:bodyPr wrap="square" lIns="0" tIns="0" rIns="0" bIns="0" rtlCol="0" anchor="ctr"/>
-          <a:lstStyle/>
-          <a:p>
-            <a:pPr indent="0" marL="0">
-              <a:buNone/>
-            </a:pPr>
-            <a:r>
-              <a:rPr lang="en-US" sz="1200" b="1" dirty="0">
-                <a:solidFill>
-                  <a:srgbClr val="0F7C86"/>
-                </a:solidFill>
-                <a:latin typeface="Courier New" pitchFamily="34" charset="0"/>
-                <a:ea typeface="Courier New" pitchFamily="34" charset="-122"/>
-                <a:cs typeface="Courier New" pitchFamily="34" charset="-120"/>
-              </a:rPr>
-              <a:t>3</a:t>
-            </a:r>
-            <a:endParaRPr lang="en-US" sz="1200" dirty="0"/>
-          </a:p>
-        </p:txBody>
-      </p:sp>
-      <p:sp>
-        <p:nvSpPr>
-          <p:cNvPr id="12" name="Text 10"/>
-          <p:cNvSpPr/>
-          <p:nvPr/>
-        </p:nvSpPr>
-        <p:spPr>
-          <a:xfrm>
-            <a:off x="1115568" y="2542032"/>
-            <a:ext cx="7461504" cy="365760"/>
-          </a:xfrm>
-          <a:prstGeom prst="rect">
-            <a:avLst/>
-          </a:prstGeom>
-          <a:noFill/>
-          <a:ln/>
-        </p:spPr>
-        <p:txBody>
-          <a:bodyPr wrap="square" lIns="0" tIns="0" rIns="0" bIns="0" rtlCol="0" anchor="ctr"/>
-          <a:lstStyle/>
-          <a:p>
-            <a:pPr indent="0" marL="0">
-              <a:buNone/>
-            </a:pPr>
-            <a:r>
-              <a:rPr lang="en-US" sz="1200" dirty="0">
-                <a:solidFill>
-                  <a:srgbClr val="434A63"/>
-                </a:solidFill>
-                <a:latin typeface="Arial" pitchFamily="34" charset="0"/>
-                <a:ea typeface="Arial" pitchFamily="34" charset="-122"/>
-                <a:cs typeface="Arial" pitchFamily="34" charset="-120"/>
-              </a:rPr>
-              <a:t>Kür-Runde: eigene Seiten im Browser zeigen – und die Image-Größen vergleichen</a:t>
-            </a:r>
-            <a:endParaRPr lang="en-US" sz="1200" dirty="0"/>
-          </a:p>
-        </p:txBody>
-      </p:sp>
-      <p:sp>
-        <p:nvSpPr>
-          <p:cNvPr id="13" name="Text 11"/>
-          <p:cNvSpPr/>
-          <p:nvPr/>
-        </p:nvSpPr>
-        <p:spPr>
-          <a:xfrm>
-            <a:off x="566928" y="2907792"/>
-            <a:ext cx="548640" cy="365760"/>
-          </a:xfrm>
-          <a:prstGeom prst="rect">
-            <a:avLst/>
-          </a:prstGeom>
-          <a:noFill/>
-          <a:ln/>
-        </p:spPr>
-        <p:txBody>
-          <a:bodyPr wrap="square" lIns="0" tIns="0" rIns="0" bIns="0" rtlCol="0" anchor="ctr"/>
-          <a:lstStyle/>
-          <a:p>
-            <a:pPr indent="0" marL="0">
-              <a:buNone/>
-            </a:pPr>
-            <a:r>
-              <a:rPr lang="en-US" sz="1200" b="1" dirty="0">
-                <a:solidFill>
-                  <a:srgbClr val="0F7C86"/>
-                </a:solidFill>
-                <a:latin typeface="Courier New" pitchFamily="34" charset="0"/>
-                <a:ea typeface="Courier New" pitchFamily="34" charset="-122"/>
-                <a:cs typeface="Courier New" pitchFamily="34" charset="-120"/>
-              </a:rPr>
-              <a:t>4</a:t>
-            </a:r>
-            <a:endParaRPr lang="en-US" sz="1200" dirty="0"/>
-          </a:p>
-        </p:txBody>
-      </p:sp>
-      <p:sp>
-        <p:nvSpPr>
-          <p:cNvPr id="14" name="Text 12"/>
-          <p:cNvSpPr/>
-          <p:nvPr/>
-        </p:nvSpPr>
-        <p:spPr>
-          <a:xfrm>
-            <a:off x="1115568" y="2907792"/>
-            <a:ext cx="7461504" cy="365760"/>
-          </a:xfrm>
-          <a:prstGeom prst="rect">
-            <a:avLst/>
-          </a:prstGeom>
-          <a:noFill/>
-          <a:ln/>
-        </p:spPr>
-        <p:txBody>
-          <a:bodyPr wrap="square" lIns="0" tIns="0" rIns="0" bIns="0" rtlCol="0" anchor="ctr"/>
-          <a:lstStyle/>
-          <a:p>
-            <a:pPr indent="0" marL="0">
-              <a:buNone/>
-            </a:pPr>
-            <a:r>
-              <a:rPr lang="en-US" sz="1200" dirty="0">
-                <a:solidFill>
-                  <a:srgbClr val="434A63"/>
-                </a:solidFill>
-                <a:latin typeface="Arial" pitchFamily="34" charset="0"/>
-                <a:ea typeface="Arial" pitchFamily="34" charset="-122"/>
-                <a:cs typeface="Arial" pitchFamily="34" charset="-120"/>
-              </a:rPr>
-              <a:t>Der Montags-Vergleich: Was ging heute schneller als bei der VM – und warum?</a:t>
-            </a:r>
-            <a:endParaRPr lang="en-US" sz="1200" dirty="0"/>
-          </a:p>
-        </p:txBody>
-      </p:sp>
-      <p:sp>
-        <p:nvSpPr>
-          <p:cNvPr id="15" name="Shape 13"/>
-          <p:cNvSpPr/>
-          <p:nvPr/>
-        </p:nvSpPr>
-        <p:spPr>
-          <a:xfrm>
-            <a:off x="566928" y="4069080"/>
-            <a:ext cx="32004" cy="256032"/>
-          </a:xfrm>
-          <a:prstGeom prst="rect">
-            <a:avLst/>
-          </a:prstGeom>
-          <a:solidFill>
-            <a:srgbClr val="0F7C86"/>
-          </a:solidFill>
-          <a:ln/>
-        </p:spPr>
-      </p:sp>
-      <p:sp>
-        <p:nvSpPr>
-          <p:cNvPr id="16" name="Text 14"/>
-          <p:cNvSpPr/>
-          <p:nvPr/>
-        </p:nvSpPr>
-        <p:spPr>
-          <a:xfrm>
-            <a:off x="749808" y="4023360"/>
-            <a:ext cx="7827264" cy="402336"/>
-          </a:xfrm>
-          <a:prstGeom prst="rect">
-            <a:avLst/>
-          </a:prstGeom>
-          <a:noFill/>
-          <a:ln/>
-        </p:spPr>
-        <p:txBody>
-          <a:bodyPr wrap="square" lIns="0" tIns="0" rIns="0" bIns="0" rtlCol="0" anchor="ctr"/>
-          <a:lstStyle/>
-          <a:p>
-            <a:pPr indent="0" marL="0">
-              <a:buNone/>
-            </a:pPr>
-            <a:r>
-              <a:rPr lang="en-US" sz="1200" b="1" dirty="0">
-                <a:solidFill>
-                  <a:srgbClr val="434A63"/>
-                </a:solidFill>
-                <a:latin typeface="Arial" pitchFamily="34" charset="0"/>
-                <a:ea typeface="Arial" pitchFamily="34" charset="-122"/>
-                <a:cs typeface="Arial" pitchFamily="34" charset="-120"/>
-              </a:rPr>
-              <a:t>Die Port-Frage ist euer Netzwerkblock in Aktion: -p 8080:80 ist nichts anderes als eine kleine NAT-Regel.</a:t>
-            </a:r>
-            <a:endParaRPr lang="en-US" sz="1200" dirty="0"/>
-          </a:p>
-        </p:txBody>
-      </p:sp>
-      <p:sp>
-        <p:nvSpPr>
-          <p:cNvPr id="17" name="Shape 15"/>
-          <p:cNvSpPr/>
-          <p:nvPr/>
-        </p:nvSpPr>
-        <p:spPr>
-          <a:xfrm>
-            <a:off x="566928" y="4631436"/>
-            <a:ext cx="8010144" cy="0"/>
-          </a:xfrm>
-          <a:prstGeom prst="line">
-            <a:avLst/>
-          </a:prstGeom>
-          <a:noFill/>
-          <a:ln w="9525">
-            <a:solidFill>
-              <a:srgbClr val="DFE3F0"/>
-            </a:solidFill>
-            <a:prstDash val="solid"/>
-          </a:ln>
-        </p:spPr>
-      </p:sp>
-      <p:sp>
-        <p:nvSpPr>
-          <p:cNvPr id="18" name="Text 16"/>
-          <p:cNvSpPr/>
-          <p:nvPr/>
-        </p:nvSpPr>
-        <p:spPr>
-          <a:xfrm>
-            <a:off x="566928" y="4722876"/>
-            <a:ext cx="5029200" cy="237744"/>
-          </a:xfrm>
-          <a:prstGeom prst="rect">
-            <a:avLst/>
-          </a:prstGeom>
-          <a:noFill/>
-          <a:ln/>
-        </p:spPr>
-        <p:txBody>
-          <a:bodyPr wrap="square" lIns="0" tIns="0" rIns="0" bIns="0" rtlCol="0" anchor="ctr"/>
-          <a:lstStyle/>
-          <a:p>
-            <a:pPr indent="0" marL="0">
-              <a:buNone/>
-            </a:pPr>
-            <a:r>
-              <a:rPr lang="en-US" sz="1050" spc="30" kern="0" dirty="0">
+            <a:off x="566928" y="3017520"/>
+            <a:ext cx="5394960" cy="548640"/>
+          </a:xfrm>
+          <a:prstGeom prst="rect">
+            <a:avLst/>
+          </a:prstGeom>
+          <a:noFill/>
+          <a:ln/>
+        </p:spPr>
+        <p:txBody>
+          <a:bodyPr wrap="square" lIns="0" tIns="0" rIns="0" bIns="0" rtlCol="0" anchor="t"/>
+          <a:lstStyle/>
+          <a:p>
+            <a:pPr indent="0" marL="0">
+              <a:buNone/>
+            </a:pPr>
+            <a:r>
+              <a:rPr lang="en-US" sz="1350" dirty="0">
                 <a:solidFill>
                   <a:srgbClr val="5C6377"/>
                 </a:solidFill>
@@ -4465,48 +4163,9 @@
                 <a:ea typeface="Arial" pitchFamily="34" charset="-122"/>
                 <a:cs typeface="Arial" pitchFamily="34" charset="-120"/>
               </a:rPr>
-              <a:t>Auswertung</a:t>
-            </a:r>
-            <a:endParaRPr lang="en-US" sz="1050" dirty="0"/>
-          </a:p>
-        </p:txBody>
-      </p:sp>
-      <p:sp>
-        <p:nvSpPr>
-          <p:cNvPr id="19" name="Text 17"/>
-          <p:cNvSpPr/>
-          <p:nvPr/>
-        </p:nvSpPr>
-        <p:spPr>
-          <a:xfrm>
-            <a:off x="8028432" y="4722876"/>
-            <a:ext cx="548640" cy="237744"/>
-          </a:xfrm>
-          <a:prstGeom prst="rect">
-            <a:avLst/>
-          </a:prstGeom>
-          <a:noFill/>
-          <a:ln/>
-        </p:spPr>
-        <p:txBody>
-          <a:bodyPr wrap="square" lIns="0" tIns="0" rIns="0" bIns="0" rtlCol="0" anchor="ctr"/>
-          <a:lstStyle/>
-          <a:p>
-            <a:pPr algn="r" indent="0" marL="0">
-              <a:buNone/>
-            </a:pPr>
-            <a:r>
-              <a:rPr lang="en-US" sz="1050" dirty="0">
-                <a:solidFill>
-                  <a:srgbClr val="5C6377"/>
-                </a:solidFill>
-                <a:latin typeface="Arial" pitchFamily="34" charset="0"/>
-                <a:ea typeface="Arial" pitchFamily="34" charset="-122"/>
-                <a:cs typeface="Arial" pitchFamily="34" charset="-120"/>
-              </a:rPr>
-              <a:t>10/12</a:t>
-            </a:r>
-            <a:endParaRPr lang="en-US" sz="1050" dirty="0"/>
+              <a:t>50 Minuten in Gruppen – und als Kür ein eigenes Image</a:t>
+            </a:r>
+            <a:endParaRPr lang="en-US" sz="1350" dirty="0"/>
           </a:p>
         </p:txBody>
       </p:sp>
@@ -4557,7 +4216,7 @@
             <a:avLst/>
           </a:prstGeom>
           <a:solidFill>
-            <a:srgbClr val="0F7C86"/>
+            <a:srgbClr val="9A6310"/>
           </a:solidFill>
           <a:ln/>
         </p:spPr>
@@ -4589,13 +4248,13 @@
             <a:r>
               <a:rPr lang="en-US" sz="1150" b="1" spc="180" kern="0" dirty="0">
                 <a:solidFill>
-                  <a:srgbClr val="0F7C86"/>
-                </a:solidFill>
-                <a:latin typeface="Arial" pitchFamily="34" charset="0"/>
-                <a:ea typeface="Arial" pitchFamily="34" charset="-122"/>
-                <a:cs typeface="Arial" pitchFamily="34" charset="-120"/>
-              </a:rPr>
-              <a:t>DER BLICK NACH VORN</a:t>
+                  <a:srgbClr val="9A6310"/>
+                </a:solidFill>
+                <a:latin typeface="Arial" pitchFamily="34" charset="0"/>
+                <a:ea typeface="Arial" pitchFamily="34" charset="-122"/>
+                <a:cs typeface="Arial" pitchFamily="34" charset="-120"/>
+              </a:rPr>
+              <a:t>BREAKOUT · 50 MINUTEN</a:t>
             </a:r>
             <a:endParaRPr lang="en-US" sz="1150" dirty="0"/>
           </a:p>
@@ -4634,7 +4293,7 @@
                 <a:ea typeface="Arial" pitchFamily="34" charset="-122"/>
                 <a:cs typeface="Arial" pitchFamily="34" charset="-120"/>
               </a:rPr>
-              <a:t>Wo Container überall stecken</a:t>
+              <a:t>Der Auftrag</a:t>
             </a:r>
             <a:endParaRPr lang="en-US" sz="2600" dirty="0"/>
           </a:p>
@@ -4648,8 +4307,8 @@
         </p:nvSpPr>
         <p:spPr>
           <a:xfrm>
-            <a:off x="566928" y="1828800"/>
-            <a:ext cx="2523744" cy="1737360"/>
+            <a:off x="438912" y="1792224"/>
+            <a:ext cx="8266176" cy="329184"/>
           </a:xfrm>
           <a:prstGeom prst="rect">
             <a:avLst/>
@@ -4662,34 +4321,386 @@
       </p:sp>
       <p:sp>
         <p:nvSpPr>
-          <p:cNvPr id="6" name="Shape 4"/>
-          <p:cNvSpPr/>
-          <p:nvPr/>
-        </p:nvSpPr>
-        <p:spPr>
-          <a:xfrm>
-            <a:off x="566928" y="1828800"/>
-            <a:ext cx="41148" cy="1737360"/>
+          <p:cNvPr id="6" name="Text 4"/>
+          <p:cNvSpPr/>
+          <p:nvPr/>
+        </p:nvSpPr>
+        <p:spPr>
+          <a:xfrm>
+            <a:off x="566928" y="1792224"/>
+            <a:ext cx="914400" cy="329184"/>
+          </a:xfrm>
+          <a:prstGeom prst="rect">
+            <a:avLst/>
+          </a:prstGeom>
+          <a:noFill/>
+          <a:ln/>
+        </p:spPr>
+        <p:txBody>
+          <a:bodyPr wrap="square" lIns="0" tIns="0" rIns="0" bIns="0" rtlCol="0" anchor="ctr"/>
+          <a:lstStyle/>
+          <a:p>
+            <a:pPr indent="0" marL="0">
+              <a:buNone/>
+            </a:pPr>
+            <a:r>
+              <a:rPr lang="en-US" sz="1100" b="1" dirty="0">
+                <a:solidFill>
+                  <a:srgbClr val="9A6310"/>
+                </a:solidFill>
+                <a:latin typeface="Courier New" pitchFamily="34" charset="0"/>
+                <a:ea typeface="Courier New" pitchFamily="34" charset="-122"/>
+                <a:cs typeface="Courier New" pitchFamily="34" charset="-120"/>
+              </a:rPr>
+              <a:t>Teil 1</a:t>
+            </a:r>
+            <a:endParaRPr lang="en-US" sz="1100" dirty="0"/>
+          </a:p>
+        </p:txBody>
+      </p:sp>
+      <p:sp>
+        <p:nvSpPr>
+          <p:cNvPr id="7" name="Text 5"/>
+          <p:cNvSpPr/>
+          <p:nvPr/>
+        </p:nvSpPr>
+        <p:spPr>
+          <a:xfrm>
+            <a:off x="1481328" y="1792224"/>
+            <a:ext cx="7095744" cy="329184"/>
+          </a:xfrm>
+          <a:prstGeom prst="rect">
+            <a:avLst/>
+          </a:prstGeom>
+          <a:noFill/>
+          <a:ln/>
+        </p:spPr>
+        <p:txBody>
+          <a:bodyPr wrap="square" lIns="0" tIns="0" rIns="0" bIns="0" rtlCol="0" anchor="ctr"/>
+          <a:lstStyle/>
+          <a:p>
+            <a:pPr indent="0" marL="0">
+              <a:buNone/>
+            </a:pPr>
+            <a:r>
+              <a:rPr lang="en-US" sz="1100" dirty="0">
+                <a:solidFill>
+                  <a:srgbClr val="434A63"/>
+                </a:solidFill>
+                <a:latin typeface="Arial" pitchFamily="34" charset="0"/>
+                <a:ea typeface="Arial" pitchFamily="34" charset="-122"/>
+                <a:cs typeface="Arial" pitchFamily="34" charset="-120"/>
+              </a:rPr>
+              <a:t>Erste Schritte: hello-world, dann nginx mit Port – Container starten, ansehen, aufräumen</a:t>
+            </a:r>
+            <a:endParaRPr lang="en-US" sz="1100" dirty="0"/>
+          </a:p>
+        </p:txBody>
+      </p:sp>
+      <p:sp>
+        <p:nvSpPr>
+          <p:cNvPr id="8" name="Text 6"/>
+          <p:cNvSpPr/>
+          <p:nvPr/>
+        </p:nvSpPr>
+        <p:spPr>
+          <a:xfrm>
+            <a:off x="566928" y="2121408"/>
+            <a:ext cx="914400" cy="329184"/>
+          </a:xfrm>
+          <a:prstGeom prst="rect">
+            <a:avLst/>
+          </a:prstGeom>
+          <a:noFill/>
+          <a:ln/>
+        </p:spPr>
+        <p:txBody>
+          <a:bodyPr wrap="square" lIns="0" tIns="0" rIns="0" bIns="0" rtlCol="0" anchor="ctr"/>
+          <a:lstStyle/>
+          <a:p>
+            <a:pPr indent="0" marL="0">
+              <a:buNone/>
+            </a:pPr>
+            <a:r>
+              <a:rPr lang="en-US" sz="1100" b="1" dirty="0">
+                <a:solidFill>
+                  <a:srgbClr val="9A6310"/>
+                </a:solidFill>
+                <a:latin typeface="Courier New" pitchFamily="34" charset="0"/>
+                <a:ea typeface="Courier New" pitchFamily="34" charset="-122"/>
+                <a:cs typeface="Courier New" pitchFamily="34" charset="-120"/>
+              </a:rPr>
+              <a:t>Teil 2</a:t>
+            </a:r>
+            <a:endParaRPr lang="en-US" sz="1100" dirty="0"/>
+          </a:p>
+        </p:txBody>
+      </p:sp>
+      <p:sp>
+        <p:nvSpPr>
+          <p:cNvPr id="9" name="Text 7"/>
+          <p:cNvSpPr/>
+          <p:nvPr/>
+        </p:nvSpPr>
+        <p:spPr>
+          <a:xfrm>
+            <a:off x="1481328" y="2121408"/>
+            <a:ext cx="7095744" cy="329184"/>
+          </a:xfrm>
+          <a:prstGeom prst="rect">
+            <a:avLst/>
+          </a:prstGeom>
+          <a:noFill/>
+          <a:ln/>
+        </p:spPr>
+        <p:txBody>
+          <a:bodyPr wrap="square" lIns="0" tIns="0" rIns="0" bIns="0" rtlCol="0" anchor="ctr"/>
+          <a:lstStyle/>
+          <a:p>
+            <a:pPr indent="0" marL="0">
+              <a:buNone/>
+            </a:pPr>
+            <a:r>
+              <a:rPr lang="en-US" sz="1100" dirty="0">
+                <a:solidFill>
+                  <a:srgbClr val="434A63"/>
+                </a:solidFill>
+                <a:latin typeface="Arial" pitchFamily="34" charset="0"/>
+                <a:ea typeface="Arial" pitchFamily="34" charset="-122"/>
+                <a:cs typeface="Arial" pitchFamily="34" charset="-120"/>
+              </a:rPr>
+              <a:t>Kür: ein eigenes Image – kleine Webseite, Dockerfile, bauen, starten</a:t>
+            </a:r>
+            <a:endParaRPr lang="en-US" sz="1100" dirty="0"/>
+          </a:p>
+        </p:txBody>
+      </p:sp>
+      <p:sp>
+        <p:nvSpPr>
+          <p:cNvPr id="10" name="Shape 8"/>
+          <p:cNvSpPr/>
+          <p:nvPr/>
+        </p:nvSpPr>
+        <p:spPr>
+          <a:xfrm>
+            <a:off x="438912" y="2450592"/>
+            <a:ext cx="8266176" cy="329184"/>
           </a:xfrm>
           <a:prstGeom prst="rect">
             <a:avLst/>
           </a:prstGeom>
           <a:solidFill>
-            <a:srgbClr val="0F7C86"/>
+            <a:srgbClr val="F5F6FC"/>
           </a:solidFill>
           <a:ln/>
         </p:spPr>
       </p:sp>
       <p:sp>
         <p:nvSpPr>
-          <p:cNvPr id="7" name="Text 5"/>
-          <p:cNvSpPr/>
-          <p:nvPr/>
-        </p:nvSpPr>
-        <p:spPr>
-          <a:xfrm>
-            <a:off x="804672" y="1975104"/>
-            <a:ext cx="2121408" cy="256032"/>
+          <p:cNvPr id="11" name="Text 9"/>
+          <p:cNvSpPr/>
+          <p:nvPr/>
+        </p:nvSpPr>
+        <p:spPr>
+          <a:xfrm>
+            <a:off x="566928" y="2450592"/>
+            <a:ext cx="914400" cy="329184"/>
+          </a:xfrm>
+          <a:prstGeom prst="rect">
+            <a:avLst/>
+          </a:prstGeom>
+          <a:noFill/>
+          <a:ln/>
+        </p:spPr>
+        <p:txBody>
+          <a:bodyPr wrap="square" lIns="0" tIns="0" rIns="0" bIns="0" rtlCol="0" anchor="ctr"/>
+          <a:lstStyle/>
+          <a:p>
+            <a:pPr indent="0" marL="0">
+              <a:buNone/>
+            </a:pPr>
+            <a:r>
+              <a:rPr lang="en-US" sz="1100" b="1" dirty="0">
+                <a:solidFill>
+                  <a:srgbClr val="9A6310"/>
+                </a:solidFill>
+                <a:latin typeface="Courier New" pitchFamily="34" charset="0"/>
+                <a:ea typeface="Courier New" pitchFamily="34" charset="-122"/>
+                <a:cs typeface="Courier New" pitchFamily="34" charset="-120"/>
+              </a:rPr>
+              <a:t>Bonus</a:t>
+            </a:r>
+            <a:endParaRPr lang="en-US" sz="1100" dirty="0"/>
+          </a:p>
+        </p:txBody>
+      </p:sp>
+      <p:sp>
+        <p:nvSpPr>
+          <p:cNvPr id="12" name="Text 10"/>
+          <p:cNvSpPr/>
+          <p:nvPr/>
+        </p:nvSpPr>
+        <p:spPr>
+          <a:xfrm>
+            <a:off x="1481328" y="2450592"/>
+            <a:ext cx="7095744" cy="329184"/>
+          </a:xfrm>
+          <a:prstGeom prst="rect">
+            <a:avLst/>
+          </a:prstGeom>
+          <a:noFill/>
+          <a:ln/>
+        </p:spPr>
+        <p:txBody>
+          <a:bodyPr wrap="square" lIns="0" tIns="0" rIns="0" bIns="0" rtlCol="0" anchor="ctr"/>
+          <a:lstStyle/>
+          <a:p>
+            <a:pPr indent="0" marL="0">
+              <a:buNone/>
+            </a:pPr>
+            <a:r>
+              <a:rPr lang="en-US" sz="1100" dirty="0">
+                <a:solidFill>
+                  <a:srgbClr val="434A63"/>
+                </a:solidFill>
+                <a:latin typeface="Arial" pitchFamily="34" charset="0"/>
+                <a:ea typeface="Arial" pitchFamily="34" charset="-122"/>
+                <a:cs typeface="Arial" pitchFamily="34" charset="-120"/>
+              </a:rPr>
+              <a:t>Vier Experimente: in den Container schauen, Wegwerf-Test, zwei Versionen, Platzverbrauch</a:t>
+            </a:r>
+            <a:endParaRPr lang="en-US" sz="1100" dirty="0"/>
+          </a:p>
+        </p:txBody>
+      </p:sp>
+      <p:sp>
+        <p:nvSpPr>
+          <p:cNvPr id="13" name="Text 11"/>
+          <p:cNvSpPr/>
+          <p:nvPr/>
+        </p:nvSpPr>
+        <p:spPr>
+          <a:xfrm>
+            <a:off x="566928" y="2779776"/>
+            <a:ext cx="914400" cy="329184"/>
+          </a:xfrm>
+          <a:prstGeom prst="rect">
+            <a:avLst/>
+          </a:prstGeom>
+          <a:noFill/>
+          <a:ln/>
+        </p:spPr>
+        <p:txBody>
+          <a:bodyPr wrap="square" lIns="0" tIns="0" rIns="0" bIns="0" rtlCol="0" anchor="ctr"/>
+          <a:lstStyle/>
+          <a:p>
+            <a:pPr indent="0" marL="0">
+              <a:buNone/>
+            </a:pPr>
+            <a:r>
+              <a:rPr lang="en-US" sz="1100" b="1" dirty="0">
+                <a:solidFill>
+                  <a:srgbClr val="9A6310"/>
+                </a:solidFill>
+                <a:latin typeface="Courier New" pitchFamily="34" charset="0"/>
+                <a:ea typeface="Courier New" pitchFamily="34" charset="-122"/>
+                <a:cs typeface="Courier New" pitchFamily="34" charset="-120"/>
+              </a:rPr>
+              <a:t>Notieren</a:t>
+            </a:r>
+            <a:endParaRPr lang="en-US" sz="1100" dirty="0"/>
+          </a:p>
+        </p:txBody>
+      </p:sp>
+      <p:sp>
+        <p:nvSpPr>
+          <p:cNvPr id="14" name="Text 12"/>
+          <p:cNvSpPr/>
+          <p:nvPr/>
+        </p:nvSpPr>
+        <p:spPr>
+          <a:xfrm>
+            <a:off x="1481328" y="2779776"/>
+            <a:ext cx="7095744" cy="329184"/>
+          </a:xfrm>
+          <a:prstGeom prst="rect">
+            <a:avLst/>
+          </a:prstGeom>
+          <a:noFill/>
+          <a:ln/>
+        </p:spPr>
+        <p:txBody>
+          <a:bodyPr wrap="square" lIns="0" tIns="0" rIns="0" bIns="0" rtlCol="0" anchor="ctr"/>
+          <a:lstStyle/>
+          <a:p>
+            <a:pPr indent="0" marL="0">
+              <a:buNone/>
+            </a:pPr>
+            <a:r>
+              <a:rPr lang="en-US" sz="1100" dirty="0">
+                <a:solidFill>
+                  <a:srgbClr val="434A63"/>
+                </a:solidFill>
+                <a:latin typeface="Arial" pitchFamily="34" charset="0"/>
+                <a:ea typeface="Arial" pitchFamily="34" charset="-122"/>
+                <a:cs typeface="Arial" pitchFamily="34" charset="-120"/>
+              </a:rPr>
+              <a:t>Euren docker-ps-Stand nach Teil 1 – und aus der Kür: eure Image-Größe</a:t>
+            </a:r>
+            <a:endParaRPr lang="en-US" sz="1100" dirty="0"/>
+          </a:p>
+        </p:txBody>
+      </p:sp>
+      <p:sp>
+        <p:nvSpPr>
+          <p:cNvPr id="15" name="Shape 13"/>
+          <p:cNvSpPr/>
+          <p:nvPr/>
+        </p:nvSpPr>
+        <p:spPr>
+          <a:xfrm>
+            <a:off x="566928" y="3401568"/>
+            <a:ext cx="8010144" cy="1097280"/>
+          </a:xfrm>
+          <a:prstGeom prst="rect">
+            <a:avLst/>
+          </a:prstGeom>
+          <a:solidFill>
+            <a:srgbClr val="EEF0FB"/>
+          </a:solidFill>
+          <a:ln/>
+        </p:spPr>
+      </p:sp>
+      <p:sp>
+        <p:nvSpPr>
+          <p:cNvPr id="16" name="Shape 14"/>
+          <p:cNvSpPr/>
+          <p:nvPr/>
+        </p:nvSpPr>
+        <p:spPr>
+          <a:xfrm>
+            <a:off x="566928" y="3401568"/>
+            <a:ext cx="41148" cy="1097280"/>
+          </a:xfrm>
+          <a:prstGeom prst="rect">
+            <a:avLst/>
+          </a:prstGeom>
+          <a:solidFill>
+            <a:srgbClr val="9A6310"/>
+          </a:solidFill>
+          <a:ln/>
+        </p:spPr>
+      </p:sp>
+      <p:sp>
+        <p:nvSpPr>
+          <p:cNvPr id="17" name="Text 15"/>
+          <p:cNvSpPr/>
+          <p:nvPr/>
+        </p:nvSpPr>
+        <p:spPr>
+          <a:xfrm>
+            <a:off x="804672" y="3547872"/>
+            <a:ext cx="7607808" cy="242062"/>
           </a:xfrm>
           <a:prstGeom prst="rect">
             <a:avLst/>
@@ -4713,7 +4724,7 @@
                 <a:ea typeface="Arial" pitchFamily="34" charset="-122"/>
                 <a:cs typeface="Arial" pitchFamily="34" charset="-120"/>
               </a:rPr>
-              <a:t>In diesem Kurs</a:t>
+              <a:t>Jetzt öffnen – alles braucht ihr gleich im Raum</a:t>
             </a:r>
             <a:endParaRPr lang="en-US" sz="1300" dirty="0"/>
           </a:p>
@@ -4721,14 +4732,14 @@
       </p:sp>
       <p:sp>
         <p:nvSpPr>
-          <p:cNvPr id="8" name="Text 6"/>
-          <p:cNvSpPr/>
-          <p:nvPr/>
-        </p:nvSpPr>
-        <p:spPr>
-          <a:xfrm>
-            <a:off x="804672" y="2276856"/>
-            <a:ext cx="2121408" cy="1170432"/>
+          <p:cNvPr id="18" name="Text 16"/>
+          <p:cNvSpPr/>
+          <p:nvPr/>
+        </p:nvSpPr>
+        <p:spPr>
+          <a:xfrm>
+            <a:off x="804672" y="3835654"/>
+            <a:ext cx="7607808" cy="544322"/>
           </a:xfrm>
           <a:prstGeom prst="rect">
             <a:avLst/>
@@ -4744,10 +4755,13 @@
               <a:lnSpc>
                 <a:spcPct val="92000"/>
               </a:lnSpc>
-              <a:buNone/>
-            </a:pPr>
-            <a:r>
-              <a:rPr lang="en-US" sz="1100" dirty="0">
+              <a:spcAft>
+                <a:spcPts val="500"/>
+              </a:spcAft>
+              <a:buNone/>
+            </a:pPr>
+            <a:r>
+              <a:rPr lang="en-US" sz="1000" dirty="0">
                 <a:solidFill>
                   <a:srgbClr val="434A63"/>
                 </a:solidFill>
@@ -4755,120 +4769,22 @@
                 <a:ea typeface="Arial" pitchFamily="34" charset="-122"/>
                 <a:cs typeface="Arial" pitchFamily="34" charset="-120"/>
               </a:rPr>
-              <a:t>MQTT-Broker, Monitoring, Kubernetes, CI/CD – ab jetzt läuft fast jede Übung in Containern.</a:t>
-            </a:r>
-            <a:endParaRPr lang="en-US" sz="1100" dirty="0"/>
-          </a:p>
-        </p:txBody>
-      </p:sp>
-      <p:sp>
-        <p:nvSpPr>
-          <p:cNvPr id="9" name="Shape 7"/>
-          <p:cNvSpPr/>
-          <p:nvPr/>
-        </p:nvSpPr>
-        <p:spPr>
-          <a:xfrm>
-            <a:off x="3310128" y="1828800"/>
-            <a:ext cx="2523744" cy="1737360"/>
-          </a:xfrm>
-          <a:prstGeom prst="rect">
-            <a:avLst/>
-          </a:prstGeom>
-          <a:solidFill>
-            <a:srgbClr val="F5F6FC"/>
-          </a:solidFill>
-          <a:ln/>
-        </p:spPr>
-      </p:sp>
-      <p:sp>
-        <p:nvSpPr>
-          <p:cNvPr id="10" name="Shape 8"/>
-          <p:cNvSpPr/>
-          <p:nvPr/>
-        </p:nvSpPr>
-        <p:spPr>
-          <a:xfrm>
-            <a:off x="3310128" y="1828800"/>
-            <a:ext cx="41148" cy="1737360"/>
-          </a:xfrm>
-          <a:prstGeom prst="rect">
-            <a:avLst/>
-          </a:prstGeom>
-          <a:solidFill>
-            <a:srgbClr val="0F7C86"/>
-          </a:solidFill>
-          <a:ln/>
-        </p:spPr>
-      </p:sp>
-      <p:sp>
-        <p:nvSpPr>
-          <p:cNvPr id="11" name="Text 9"/>
-          <p:cNvSpPr/>
-          <p:nvPr/>
-        </p:nvSpPr>
-        <p:spPr>
-          <a:xfrm>
-            <a:off x="3547872" y="1975104"/>
-            <a:ext cx="2121408" cy="256032"/>
-          </a:xfrm>
-          <a:prstGeom prst="rect">
-            <a:avLst/>
-          </a:prstGeom>
-          <a:noFill/>
-          <a:ln/>
-        </p:spPr>
-        <p:txBody>
-          <a:bodyPr wrap="square" lIns="0" tIns="0" rIns="0" bIns="0" rtlCol="0" anchor="t"/>
-          <a:lstStyle/>
-          <a:p>
-            <a:pPr indent="0" marL="0">
-              <a:buNone/>
-            </a:pPr>
-            <a:r>
-              <a:rPr lang="en-US" sz="1300" b="1" dirty="0">
-                <a:solidFill>
-                  <a:srgbClr val="272E52"/>
-                </a:solidFill>
-                <a:latin typeface="Arial" pitchFamily="34" charset="0"/>
-                <a:ea typeface="Arial" pitchFamily="34" charset="-122"/>
-                <a:cs typeface="Arial" pitchFamily="34" charset="-120"/>
-              </a:rPr>
-              <a:t>Im Betrieb</a:t>
-            </a:r>
-            <a:endParaRPr lang="en-US" sz="1300" dirty="0"/>
-          </a:p>
-        </p:txBody>
-      </p:sp>
-      <p:sp>
-        <p:nvSpPr>
-          <p:cNvPr id="12" name="Text 10"/>
-          <p:cNvSpPr/>
-          <p:nvPr/>
-        </p:nvSpPr>
-        <p:spPr>
-          <a:xfrm>
-            <a:off x="3547872" y="2276856"/>
-            <a:ext cx="2121408" cy="1170432"/>
-          </a:xfrm>
-          <a:prstGeom prst="rect">
-            <a:avLst/>
-          </a:prstGeom>
-          <a:noFill/>
-          <a:ln/>
-        </p:spPr>
-        <p:txBody>
-          <a:bodyPr wrap="square" lIns="0" tIns="0" rIns="0" bIns="0" rtlCol="0" anchor="t"/>
-          <a:lstStyle/>
+              <a:t>Teil 1:  jacobmenge.github.io/kurs-unterlagen/docker/erste-schritte/</a:t>
+            </a:r>
+            <a:endParaRPr lang="en-US" sz="1000" dirty="0"/>
+          </a:p>
           <a:p>
             <a:pPr indent="0" marL="0">
               <a:lnSpc>
                 <a:spcPct val="92000"/>
               </a:lnSpc>
-              <a:buNone/>
-            </a:pPr>
-            <a:r>
-              <a:rPr lang="en-US" sz="1100" dirty="0">
+              <a:spcAft>
+                <a:spcPts val="500"/>
+              </a:spcAft>
+              <a:buNone/>
+            </a:pPr>
+            <a:r>
+              <a:rPr lang="en-US" sz="1000" dirty="0">
                 <a:solidFill>
                   <a:srgbClr val="434A63"/>
                 </a:solidFill>
@@ -4876,120 +4792,22 @@
                 <a:ea typeface="Arial" pitchFamily="34" charset="-122"/>
                 <a:cs typeface="Arial" pitchFamily="34" charset="-120"/>
               </a:rPr>
-              <a:t>Moderne Anwendungen werden als Container ausgeliefert – gleiche Umgebung vom Laptop bis zur Cloud.</a:t>
-            </a:r>
-            <a:endParaRPr lang="en-US" sz="1100" dirty="0"/>
-          </a:p>
-        </p:txBody>
-      </p:sp>
-      <p:sp>
-        <p:nvSpPr>
-          <p:cNvPr id="13" name="Shape 11"/>
-          <p:cNvSpPr/>
-          <p:nvPr/>
-        </p:nvSpPr>
-        <p:spPr>
-          <a:xfrm>
-            <a:off x="6053328" y="1828800"/>
-            <a:ext cx="2523744" cy="1737360"/>
-          </a:xfrm>
-          <a:prstGeom prst="rect">
-            <a:avLst/>
-          </a:prstGeom>
-          <a:solidFill>
-            <a:srgbClr val="F5F6FC"/>
-          </a:solidFill>
-          <a:ln/>
-        </p:spPr>
-      </p:sp>
-      <p:sp>
-        <p:nvSpPr>
-          <p:cNvPr id="14" name="Shape 12"/>
-          <p:cNvSpPr/>
-          <p:nvPr/>
-        </p:nvSpPr>
-        <p:spPr>
-          <a:xfrm>
-            <a:off x="6053328" y="1828800"/>
-            <a:ext cx="41148" cy="1737360"/>
-          </a:xfrm>
-          <a:prstGeom prst="rect">
-            <a:avLst/>
-          </a:prstGeom>
-          <a:solidFill>
-            <a:srgbClr val="0F7C86"/>
-          </a:solidFill>
-          <a:ln/>
-        </p:spPr>
-      </p:sp>
-      <p:sp>
-        <p:nvSpPr>
-          <p:cNvPr id="15" name="Text 13"/>
-          <p:cNvSpPr/>
-          <p:nvPr/>
-        </p:nvSpPr>
-        <p:spPr>
-          <a:xfrm>
-            <a:off x="6291072" y="1975104"/>
-            <a:ext cx="2121408" cy="256032"/>
-          </a:xfrm>
-          <a:prstGeom prst="rect">
-            <a:avLst/>
-          </a:prstGeom>
-          <a:noFill/>
-          <a:ln/>
-        </p:spPr>
-        <p:txBody>
-          <a:bodyPr wrap="square" lIns="0" tIns="0" rIns="0" bIns="0" rtlCol="0" anchor="t"/>
-          <a:lstStyle/>
-          <a:p>
-            <a:pPr indent="0" marL="0">
-              <a:buNone/>
-            </a:pPr>
-            <a:r>
-              <a:rPr lang="en-US" sz="1300" b="1" dirty="0">
-                <a:solidFill>
-                  <a:srgbClr val="272E52"/>
-                </a:solidFill>
-                <a:latin typeface="Arial" pitchFamily="34" charset="0"/>
-                <a:ea typeface="Arial" pitchFamily="34" charset="-122"/>
-                <a:cs typeface="Arial" pitchFamily="34" charset="-120"/>
-              </a:rPr>
-              <a:t>Grenzen bleiben</a:t>
-            </a:r>
-            <a:endParaRPr lang="en-US" sz="1300" dirty="0"/>
-          </a:p>
-        </p:txBody>
-      </p:sp>
-      <p:sp>
-        <p:nvSpPr>
-          <p:cNvPr id="16" name="Text 14"/>
-          <p:cNvSpPr/>
-          <p:nvPr/>
-        </p:nvSpPr>
-        <p:spPr>
-          <a:xfrm>
-            <a:off x="6291072" y="2276856"/>
-            <a:ext cx="2121408" cy="1170432"/>
-          </a:xfrm>
-          <a:prstGeom prst="rect">
-            <a:avLst/>
-          </a:prstGeom>
-          <a:noFill/>
-          <a:ln/>
-        </p:spPr>
-        <p:txBody>
-          <a:bodyPr wrap="square" lIns="0" tIns="0" rIns="0" bIns="0" rtlCol="0" anchor="t"/>
-          <a:lstStyle/>
+              <a:t>Teil 2 (Kür):  jacobmenge.github.io/kurs-unterlagen/docker/praxis-eigenes-image/</a:t>
+            </a:r>
+            <a:endParaRPr lang="en-US" sz="1000" dirty="0"/>
+          </a:p>
           <a:p>
             <a:pPr indent="0" marL="0">
               <a:lnSpc>
                 <a:spcPct val="92000"/>
               </a:lnSpc>
-              <a:buNone/>
-            </a:pPr>
-            <a:r>
-              <a:rPr lang="en-US" sz="1100" dirty="0">
+              <a:spcAft>
+                <a:spcPts val="500"/>
+              </a:spcAft>
+              <a:buNone/>
+            </a:pPr>
+            <a:r>
+              <a:rPr lang="en-US" sz="1000" dirty="0">
                 <a:solidFill>
                   <a:srgbClr val="434A63"/>
                 </a:solidFill>
@@ -4997,68 +4815,9 @@
                 <a:ea typeface="Arial" pitchFamily="34" charset="-122"/>
                 <a:cs typeface="Arial" pitchFamily="34" charset="-120"/>
               </a:rPr>
-              <a:t>Container teilen den Kernel des Hosts. Fremde Betriebssysteme oder harte Isolation? Dann doch die VM von Montag.</a:t>
-            </a:r>
-            <a:endParaRPr lang="en-US" sz="1100" dirty="0"/>
-          </a:p>
-        </p:txBody>
-      </p:sp>
-      <p:sp>
-        <p:nvSpPr>
-          <p:cNvPr id="17" name="Shape 15"/>
-          <p:cNvSpPr/>
-          <p:nvPr/>
-        </p:nvSpPr>
-        <p:spPr>
-          <a:xfrm>
-            <a:off x="566928" y="4069080"/>
-            <a:ext cx="32004" cy="256032"/>
-          </a:xfrm>
-          <a:prstGeom prst="rect">
-            <a:avLst/>
-          </a:prstGeom>
-          <a:solidFill>
-            <a:srgbClr val="0F7C86"/>
-          </a:solidFill>
-          <a:ln/>
-        </p:spPr>
-      </p:sp>
-      <p:sp>
-        <p:nvSpPr>
-          <p:cNvPr id="18" name="Text 16"/>
-          <p:cNvSpPr/>
-          <p:nvPr/>
-        </p:nvSpPr>
-        <p:spPr>
-          <a:xfrm>
-            <a:off x="749808" y="4023360"/>
-            <a:ext cx="7827264" cy="402336"/>
-          </a:xfrm>
-          <a:prstGeom prst="rect">
-            <a:avLst/>
-          </a:prstGeom>
-          <a:noFill/>
-          <a:ln/>
-        </p:spPr>
-        <p:txBody>
-          <a:bodyPr wrap="square" lIns="0" tIns="0" rIns="0" bIns="0" rtlCol="0" anchor="ctr"/>
-          <a:lstStyle/>
-          <a:p>
-            <a:pPr indent="0" marL="0">
-              <a:buNone/>
-            </a:pPr>
-            <a:r>
-              <a:rPr lang="en-US" sz="1200" b="1" dirty="0">
-                <a:solidFill>
-                  <a:srgbClr val="434A63"/>
-                </a:solidFill>
-                <a:latin typeface="Arial" pitchFamily="34" charset="0"/>
-                <a:ea typeface="Arial" pitchFamily="34" charset="-122"/>
-                <a:cs typeface="Arial" pitchFamily="34" charset="-120"/>
-              </a:rPr>
-              <a:t>Merksatz des Abends: Image = Bauplan, Container = laufende Instanz – und Wegwerfen ist wieder erlaubt.</a:t>
-            </a:r>
-            <a:endParaRPr lang="en-US" sz="1200" dirty="0"/>
+              <a:t>Ergebnisse eintragen:  &lt;Link zum Ergebnis-Dokument hier eintragen&gt;</a:t>
+            </a:r>
+            <a:endParaRPr lang="en-US" sz="1000" dirty="0"/>
           </a:p>
         </p:txBody>
       </p:sp>
@@ -5118,7 +4877,7 @@
                 <a:ea typeface="Arial" pitchFamily="34" charset="-122"/>
                 <a:cs typeface="Arial" pitchFamily="34" charset="-120"/>
               </a:rPr>
-              <a:t>Auswertung</a:t>
+              <a:t>Breakout</a:t>
             </a:r>
             <a:endParaRPr lang="en-US" sz="1050" dirty="0"/>
           </a:p>
@@ -5157,7 +4916,7 @@
                 <a:ea typeface="Arial" pitchFamily="34" charset="-122"/>
                 <a:cs typeface="Arial" pitchFamily="34" charset="-120"/>
               </a:rPr>
-              <a:t>11/12</a:t>
+              <a:t>11/15</a:t>
             </a:r>
             <a:endParaRPr lang="en-US" sz="1050" dirty="0"/>
           </a:p>
@@ -5210,7 +4969,7 @@
             <a:avLst/>
           </a:prstGeom>
           <a:solidFill>
-            <a:srgbClr val="0F7C86"/>
+            <a:srgbClr val="9A6310"/>
           </a:solidFill>
           <a:ln/>
         </p:spPr>
@@ -5242,13 +5001,13 @@
             <a:r>
               <a:rPr lang="en-US" sz="1150" b="1" spc="180" kern="0" dirty="0">
                 <a:solidFill>
-                  <a:srgbClr val="0F7C86"/>
-                </a:solidFill>
-                <a:latin typeface="Arial" pitchFamily="34" charset="0"/>
-                <a:ea typeface="Arial" pitchFamily="34" charset="-122"/>
-                <a:cs typeface="Arial" pitchFamily="34" charset="-120"/>
-              </a:rPr>
-              <a:t>AUSBLICK</a:t>
+                  <a:srgbClr val="9A6310"/>
+                </a:solidFill>
+                <a:latin typeface="Arial" pitchFamily="34" charset="0"/>
+                <a:ea typeface="Arial" pitchFamily="34" charset="-122"/>
+                <a:cs typeface="Arial" pitchFamily="34" charset="-120"/>
+              </a:rPr>
+              <a:t>SPIELREGELN</a:t>
             </a:r>
             <a:endParaRPr lang="en-US" sz="1150" dirty="0"/>
           </a:p>
@@ -5287,7 +5046,7 @@
                 <a:ea typeface="Arial" pitchFamily="34" charset="-122"/>
                 <a:cs typeface="Arial" pitchFamily="34" charset="-120"/>
               </a:rPr>
-              <a:t>Bis Montag</a:t>
+              <a:t>So arbeitet ihr</a:t>
             </a:r>
             <a:endParaRPr lang="en-US" sz="2600" dirty="0"/>
           </a:p>
@@ -5301,8 +5060,8 @@
         </p:nvSpPr>
         <p:spPr>
           <a:xfrm>
-            <a:off x="566928" y="1444752"/>
-            <a:ext cx="8010144" cy="438912"/>
+            <a:off x="566928" y="1700784"/>
+            <a:ext cx="8010144" cy="2011680"/>
           </a:xfrm>
           <a:prstGeom prst="rect">
             <a:avLst/>
@@ -5315,20 +5074,243 @@
           <a:lstStyle/>
           <a:p>
             <a:pPr indent="0" marL="0">
-              <a:buNone/>
-            </a:pPr>
-            <a:r>
-              <a:rPr lang="en-US" sz="1300" dirty="0">
-                <a:solidFill>
-                  <a:srgbClr val="5C6377"/>
-                </a:solidFill>
-                <a:latin typeface="Arial" pitchFamily="34" charset="0"/>
-                <a:ea typeface="Arial" pitchFamily="34" charset="-122"/>
-                <a:cs typeface="Arial" pitchFamily="34" charset="-120"/>
-              </a:rPr>
-              <a:t>Montag geht es in die Tiefe: Was passiert mit Daten, wenn der Container stirbt?</a:t>
-            </a:r>
-            <a:endParaRPr lang="en-US" sz="1300" dirty="0"/>
+              <a:lnSpc>
+                <a:spcPct val="92000"/>
+              </a:lnSpc>
+              <a:buNone/>
+            </a:pPr>
+            <a:r>
+              <a:rPr lang="en-US" sz="1250" b="1" dirty="0">
+                <a:solidFill>
+                  <a:srgbClr val="9A6310"/>
+                </a:solidFill>
+                <a:latin typeface="Arial" pitchFamily="34" charset="0"/>
+                <a:ea typeface="Arial" pitchFamily="34" charset="-122"/>
+                <a:cs typeface="Arial" pitchFamily="34" charset="-120"/>
+              </a:rPr>
+              <a:t>▸   </a:t>
+            </a:r>
+            <a:pPr indent="0" marL="0">
+              <a:lnSpc>
+                <a:spcPct val="92000"/>
+              </a:lnSpc>
+              <a:spcAft>
+                <a:spcPts val="900"/>
+              </a:spcAft>
+              <a:buNone/>
+            </a:pPr>
+            <a:r>
+              <a:rPr lang="en-US" sz="1250" dirty="0">
+                <a:solidFill>
+                  <a:srgbClr val="434A63"/>
+                </a:solidFill>
+                <a:latin typeface="Arial" pitchFamily="34" charset="0"/>
+                <a:ea typeface="Arial" pitchFamily="34" charset="-122"/>
+                <a:cs typeface="Arial" pitchFamily="34" charset="-120"/>
+              </a:rPr>
+              <a:t>Gleiche Gruppen, eine Person teilt den Bildschirm – alle tippen auf dem eigenen Rechner mit.</a:t>
+            </a:r>
+            <a:endParaRPr lang="en-US" sz="1250" dirty="0"/>
+          </a:p>
+          <a:p>
+            <a:pPr indent="0" marL="0">
+              <a:lnSpc>
+                <a:spcPct val="92000"/>
+              </a:lnSpc>
+              <a:buNone/>
+            </a:pPr>
+            <a:r>
+              <a:rPr lang="en-US" sz="1250" b="1" dirty="0">
+                <a:solidFill>
+                  <a:srgbClr val="9A6310"/>
+                </a:solidFill>
+                <a:latin typeface="Arial" pitchFamily="34" charset="0"/>
+                <a:ea typeface="Arial" pitchFamily="34" charset="-122"/>
+                <a:cs typeface="Arial" pitchFamily="34" charset="-120"/>
+              </a:rPr>
+              <a:t>▸   </a:t>
+            </a:r>
+            <a:pPr indent="0" marL="0">
+              <a:lnSpc>
+                <a:spcPct val="92000"/>
+              </a:lnSpc>
+              <a:spcAft>
+                <a:spcPts val="900"/>
+              </a:spcAft>
+              <a:buNone/>
+            </a:pPr>
+            <a:r>
+              <a:rPr lang="en-US" sz="1250" dirty="0">
+                <a:solidFill>
+                  <a:srgbClr val="434A63"/>
+                </a:solidFill>
+                <a:latin typeface="Arial" pitchFamily="34" charset="0"/>
+                <a:ea typeface="Arial" pitchFamily="34" charset="-122"/>
+                <a:cs typeface="Arial" pitchFamily="34" charset="-120"/>
+              </a:rPr>
+              <a:t>Die Anleitung zeigt jeden Befehl mit erwarteter Ausgabe – vergleicht, was bei euch anders aussieht.</a:t>
+            </a:r>
+            <a:endParaRPr lang="en-US" sz="1250" dirty="0"/>
+          </a:p>
+          <a:p>
+            <a:pPr indent="0" marL="0">
+              <a:lnSpc>
+                <a:spcPct val="92000"/>
+              </a:lnSpc>
+              <a:buNone/>
+            </a:pPr>
+            <a:r>
+              <a:rPr lang="en-US" sz="1250" b="1" dirty="0">
+                <a:solidFill>
+                  <a:srgbClr val="9A6310"/>
+                </a:solidFill>
+                <a:latin typeface="Arial" pitchFamily="34" charset="0"/>
+                <a:ea typeface="Arial" pitchFamily="34" charset="-122"/>
+                <a:cs typeface="Arial" pitchFamily="34" charset="-120"/>
+              </a:rPr>
+              <a:t>▸   </a:t>
+            </a:r>
+            <a:pPr indent="0" marL="0">
+              <a:lnSpc>
+                <a:spcPct val="92000"/>
+              </a:lnSpc>
+              <a:spcAft>
+                <a:spcPts val="900"/>
+              </a:spcAft>
+              <a:buNone/>
+            </a:pPr>
+            <a:r>
+              <a:rPr lang="en-US" sz="1250" dirty="0">
+                <a:solidFill>
+                  <a:srgbClr val="434A63"/>
+                </a:solidFill>
+                <a:latin typeface="Arial" pitchFamily="34" charset="0"/>
+                <a:ea typeface="Arial" pitchFamily="34" charset="-122"/>
+                <a:cs typeface="Arial" pitchFamily="34" charset="-120"/>
+              </a:rPr>
+              <a:t>Teil 1 ist Pflicht bis einschließlich Aufräumen. Die Kür beginnt erst, wenn Teil 1 sauber durch ist.</a:t>
+            </a:r>
+            <a:endParaRPr lang="en-US" sz="1250" dirty="0"/>
+          </a:p>
+          <a:p>
+            <a:pPr indent="0" marL="0">
+              <a:lnSpc>
+                <a:spcPct val="92000"/>
+              </a:lnSpc>
+              <a:buNone/>
+            </a:pPr>
+            <a:r>
+              <a:rPr lang="en-US" sz="1250" b="1" dirty="0">
+                <a:solidFill>
+                  <a:srgbClr val="9A6310"/>
+                </a:solidFill>
+                <a:latin typeface="Arial" pitchFamily="34" charset="0"/>
+                <a:ea typeface="Arial" pitchFamily="34" charset="-122"/>
+                <a:cs typeface="Arial" pitchFamily="34" charset="-120"/>
+              </a:rPr>
+              <a:t>▸   </a:t>
+            </a:r>
+            <a:pPr indent="0" marL="0">
+              <a:lnSpc>
+                <a:spcPct val="92000"/>
+              </a:lnSpc>
+              <a:spcAft>
+                <a:spcPts val="900"/>
+              </a:spcAft>
+              <a:buNone/>
+            </a:pPr>
+            <a:r>
+              <a:rPr lang="en-US" sz="1250" dirty="0">
+                <a:solidFill>
+                  <a:srgbClr val="434A63"/>
+                </a:solidFill>
+                <a:latin typeface="Arial" pitchFamily="34" charset="0"/>
+                <a:ea typeface="Arial" pitchFamily="34" charset="-122"/>
+                <a:cs typeface="Arial" pitchFamily="34" charset="-120"/>
+              </a:rPr>
+              <a:t>Schnell durch? Am Ende der Kür-Seite warten vier Bonus-Experimente – eines davon erklärt schon Montag.</a:t>
+            </a:r>
+            <a:endParaRPr lang="en-US" sz="1250" dirty="0"/>
+          </a:p>
+          <a:p>
+            <a:pPr indent="0" marL="0">
+              <a:lnSpc>
+                <a:spcPct val="92000"/>
+              </a:lnSpc>
+              <a:buNone/>
+            </a:pPr>
+            <a:r>
+              <a:rPr lang="en-US" sz="1250" b="1" dirty="0">
+                <a:solidFill>
+                  <a:srgbClr val="9A6310"/>
+                </a:solidFill>
+                <a:latin typeface="Arial" pitchFamily="34" charset="0"/>
+                <a:ea typeface="Arial" pitchFamily="34" charset="-122"/>
+                <a:cs typeface="Arial" pitchFamily="34" charset="-120"/>
+              </a:rPr>
+              <a:t>▸   </a:t>
+            </a:r>
+            <a:pPr indent="0" marL="0">
+              <a:lnSpc>
+                <a:spcPct val="92000"/>
+              </a:lnSpc>
+              <a:spcAft>
+                <a:spcPts val="900"/>
+              </a:spcAft>
+              <a:buNone/>
+            </a:pPr>
+            <a:r>
+              <a:rPr lang="en-US" sz="1250" dirty="0">
+                <a:solidFill>
+                  <a:srgbClr val="434A63"/>
+                </a:solidFill>
+                <a:latin typeface="Arial" pitchFamily="34" charset="0"/>
+                <a:ea typeface="Arial" pitchFamily="34" charset="-122"/>
+                <a:cs typeface="Arial" pitchFamily="34" charset="-120"/>
+              </a:rPr>
+              <a:t>Wer ohne Docker dasteht: in der Gruppe mitarbeiten und zu Hause nachziehen – Installation läuft notfalls nebenher.</a:t>
+            </a:r>
+            <a:endParaRPr lang="en-US" sz="1250" dirty="0"/>
+          </a:p>
+          <a:p>
+            <a:pPr indent="0" marL="0">
+              <a:lnSpc>
+                <a:spcPct val="92000"/>
+              </a:lnSpc>
+              <a:buNone/>
+            </a:pPr>
+            <a:r>
+              <a:rPr lang="en-US" sz="1250" b="1" dirty="0">
+                <a:solidFill>
+                  <a:srgbClr val="9A6310"/>
+                </a:solidFill>
+                <a:latin typeface="Arial" pitchFamily="34" charset="0"/>
+                <a:ea typeface="Arial" pitchFamily="34" charset="-122"/>
+                <a:cs typeface="Arial" pitchFamily="34" charset="-120"/>
+              </a:rPr>
+              <a:t>▸   </a:t>
+            </a:r>
+            <a:pPr indent="0" marL="0">
+              <a:lnSpc>
+                <a:spcPct val="92000"/>
+              </a:lnSpc>
+              <a:spcAft>
+                <a:spcPts val="900"/>
+              </a:spcAft>
+              <a:buNone/>
+            </a:pPr>
+            <a:r>
+              <a:rPr lang="en-US" sz="1250" dirty="0">
+                <a:solidFill>
+                  <a:srgbClr val="434A63"/>
+                </a:solidFill>
+                <a:latin typeface="Arial" pitchFamily="34" charset="0"/>
+                <a:ea typeface="Arial" pitchFamily="34" charset="-122"/>
+                <a:cs typeface="Arial" pitchFamily="34" charset="-120"/>
+              </a:rPr>
+              <a:t>Wenn es klemmt: Stolpersteine-Seite, dann „Um Hilfe bitten“.</a:t>
+            </a:r>
+            <a:endParaRPr lang="en-US" sz="1250" dirty="0"/>
           </a:p>
         </p:txBody>
       </p:sp>
@@ -5340,8 +5322,8 @@
         </p:nvSpPr>
         <p:spPr>
           <a:xfrm>
-            <a:off x="566928" y="1975104"/>
-            <a:ext cx="2523744" cy="1920240"/>
+            <a:off x="566928" y="3602736"/>
+            <a:ext cx="8010144" cy="822960"/>
           </a:xfrm>
           <a:prstGeom prst="rect">
             <a:avLst/>
@@ -5360,14 +5342,14 @@
         </p:nvSpPr>
         <p:spPr>
           <a:xfrm>
-            <a:off x="566928" y="1975104"/>
-            <a:ext cx="41148" cy="1920240"/>
+            <a:off x="566928" y="3602736"/>
+            <a:ext cx="41148" cy="822960"/>
           </a:xfrm>
           <a:prstGeom prst="rect">
             <a:avLst/>
           </a:prstGeom>
           <a:solidFill>
-            <a:srgbClr val="0F7C86"/>
+            <a:srgbClr val="9A6310"/>
           </a:solidFill>
           <a:ln/>
         </p:spPr>
@@ -5380,8 +5362,8 @@
         </p:nvSpPr>
         <p:spPr>
           <a:xfrm>
-            <a:off x="804672" y="2121408"/>
-            <a:ext cx="2121408" cy="256032"/>
+            <a:off x="804672" y="3749040"/>
+            <a:ext cx="7607808" cy="242062"/>
           </a:xfrm>
           <a:prstGeom prst="rect">
             <a:avLst/>
@@ -5405,7 +5387,7 @@
                 <a:ea typeface="Arial" pitchFamily="34" charset="-122"/>
                 <a:cs typeface="Arial" pitchFamily="34" charset="-120"/>
               </a:rPr>
-              <a:t>Volumes</a:t>
+              <a:t>Um 20:15 sind alle wieder hier</a:t>
             </a:r>
             <a:endParaRPr lang="en-US" sz="1300" dirty="0"/>
           </a:p>
@@ -5419,8 +5401,8 @@
         </p:nvSpPr>
         <p:spPr>
           <a:xfrm>
-            <a:off x="804672" y="2423160"/>
-            <a:ext cx="2121408" cy="1353312"/>
+            <a:off x="804672" y="4036822"/>
+            <a:ext cx="7607808" cy="270002"/>
           </a:xfrm>
           <a:prstGeom prst="rect">
             <a:avLst/>
@@ -5447,7 +5429,7 @@
                 <a:ea typeface="Arial" pitchFamily="34" charset="-122"/>
                 <a:cs typeface="Arial" pitchFamily="34" charset="-120"/>
               </a:rPr>
-              <a:t>Container weg heißt Daten weg – außer man gibt ihnen ein Zuhause. Genau dafür sind Volumes da.</a:t>
+              <a:t>Jede Gruppe zeigt kurz ihr docker ps – und wer die Kür geschafft hat, seine eigene Seite im Browser.</a:t>
             </a:r>
             <a:endParaRPr lang="en-US" sz="1150" dirty="0"/>
           </a:p>
@@ -5456,307 +5438,6 @@
       <p:sp>
         <p:nvSpPr>
           <p:cNvPr id="10" name="Shape 8"/>
-          <p:cNvSpPr/>
-          <p:nvPr/>
-        </p:nvSpPr>
-        <p:spPr>
-          <a:xfrm>
-            <a:off x="3310128" y="1975104"/>
-            <a:ext cx="2523744" cy="1920240"/>
-          </a:xfrm>
-          <a:prstGeom prst="rect">
-            <a:avLst/>
-          </a:prstGeom>
-          <a:solidFill>
-            <a:srgbClr val="F5F6FC"/>
-          </a:solidFill>
-          <a:ln/>
-        </p:spPr>
-      </p:sp>
-      <p:sp>
-        <p:nvSpPr>
-          <p:cNvPr id="11" name="Shape 9"/>
-          <p:cNvSpPr/>
-          <p:nvPr/>
-        </p:nvSpPr>
-        <p:spPr>
-          <a:xfrm>
-            <a:off x="3310128" y="1975104"/>
-            <a:ext cx="41148" cy="1920240"/>
-          </a:xfrm>
-          <a:prstGeom prst="rect">
-            <a:avLst/>
-          </a:prstGeom>
-          <a:solidFill>
-            <a:srgbClr val="0F7C86"/>
-          </a:solidFill>
-          <a:ln/>
-        </p:spPr>
-      </p:sp>
-      <p:sp>
-        <p:nvSpPr>
-          <p:cNvPr id="12" name="Text 10"/>
-          <p:cNvSpPr/>
-          <p:nvPr/>
-        </p:nvSpPr>
-        <p:spPr>
-          <a:xfrm>
-            <a:off x="3547872" y="2121408"/>
-            <a:ext cx="2121408" cy="256032"/>
-          </a:xfrm>
-          <a:prstGeom prst="rect">
-            <a:avLst/>
-          </a:prstGeom>
-          <a:noFill/>
-          <a:ln/>
-        </p:spPr>
-        <p:txBody>
-          <a:bodyPr wrap="square" lIns="0" tIns="0" rIns="0" bIns="0" rtlCol="0" anchor="t"/>
-          <a:lstStyle/>
-          <a:p>
-            <a:pPr indent="0" marL="0">
-              <a:buNone/>
-            </a:pPr>
-            <a:r>
-              <a:rPr lang="en-US" sz="1300" b="1" dirty="0">
-                <a:solidFill>
-                  <a:srgbClr val="272E52"/>
-                </a:solidFill>
-                <a:latin typeface="Arial" pitchFamily="34" charset="0"/>
-                <a:ea typeface="Arial" pitchFamily="34" charset="-122"/>
-                <a:cs typeface="Arial" pitchFamily="34" charset="-120"/>
-              </a:rPr>
-              <a:t>Container-Netze</a:t>
-            </a:r>
-            <a:endParaRPr lang="en-US" sz="1300" dirty="0"/>
-          </a:p>
-        </p:txBody>
-      </p:sp>
-      <p:sp>
-        <p:nvSpPr>
-          <p:cNvPr id="13" name="Text 11"/>
-          <p:cNvSpPr/>
-          <p:nvPr/>
-        </p:nvSpPr>
-        <p:spPr>
-          <a:xfrm>
-            <a:off x="3547872" y="2423160"/>
-            <a:ext cx="2121408" cy="1353312"/>
-          </a:xfrm>
-          <a:prstGeom prst="rect">
-            <a:avLst/>
-          </a:prstGeom>
-          <a:noFill/>
-          <a:ln/>
-        </p:spPr>
-        <p:txBody>
-          <a:bodyPr wrap="square" lIns="0" tIns="0" rIns="0" bIns="0" rtlCol="0" anchor="t"/>
-          <a:lstStyle/>
-          <a:p>
-            <a:pPr indent="0" marL="0">
-              <a:lnSpc>
-                <a:spcPct val="92000"/>
-              </a:lnSpc>
-              <a:buNone/>
-            </a:pPr>
-            <a:r>
-              <a:rPr lang="en-US" sz="1150" dirty="0">
-                <a:solidFill>
-                  <a:srgbClr val="434A63"/>
-                </a:solidFill>
-                <a:latin typeface="Arial" pitchFamily="34" charset="0"/>
-                <a:ea typeface="Arial" pitchFamily="34" charset="-122"/>
-                <a:cs typeface="Arial" pitchFamily="34" charset="-120"/>
-              </a:rPr>
-              <a:t>Mehrere Container sprechen miteinander – euer VLAN-Wissen kommt wieder, nur in klein.</a:t>
-            </a:r>
-            <a:endParaRPr lang="en-US" sz="1150" dirty="0"/>
-          </a:p>
-        </p:txBody>
-      </p:sp>
-      <p:sp>
-        <p:nvSpPr>
-          <p:cNvPr id="14" name="Shape 12"/>
-          <p:cNvSpPr/>
-          <p:nvPr/>
-        </p:nvSpPr>
-        <p:spPr>
-          <a:xfrm>
-            <a:off x="6053328" y="1975104"/>
-            <a:ext cx="2523744" cy="1920240"/>
-          </a:xfrm>
-          <a:prstGeom prst="rect">
-            <a:avLst/>
-          </a:prstGeom>
-          <a:solidFill>
-            <a:srgbClr val="F5F6FC"/>
-          </a:solidFill>
-          <a:ln/>
-        </p:spPr>
-      </p:sp>
-      <p:sp>
-        <p:nvSpPr>
-          <p:cNvPr id="15" name="Shape 13"/>
-          <p:cNvSpPr/>
-          <p:nvPr/>
-        </p:nvSpPr>
-        <p:spPr>
-          <a:xfrm>
-            <a:off x="6053328" y="1975104"/>
-            <a:ext cx="41148" cy="1920240"/>
-          </a:xfrm>
-          <a:prstGeom prst="rect">
-            <a:avLst/>
-          </a:prstGeom>
-          <a:solidFill>
-            <a:srgbClr val="0F7C86"/>
-          </a:solidFill>
-          <a:ln/>
-        </p:spPr>
-      </p:sp>
-      <p:sp>
-        <p:nvSpPr>
-          <p:cNvPr id="16" name="Text 14"/>
-          <p:cNvSpPr/>
-          <p:nvPr/>
-        </p:nvSpPr>
-        <p:spPr>
-          <a:xfrm>
-            <a:off x="6291072" y="2121408"/>
-            <a:ext cx="2121408" cy="256032"/>
-          </a:xfrm>
-          <a:prstGeom prst="rect">
-            <a:avLst/>
-          </a:prstGeom>
-          <a:noFill/>
-          <a:ln/>
-        </p:spPr>
-        <p:txBody>
-          <a:bodyPr wrap="square" lIns="0" tIns="0" rIns="0" bIns="0" rtlCol="0" anchor="t"/>
-          <a:lstStyle/>
-          <a:p>
-            <a:pPr indent="0" marL="0">
-              <a:buNone/>
-            </a:pPr>
-            <a:r>
-              <a:rPr lang="en-US" sz="1300" b="1" dirty="0">
-                <a:solidFill>
-                  <a:srgbClr val="272E52"/>
-                </a:solidFill>
-                <a:latin typeface="Arial" pitchFamily="34" charset="0"/>
-                <a:ea typeface="Arial" pitchFamily="34" charset="-122"/>
-                <a:cs typeface="Arial" pitchFamily="34" charset="-120"/>
-              </a:rPr>
-              <a:t>Nichts vorbereiten</a:t>
-            </a:r>
-            <a:endParaRPr lang="en-US" sz="1300" dirty="0"/>
-          </a:p>
-        </p:txBody>
-      </p:sp>
-      <p:sp>
-        <p:nvSpPr>
-          <p:cNvPr id="17" name="Text 15"/>
-          <p:cNvSpPr/>
-          <p:nvPr/>
-        </p:nvSpPr>
-        <p:spPr>
-          <a:xfrm>
-            <a:off x="6291072" y="2423160"/>
-            <a:ext cx="2121408" cy="1353312"/>
-          </a:xfrm>
-          <a:prstGeom prst="rect">
-            <a:avLst/>
-          </a:prstGeom>
-          <a:noFill/>
-          <a:ln/>
-        </p:spPr>
-        <p:txBody>
-          <a:bodyPr wrap="square" lIns="0" tIns="0" rIns="0" bIns="0" rtlCol="0" anchor="t"/>
-          <a:lstStyle/>
-          <a:p>
-            <a:pPr indent="0" marL="0">
-              <a:lnSpc>
-                <a:spcPct val="92000"/>
-              </a:lnSpc>
-              <a:buNone/>
-            </a:pPr>
-            <a:r>
-              <a:rPr lang="en-US" sz="1150" dirty="0">
-                <a:solidFill>
-                  <a:srgbClr val="434A63"/>
-                </a:solidFill>
-                <a:latin typeface="Arial" pitchFamily="34" charset="0"/>
-                <a:ea typeface="Arial" pitchFamily="34" charset="-122"/>
-                <a:cs typeface="Arial" pitchFamily="34" charset="-120"/>
-              </a:rPr>
-              <a:t>Docker läuft jetzt bei euch – mehr braucht es nicht. Wer mag, spielt die Kür zu Ende.</a:t>
-            </a:r>
-            <a:endParaRPr lang="en-US" sz="1150" dirty="0"/>
-          </a:p>
-        </p:txBody>
-      </p:sp>
-      <p:sp>
-        <p:nvSpPr>
-          <p:cNvPr id="18" name="Shape 16"/>
-          <p:cNvSpPr/>
-          <p:nvPr/>
-        </p:nvSpPr>
-        <p:spPr>
-          <a:xfrm>
-            <a:off x="566928" y="4160520"/>
-            <a:ext cx="32004" cy="256032"/>
-          </a:xfrm>
-          <a:prstGeom prst="rect">
-            <a:avLst/>
-          </a:prstGeom>
-          <a:solidFill>
-            <a:srgbClr val="0F7C86"/>
-          </a:solidFill>
-          <a:ln/>
-        </p:spPr>
-      </p:sp>
-      <p:sp>
-        <p:nvSpPr>
-          <p:cNvPr id="19" name="Text 17"/>
-          <p:cNvSpPr/>
-          <p:nvPr/>
-        </p:nvSpPr>
-        <p:spPr>
-          <a:xfrm>
-            <a:off x="749808" y="4114800"/>
-            <a:ext cx="7827264" cy="402336"/>
-          </a:xfrm>
-          <a:prstGeom prst="rect">
-            <a:avLst/>
-          </a:prstGeom>
-          <a:noFill/>
-          <a:ln/>
-        </p:spPr>
-        <p:txBody>
-          <a:bodyPr wrap="square" lIns="0" tIns="0" rIns="0" bIns="0" rtlCol="0" anchor="ctr"/>
-          <a:lstStyle/>
-          <a:p>
-            <a:pPr indent="0" marL="0">
-              <a:buNone/>
-            </a:pPr>
-            <a:r>
-              <a:rPr lang="en-US" sz="1200" b="1" dirty="0">
-                <a:solidFill>
-                  <a:srgbClr val="434A63"/>
-                </a:solidFill>
-                <a:latin typeface="Arial" pitchFamily="34" charset="0"/>
-                <a:ea typeface="Arial" pitchFamily="34" charset="-122"/>
-                <a:cs typeface="Arial" pitchFamily="34" charset="-120"/>
-              </a:rPr>
-              <a:t>Nächster Termin: Montag, 14. September, 18:00 Uhr – Docker: Volumes, Netze, Umgebungsvariablen.</a:t>
-            </a:r>
-            <a:endParaRPr lang="en-US" sz="1200" dirty="0"/>
-          </a:p>
-        </p:txBody>
-      </p:sp>
-      <p:sp>
-        <p:nvSpPr>
-          <p:cNvPr id="20" name="Shape 18"/>
           <p:cNvSpPr/>
           <p:nvPr/>
         </p:nvSpPr>
@@ -5779,7 +5460,7 @@
       </p:sp>
       <p:sp>
         <p:nvSpPr>
-          <p:cNvPr id="21" name="Text 19"/>
+          <p:cNvPr id="11" name="Text 9"/>
           <p:cNvSpPr/>
           <p:nvPr/>
         </p:nvSpPr>
@@ -5810,7 +5491,7 @@
                 <a:ea typeface="Arial" pitchFamily="34" charset="-122"/>
                 <a:cs typeface="Arial" pitchFamily="34" charset="-120"/>
               </a:rPr>
-              <a:t>Abschluss</a:t>
+              <a:t>Breakout</a:t>
             </a:r>
             <a:endParaRPr lang="en-US" sz="1050" dirty="0"/>
           </a:p>
@@ -5818,7 +5499,7 @@
       </p:sp>
       <p:sp>
         <p:nvSpPr>
-          <p:cNvPr id="22" name="Text 20"/>
+          <p:cNvPr id="12" name="Text 10"/>
           <p:cNvSpPr/>
           <p:nvPr/>
         </p:nvSpPr>
@@ -5849,7 +5530,7 @@
                 <a:ea typeface="Arial" pitchFamily="34" charset="-122"/>
                 <a:cs typeface="Arial" pitchFamily="34" charset="-120"/>
               </a:rPr>
-              <a:t>12/12</a:t>
+              <a:t>12/15</a:t>
             </a:r>
             <a:endParaRPr lang="en-US" sz="1050" dirty="0"/>
           </a:p>
@@ -5866,6 +5547,1752 @@
 <file path=ppt/slides/slide16.xml><?xml version="1.0" encoding="utf-8"?>
 <p:sld xmlns:a="http://schemas.openxmlformats.org/drawingml/2006/main" xmlns:r="http://schemas.openxmlformats.org/officeDocument/2006/relationships" xmlns:p="http://schemas.openxmlformats.org/presentationml/2006/main">
   <p:cSld name="Slide 16">
+    <p:bg>
+      <p:bgPr>
+        <a:solidFill>
+          <a:srgbClr val="FFFFFF"/>
+        </a:solidFill>
+      </p:bgPr>
+    </p:bg>
+    <p:spTree>
+      <p:nvGrpSpPr>
+        <p:cNvPr id="1" name=""/>
+        <p:cNvGrpSpPr/>
+        <p:nvPr/>
+      </p:nvGrpSpPr>
+      <p:grpSpPr>
+        <a:xfrm>
+          <a:off x="0" y="0"/>
+          <a:ext cx="0" cy="0"/>
+          <a:chOff x="0" y="0"/>
+          <a:chExt cx="0" cy="0"/>
+        </a:xfrm>
+      </p:grpSpPr>
+      <p:sp>
+        <p:nvSpPr>
+          <p:cNvPr id="2" name="Shape 0"/>
+          <p:cNvSpPr/>
+          <p:nvPr/>
+        </p:nvSpPr>
+        <p:spPr>
+          <a:xfrm>
+            <a:off x="566928" y="201168"/>
+            <a:ext cx="475488" cy="50292"/>
+          </a:xfrm>
+          <a:prstGeom prst="rect">
+            <a:avLst/>
+          </a:prstGeom>
+          <a:solidFill>
+            <a:srgbClr val="0F7C86"/>
+          </a:solidFill>
+          <a:ln/>
+        </p:spPr>
+      </p:sp>
+      <p:sp>
+        <p:nvSpPr>
+          <p:cNvPr id="3" name="Text 1"/>
+          <p:cNvSpPr/>
+          <p:nvPr/>
+        </p:nvSpPr>
+        <p:spPr>
+          <a:xfrm>
+            <a:off x="566928" y="384048"/>
+            <a:ext cx="8010144" cy="237744"/>
+          </a:xfrm>
+          <a:prstGeom prst="rect">
+            <a:avLst/>
+          </a:prstGeom>
+          <a:noFill/>
+          <a:ln/>
+        </p:spPr>
+        <p:txBody>
+          <a:bodyPr wrap="square" lIns="0" tIns="0" rIns="0" bIns="0" rtlCol="0" anchor="ctr"/>
+          <a:lstStyle/>
+          <a:p>
+            <a:pPr indent="0" marL="0">
+              <a:buNone/>
+            </a:pPr>
+            <a:r>
+              <a:rPr lang="en-US" sz="1150" b="1" spc="180" kern="0" dirty="0">
+                <a:solidFill>
+                  <a:srgbClr val="0F7C86"/>
+                </a:solidFill>
+                <a:latin typeface="Arial" pitchFamily="34" charset="0"/>
+                <a:ea typeface="Arial" pitchFamily="34" charset="-122"/>
+                <a:cs typeface="Arial" pitchFamily="34" charset="-120"/>
+              </a:rPr>
+              <a:t>AUSWERTUNG · 25 MINUTEN</a:t>
+            </a:r>
+            <a:endParaRPr lang="en-US" sz="1150" dirty="0"/>
+          </a:p>
+        </p:txBody>
+      </p:sp>
+      <p:sp>
+        <p:nvSpPr>
+          <p:cNvPr id="4" name="Text 2"/>
+          <p:cNvSpPr/>
+          <p:nvPr/>
+        </p:nvSpPr>
+        <p:spPr>
+          <a:xfrm>
+            <a:off x="566928" y="731520"/>
+            <a:ext cx="8010144" cy="603504"/>
+          </a:xfrm>
+          <a:prstGeom prst="rect">
+            <a:avLst/>
+          </a:prstGeom>
+          <a:noFill/>
+          <a:ln/>
+        </p:spPr>
+        <p:txBody>
+          <a:bodyPr wrap="square" lIns="0" tIns="0" rIns="0" bIns="0" rtlCol="0" anchor="t"/>
+          <a:lstStyle/>
+          <a:p>
+            <a:pPr indent="0" marL="0">
+              <a:buNone/>
+            </a:pPr>
+            <a:r>
+              <a:rPr lang="en-US" sz="2600" b="1" dirty="0">
+                <a:solidFill>
+                  <a:srgbClr val="272E52"/>
+                </a:solidFill>
+                <a:latin typeface="Arial" pitchFamily="34" charset="0"/>
+                <a:ea typeface="Arial" pitchFamily="34" charset="-122"/>
+                <a:cs typeface="Arial" pitchFamily="34" charset="-120"/>
+              </a:rPr>
+              <a:t>Eure Container</a:t>
+            </a:r>
+            <a:endParaRPr lang="en-US" sz="2600" dirty="0"/>
+          </a:p>
+        </p:txBody>
+      </p:sp>
+      <p:sp>
+        <p:nvSpPr>
+          <p:cNvPr id="5" name="Shape 3"/>
+          <p:cNvSpPr/>
+          <p:nvPr/>
+        </p:nvSpPr>
+        <p:spPr>
+          <a:xfrm>
+            <a:off x="438912" y="1810512"/>
+            <a:ext cx="8266176" cy="365760"/>
+          </a:xfrm>
+          <a:prstGeom prst="rect">
+            <a:avLst/>
+          </a:prstGeom>
+          <a:solidFill>
+            <a:srgbClr val="F5F6FC"/>
+          </a:solidFill>
+          <a:ln/>
+        </p:spPr>
+      </p:sp>
+      <p:sp>
+        <p:nvSpPr>
+          <p:cNvPr id="6" name="Text 4"/>
+          <p:cNvSpPr/>
+          <p:nvPr/>
+        </p:nvSpPr>
+        <p:spPr>
+          <a:xfrm>
+            <a:off x="566928" y="1810512"/>
+            <a:ext cx="548640" cy="365760"/>
+          </a:xfrm>
+          <a:prstGeom prst="rect">
+            <a:avLst/>
+          </a:prstGeom>
+          <a:noFill/>
+          <a:ln/>
+        </p:spPr>
+        <p:txBody>
+          <a:bodyPr wrap="square" lIns="0" tIns="0" rIns="0" bIns="0" rtlCol="0" anchor="ctr"/>
+          <a:lstStyle/>
+          <a:p>
+            <a:pPr indent="0" marL="0">
+              <a:buNone/>
+            </a:pPr>
+            <a:r>
+              <a:rPr lang="en-US" sz="1200" b="1" dirty="0">
+                <a:solidFill>
+                  <a:srgbClr val="0F7C86"/>
+                </a:solidFill>
+                <a:latin typeface="Courier New" pitchFamily="34" charset="0"/>
+                <a:ea typeface="Courier New" pitchFamily="34" charset="-122"/>
+                <a:cs typeface="Courier New" pitchFamily="34" charset="-120"/>
+              </a:rPr>
+              <a:t>1</a:t>
+            </a:r>
+            <a:endParaRPr lang="en-US" sz="1200" dirty="0"/>
+          </a:p>
+        </p:txBody>
+      </p:sp>
+      <p:sp>
+        <p:nvSpPr>
+          <p:cNvPr id="7" name="Text 5"/>
+          <p:cNvSpPr/>
+          <p:nvPr/>
+        </p:nvSpPr>
+        <p:spPr>
+          <a:xfrm>
+            <a:off x="1115568" y="1810512"/>
+            <a:ext cx="7461504" cy="365760"/>
+          </a:xfrm>
+          <a:prstGeom prst="rect">
+            <a:avLst/>
+          </a:prstGeom>
+          <a:noFill/>
+          <a:ln/>
+        </p:spPr>
+        <p:txBody>
+          <a:bodyPr wrap="square" lIns="0" tIns="0" rIns="0" bIns="0" rtlCol="0" anchor="ctr"/>
+          <a:lstStyle/>
+          <a:p>
+            <a:pPr indent="0" marL="0">
+              <a:buNone/>
+            </a:pPr>
+            <a:r>
+              <a:rPr lang="en-US" sz="1200" dirty="0">
+                <a:solidFill>
+                  <a:srgbClr val="434A63"/>
+                </a:solidFill>
+                <a:latin typeface="Arial" pitchFamily="34" charset="0"/>
+                <a:ea typeface="Arial" pitchFamily="34" charset="-122"/>
+                <a:cs typeface="Arial" pitchFamily="34" charset="-120"/>
+              </a:rPr>
+              <a:t>Jede Gruppe: docker ps zeigen – was läuft, was ist gestoppt, was wurde aufgeräumt?</a:t>
+            </a:r>
+            <a:endParaRPr lang="en-US" sz="1200" dirty="0"/>
+          </a:p>
+        </p:txBody>
+      </p:sp>
+      <p:sp>
+        <p:nvSpPr>
+          <p:cNvPr id="8" name="Text 6"/>
+          <p:cNvSpPr/>
+          <p:nvPr/>
+        </p:nvSpPr>
+        <p:spPr>
+          <a:xfrm>
+            <a:off x="566928" y="2176272"/>
+            <a:ext cx="548640" cy="365760"/>
+          </a:xfrm>
+          <a:prstGeom prst="rect">
+            <a:avLst/>
+          </a:prstGeom>
+          <a:noFill/>
+          <a:ln/>
+        </p:spPr>
+        <p:txBody>
+          <a:bodyPr wrap="square" lIns="0" tIns="0" rIns="0" bIns="0" rtlCol="0" anchor="ctr"/>
+          <a:lstStyle/>
+          <a:p>
+            <a:pPr indent="0" marL="0">
+              <a:buNone/>
+            </a:pPr>
+            <a:r>
+              <a:rPr lang="en-US" sz="1200" b="1" dirty="0">
+                <a:solidFill>
+                  <a:srgbClr val="0F7C86"/>
+                </a:solidFill>
+                <a:latin typeface="Courier New" pitchFamily="34" charset="0"/>
+                <a:ea typeface="Courier New" pitchFamily="34" charset="-122"/>
+                <a:cs typeface="Courier New" pitchFamily="34" charset="-120"/>
+              </a:rPr>
+              <a:t>2</a:t>
+            </a:r>
+            <a:endParaRPr lang="en-US" sz="1200" dirty="0"/>
+          </a:p>
+        </p:txBody>
+      </p:sp>
+      <p:sp>
+        <p:nvSpPr>
+          <p:cNvPr id="9" name="Text 7"/>
+          <p:cNvSpPr/>
+          <p:nvPr/>
+        </p:nvSpPr>
+        <p:spPr>
+          <a:xfrm>
+            <a:off x="1115568" y="2176272"/>
+            <a:ext cx="7461504" cy="365760"/>
+          </a:xfrm>
+          <a:prstGeom prst="rect">
+            <a:avLst/>
+          </a:prstGeom>
+          <a:noFill/>
+          <a:ln/>
+        </p:spPr>
+        <p:txBody>
+          <a:bodyPr wrap="square" lIns="0" tIns="0" rIns="0" bIns="0" rtlCol="0" anchor="ctr"/>
+          <a:lstStyle/>
+          <a:p>
+            <a:pPr indent="0" marL="0">
+              <a:buNone/>
+            </a:pPr>
+            <a:r>
+              <a:rPr lang="en-US" sz="1200" dirty="0">
+                <a:solidFill>
+                  <a:srgbClr val="434A63"/>
+                </a:solidFill>
+                <a:latin typeface="Arial" pitchFamily="34" charset="0"/>
+                <a:ea typeface="Arial" pitchFamily="34" charset="-122"/>
+                <a:cs typeface="Arial" pitchFamily="34" charset="-120"/>
+              </a:rPr>
+              <a:t>Die Port-Frage: Wie kam nginx in euren Browser – wer hat da worauf weitergeleitet?</a:t>
+            </a:r>
+            <a:endParaRPr lang="en-US" sz="1200" dirty="0"/>
+          </a:p>
+        </p:txBody>
+      </p:sp>
+      <p:sp>
+        <p:nvSpPr>
+          <p:cNvPr id="10" name="Shape 8"/>
+          <p:cNvSpPr/>
+          <p:nvPr/>
+        </p:nvSpPr>
+        <p:spPr>
+          <a:xfrm>
+            <a:off x="438912" y="2542032"/>
+            <a:ext cx="8266176" cy="365760"/>
+          </a:xfrm>
+          <a:prstGeom prst="rect">
+            <a:avLst/>
+          </a:prstGeom>
+          <a:solidFill>
+            <a:srgbClr val="F5F6FC"/>
+          </a:solidFill>
+          <a:ln/>
+        </p:spPr>
+      </p:sp>
+      <p:sp>
+        <p:nvSpPr>
+          <p:cNvPr id="11" name="Text 9"/>
+          <p:cNvSpPr/>
+          <p:nvPr/>
+        </p:nvSpPr>
+        <p:spPr>
+          <a:xfrm>
+            <a:off x="566928" y="2542032"/>
+            <a:ext cx="548640" cy="365760"/>
+          </a:xfrm>
+          <a:prstGeom prst="rect">
+            <a:avLst/>
+          </a:prstGeom>
+          <a:noFill/>
+          <a:ln/>
+        </p:spPr>
+        <p:txBody>
+          <a:bodyPr wrap="square" lIns="0" tIns="0" rIns="0" bIns="0" rtlCol="0" anchor="ctr"/>
+          <a:lstStyle/>
+          <a:p>
+            <a:pPr indent="0" marL="0">
+              <a:buNone/>
+            </a:pPr>
+            <a:r>
+              <a:rPr lang="en-US" sz="1200" b="1" dirty="0">
+                <a:solidFill>
+                  <a:srgbClr val="0F7C86"/>
+                </a:solidFill>
+                <a:latin typeface="Courier New" pitchFamily="34" charset="0"/>
+                <a:ea typeface="Courier New" pitchFamily="34" charset="-122"/>
+                <a:cs typeface="Courier New" pitchFamily="34" charset="-120"/>
+              </a:rPr>
+              <a:t>3</a:t>
+            </a:r>
+            <a:endParaRPr lang="en-US" sz="1200" dirty="0"/>
+          </a:p>
+        </p:txBody>
+      </p:sp>
+      <p:sp>
+        <p:nvSpPr>
+          <p:cNvPr id="12" name="Text 10"/>
+          <p:cNvSpPr/>
+          <p:nvPr/>
+        </p:nvSpPr>
+        <p:spPr>
+          <a:xfrm>
+            <a:off x="1115568" y="2542032"/>
+            <a:ext cx="7461504" cy="365760"/>
+          </a:xfrm>
+          <a:prstGeom prst="rect">
+            <a:avLst/>
+          </a:prstGeom>
+          <a:noFill/>
+          <a:ln/>
+        </p:spPr>
+        <p:txBody>
+          <a:bodyPr wrap="square" lIns="0" tIns="0" rIns="0" bIns="0" rtlCol="0" anchor="ctr"/>
+          <a:lstStyle/>
+          <a:p>
+            <a:pPr indent="0" marL="0">
+              <a:buNone/>
+            </a:pPr>
+            <a:r>
+              <a:rPr lang="en-US" sz="1200" dirty="0">
+                <a:solidFill>
+                  <a:srgbClr val="434A63"/>
+                </a:solidFill>
+                <a:latin typeface="Arial" pitchFamily="34" charset="0"/>
+                <a:ea typeface="Arial" pitchFamily="34" charset="-122"/>
+                <a:cs typeface="Arial" pitchFamily="34" charset="-120"/>
+              </a:rPr>
+              <a:t>Kür-Runde: eigene Seiten im Browser zeigen – und die Image-Größen vergleichen</a:t>
+            </a:r>
+            <a:endParaRPr lang="en-US" sz="1200" dirty="0"/>
+          </a:p>
+        </p:txBody>
+      </p:sp>
+      <p:sp>
+        <p:nvSpPr>
+          <p:cNvPr id="13" name="Text 11"/>
+          <p:cNvSpPr/>
+          <p:nvPr/>
+        </p:nvSpPr>
+        <p:spPr>
+          <a:xfrm>
+            <a:off x="566928" y="2907792"/>
+            <a:ext cx="548640" cy="365760"/>
+          </a:xfrm>
+          <a:prstGeom prst="rect">
+            <a:avLst/>
+          </a:prstGeom>
+          <a:noFill/>
+          <a:ln/>
+        </p:spPr>
+        <p:txBody>
+          <a:bodyPr wrap="square" lIns="0" tIns="0" rIns="0" bIns="0" rtlCol="0" anchor="ctr"/>
+          <a:lstStyle/>
+          <a:p>
+            <a:pPr indent="0" marL="0">
+              <a:buNone/>
+            </a:pPr>
+            <a:r>
+              <a:rPr lang="en-US" sz="1200" b="1" dirty="0">
+                <a:solidFill>
+                  <a:srgbClr val="0F7C86"/>
+                </a:solidFill>
+                <a:latin typeface="Courier New" pitchFamily="34" charset="0"/>
+                <a:ea typeface="Courier New" pitchFamily="34" charset="-122"/>
+                <a:cs typeface="Courier New" pitchFamily="34" charset="-120"/>
+              </a:rPr>
+              <a:t>4</a:t>
+            </a:r>
+            <a:endParaRPr lang="en-US" sz="1200" dirty="0"/>
+          </a:p>
+        </p:txBody>
+      </p:sp>
+      <p:sp>
+        <p:nvSpPr>
+          <p:cNvPr id="14" name="Text 12"/>
+          <p:cNvSpPr/>
+          <p:nvPr/>
+        </p:nvSpPr>
+        <p:spPr>
+          <a:xfrm>
+            <a:off x="1115568" y="2907792"/>
+            <a:ext cx="7461504" cy="365760"/>
+          </a:xfrm>
+          <a:prstGeom prst="rect">
+            <a:avLst/>
+          </a:prstGeom>
+          <a:noFill/>
+          <a:ln/>
+        </p:spPr>
+        <p:txBody>
+          <a:bodyPr wrap="square" lIns="0" tIns="0" rIns="0" bIns="0" rtlCol="0" anchor="ctr"/>
+          <a:lstStyle/>
+          <a:p>
+            <a:pPr indent="0" marL="0">
+              <a:buNone/>
+            </a:pPr>
+            <a:r>
+              <a:rPr lang="en-US" sz="1200" dirty="0">
+                <a:solidFill>
+                  <a:srgbClr val="434A63"/>
+                </a:solidFill>
+                <a:latin typeface="Arial" pitchFamily="34" charset="0"/>
+                <a:ea typeface="Arial" pitchFamily="34" charset="-122"/>
+                <a:cs typeface="Arial" pitchFamily="34" charset="-120"/>
+              </a:rPr>
+              <a:t>Wer im Bonus war: Was ist mit der Änderung im Container passiert? (Cliffhanger für Montag)</a:t>
+            </a:r>
+            <a:endParaRPr lang="en-US" sz="1200" dirty="0"/>
+          </a:p>
+        </p:txBody>
+      </p:sp>
+      <p:sp>
+        <p:nvSpPr>
+          <p:cNvPr id="15" name="Shape 13"/>
+          <p:cNvSpPr/>
+          <p:nvPr/>
+        </p:nvSpPr>
+        <p:spPr>
+          <a:xfrm>
+            <a:off x="438912" y="3273552"/>
+            <a:ext cx="8266176" cy="365760"/>
+          </a:xfrm>
+          <a:prstGeom prst="rect">
+            <a:avLst/>
+          </a:prstGeom>
+          <a:solidFill>
+            <a:srgbClr val="F5F6FC"/>
+          </a:solidFill>
+          <a:ln/>
+        </p:spPr>
+      </p:sp>
+      <p:sp>
+        <p:nvSpPr>
+          <p:cNvPr id="16" name="Text 14"/>
+          <p:cNvSpPr/>
+          <p:nvPr/>
+        </p:nvSpPr>
+        <p:spPr>
+          <a:xfrm>
+            <a:off x="566928" y="3273552"/>
+            <a:ext cx="548640" cy="365760"/>
+          </a:xfrm>
+          <a:prstGeom prst="rect">
+            <a:avLst/>
+          </a:prstGeom>
+          <a:noFill/>
+          <a:ln/>
+        </p:spPr>
+        <p:txBody>
+          <a:bodyPr wrap="square" lIns="0" tIns="0" rIns="0" bIns="0" rtlCol="0" anchor="ctr"/>
+          <a:lstStyle/>
+          <a:p>
+            <a:pPr indent="0" marL="0">
+              <a:buNone/>
+            </a:pPr>
+            <a:r>
+              <a:rPr lang="en-US" sz="1200" b="1" dirty="0">
+                <a:solidFill>
+                  <a:srgbClr val="0F7C86"/>
+                </a:solidFill>
+                <a:latin typeface="Courier New" pitchFamily="34" charset="0"/>
+                <a:ea typeface="Courier New" pitchFamily="34" charset="-122"/>
+                <a:cs typeface="Courier New" pitchFamily="34" charset="-120"/>
+              </a:rPr>
+              <a:t>5</a:t>
+            </a:r>
+            <a:endParaRPr lang="en-US" sz="1200" dirty="0"/>
+          </a:p>
+        </p:txBody>
+      </p:sp>
+      <p:sp>
+        <p:nvSpPr>
+          <p:cNvPr id="17" name="Text 15"/>
+          <p:cNvSpPr/>
+          <p:nvPr/>
+        </p:nvSpPr>
+        <p:spPr>
+          <a:xfrm>
+            <a:off x="1115568" y="3273552"/>
+            <a:ext cx="7461504" cy="365760"/>
+          </a:xfrm>
+          <a:prstGeom prst="rect">
+            <a:avLst/>
+          </a:prstGeom>
+          <a:noFill/>
+          <a:ln/>
+        </p:spPr>
+        <p:txBody>
+          <a:bodyPr wrap="square" lIns="0" tIns="0" rIns="0" bIns="0" rtlCol="0" anchor="ctr"/>
+          <a:lstStyle/>
+          <a:p>
+            <a:pPr indent="0" marL="0">
+              <a:buNone/>
+            </a:pPr>
+            <a:r>
+              <a:rPr lang="en-US" sz="1200" dirty="0">
+                <a:solidFill>
+                  <a:srgbClr val="434A63"/>
+                </a:solidFill>
+                <a:latin typeface="Arial" pitchFamily="34" charset="0"/>
+                <a:ea typeface="Arial" pitchFamily="34" charset="-122"/>
+                <a:cs typeface="Arial" pitchFamily="34" charset="-120"/>
+              </a:rPr>
+              <a:t>Der Montags-Vergleich: Die Cloud-VM brauchte ~7 Minuten bis „Ready“ – wie lange lief euer Container?</a:t>
+            </a:r>
+            <a:endParaRPr lang="en-US" sz="1200" dirty="0"/>
+          </a:p>
+        </p:txBody>
+      </p:sp>
+      <p:sp>
+        <p:nvSpPr>
+          <p:cNvPr id="18" name="Shape 16"/>
+          <p:cNvSpPr/>
+          <p:nvPr/>
+        </p:nvSpPr>
+        <p:spPr>
+          <a:xfrm>
+            <a:off x="566928" y="4069080"/>
+            <a:ext cx="32004" cy="256032"/>
+          </a:xfrm>
+          <a:prstGeom prst="rect">
+            <a:avLst/>
+          </a:prstGeom>
+          <a:solidFill>
+            <a:srgbClr val="0F7C86"/>
+          </a:solidFill>
+          <a:ln/>
+        </p:spPr>
+      </p:sp>
+      <p:sp>
+        <p:nvSpPr>
+          <p:cNvPr id="19" name="Text 17"/>
+          <p:cNvSpPr/>
+          <p:nvPr/>
+        </p:nvSpPr>
+        <p:spPr>
+          <a:xfrm>
+            <a:off x="749808" y="4023360"/>
+            <a:ext cx="7827264" cy="402336"/>
+          </a:xfrm>
+          <a:prstGeom prst="rect">
+            <a:avLst/>
+          </a:prstGeom>
+          <a:noFill/>
+          <a:ln/>
+        </p:spPr>
+        <p:txBody>
+          <a:bodyPr wrap="square" lIns="0" tIns="0" rIns="0" bIns="0" rtlCol="0" anchor="ctr"/>
+          <a:lstStyle/>
+          <a:p>
+            <a:pPr indent="0" marL="0">
+              <a:buNone/>
+            </a:pPr>
+            <a:r>
+              <a:rPr lang="en-US" sz="1200" b="1" dirty="0">
+                <a:solidFill>
+                  <a:srgbClr val="434A63"/>
+                </a:solidFill>
+                <a:latin typeface="Arial" pitchFamily="34" charset="0"/>
+                <a:ea typeface="Arial" pitchFamily="34" charset="-122"/>
+                <a:cs typeface="Arial" pitchFamily="34" charset="-120"/>
+              </a:rPr>
+              <a:t>Die Port-Frage ist euer Netzwerkblock in Aktion: -p 8080:80 ist nichts anderes als eine kleine NAT-Regel.</a:t>
+            </a:r>
+            <a:endParaRPr lang="en-US" sz="1200" dirty="0"/>
+          </a:p>
+        </p:txBody>
+      </p:sp>
+      <p:sp>
+        <p:nvSpPr>
+          <p:cNvPr id="20" name="Shape 18"/>
+          <p:cNvSpPr/>
+          <p:nvPr/>
+        </p:nvSpPr>
+        <p:spPr>
+          <a:xfrm>
+            <a:off x="566928" y="4631436"/>
+            <a:ext cx="8010144" cy="0"/>
+          </a:xfrm>
+          <a:prstGeom prst="line">
+            <a:avLst/>
+          </a:prstGeom>
+          <a:noFill/>
+          <a:ln w="9525">
+            <a:solidFill>
+              <a:srgbClr val="DFE3F0"/>
+            </a:solidFill>
+            <a:prstDash val="solid"/>
+          </a:ln>
+        </p:spPr>
+      </p:sp>
+      <p:sp>
+        <p:nvSpPr>
+          <p:cNvPr id="21" name="Text 19"/>
+          <p:cNvSpPr/>
+          <p:nvPr/>
+        </p:nvSpPr>
+        <p:spPr>
+          <a:xfrm>
+            <a:off x="566928" y="4722876"/>
+            <a:ext cx="5029200" cy="237744"/>
+          </a:xfrm>
+          <a:prstGeom prst="rect">
+            <a:avLst/>
+          </a:prstGeom>
+          <a:noFill/>
+          <a:ln/>
+        </p:spPr>
+        <p:txBody>
+          <a:bodyPr wrap="square" lIns="0" tIns="0" rIns="0" bIns="0" rtlCol="0" anchor="ctr"/>
+          <a:lstStyle/>
+          <a:p>
+            <a:pPr indent="0" marL="0">
+              <a:buNone/>
+            </a:pPr>
+            <a:r>
+              <a:rPr lang="en-US" sz="1050" spc="30" kern="0" dirty="0">
+                <a:solidFill>
+                  <a:srgbClr val="5C6377"/>
+                </a:solidFill>
+                <a:latin typeface="Arial" pitchFamily="34" charset="0"/>
+                <a:ea typeface="Arial" pitchFamily="34" charset="-122"/>
+                <a:cs typeface="Arial" pitchFamily="34" charset="-120"/>
+              </a:rPr>
+              <a:t>Auswertung</a:t>
+            </a:r>
+            <a:endParaRPr lang="en-US" sz="1050" dirty="0"/>
+          </a:p>
+        </p:txBody>
+      </p:sp>
+      <p:sp>
+        <p:nvSpPr>
+          <p:cNvPr id="22" name="Text 20"/>
+          <p:cNvSpPr/>
+          <p:nvPr/>
+        </p:nvSpPr>
+        <p:spPr>
+          <a:xfrm>
+            <a:off x="8028432" y="4722876"/>
+            <a:ext cx="548640" cy="237744"/>
+          </a:xfrm>
+          <a:prstGeom prst="rect">
+            <a:avLst/>
+          </a:prstGeom>
+          <a:noFill/>
+          <a:ln/>
+        </p:spPr>
+        <p:txBody>
+          <a:bodyPr wrap="square" lIns="0" tIns="0" rIns="0" bIns="0" rtlCol="0" anchor="ctr"/>
+          <a:lstStyle/>
+          <a:p>
+            <a:pPr algn="r" indent="0" marL="0">
+              <a:buNone/>
+            </a:pPr>
+            <a:r>
+              <a:rPr lang="en-US" sz="1050" dirty="0">
+                <a:solidFill>
+                  <a:srgbClr val="5C6377"/>
+                </a:solidFill>
+                <a:latin typeface="Arial" pitchFamily="34" charset="0"/>
+                <a:ea typeface="Arial" pitchFamily="34" charset="-122"/>
+                <a:cs typeface="Arial" pitchFamily="34" charset="-120"/>
+              </a:rPr>
+              <a:t>13/15</a:t>
+            </a:r>
+            <a:endParaRPr lang="en-US" sz="1050" dirty="0"/>
+          </a:p>
+        </p:txBody>
+      </p:sp>
+    </p:spTree>
+  </p:cSld>
+  <p:clrMapOvr>
+    <a:masterClrMapping/>
+  </p:clrMapOvr>
+</p:sld>
+</file>
+
+<file path=ppt/slides/slide17.xml><?xml version="1.0" encoding="utf-8"?>
+<p:sld xmlns:a="http://schemas.openxmlformats.org/drawingml/2006/main" xmlns:r="http://schemas.openxmlformats.org/officeDocument/2006/relationships" xmlns:p="http://schemas.openxmlformats.org/presentationml/2006/main">
+  <p:cSld name="Slide 17">
+    <p:bg>
+      <p:bgPr>
+        <a:solidFill>
+          <a:srgbClr val="FFFFFF"/>
+        </a:solidFill>
+      </p:bgPr>
+    </p:bg>
+    <p:spTree>
+      <p:nvGrpSpPr>
+        <p:cNvPr id="1" name=""/>
+        <p:cNvGrpSpPr/>
+        <p:nvPr/>
+      </p:nvGrpSpPr>
+      <p:grpSpPr>
+        <a:xfrm>
+          <a:off x="0" y="0"/>
+          <a:ext cx="0" cy="0"/>
+          <a:chOff x="0" y="0"/>
+          <a:chExt cx="0" cy="0"/>
+        </a:xfrm>
+      </p:grpSpPr>
+      <p:sp>
+        <p:nvSpPr>
+          <p:cNvPr id="2" name="Shape 0"/>
+          <p:cNvSpPr/>
+          <p:nvPr/>
+        </p:nvSpPr>
+        <p:spPr>
+          <a:xfrm>
+            <a:off x="566928" y="201168"/>
+            <a:ext cx="475488" cy="50292"/>
+          </a:xfrm>
+          <a:prstGeom prst="rect">
+            <a:avLst/>
+          </a:prstGeom>
+          <a:solidFill>
+            <a:srgbClr val="0F7C86"/>
+          </a:solidFill>
+          <a:ln/>
+        </p:spPr>
+      </p:sp>
+      <p:sp>
+        <p:nvSpPr>
+          <p:cNvPr id="3" name="Text 1"/>
+          <p:cNvSpPr/>
+          <p:nvPr/>
+        </p:nvSpPr>
+        <p:spPr>
+          <a:xfrm>
+            <a:off x="566928" y="384048"/>
+            <a:ext cx="8010144" cy="237744"/>
+          </a:xfrm>
+          <a:prstGeom prst="rect">
+            <a:avLst/>
+          </a:prstGeom>
+          <a:noFill/>
+          <a:ln/>
+        </p:spPr>
+        <p:txBody>
+          <a:bodyPr wrap="square" lIns="0" tIns="0" rIns="0" bIns="0" rtlCol="0" anchor="ctr"/>
+          <a:lstStyle/>
+          <a:p>
+            <a:pPr indent="0" marL="0">
+              <a:buNone/>
+            </a:pPr>
+            <a:r>
+              <a:rPr lang="en-US" sz="1150" b="1" spc="180" kern="0" dirty="0">
+                <a:solidFill>
+                  <a:srgbClr val="0F7C86"/>
+                </a:solidFill>
+                <a:latin typeface="Arial" pitchFamily="34" charset="0"/>
+                <a:ea typeface="Arial" pitchFamily="34" charset="-122"/>
+                <a:cs typeface="Arial" pitchFamily="34" charset="-120"/>
+              </a:rPr>
+              <a:t>DER BLICK NACH VORN</a:t>
+            </a:r>
+            <a:endParaRPr lang="en-US" sz="1150" dirty="0"/>
+          </a:p>
+        </p:txBody>
+      </p:sp>
+      <p:sp>
+        <p:nvSpPr>
+          <p:cNvPr id="4" name="Text 2"/>
+          <p:cNvSpPr/>
+          <p:nvPr/>
+        </p:nvSpPr>
+        <p:spPr>
+          <a:xfrm>
+            <a:off x="566928" y="731520"/>
+            <a:ext cx="8010144" cy="603504"/>
+          </a:xfrm>
+          <a:prstGeom prst="rect">
+            <a:avLst/>
+          </a:prstGeom>
+          <a:noFill/>
+          <a:ln/>
+        </p:spPr>
+        <p:txBody>
+          <a:bodyPr wrap="square" lIns="0" tIns="0" rIns="0" bIns="0" rtlCol="0" anchor="t"/>
+          <a:lstStyle/>
+          <a:p>
+            <a:pPr indent="0" marL="0">
+              <a:buNone/>
+            </a:pPr>
+            <a:r>
+              <a:rPr lang="en-US" sz="2600" b="1" dirty="0">
+                <a:solidFill>
+                  <a:srgbClr val="272E52"/>
+                </a:solidFill>
+                <a:latin typeface="Arial" pitchFamily="34" charset="0"/>
+                <a:ea typeface="Arial" pitchFamily="34" charset="-122"/>
+                <a:cs typeface="Arial" pitchFamily="34" charset="-120"/>
+              </a:rPr>
+              <a:t>Wo Container überall stecken</a:t>
+            </a:r>
+            <a:endParaRPr lang="en-US" sz="2600" dirty="0"/>
+          </a:p>
+        </p:txBody>
+      </p:sp>
+      <p:pic>
+        <p:nvPicPr>
+          <p:cNvPr id="5" name="Image 0" descr="/Users/jacobmenge/Desktop/kurs-26.2b-orga/folienwerkstatt/assets/diagramme/container-orte.png">    </p:cNvPr>
+          <p:cNvPicPr>
+            <a:picLocks noChangeAspect="1"/>
+          </p:cNvPicPr>
+          <p:nvPr/>
+        </p:nvPicPr>
+        <p:blipFill>
+          <a:blip r:embed="rId1"/>
+          <a:stretch>
+            <a:fillRect/>
+          </a:stretch>
+        </p:blipFill>
+        <p:spPr>
+          <a:xfrm>
+            <a:off x="566928" y="1481328"/>
+            <a:ext cx="8010144" cy="2395728"/>
+          </a:xfrm>
+          <a:prstGeom prst="rect">
+            <a:avLst/>
+          </a:prstGeom>
+        </p:spPr>
+      </p:pic>
+      <p:sp>
+        <p:nvSpPr>
+          <p:cNvPr id="6" name="Shape 3"/>
+          <p:cNvSpPr/>
+          <p:nvPr/>
+        </p:nvSpPr>
+        <p:spPr>
+          <a:xfrm>
+            <a:off x="566928" y="4087368"/>
+            <a:ext cx="32004" cy="256032"/>
+          </a:xfrm>
+          <a:prstGeom prst="rect">
+            <a:avLst/>
+          </a:prstGeom>
+          <a:solidFill>
+            <a:srgbClr val="0F7C86"/>
+          </a:solidFill>
+          <a:ln/>
+        </p:spPr>
+      </p:sp>
+      <p:sp>
+        <p:nvSpPr>
+          <p:cNvPr id="7" name="Text 4"/>
+          <p:cNvSpPr/>
+          <p:nvPr/>
+        </p:nvSpPr>
+        <p:spPr>
+          <a:xfrm>
+            <a:off x="749808" y="4041648"/>
+            <a:ext cx="7827264" cy="402336"/>
+          </a:xfrm>
+          <a:prstGeom prst="rect">
+            <a:avLst/>
+          </a:prstGeom>
+          <a:noFill/>
+          <a:ln/>
+        </p:spPr>
+        <p:txBody>
+          <a:bodyPr wrap="square" lIns="0" tIns="0" rIns="0" bIns="0" rtlCol="0" anchor="ctr"/>
+          <a:lstStyle/>
+          <a:p>
+            <a:pPr indent="0" marL="0">
+              <a:buNone/>
+            </a:pPr>
+            <a:r>
+              <a:rPr lang="en-US" sz="1200" b="1" dirty="0">
+                <a:solidFill>
+                  <a:srgbClr val="434A63"/>
+                </a:solidFill>
+                <a:latin typeface="Arial" pitchFamily="34" charset="0"/>
+                <a:ea typeface="Arial" pitchFamily="34" charset="-122"/>
+                <a:cs typeface="Arial" pitchFamily="34" charset="-120"/>
+              </a:rPr>
+              <a:t>Merksatz des Abends: Image = Bauplan, Container = laufende Instanz – und Wegwerfen ist wieder erlaubt.</a:t>
+            </a:r>
+            <a:endParaRPr lang="en-US" sz="1200" dirty="0"/>
+          </a:p>
+        </p:txBody>
+      </p:sp>
+      <p:sp>
+        <p:nvSpPr>
+          <p:cNvPr id="8" name="Shape 5"/>
+          <p:cNvSpPr/>
+          <p:nvPr/>
+        </p:nvSpPr>
+        <p:spPr>
+          <a:xfrm>
+            <a:off x="566928" y="4631436"/>
+            <a:ext cx="8010144" cy="0"/>
+          </a:xfrm>
+          <a:prstGeom prst="line">
+            <a:avLst/>
+          </a:prstGeom>
+          <a:noFill/>
+          <a:ln w="9525">
+            <a:solidFill>
+              <a:srgbClr val="DFE3F0"/>
+            </a:solidFill>
+            <a:prstDash val="solid"/>
+          </a:ln>
+        </p:spPr>
+      </p:sp>
+      <p:sp>
+        <p:nvSpPr>
+          <p:cNvPr id="9" name="Text 6"/>
+          <p:cNvSpPr/>
+          <p:nvPr/>
+        </p:nvSpPr>
+        <p:spPr>
+          <a:xfrm>
+            <a:off x="566928" y="4722876"/>
+            <a:ext cx="5029200" cy="237744"/>
+          </a:xfrm>
+          <a:prstGeom prst="rect">
+            <a:avLst/>
+          </a:prstGeom>
+          <a:noFill/>
+          <a:ln/>
+        </p:spPr>
+        <p:txBody>
+          <a:bodyPr wrap="square" lIns="0" tIns="0" rIns="0" bIns="0" rtlCol="0" anchor="ctr"/>
+          <a:lstStyle/>
+          <a:p>
+            <a:pPr indent="0" marL="0">
+              <a:buNone/>
+            </a:pPr>
+            <a:r>
+              <a:rPr lang="en-US" sz="1050" spc="30" kern="0" dirty="0">
+                <a:solidFill>
+                  <a:srgbClr val="5C6377"/>
+                </a:solidFill>
+                <a:latin typeface="Arial" pitchFamily="34" charset="0"/>
+                <a:ea typeface="Arial" pitchFamily="34" charset="-122"/>
+                <a:cs typeface="Arial" pitchFamily="34" charset="-120"/>
+              </a:rPr>
+              <a:t>Auswertung</a:t>
+            </a:r>
+            <a:endParaRPr lang="en-US" sz="1050" dirty="0"/>
+          </a:p>
+        </p:txBody>
+      </p:sp>
+      <p:sp>
+        <p:nvSpPr>
+          <p:cNvPr id="10" name="Text 7"/>
+          <p:cNvSpPr/>
+          <p:nvPr/>
+        </p:nvSpPr>
+        <p:spPr>
+          <a:xfrm>
+            <a:off x="8028432" y="4722876"/>
+            <a:ext cx="548640" cy="237744"/>
+          </a:xfrm>
+          <a:prstGeom prst="rect">
+            <a:avLst/>
+          </a:prstGeom>
+          <a:noFill/>
+          <a:ln/>
+        </p:spPr>
+        <p:txBody>
+          <a:bodyPr wrap="square" lIns="0" tIns="0" rIns="0" bIns="0" rtlCol="0" anchor="ctr"/>
+          <a:lstStyle/>
+          <a:p>
+            <a:pPr algn="r" indent="0" marL="0">
+              <a:buNone/>
+            </a:pPr>
+            <a:r>
+              <a:rPr lang="en-US" sz="1050" dirty="0">
+                <a:solidFill>
+                  <a:srgbClr val="5C6377"/>
+                </a:solidFill>
+                <a:latin typeface="Arial" pitchFamily="34" charset="0"/>
+                <a:ea typeface="Arial" pitchFamily="34" charset="-122"/>
+                <a:cs typeface="Arial" pitchFamily="34" charset="-120"/>
+              </a:rPr>
+              <a:t>14/15</a:t>
+            </a:r>
+            <a:endParaRPr lang="en-US" sz="1050" dirty="0"/>
+          </a:p>
+        </p:txBody>
+      </p:sp>
+    </p:spTree>
+  </p:cSld>
+  <p:clrMapOvr>
+    <a:masterClrMapping/>
+  </p:clrMapOvr>
+</p:sld>
+</file>
+
+<file path=ppt/slides/slide18.xml><?xml version="1.0" encoding="utf-8"?>
+<p:sld xmlns:a="http://schemas.openxmlformats.org/drawingml/2006/main" xmlns:r="http://schemas.openxmlformats.org/officeDocument/2006/relationships" xmlns:p="http://schemas.openxmlformats.org/presentationml/2006/main">
+  <p:cSld name="Slide 18">
+    <p:bg>
+      <p:bgPr>
+        <a:solidFill>
+          <a:srgbClr val="FFFFFF"/>
+        </a:solidFill>
+      </p:bgPr>
+    </p:bg>
+    <p:spTree>
+      <p:nvGrpSpPr>
+        <p:cNvPr id="1" name=""/>
+        <p:cNvGrpSpPr/>
+        <p:nvPr/>
+      </p:nvGrpSpPr>
+      <p:grpSpPr>
+        <a:xfrm>
+          <a:off x="0" y="0"/>
+          <a:ext cx="0" cy="0"/>
+          <a:chOff x="0" y="0"/>
+          <a:chExt cx="0" cy="0"/>
+        </a:xfrm>
+      </p:grpSpPr>
+      <p:sp>
+        <p:nvSpPr>
+          <p:cNvPr id="2" name="Shape 0"/>
+          <p:cNvSpPr/>
+          <p:nvPr/>
+        </p:nvSpPr>
+        <p:spPr>
+          <a:xfrm>
+            <a:off x="566928" y="201168"/>
+            <a:ext cx="475488" cy="50292"/>
+          </a:xfrm>
+          <a:prstGeom prst="rect">
+            <a:avLst/>
+          </a:prstGeom>
+          <a:solidFill>
+            <a:srgbClr val="0F7C86"/>
+          </a:solidFill>
+          <a:ln/>
+        </p:spPr>
+      </p:sp>
+      <p:sp>
+        <p:nvSpPr>
+          <p:cNvPr id="3" name="Text 1"/>
+          <p:cNvSpPr/>
+          <p:nvPr/>
+        </p:nvSpPr>
+        <p:spPr>
+          <a:xfrm>
+            <a:off x="566928" y="384048"/>
+            <a:ext cx="8010144" cy="237744"/>
+          </a:xfrm>
+          <a:prstGeom prst="rect">
+            <a:avLst/>
+          </a:prstGeom>
+          <a:noFill/>
+          <a:ln/>
+        </p:spPr>
+        <p:txBody>
+          <a:bodyPr wrap="square" lIns="0" tIns="0" rIns="0" bIns="0" rtlCol="0" anchor="ctr"/>
+          <a:lstStyle/>
+          <a:p>
+            <a:pPr indent="0" marL="0">
+              <a:buNone/>
+            </a:pPr>
+            <a:r>
+              <a:rPr lang="en-US" sz="1150" b="1" spc="180" kern="0" dirty="0">
+                <a:solidFill>
+                  <a:srgbClr val="0F7C86"/>
+                </a:solidFill>
+                <a:latin typeface="Arial" pitchFamily="34" charset="0"/>
+                <a:ea typeface="Arial" pitchFamily="34" charset="-122"/>
+                <a:cs typeface="Arial" pitchFamily="34" charset="-120"/>
+              </a:rPr>
+              <a:t>AUSBLICK</a:t>
+            </a:r>
+            <a:endParaRPr lang="en-US" sz="1150" dirty="0"/>
+          </a:p>
+        </p:txBody>
+      </p:sp>
+      <p:sp>
+        <p:nvSpPr>
+          <p:cNvPr id="4" name="Text 2"/>
+          <p:cNvSpPr/>
+          <p:nvPr/>
+        </p:nvSpPr>
+        <p:spPr>
+          <a:xfrm>
+            <a:off x="566928" y="731520"/>
+            <a:ext cx="8010144" cy="603504"/>
+          </a:xfrm>
+          <a:prstGeom prst="rect">
+            <a:avLst/>
+          </a:prstGeom>
+          <a:noFill/>
+          <a:ln/>
+        </p:spPr>
+        <p:txBody>
+          <a:bodyPr wrap="square" lIns="0" tIns="0" rIns="0" bIns="0" rtlCol="0" anchor="t"/>
+          <a:lstStyle/>
+          <a:p>
+            <a:pPr indent="0" marL="0">
+              <a:buNone/>
+            </a:pPr>
+            <a:r>
+              <a:rPr lang="en-US" sz="2600" b="1" dirty="0">
+                <a:solidFill>
+                  <a:srgbClr val="272E52"/>
+                </a:solidFill>
+                <a:latin typeface="Arial" pitchFamily="34" charset="0"/>
+                <a:ea typeface="Arial" pitchFamily="34" charset="-122"/>
+                <a:cs typeface="Arial" pitchFamily="34" charset="-120"/>
+              </a:rPr>
+              <a:t>Bis Montag</a:t>
+            </a:r>
+            <a:endParaRPr lang="en-US" sz="2600" dirty="0"/>
+          </a:p>
+        </p:txBody>
+      </p:sp>
+      <p:sp>
+        <p:nvSpPr>
+          <p:cNvPr id="5" name="Text 3"/>
+          <p:cNvSpPr/>
+          <p:nvPr/>
+        </p:nvSpPr>
+        <p:spPr>
+          <a:xfrm>
+            <a:off x="566928" y="1444752"/>
+            <a:ext cx="8010144" cy="438912"/>
+          </a:xfrm>
+          <a:prstGeom prst="rect">
+            <a:avLst/>
+          </a:prstGeom>
+          <a:noFill/>
+          <a:ln/>
+        </p:spPr>
+        <p:txBody>
+          <a:bodyPr wrap="square" lIns="0" tIns="0" rIns="0" bIns="0" rtlCol="0" anchor="t"/>
+          <a:lstStyle/>
+          <a:p>
+            <a:pPr indent="0" marL="0">
+              <a:buNone/>
+            </a:pPr>
+            <a:r>
+              <a:rPr lang="en-US" sz="1300" dirty="0">
+                <a:solidFill>
+                  <a:srgbClr val="5C6377"/>
+                </a:solidFill>
+                <a:latin typeface="Arial" pitchFamily="34" charset="0"/>
+                <a:ea typeface="Arial" pitchFamily="34" charset="-122"/>
+                <a:cs typeface="Arial" pitchFamily="34" charset="-120"/>
+              </a:rPr>
+              <a:t>Montag geht es in die Tiefe: Was passiert mit Daten, wenn der Container stirbt?</a:t>
+            </a:r>
+            <a:endParaRPr lang="en-US" sz="1300" dirty="0"/>
+          </a:p>
+        </p:txBody>
+      </p:sp>
+      <p:sp>
+        <p:nvSpPr>
+          <p:cNvPr id="6" name="Shape 4"/>
+          <p:cNvSpPr/>
+          <p:nvPr/>
+        </p:nvSpPr>
+        <p:spPr>
+          <a:xfrm>
+            <a:off x="566928" y="1975104"/>
+            <a:ext cx="2523744" cy="1920240"/>
+          </a:xfrm>
+          <a:prstGeom prst="rect">
+            <a:avLst/>
+          </a:prstGeom>
+          <a:solidFill>
+            <a:srgbClr val="F5F6FC"/>
+          </a:solidFill>
+          <a:ln/>
+        </p:spPr>
+      </p:sp>
+      <p:sp>
+        <p:nvSpPr>
+          <p:cNvPr id="7" name="Shape 5"/>
+          <p:cNvSpPr/>
+          <p:nvPr/>
+        </p:nvSpPr>
+        <p:spPr>
+          <a:xfrm>
+            <a:off x="566928" y="1975104"/>
+            <a:ext cx="41148" cy="1920240"/>
+          </a:xfrm>
+          <a:prstGeom prst="rect">
+            <a:avLst/>
+          </a:prstGeom>
+          <a:solidFill>
+            <a:srgbClr val="0F7C86"/>
+          </a:solidFill>
+          <a:ln/>
+        </p:spPr>
+      </p:sp>
+      <p:sp>
+        <p:nvSpPr>
+          <p:cNvPr id="8" name="Text 6"/>
+          <p:cNvSpPr/>
+          <p:nvPr/>
+        </p:nvSpPr>
+        <p:spPr>
+          <a:xfrm>
+            <a:off x="804672" y="2121408"/>
+            <a:ext cx="2121408" cy="256032"/>
+          </a:xfrm>
+          <a:prstGeom prst="rect">
+            <a:avLst/>
+          </a:prstGeom>
+          <a:noFill/>
+          <a:ln/>
+        </p:spPr>
+        <p:txBody>
+          <a:bodyPr wrap="square" lIns="0" tIns="0" rIns="0" bIns="0" rtlCol="0" anchor="t"/>
+          <a:lstStyle/>
+          <a:p>
+            <a:pPr indent="0" marL="0">
+              <a:buNone/>
+            </a:pPr>
+            <a:r>
+              <a:rPr lang="en-US" sz="1300" b="1" dirty="0">
+                <a:solidFill>
+                  <a:srgbClr val="272E52"/>
+                </a:solidFill>
+                <a:latin typeface="Arial" pitchFamily="34" charset="0"/>
+                <a:ea typeface="Arial" pitchFamily="34" charset="-122"/>
+                <a:cs typeface="Arial" pitchFamily="34" charset="-120"/>
+              </a:rPr>
+              <a:t>Volumes</a:t>
+            </a:r>
+            <a:endParaRPr lang="en-US" sz="1300" dirty="0"/>
+          </a:p>
+        </p:txBody>
+      </p:sp>
+      <p:sp>
+        <p:nvSpPr>
+          <p:cNvPr id="9" name="Text 7"/>
+          <p:cNvSpPr/>
+          <p:nvPr/>
+        </p:nvSpPr>
+        <p:spPr>
+          <a:xfrm>
+            <a:off x="804672" y="2423160"/>
+            <a:ext cx="2121408" cy="1353312"/>
+          </a:xfrm>
+          <a:prstGeom prst="rect">
+            <a:avLst/>
+          </a:prstGeom>
+          <a:noFill/>
+          <a:ln/>
+        </p:spPr>
+        <p:txBody>
+          <a:bodyPr wrap="square" lIns="0" tIns="0" rIns="0" bIns="0" rtlCol="0" anchor="t"/>
+          <a:lstStyle/>
+          <a:p>
+            <a:pPr indent="0" marL="0">
+              <a:lnSpc>
+                <a:spcPct val="92000"/>
+              </a:lnSpc>
+              <a:buNone/>
+            </a:pPr>
+            <a:r>
+              <a:rPr lang="en-US" sz="1150" dirty="0">
+                <a:solidFill>
+                  <a:srgbClr val="434A63"/>
+                </a:solidFill>
+                <a:latin typeface="Arial" pitchFamily="34" charset="0"/>
+                <a:ea typeface="Arial" pitchFamily="34" charset="-122"/>
+                <a:cs typeface="Arial" pitchFamily="34" charset="-120"/>
+              </a:rPr>
+              <a:t>Container weg heißt Daten weg – außer man gibt ihnen ein Zuhause. Genau dafür sind Volumes da.</a:t>
+            </a:r>
+            <a:endParaRPr lang="en-US" sz="1150" dirty="0"/>
+          </a:p>
+        </p:txBody>
+      </p:sp>
+      <p:sp>
+        <p:nvSpPr>
+          <p:cNvPr id="10" name="Shape 8"/>
+          <p:cNvSpPr/>
+          <p:nvPr/>
+        </p:nvSpPr>
+        <p:spPr>
+          <a:xfrm>
+            <a:off x="3310128" y="1975104"/>
+            <a:ext cx="2523744" cy="1920240"/>
+          </a:xfrm>
+          <a:prstGeom prst="rect">
+            <a:avLst/>
+          </a:prstGeom>
+          <a:solidFill>
+            <a:srgbClr val="F5F6FC"/>
+          </a:solidFill>
+          <a:ln/>
+        </p:spPr>
+      </p:sp>
+      <p:sp>
+        <p:nvSpPr>
+          <p:cNvPr id="11" name="Shape 9"/>
+          <p:cNvSpPr/>
+          <p:nvPr/>
+        </p:nvSpPr>
+        <p:spPr>
+          <a:xfrm>
+            <a:off x="3310128" y="1975104"/>
+            <a:ext cx="41148" cy="1920240"/>
+          </a:xfrm>
+          <a:prstGeom prst="rect">
+            <a:avLst/>
+          </a:prstGeom>
+          <a:solidFill>
+            <a:srgbClr val="0F7C86"/>
+          </a:solidFill>
+          <a:ln/>
+        </p:spPr>
+      </p:sp>
+      <p:sp>
+        <p:nvSpPr>
+          <p:cNvPr id="12" name="Text 10"/>
+          <p:cNvSpPr/>
+          <p:nvPr/>
+        </p:nvSpPr>
+        <p:spPr>
+          <a:xfrm>
+            <a:off x="3547872" y="2121408"/>
+            <a:ext cx="2121408" cy="256032"/>
+          </a:xfrm>
+          <a:prstGeom prst="rect">
+            <a:avLst/>
+          </a:prstGeom>
+          <a:noFill/>
+          <a:ln/>
+        </p:spPr>
+        <p:txBody>
+          <a:bodyPr wrap="square" lIns="0" tIns="0" rIns="0" bIns="0" rtlCol="0" anchor="t"/>
+          <a:lstStyle/>
+          <a:p>
+            <a:pPr indent="0" marL="0">
+              <a:buNone/>
+            </a:pPr>
+            <a:r>
+              <a:rPr lang="en-US" sz="1300" b="1" dirty="0">
+                <a:solidFill>
+                  <a:srgbClr val="272E52"/>
+                </a:solidFill>
+                <a:latin typeface="Arial" pitchFamily="34" charset="0"/>
+                <a:ea typeface="Arial" pitchFamily="34" charset="-122"/>
+                <a:cs typeface="Arial" pitchFamily="34" charset="-120"/>
+              </a:rPr>
+              <a:t>Container-Netze</a:t>
+            </a:r>
+            <a:endParaRPr lang="en-US" sz="1300" dirty="0"/>
+          </a:p>
+        </p:txBody>
+      </p:sp>
+      <p:sp>
+        <p:nvSpPr>
+          <p:cNvPr id="13" name="Text 11"/>
+          <p:cNvSpPr/>
+          <p:nvPr/>
+        </p:nvSpPr>
+        <p:spPr>
+          <a:xfrm>
+            <a:off x="3547872" y="2423160"/>
+            <a:ext cx="2121408" cy="1353312"/>
+          </a:xfrm>
+          <a:prstGeom prst="rect">
+            <a:avLst/>
+          </a:prstGeom>
+          <a:noFill/>
+          <a:ln/>
+        </p:spPr>
+        <p:txBody>
+          <a:bodyPr wrap="square" lIns="0" tIns="0" rIns="0" bIns="0" rtlCol="0" anchor="t"/>
+          <a:lstStyle/>
+          <a:p>
+            <a:pPr indent="0" marL="0">
+              <a:lnSpc>
+                <a:spcPct val="92000"/>
+              </a:lnSpc>
+              <a:buNone/>
+            </a:pPr>
+            <a:r>
+              <a:rPr lang="en-US" sz="1150" dirty="0">
+                <a:solidFill>
+                  <a:srgbClr val="434A63"/>
+                </a:solidFill>
+                <a:latin typeface="Arial" pitchFamily="34" charset="0"/>
+                <a:ea typeface="Arial" pitchFamily="34" charset="-122"/>
+                <a:cs typeface="Arial" pitchFamily="34" charset="-120"/>
+              </a:rPr>
+              <a:t>Mehrere Container sprechen miteinander – euer VLAN-Wissen kommt wieder, nur in klein.</a:t>
+            </a:r>
+            <a:endParaRPr lang="en-US" sz="1150" dirty="0"/>
+          </a:p>
+        </p:txBody>
+      </p:sp>
+      <p:sp>
+        <p:nvSpPr>
+          <p:cNvPr id="14" name="Shape 12"/>
+          <p:cNvSpPr/>
+          <p:nvPr/>
+        </p:nvSpPr>
+        <p:spPr>
+          <a:xfrm>
+            <a:off x="6053328" y="1975104"/>
+            <a:ext cx="2523744" cy="1920240"/>
+          </a:xfrm>
+          <a:prstGeom prst="rect">
+            <a:avLst/>
+          </a:prstGeom>
+          <a:solidFill>
+            <a:srgbClr val="F5F6FC"/>
+          </a:solidFill>
+          <a:ln/>
+        </p:spPr>
+      </p:sp>
+      <p:sp>
+        <p:nvSpPr>
+          <p:cNvPr id="15" name="Shape 13"/>
+          <p:cNvSpPr/>
+          <p:nvPr/>
+        </p:nvSpPr>
+        <p:spPr>
+          <a:xfrm>
+            <a:off x="6053328" y="1975104"/>
+            <a:ext cx="41148" cy="1920240"/>
+          </a:xfrm>
+          <a:prstGeom prst="rect">
+            <a:avLst/>
+          </a:prstGeom>
+          <a:solidFill>
+            <a:srgbClr val="0F7C86"/>
+          </a:solidFill>
+          <a:ln/>
+        </p:spPr>
+      </p:sp>
+      <p:sp>
+        <p:nvSpPr>
+          <p:cNvPr id="16" name="Text 14"/>
+          <p:cNvSpPr/>
+          <p:nvPr/>
+        </p:nvSpPr>
+        <p:spPr>
+          <a:xfrm>
+            <a:off x="6291072" y="2121408"/>
+            <a:ext cx="2121408" cy="256032"/>
+          </a:xfrm>
+          <a:prstGeom prst="rect">
+            <a:avLst/>
+          </a:prstGeom>
+          <a:noFill/>
+          <a:ln/>
+        </p:spPr>
+        <p:txBody>
+          <a:bodyPr wrap="square" lIns="0" tIns="0" rIns="0" bIns="0" rtlCol="0" anchor="t"/>
+          <a:lstStyle/>
+          <a:p>
+            <a:pPr indent="0" marL="0">
+              <a:buNone/>
+            </a:pPr>
+            <a:r>
+              <a:rPr lang="en-US" sz="1300" b="1" dirty="0">
+                <a:solidFill>
+                  <a:srgbClr val="272E52"/>
+                </a:solidFill>
+                <a:latin typeface="Arial" pitchFamily="34" charset="0"/>
+                <a:ea typeface="Arial" pitchFamily="34" charset="-122"/>
+                <a:cs typeface="Arial" pitchFamily="34" charset="-120"/>
+              </a:rPr>
+              <a:t>Nichts vorbereiten</a:t>
+            </a:r>
+            <a:endParaRPr lang="en-US" sz="1300" dirty="0"/>
+          </a:p>
+        </p:txBody>
+      </p:sp>
+      <p:sp>
+        <p:nvSpPr>
+          <p:cNvPr id="17" name="Text 15"/>
+          <p:cNvSpPr/>
+          <p:nvPr/>
+        </p:nvSpPr>
+        <p:spPr>
+          <a:xfrm>
+            <a:off x="6291072" y="2423160"/>
+            <a:ext cx="2121408" cy="1353312"/>
+          </a:xfrm>
+          <a:prstGeom prst="rect">
+            <a:avLst/>
+          </a:prstGeom>
+          <a:noFill/>
+          <a:ln/>
+        </p:spPr>
+        <p:txBody>
+          <a:bodyPr wrap="square" lIns="0" tIns="0" rIns="0" bIns="0" rtlCol="0" anchor="t"/>
+          <a:lstStyle/>
+          <a:p>
+            <a:pPr indent="0" marL="0">
+              <a:lnSpc>
+                <a:spcPct val="92000"/>
+              </a:lnSpc>
+              <a:buNone/>
+            </a:pPr>
+            <a:r>
+              <a:rPr lang="en-US" sz="1150" dirty="0">
+                <a:solidFill>
+                  <a:srgbClr val="434A63"/>
+                </a:solidFill>
+                <a:latin typeface="Arial" pitchFamily="34" charset="0"/>
+                <a:ea typeface="Arial" pitchFamily="34" charset="-122"/>
+                <a:cs typeface="Arial" pitchFamily="34" charset="-120"/>
+              </a:rPr>
+              <a:t>Docker läuft jetzt bei euch – mehr braucht es nicht. Wer mag, spielt die Kür zu Ende.</a:t>
+            </a:r>
+            <a:endParaRPr lang="en-US" sz="1150" dirty="0"/>
+          </a:p>
+        </p:txBody>
+      </p:sp>
+      <p:sp>
+        <p:nvSpPr>
+          <p:cNvPr id="18" name="Shape 16"/>
+          <p:cNvSpPr/>
+          <p:nvPr/>
+        </p:nvSpPr>
+        <p:spPr>
+          <a:xfrm>
+            <a:off x="566928" y="4160520"/>
+            <a:ext cx="32004" cy="256032"/>
+          </a:xfrm>
+          <a:prstGeom prst="rect">
+            <a:avLst/>
+          </a:prstGeom>
+          <a:solidFill>
+            <a:srgbClr val="0F7C86"/>
+          </a:solidFill>
+          <a:ln/>
+        </p:spPr>
+      </p:sp>
+      <p:sp>
+        <p:nvSpPr>
+          <p:cNvPr id="19" name="Text 17"/>
+          <p:cNvSpPr/>
+          <p:nvPr/>
+        </p:nvSpPr>
+        <p:spPr>
+          <a:xfrm>
+            <a:off x="749808" y="4114800"/>
+            <a:ext cx="7827264" cy="402336"/>
+          </a:xfrm>
+          <a:prstGeom prst="rect">
+            <a:avLst/>
+          </a:prstGeom>
+          <a:noFill/>
+          <a:ln/>
+        </p:spPr>
+        <p:txBody>
+          <a:bodyPr wrap="square" lIns="0" tIns="0" rIns="0" bIns="0" rtlCol="0" anchor="ctr"/>
+          <a:lstStyle/>
+          <a:p>
+            <a:pPr indent="0" marL="0">
+              <a:buNone/>
+            </a:pPr>
+            <a:r>
+              <a:rPr lang="en-US" sz="1200" b="1" dirty="0">
+                <a:solidFill>
+                  <a:srgbClr val="434A63"/>
+                </a:solidFill>
+                <a:latin typeface="Arial" pitchFamily="34" charset="0"/>
+                <a:ea typeface="Arial" pitchFamily="34" charset="-122"/>
+                <a:cs typeface="Arial" pitchFamily="34" charset="-120"/>
+              </a:rPr>
+              <a:t>Nächster Termin: Montag, 14. September, 18:00 Uhr – Docker: Volumes, Netze, Umgebungsvariablen.</a:t>
+            </a:r>
+            <a:endParaRPr lang="en-US" sz="1200" dirty="0"/>
+          </a:p>
+        </p:txBody>
+      </p:sp>
+      <p:sp>
+        <p:nvSpPr>
+          <p:cNvPr id="20" name="Shape 18"/>
+          <p:cNvSpPr/>
+          <p:nvPr/>
+        </p:nvSpPr>
+        <p:spPr>
+          <a:xfrm>
+            <a:off x="566928" y="4631436"/>
+            <a:ext cx="8010144" cy="0"/>
+          </a:xfrm>
+          <a:prstGeom prst="line">
+            <a:avLst/>
+          </a:prstGeom>
+          <a:noFill/>
+          <a:ln w="9525">
+            <a:solidFill>
+              <a:srgbClr val="DFE3F0"/>
+            </a:solidFill>
+            <a:prstDash val="solid"/>
+          </a:ln>
+        </p:spPr>
+      </p:sp>
+      <p:sp>
+        <p:nvSpPr>
+          <p:cNvPr id="21" name="Text 19"/>
+          <p:cNvSpPr/>
+          <p:nvPr/>
+        </p:nvSpPr>
+        <p:spPr>
+          <a:xfrm>
+            <a:off x="566928" y="4722876"/>
+            <a:ext cx="5029200" cy="237744"/>
+          </a:xfrm>
+          <a:prstGeom prst="rect">
+            <a:avLst/>
+          </a:prstGeom>
+          <a:noFill/>
+          <a:ln/>
+        </p:spPr>
+        <p:txBody>
+          <a:bodyPr wrap="square" lIns="0" tIns="0" rIns="0" bIns="0" rtlCol="0" anchor="ctr"/>
+          <a:lstStyle/>
+          <a:p>
+            <a:pPr indent="0" marL="0">
+              <a:buNone/>
+            </a:pPr>
+            <a:r>
+              <a:rPr lang="en-US" sz="1050" spc="30" kern="0" dirty="0">
+                <a:solidFill>
+                  <a:srgbClr val="5C6377"/>
+                </a:solidFill>
+                <a:latin typeface="Arial" pitchFamily="34" charset="0"/>
+                <a:ea typeface="Arial" pitchFamily="34" charset="-122"/>
+                <a:cs typeface="Arial" pitchFamily="34" charset="-120"/>
+              </a:rPr>
+              <a:t>Abschluss</a:t>
+            </a:r>
+            <a:endParaRPr lang="en-US" sz="1050" dirty="0"/>
+          </a:p>
+        </p:txBody>
+      </p:sp>
+      <p:sp>
+        <p:nvSpPr>
+          <p:cNvPr id="22" name="Text 20"/>
+          <p:cNvSpPr/>
+          <p:nvPr/>
+        </p:nvSpPr>
+        <p:spPr>
+          <a:xfrm>
+            <a:off x="8028432" y="4722876"/>
+            <a:ext cx="548640" cy="237744"/>
+          </a:xfrm>
+          <a:prstGeom prst="rect">
+            <a:avLst/>
+          </a:prstGeom>
+          <a:noFill/>
+          <a:ln/>
+        </p:spPr>
+        <p:txBody>
+          <a:bodyPr wrap="square" lIns="0" tIns="0" rIns="0" bIns="0" rtlCol="0" anchor="ctr"/>
+          <a:lstStyle/>
+          <a:p>
+            <a:pPr algn="r" indent="0" marL="0">
+              <a:buNone/>
+            </a:pPr>
+            <a:r>
+              <a:rPr lang="en-US" sz="1050" dirty="0">
+                <a:solidFill>
+                  <a:srgbClr val="5C6377"/>
+                </a:solidFill>
+                <a:latin typeface="Arial" pitchFamily="34" charset="0"/>
+                <a:ea typeface="Arial" pitchFamily="34" charset="-122"/>
+                <a:cs typeface="Arial" pitchFamily="34" charset="-120"/>
+              </a:rPr>
+              <a:t>15/15</a:t>
+            </a:r>
+            <a:endParaRPr lang="en-US" sz="1050" dirty="0"/>
+          </a:p>
+        </p:txBody>
+      </p:sp>
+    </p:spTree>
+  </p:cSld>
+  <p:clrMapOvr>
+    <a:masterClrMapping/>
+  </p:clrMapOvr>
+</p:sld>
+</file>
+
+<file path=ppt/slides/slide19.xml><?xml version="1.0" encoding="utf-8"?>
+<p:sld xmlns:a="http://schemas.openxmlformats.org/drawingml/2006/main" xmlns:r="http://schemas.openxmlformats.org/officeDocument/2006/relationships" xmlns:p="http://schemas.openxmlformats.org/presentationml/2006/main">
+  <p:cSld name="Slide 19">
     <p:bg>
       <p:bgPr>
         <a:solidFill>
@@ -6422,7 +7849,7 @@
                 <a:ea typeface="Arial" pitchFamily="34" charset="-122"/>
                 <a:cs typeface="Arial" pitchFamily="34" charset="-120"/>
               </a:rPr>
-              <a:t>Image, Container, Registry – und was bei docker run passiert</a:t>
+              <a:t>Image, Container, Registry · docker run · Ports · Lebenszyklus · Dockerfile</a:t>
             </a:r>
             <a:endParaRPr lang="en-US" sz="1050" dirty="0"/>
           </a:p>
@@ -7110,7 +8537,7 @@
                 <a:ea typeface="Arial" pitchFamily="34" charset="-122"/>
                 <a:cs typeface="Arial" pitchFamily="34" charset="-120"/>
               </a:rPr>
-              <a:t>1/12</a:t>
+              <a:t>1/15</a:t>
             </a:r>
             <a:endParaRPr lang="en-US" sz="1050" dirty="0"/>
           </a:p>
@@ -7456,7 +8883,7 @@
                 <a:ea typeface="Arial" pitchFamily="34" charset="-122"/>
                 <a:cs typeface="Arial" pitchFamily="34" charset="-120"/>
               </a:rPr>
-              <a:t>2/12</a:t>
+              <a:t>2/15</a:t>
             </a:r>
             <a:endParaRPr lang="en-US" sz="1050" dirty="0"/>
           </a:p>
@@ -7592,356 +9019,40 @@
           </a:p>
         </p:txBody>
       </p:sp>
-      <p:sp>
-        <p:nvSpPr>
-          <p:cNvPr id="5" name="Shape 3"/>
-          <p:cNvSpPr/>
-          <p:nvPr/>
-        </p:nvSpPr>
-        <p:spPr>
-          <a:xfrm>
-            <a:off x="566928" y="1828800"/>
-            <a:ext cx="2523744" cy="1737360"/>
-          </a:xfrm>
-          <a:prstGeom prst="rect">
-            <a:avLst/>
-          </a:prstGeom>
-          <a:solidFill>
-            <a:srgbClr val="F5F6FC"/>
-          </a:solidFill>
-          <a:ln/>
-        </p:spPr>
-      </p:sp>
-      <p:sp>
-        <p:nvSpPr>
-          <p:cNvPr id="6" name="Shape 4"/>
-          <p:cNvSpPr/>
-          <p:nvPr/>
-        </p:nvSpPr>
-        <p:spPr>
-          <a:xfrm>
-            <a:off x="566928" y="1828800"/>
-            <a:ext cx="41148" cy="1737360"/>
-          </a:xfrm>
-          <a:prstGeom prst="rect">
-            <a:avLst/>
-          </a:prstGeom>
-          <a:solidFill>
-            <a:srgbClr val="3843AF"/>
-          </a:solidFill>
-          <a:ln/>
-        </p:spPr>
-      </p:sp>
-      <p:sp>
-        <p:nvSpPr>
-          <p:cNvPr id="7" name="Text 5"/>
-          <p:cNvSpPr/>
-          <p:nvPr/>
-        </p:nvSpPr>
-        <p:spPr>
-          <a:xfrm>
-            <a:off x="804672" y="1920240"/>
-            <a:ext cx="384048" cy="411480"/>
-          </a:xfrm>
-          <a:prstGeom prst="rect">
-            <a:avLst/>
-          </a:prstGeom>
-          <a:noFill/>
-          <a:ln/>
-        </p:spPr>
-        <p:txBody>
-          <a:bodyPr wrap="square" lIns="0" tIns="0" rIns="0" bIns="0" rtlCol="0" anchor="t"/>
-          <a:lstStyle/>
-          <a:p>
-            <a:pPr indent="0" marL="0">
-              <a:buNone/>
-            </a:pPr>
-            <a:r>
-              <a:rPr lang="en-US" sz="2000" b="1" dirty="0">
-                <a:solidFill>
-                  <a:srgbClr val="3843AF"/>
-                </a:solidFill>
-                <a:latin typeface="Courier New" pitchFamily="34" charset="0"/>
-                <a:ea typeface="Courier New" pitchFamily="34" charset="-122"/>
-                <a:cs typeface="Courier New" pitchFamily="34" charset="-120"/>
-              </a:rPr>
-              <a:t>1</a:t>
-            </a:r>
-            <a:endParaRPr lang="en-US" sz="2000" dirty="0"/>
-          </a:p>
-        </p:txBody>
-      </p:sp>
-      <p:sp>
-        <p:nvSpPr>
-          <p:cNvPr id="8" name="Text 6"/>
-          <p:cNvSpPr/>
-          <p:nvPr/>
-        </p:nvSpPr>
-        <p:spPr>
-          <a:xfrm>
-            <a:off x="1298448" y="1975104"/>
-            <a:ext cx="1627632" cy="274320"/>
-          </a:xfrm>
-          <a:prstGeom prst="rect">
-            <a:avLst/>
-          </a:prstGeom>
-          <a:noFill/>
-          <a:ln/>
-        </p:spPr>
-        <p:txBody>
-          <a:bodyPr wrap="square" lIns="0" tIns="0" rIns="0" bIns="0" rtlCol="0" anchor="t"/>
-          <a:lstStyle/>
-          <a:p>
-            <a:pPr indent="0" marL="0">
-              <a:buNone/>
-            </a:pPr>
-            <a:r>
-              <a:rPr lang="en-US" sz="1300" b="1" dirty="0">
-                <a:solidFill>
-                  <a:srgbClr val="272E52"/>
-                </a:solidFill>
-                <a:latin typeface="Arial" pitchFamily="34" charset="0"/>
-                <a:ea typeface="Arial" pitchFamily="34" charset="-122"/>
-                <a:cs typeface="Arial" pitchFamily="34" charset="-120"/>
-              </a:rPr>
-              <a:t>Host</a:t>
-            </a:r>
-            <a:endParaRPr lang="en-US" sz="1300" dirty="0"/>
-          </a:p>
-        </p:txBody>
-      </p:sp>
-      <p:sp>
-        <p:nvSpPr>
-          <p:cNvPr id="9" name="Text 7"/>
-          <p:cNvSpPr/>
-          <p:nvPr/>
-        </p:nvSpPr>
-        <p:spPr>
-          <a:xfrm>
-            <a:off x="1298448" y="2295144"/>
-            <a:ext cx="1627632" cy="1152144"/>
-          </a:xfrm>
-          <a:prstGeom prst="rect">
-            <a:avLst/>
-          </a:prstGeom>
-          <a:noFill/>
-          <a:ln/>
-        </p:spPr>
-        <p:txBody>
-          <a:bodyPr wrap="square" lIns="0" tIns="0" rIns="0" bIns="0" rtlCol="0" anchor="t"/>
-          <a:lstStyle/>
-          <a:p>
-            <a:pPr indent="0" marL="0">
-              <a:lnSpc>
-                <a:spcPct val="92000"/>
-              </a:lnSpc>
-              <a:buNone/>
-            </a:pPr>
-            <a:r>
-              <a:rPr lang="en-US" sz="1150" dirty="0">
-                <a:solidFill>
-                  <a:srgbClr val="434A63"/>
-                </a:solidFill>
-                <a:latin typeface="Arial" pitchFamily="34" charset="0"/>
-                <a:ea typeface="Arial" pitchFamily="34" charset="-122"/>
-                <a:cs typeface="Arial" pitchFamily="34" charset="-120"/>
-              </a:rPr>
-              <a:t>Der echte Rechner, auf dem alles läuft.</a:t>
-            </a:r>
-            <a:endParaRPr lang="en-US" sz="1150" dirty="0"/>
-          </a:p>
-        </p:txBody>
-      </p:sp>
-      <p:sp>
-        <p:nvSpPr>
-          <p:cNvPr id="10" name="Shape 8"/>
-          <p:cNvSpPr/>
-          <p:nvPr/>
-        </p:nvSpPr>
-        <p:spPr>
-          <a:xfrm>
-            <a:off x="3310128" y="1828800"/>
-            <a:ext cx="2523744" cy="1737360"/>
-          </a:xfrm>
-          <a:prstGeom prst="rect">
-            <a:avLst/>
-          </a:prstGeom>
-          <a:solidFill>
-            <a:srgbClr val="F5F6FC"/>
-          </a:solidFill>
-          <a:ln/>
-        </p:spPr>
-      </p:sp>
-      <p:sp>
-        <p:nvSpPr>
-          <p:cNvPr id="11" name="Shape 9"/>
-          <p:cNvSpPr/>
-          <p:nvPr/>
-        </p:nvSpPr>
-        <p:spPr>
-          <a:xfrm>
-            <a:off x="3310128" y="1828800"/>
-            <a:ext cx="41148" cy="1737360"/>
-          </a:xfrm>
-          <a:prstGeom prst="rect">
-            <a:avLst/>
-          </a:prstGeom>
-          <a:solidFill>
-            <a:srgbClr val="9A6310"/>
-          </a:solidFill>
-          <a:ln/>
-        </p:spPr>
-      </p:sp>
-      <p:sp>
-        <p:nvSpPr>
-          <p:cNvPr id="12" name="Text 10"/>
-          <p:cNvSpPr/>
-          <p:nvPr/>
-        </p:nvSpPr>
-        <p:spPr>
-          <a:xfrm>
-            <a:off x="3547872" y="1920240"/>
-            <a:ext cx="384048" cy="411480"/>
-          </a:xfrm>
-          <a:prstGeom prst="rect">
-            <a:avLst/>
-          </a:prstGeom>
-          <a:noFill/>
-          <a:ln/>
-        </p:spPr>
-        <p:txBody>
-          <a:bodyPr wrap="square" lIns="0" tIns="0" rIns="0" bIns="0" rtlCol="0" anchor="t"/>
-          <a:lstStyle/>
-          <a:p>
-            <a:pPr indent="0" marL="0">
-              <a:buNone/>
-            </a:pPr>
-            <a:r>
-              <a:rPr lang="en-US" sz="2000" b="1" dirty="0">
-                <a:solidFill>
-                  <a:srgbClr val="9A6310"/>
-                </a:solidFill>
-                <a:latin typeface="Courier New" pitchFamily="34" charset="0"/>
-                <a:ea typeface="Courier New" pitchFamily="34" charset="-122"/>
-                <a:cs typeface="Courier New" pitchFamily="34" charset="-120"/>
-              </a:rPr>
-              <a:t>2</a:t>
-            </a:r>
-            <a:endParaRPr lang="en-US" sz="2000" dirty="0"/>
-          </a:p>
-        </p:txBody>
-      </p:sp>
-      <p:sp>
-        <p:nvSpPr>
-          <p:cNvPr id="13" name="Text 11"/>
-          <p:cNvSpPr/>
-          <p:nvPr/>
-        </p:nvSpPr>
-        <p:spPr>
-          <a:xfrm>
-            <a:off x="4041648" y="1975104"/>
-            <a:ext cx="1627632" cy="274320"/>
-          </a:xfrm>
-          <a:prstGeom prst="rect">
-            <a:avLst/>
-          </a:prstGeom>
-          <a:noFill/>
-          <a:ln/>
-        </p:spPr>
-        <p:txBody>
-          <a:bodyPr wrap="square" lIns="0" tIns="0" rIns="0" bIns="0" rtlCol="0" anchor="t"/>
-          <a:lstStyle/>
-          <a:p>
-            <a:pPr indent="0" marL="0">
-              <a:buNone/>
-            </a:pPr>
-            <a:r>
-              <a:rPr lang="en-US" sz="1300" b="1" dirty="0">
-                <a:solidFill>
-                  <a:srgbClr val="272E52"/>
-                </a:solidFill>
-                <a:latin typeface="Arial" pitchFamily="34" charset="0"/>
-                <a:ea typeface="Arial" pitchFamily="34" charset="-122"/>
-                <a:cs typeface="Arial" pitchFamily="34" charset="-120"/>
-              </a:rPr>
-              <a:t>Gast</a:t>
-            </a:r>
-            <a:endParaRPr lang="en-US" sz="1300" dirty="0"/>
-          </a:p>
-        </p:txBody>
-      </p:sp>
-      <p:sp>
-        <p:nvSpPr>
-          <p:cNvPr id="14" name="Text 12"/>
-          <p:cNvSpPr/>
-          <p:nvPr/>
-        </p:nvSpPr>
-        <p:spPr>
-          <a:xfrm>
-            <a:off x="4041648" y="2295144"/>
-            <a:ext cx="1627632" cy="1152144"/>
-          </a:xfrm>
-          <a:prstGeom prst="rect">
-            <a:avLst/>
-          </a:prstGeom>
-          <a:noFill/>
-          <a:ln/>
-        </p:spPr>
-        <p:txBody>
-          <a:bodyPr wrap="square" lIns="0" tIns="0" rIns="0" bIns="0" rtlCol="0" anchor="t"/>
-          <a:lstStyle/>
-          <a:p>
-            <a:pPr indent="0" marL="0">
-              <a:lnSpc>
-                <a:spcPct val="92000"/>
-              </a:lnSpc>
-              <a:buNone/>
-            </a:pPr>
-            <a:r>
-              <a:rPr lang="en-US" sz="1150" dirty="0">
-                <a:solidFill>
-                  <a:srgbClr val="434A63"/>
-                </a:solidFill>
-                <a:latin typeface="Arial" pitchFamily="34" charset="0"/>
-                <a:ea typeface="Arial" pitchFamily="34" charset="-122"/>
-                <a:cs typeface="Arial" pitchFamily="34" charset="-120"/>
-              </a:rPr>
-              <a:t>Die VM darin – mit eigenem kompletten Betriebssystem.</a:t>
-            </a:r>
-            <a:endParaRPr lang="en-US" sz="1150" dirty="0"/>
-          </a:p>
-        </p:txBody>
-      </p:sp>
-      <p:sp>
-        <p:nvSpPr>
-          <p:cNvPr id="15" name="Shape 13"/>
-          <p:cNvSpPr/>
-          <p:nvPr/>
-        </p:nvSpPr>
-        <p:spPr>
-          <a:xfrm>
-            <a:off x="6053328" y="1828800"/>
-            <a:ext cx="2523744" cy="1737360"/>
-          </a:xfrm>
-          <a:prstGeom prst="rect">
-            <a:avLst/>
-          </a:prstGeom>
-          <a:solidFill>
-            <a:srgbClr val="F5F6FC"/>
-          </a:solidFill>
-          <a:ln/>
-        </p:spPr>
-      </p:sp>
-      <p:sp>
-        <p:nvSpPr>
-          <p:cNvPr id="16" name="Shape 14"/>
-          <p:cNvSpPr/>
-          <p:nvPr/>
-        </p:nvSpPr>
-        <p:spPr>
-          <a:xfrm>
-            <a:off x="6053328" y="1828800"/>
-            <a:ext cx="41148" cy="1737360"/>
+      <p:pic>
+        <p:nvPicPr>
+          <p:cNvPr id="5" name="Image 0" descr="/Users/jacobmenge/Desktop/kurs-26.2b-orga/folienwerkstatt/assets/diagramme/host-gast-bild.png">    </p:cNvPr>
+          <p:cNvPicPr>
+            <a:picLocks noChangeAspect="1"/>
+          </p:cNvPicPr>
+          <p:nvPr/>
+        </p:nvPicPr>
+        <p:blipFill>
+          <a:blip r:embed="rId1"/>
+          <a:stretch>
+            <a:fillRect/>
+          </a:stretch>
+        </p:blipFill>
+        <p:spPr>
+          <a:xfrm>
+            <a:off x="566928" y="1481328"/>
+            <a:ext cx="8010144" cy="2359152"/>
+          </a:xfrm>
+          <a:prstGeom prst="rect">
+            <a:avLst/>
+          </a:prstGeom>
+        </p:spPr>
+      </p:pic>
+      <p:sp>
+        <p:nvSpPr>
+          <p:cNvPr id="6" name="Shape 3"/>
+          <p:cNvSpPr/>
+          <p:nvPr/>
+        </p:nvSpPr>
+        <p:spPr>
+          <a:xfrm>
+            <a:off x="566928" y="4069080"/>
+            <a:ext cx="32004" cy="256032"/>
           </a:xfrm>
           <a:prstGeom prst="rect">
             <a:avLst/>
@@ -7954,147 +9065,7 @@
       </p:sp>
       <p:sp>
         <p:nvSpPr>
-          <p:cNvPr id="17" name="Text 15"/>
-          <p:cNvSpPr/>
-          <p:nvPr/>
-        </p:nvSpPr>
-        <p:spPr>
-          <a:xfrm>
-            <a:off x="6291072" y="1920240"/>
-            <a:ext cx="384048" cy="411480"/>
-          </a:xfrm>
-          <a:prstGeom prst="rect">
-            <a:avLst/>
-          </a:prstGeom>
-          <a:noFill/>
-          <a:ln/>
-        </p:spPr>
-        <p:txBody>
-          <a:bodyPr wrap="square" lIns="0" tIns="0" rIns="0" bIns="0" rtlCol="0" anchor="t"/>
-          <a:lstStyle/>
-          <a:p>
-            <a:pPr indent="0" marL="0">
-              <a:buNone/>
-            </a:pPr>
-            <a:r>
-              <a:rPr lang="en-US" sz="2000" b="1" dirty="0">
-                <a:solidFill>
-                  <a:srgbClr val="0F7C86"/>
-                </a:solidFill>
-                <a:latin typeface="Courier New" pitchFamily="34" charset="0"/>
-                <a:ea typeface="Courier New" pitchFamily="34" charset="-122"/>
-                <a:cs typeface="Courier New" pitchFamily="34" charset="-120"/>
-              </a:rPr>
-              <a:t>3</a:t>
-            </a:r>
-            <a:endParaRPr lang="en-US" sz="2000" dirty="0"/>
-          </a:p>
-        </p:txBody>
-      </p:sp>
-      <p:sp>
-        <p:nvSpPr>
-          <p:cNvPr id="18" name="Text 16"/>
-          <p:cNvSpPr/>
-          <p:nvPr/>
-        </p:nvSpPr>
-        <p:spPr>
-          <a:xfrm>
-            <a:off x="6784848" y="1975104"/>
-            <a:ext cx="1627632" cy="274320"/>
-          </a:xfrm>
-          <a:prstGeom prst="rect">
-            <a:avLst/>
-          </a:prstGeom>
-          <a:noFill/>
-          <a:ln/>
-        </p:spPr>
-        <p:txBody>
-          <a:bodyPr wrap="square" lIns="0" tIns="0" rIns="0" bIns="0" rtlCol="0" anchor="t"/>
-          <a:lstStyle/>
-          <a:p>
-            <a:pPr indent="0" marL="0">
-              <a:buNone/>
-            </a:pPr>
-            <a:r>
-              <a:rPr lang="en-US" sz="1300" b="1" dirty="0">
-                <a:solidFill>
-                  <a:srgbClr val="272E52"/>
-                </a:solidFill>
-                <a:latin typeface="Arial" pitchFamily="34" charset="0"/>
-                <a:ea typeface="Arial" pitchFamily="34" charset="-122"/>
-                <a:cs typeface="Arial" pitchFamily="34" charset="-120"/>
-              </a:rPr>
-              <a:t>Hypervisor</a:t>
-            </a:r>
-            <a:endParaRPr lang="en-US" sz="1300" dirty="0"/>
-          </a:p>
-        </p:txBody>
-      </p:sp>
-      <p:sp>
-        <p:nvSpPr>
-          <p:cNvPr id="19" name="Text 17"/>
-          <p:cNvSpPr/>
-          <p:nvPr/>
-        </p:nvSpPr>
-        <p:spPr>
-          <a:xfrm>
-            <a:off x="6784848" y="2295144"/>
-            <a:ext cx="1627632" cy="1152144"/>
-          </a:xfrm>
-          <a:prstGeom prst="rect">
-            <a:avLst/>
-          </a:prstGeom>
-          <a:noFill/>
-          <a:ln/>
-        </p:spPr>
-        <p:txBody>
-          <a:bodyPr wrap="square" lIns="0" tIns="0" rIns="0" bIns="0" rtlCol="0" anchor="t"/>
-          <a:lstStyle/>
-          <a:p>
-            <a:pPr indent="0" marL="0">
-              <a:lnSpc>
-                <a:spcPct val="92000"/>
-              </a:lnSpc>
-              <a:buNone/>
-            </a:pPr>
-            <a:r>
-              <a:rPr lang="en-US" sz="1150" dirty="0">
-                <a:solidFill>
-                  <a:srgbClr val="434A63"/>
-                </a:solidFill>
-                <a:latin typeface="Arial" pitchFamily="34" charset="0"/>
-                <a:ea typeface="Arial" pitchFamily="34" charset="-122"/>
-                <a:cs typeface="Arial" pitchFamily="34" charset="-120"/>
-              </a:rPr>
-              <a:t>Die Software dazwischen, die die Hardware verteilt.</a:t>
-            </a:r>
-            <a:endParaRPr lang="en-US" sz="1150" dirty="0"/>
-          </a:p>
-        </p:txBody>
-      </p:sp>
-      <p:sp>
-        <p:nvSpPr>
-          <p:cNvPr id="20" name="Shape 18"/>
-          <p:cNvSpPr/>
-          <p:nvPr/>
-        </p:nvSpPr>
-        <p:spPr>
-          <a:xfrm>
-            <a:off x="566928" y="4069080"/>
-            <a:ext cx="32004" cy="256032"/>
-          </a:xfrm>
-          <a:prstGeom prst="rect">
-            <a:avLst/>
-          </a:prstGeom>
-          <a:solidFill>
-            <a:srgbClr val="0F7C86"/>
-          </a:solidFill>
-          <a:ln/>
-        </p:spPr>
-      </p:sp>
-      <p:sp>
-        <p:nvSpPr>
-          <p:cNvPr id="21" name="Text 19"/>
+          <p:cNvPr id="7" name="Text 4"/>
           <p:cNvSpPr/>
           <p:nvPr/>
         </p:nvSpPr>
@@ -8125,7 +9096,7 @@
                 <a:ea typeface="Arial" pitchFamily="34" charset="-122"/>
                 <a:cs typeface="Arial" pitchFamily="34" charset="-120"/>
               </a:rPr>
-              <a:t>Merkt euch besonders den Gast mit eigenem Betriebssystem – genau da setzt Docker den Hebel an.</a:t>
+              <a:t>Genau das Bild von Montag. Merkt euch den Gast mit eigenem Betriebssystem – da setzt Docker gleich den Hebel an.</a:t>
             </a:r>
             <a:endParaRPr lang="en-US" sz="1200" dirty="0"/>
           </a:p>
@@ -8133,7 +9104,7 @@
       </p:sp>
       <p:sp>
         <p:nvSpPr>
-          <p:cNvPr id="22" name="Shape 20"/>
+          <p:cNvPr id="8" name="Shape 5"/>
           <p:cNvSpPr/>
           <p:nvPr/>
         </p:nvSpPr>
@@ -8156,7 +9127,7 @@
       </p:sp>
       <p:sp>
         <p:nvSpPr>
-          <p:cNvPr id="23" name="Text 21"/>
+          <p:cNvPr id="9" name="Text 6"/>
           <p:cNvSpPr/>
           <p:nvPr/>
         </p:nvSpPr>
@@ -8195,7 +9166,7 @@
       </p:sp>
       <p:sp>
         <p:nvSpPr>
-          <p:cNvPr id="24" name="Text 22"/>
+          <p:cNvPr id="10" name="Text 7"/>
           <p:cNvSpPr/>
           <p:nvPr/>
         </p:nvSpPr>
@@ -8226,7 +9197,7 @@
                 <a:ea typeface="Arial" pitchFamily="34" charset="-122"/>
                 <a:cs typeface="Arial" pitchFamily="34" charset="-120"/>
               </a:rPr>
-              <a:t>3/12</a:t>
+              <a:t>3/15</a:t>
             </a:r>
             <a:endParaRPr lang="en-US" sz="1050" dirty="0"/>
           </a:p>
@@ -8749,7 +9720,7 @@
                 <a:ea typeface="Arial" pitchFamily="34" charset="-122"/>
                 <a:cs typeface="Arial" pitchFamily="34" charset="-120"/>
               </a:rPr>
-              <a:t>4/12</a:t>
+              <a:t>4/15</a:t>
             </a:r>
             <a:endParaRPr lang="en-US" sz="1050" dirty="0"/>
           </a:p>
@@ -9063,7 +10034,7 @@
                 <a:ea typeface="Arial" pitchFamily="34" charset="-122"/>
                 <a:cs typeface="Arial" pitchFamily="34" charset="-120"/>
               </a:rPr>
-              <a:t>5/12</a:t>
+              <a:t>5/15</a:t>
             </a:r>
             <a:endParaRPr lang="en-US" sz="1050" dirty="0"/>
           </a:p>
@@ -9377,7 +10348,7 @@
                 <a:ea typeface="Arial" pitchFamily="34" charset="-122"/>
                 <a:cs typeface="Arial" pitchFamily="34" charset="-120"/>
               </a:rPr>
-              <a:t>6/12</a:t>
+              <a:t>6/15</a:t>
             </a:r>
             <a:endParaRPr lang="en-US" sz="1050" dirty="0"/>
           </a:p>
@@ -9430,7 +10401,7 @@
             <a:avLst/>
           </a:prstGeom>
           <a:solidFill>
-            <a:srgbClr val="3843AF"/>
+            <a:srgbClr val="0F7C86"/>
           </a:solidFill>
           <a:ln/>
         </p:spPr>
@@ -9462,13 +10433,13 @@
             <a:r>
               <a:rPr lang="en-US" sz="1150" b="1" spc="180" kern="0" dirty="0">
                 <a:solidFill>
-                  <a:srgbClr val="3843AF"/>
-                </a:solidFill>
-                <a:latin typeface="Arial" pitchFamily="34" charset="0"/>
-                <a:ea typeface="Arial" pitchFamily="34" charset="-122"/>
-                <a:cs typeface="Arial" pitchFamily="34" charset="-120"/>
-              </a:rPr>
-              <a:t>ALLE ZUSAMMEN, JETZT</a:t>
+                  <a:srgbClr val="0F7C86"/>
+                </a:solidFill>
+                <a:latin typeface="Arial" pitchFamily="34" charset="0"/>
+                <a:ea typeface="Arial" pitchFamily="34" charset="-122"/>
+                <a:cs typeface="Arial" pitchFamily="34" charset="-120"/>
+              </a:rPr>
+              <a:t>PORT-MAPPING</a:t>
             </a:r>
             <a:endParaRPr lang="en-US" sz="1150" dirty="0"/>
           </a:p>
@@ -9507,159 +10478,82 @@
                 <a:ea typeface="Arial" pitchFamily="34" charset="-122"/>
                 <a:cs typeface="Arial" pitchFamily="34" charset="-120"/>
               </a:rPr>
-              <a:t>Docker Desktop einrichten – gemeinsam</a:t>
+              <a:t>Wie kommt der Container in den Browser?</a:t>
             </a:r>
             <a:endParaRPr lang="en-US" sz="2600" dirty="0"/>
           </a:p>
         </p:txBody>
       </p:sp>
-      <p:sp>
-        <p:nvSpPr>
-          <p:cNvPr id="5" name="Text 3"/>
-          <p:cNvSpPr/>
-          <p:nvPr/>
-        </p:nvSpPr>
-        <p:spPr>
-          <a:xfrm>
-            <a:off x="566928" y="1444752"/>
-            <a:ext cx="8010144" cy="274320"/>
-          </a:xfrm>
-          <a:prstGeom prst="rect">
-            <a:avLst/>
-          </a:prstGeom>
-          <a:noFill/>
-          <a:ln/>
-        </p:spPr>
-        <p:txBody>
-          <a:bodyPr wrap="square" lIns="0" tIns="0" rIns="0" bIns="0" rtlCol="0" anchor="t"/>
-          <a:lstStyle/>
-          <a:p>
-            <a:pPr indent="0" marL="0">
-              <a:buNone/>
-            </a:pPr>
-            <a:r>
-              <a:rPr lang="en-US" sz="1300" dirty="0">
-                <a:solidFill>
-                  <a:srgbClr val="5C6377"/>
-                </a:solidFill>
-                <a:latin typeface="Arial" pitchFamily="34" charset="0"/>
-                <a:ea typeface="Arial" pitchFamily="34" charset="-122"/>
-                <a:cs typeface="Arial" pitchFamily="34" charset="-120"/>
-              </a:rPr>
-              <a:t>Wir installieren jetzt gemeinsam – die Anleitung führt euch je Betriebssystem durch:</a:t>
-            </a:r>
-            <a:endParaRPr lang="en-US" sz="1300" dirty="0"/>
-          </a:p>
-        </p:txBody>
-      </p:sp>
-      <p:sp>
-        <p:nvSpPr>
-          <p:cNvPr id="6" name="Shape 4"/>
-          <p:cNvSpPr/>
-          <p:nvPr/>
-        </p:nvSpPr>
-        <p:spPr>
-          <a:xfrm>
-            <a:off x="566928" y="1920240"/>
-            <a:ext cx="8010144" cy="713232"/>
+      <p:pic>
+        <p:nvPicPr>
+          <p:cNvPr id="5" name="Image 0" descr="/Users/jacobmenge/Desktop/kurs-26.2b-orga/folienwerkstatt/assets/diagramme/port-mapping.png">    </p:cNvPr>
+          <p:cNvPicPr>
+            <a:picLocks noChangeAspect="1"/>
+          </p:cNvPicPr>
+          <p:nvPr/>
+        </p:nvPicPr>
+        <p:blipFill>
+          <a:blip r:embed="rId1"/>
+          <a:stretch>
+            <a:fillRect/>
+          </a:stretch>
+        </p:blipFill>
+        <p:spPr>
+          <a:xfrm>
+            <a:off x="566928" y="1517904"/>
+            <a:ext cx="8010144" cy="2286000"/>
+          </a:xfrm>
+          <a:prstGeom prst="rect">
+            <a:avLst/>
+          </a:prstGeom>
+        </p:spPr>
+      </p:pic>
+      <p:sp>
+        <p:nvSpPr>
+          <p:cNvPr id="6" name="Shape 3"/>
+          <p:cNvSpPr/>
+          <p:nvPr/>
+        </p:nvSpPr>
+        <p:spPr>
+          <a:xfrm>
+            <a:off x="566928" y="4069080"/>
+            <a:ext cx="32004" cy="256032"/>
           </a:xfrm>
           <a:prstGeom prst="rect">
             <a:avLst/>
           </a:prstGeom>
           <a:solidFill>
-            <a:srgbClr val="EEF0FB"/>
+            <a:srgbClr val="0F7C86"/>
           </a:solidFill>
           <a:ln/>
         </p:spPr>
       </p:sp>
       <p:sp>
         <p:nvSpPr>
-          <p:cNvPr id="7" name="Shape 5"/>
-          <p:cNvSpPr/>
-          <p:nvPr/>
-        </p:nvSpPr>
-        <p:spPr>
-          <a:xfrm>
-            <a:off x="566928" y="1920240"/>
-            <a:ext cx="41148" cy="713232"/>
-          </a:xfrm>
-          <a:prstGeom prst="rect">
-            <a:avLst/>
-          </a:prstGeom>
-          <a:solidFill>
-            <a:srgbClr val="3843AF"/>
-          </a:solidFill>
-          <a:ln/>
-        </p:spPr>
-      </p:sp>
-      <p:sp>
-        <p:nvSpPr>
-          <p:cNvPr id="8" name="Text 6"/>
-          <p:cNvSpPr/>
-          <p:nvPr/>
-        </p:nvSpPr>
-        <p:spPr>
-          <a:xfrm>
-            <a:off x="804672" y="2066544"/>
-            <a:ext cx="7607808" cy="242062"/>
-          </a:xfrm>
-          <a:prstGeom prst="rect">
-            <a:avLst/>
-          </a:prstGeom>
-          <a:noFill/>
-          <a:ln/>
-        </p:spPr>
-        <p:txBody>
-          <a:bodyPr wrap="square" lIns="0" tIns="0" rIns="0" bIns="0" rtlCol="0" anchor="t"/>
-          <a:lstStyle/>
-          <a:p>
-            <a:pPr indent="0" marL="0">
-              <a:buNone/>
-            </a:pPr>
-            <a:r>
-              <a:rPr lang="en-US" sz="1300" b="1" dirty="0">
-                <a:solidFill>
-                  <a:srgbClr val="272E52"/>
-                </a:solidFill>
-                <a:latin typeface="Arial" pitchFamily="34" charset="0"/>
-                <a:ea typeface="Arial" pitchFamily="34" charset="-122"/>
-                <a:cs typeface="Arial" pitchFamily="34" charset="-120"/>
-              </a:rPr>
-              <a:t>Anleitung öffnen</a:t>
-            </a:r>
-            <a:endParaRPr lang="en-US" sz="1300" dirty="0"/>
-          </a:p>
-        </p:txBody>
-      </p:sp>
-      <p:sp>
-        <p:nvSpPr>
-          <p:cNvPr id="9" name="Text 7"/>
-          <p:cNvSpPr/>
-          <p:nvPr/>
-        </p:nvSpPr>
-        <p:spPr>
-          <a:xfrm>
-            <a:off x="804672" y="2354326"/>
-            <a:ext cx="7607808" cy="160274"/>
-          </a:xfrm>
-          <a:prstGeom prst="rect">
-            <a:avLst/>
-          </a:prstGeom>
-          <a:noFill/>
-          <a:ln/>
-        </p:spPr>
-        <p:txBody>
-          <a:bodyPr wrap="square" lIns="0" tIns="0" rIns="0" bIns="0" rtlCol="0" anchor="t"/>
-          <a:lstStyle/>
-          <a:p>
-            <a:pPr indent="0" marL="0">
-              <a:lnSpc>
-                <a:spcPct val="92000"/>
-              </a:lnSpc>
-              <a:buNone/>
-            </a:pPr>
-            <a:r>
-              <a:rPr lang="en-US" sz="1200" dirty="0">
+          <p:cNvPr id="7" name="Text 4"/>
+          <p:cNvSpPr/>
+          <p:nvPr/>
+        </p:nvSpPr>
+        <p:spPr>
+          <a:xfrm>
+            <a:off x="749808" y="4023360"/>
+            <a:ext cx="7827264" cy="402336"/>
+          </a:xfrm>
+          <a:prstGeom prst="rect">
+            <a:avLst/>
+          </a:prstGeom>
+          <a:noFill/>
+          <a:ln/>
+        </p:spPr>
+        <p:txBody>
+          <a:bodyPr wrap="square" lIns="0" tIns="0" rIns="0" bIns="0" rtlCol="0" anchor="ctr"/>
+          <a:lstStyle/>
+          <a:p>
+            <a:pPr indent="0" marL="0">
+              <a:buNone/>
+            </a:pPr>
+            <a:r>
+              <a:rPr lang="en-US" sz="1200" b="1" dirty="0">
                 <a:solidFill>
                   <a:srgbClr val="434A63"/>
                 </a:solidFill>
@@ -9667,7 +10561,7 @@
                 <a:ea typeface="Arial" pitchFamily="34" charset="-122"/>
                 <a:cs typeface="Arial" pitchFamily="34" charset="-120"/>
               </a:rPr>
-              <a:t>jacobmenge.github.io/kurs-unterlagen/docker/installation/</a:t>
+              <a:t>Ohne -p bleibt der Container für sich. Erst die Weiterleitung macht ihn von außen erreichbar.</a:t>
             </a:r>
             <a:endParaRPr lang="en-US" sz="1200" dirty="0"/>
           </a:p>
@@ -9675,248 +10569,7 @@
       </p:sp>
       <p:sp>
         <p:nvSpPr>
-          <p:cNvPr id="10" name="Text 8"/>
-          <p:cNvSpPr/>
-          <p:nvPr/>
-        </p:nvSpPr>
-        <p:spPr>
-          <a:xfrm>
-            <a:off x="566928" y="2834640"/>
-            <a:ext cx="8010144" cy="1188720"/>
-          </a:xfrm>
-          <a:prstGeom prst="rect">
-            <a:avLst/>
-          </a:prstGeom>
-          <a:noFill/>
-          <a:ln/>
-        </p:spPr>
-        <p:txBody>
-          <a:bodyPr wrap="square" lIns="0" tIns="0" rIns="0" bIns="0" rtlCol="0" anchor="t"/>
-          <a:lstStyle/>
-          <a:p>
-            <a:pPr indent="0" marL="0">
-              <a:lnSpc>
-                <a:spcPct val="92000"/>
-              </a:lnSpc>
-              <a:buNone/>
-            </a:pPr>
-            <a:r>
-              <a:rPr lang="en-US" sz="1150" b="1" dirty="0">
-                <a:solidFill>
-                  <a:srgbClr val="3843AF"/>
-                </a:solidFill>
-                <a:latin typeface="Arial" pitchFamily="34" charset="0"/>
-                <a:ea typeface="Arial" pitchFamily="34" charset="-122"/>
-                <a:cs typeface="Arial" pitchFamily="34" charset="-120"/>
-              </a:rPr>
-              <a:t>▸   </a:t>
-            </a:r>
-            <a:pPr indent="0" marL="0">
-              <a:lnSpc>
-                <a:spcPct val="92000"/>
-              </a:lnSpc>
-              <a:spcAft>
-                <a:spcPts val="900"/>
-              </a:spcAft>
-              <a:buNone/>
-            </a:pPr>
-            <a:r>
-              <a:rPr lang="en-US" sz="1150" dirty="0">
-                <a:solidFill>
-                  <a:srgbClr val="434A63"/>
-                </a:solidFill>
-                <a:latin typeface="Arial" pitchFamily="34" charset="0"/>
-                <a:ea typeface="Arial" pitchFamily="34" charset="-122"/>
-                <a:cs typeface="Arial" pitchFamily="34" charset="-120"/>
-              </a:rPr>
-              <a:t>Windows: Docker Desktop lädt WSL2 als Unterbau – ein Neustart kann dazugehören.</a:t>
-            </a:r>
-            <a:endParaRPr lang="en-US" sz="1150" dirty="0"/>
-          </a:p>
-          <a:p>
-            <a:pPr indent="0" marL="0">
-              <a:lnSpc>
-                <a:spcPct val="92000"/>
-              </a:lnSpc>
-              <a:buNone/>
-            </a:pPr>
-            <a:r>
-              <a:rPr lang="en-US" sz="1150" b="1" dirty="0">
-                <a:solidFill>
-                  <a:srgbClr val="3843AF"/>
-                </a:solidFill>
-                <a:latin typeface="Arial" pitchFamily="34" charset="0"/>
-                <a:ea typeface="Arial" pitchFamily="34" charset="-122"/>
-                <a:cs typeface="Arial" pitchFamily="34" charset="-120"/>
-              </a:rPr>
-              <a:t>▸   </a:t>
-            </a:r>
-            <a:pPr indent="0" marL="0">
-              <a:lnSpc>
-                <a:spcPct val="92000"/>
-              </a:lnSpc>
-              <a:spcAft>
-                <a:spcPts val="900"/>
-              </a:spcAft>
-              <a:buNone/>
-            </a:pPr>
-            <a:r>
-              <a:rPr lang="en-US" sz="1150" dirty="0">
-                <a:solidFill>
-                  <a:srgbClr val="434A63"/>
-                </a:solidFill>
-                <a:latin typeface="Arial" pitchFamily="34" charset="0"/>
-                <a:ea typeface="Arial" pitchFamily="34" charset="-122"/>
-                <a:cs typeface="Arial" pitchFamily="34" charset="-120"/>
-              </a:rPr>
-              <a:t>macOS: Installer ziehen, starten – fertig.</a:t>
-            </a:r>
-            <a:endParaRPr lang="en-US" sz="1150" dirty="0"/>
-          </a:p>
-          <a:p>
-            <a:pPr indent="0" marL="0">
-              <a:lnSpc>
-                <a:spcPct val="92000"/>
-              </a:lnSpc>
-              <a:buNone/>
-            </a:pPr>
-            <a:r>
-              <a:rPr lang="en-US" sz="1150" b="1" dirty="0">
-                <a:solidFill>
-                  <a:srgbClr val="3843AF"/>
-                </a:solidFill>
-                <a:latin typeface="Arial" pitchFamily="34" charset="0"/>
-                <a:ea typeface="Arial" pitchFamily="34" charset="-122"/>
-                <a:cs typeface="Arial" pitchFamily="34" charset="-120"/>
-              </a:rPr>
-              <a:t>▸   </a:t>
-            </a:r>
-            <a:pPr indent="0" marL="0">
-              <a:lnSpc>
-                <a:spcPct val="92000"/>
-              </a:lnSpc>
-              <a:spcAft>
-                <a:spcPts val="900"/>
-              </a:spcAft>
-              <a:buNone/>
-            </a:pPr>
-            <a:r>
-              <a:rPr lang="en-US" sz="1150" dirty="0">
-                <a:solidFill>
-                  <a:srgbClr val="434A63"/>
-                </a:solidFill>
-                <a:latin typeface="Arial" pitchFamily="34" charset="0"/>
-                <a:ea typeface="Arial" pitchFamily="34" charset="-122"/>
-                <a:cs typeface="Arial" pitchFamily="34" charset="-120"/>
-              </a:rPr>
-              <a:t>Linux: Docker Engine reicht („docker“ aus der Paketverwaltung).</a:t>
-            </a:r>
-            <a:endParaRPr lang="en-US" sz="1150" dirty="0"/>
-          </a:p>
-          <a:p>
-            <a:pPr indent="0" marL="0">
-              <a:lnSpc>
-                <a:spcPct val="92000"/>
-              </a:lnSpc>
-              <a:buNone/>
-            </a:pPr>
-            <a:r>
-              <a:rPr lang="en-US" sz="1150" b="1" dirty="0">
-                <a:solidFill>
-                  <a:srgbClr val="3843AF"/>
-                </a:solidFill>
-                <a:latin typeface="Arial" pitchFamily="34" charset="0"/>
-                <a:ea typeface="Arial" pitchFamily="34" charset="-122"/>
-                <a:cs typeface="Arial" pitchFamily="34" charset="-120"/>
-              </a:rPr>
-              <a:t>▸   </a:t>
-            </a:r>
-            <a:pPr indent="0" marL="0">
-              <a:lnSpc>
-                <a:spcPct val="92000"/>
-              </a:lnSpc>
-              <a:spcAft>
-                <a:spcPts val="900"/>
-              </a:spcAft>
-              <a:buNone/>
-            </a:pPr>
-            <a:r>
-              <a:rPr lang="en-US" sz="1150" dirty="0">
-                <a:solidFill>
-                  <a:srgbClr val="434A63"/>
-                </a:solidFill>
-                <a:latin typeface="Arial" pitchFamily="34" charset="0"/>
-                <a:ea typeface="Arial" pitchFamily="34" charset="-122"/>
-                <a:cs typeface="Arial" pitchFamily="34" charset="-120"/>
-              </a:rPr>
-              <a:t>Test bei allen gleich: „docker version“ meldet Client UND Server.</a:t>
-            </a:r>
-            <a:endParaRPr lang="en-US" sz="1150" dirty="0"/>
-          </a:p>
-        </p:txBody>
-      </p:sp>
-      <p:sp>
-        <p:nvSpPr>
-          <p:cNvPr id="11" name="Shape 9"/>
-          <p:cNvSpPr/>
-          <p:nvPr/>
-        </p:nvSpPr>
-        <p:spPr>
-          <a:xfrm>
-            <a:off x="566928" y="4206240"/>
-            <a:ext cx="32004" cy="256032"/>
-          </a:xfrm>
-          <a:prstGeom prst="rect">
-            <a:avLst/>
-          </a:prstGeom>
-          <a:solidFill>
-            <a:srgbClr val="3843AF"/>
-          </a:solidFill>
-          <a:ln/>
-        </p:spPr>
-      </p:sp>
-      <p:sp>
-        <p:nvSpPr>
-          <p:cNvPr id="12" name="Text 10"/>
-          <p:cNvSpPr/>
-          <p:nvPr/>
-        </p:nvSpPr>
-        <p:spPr>
-          <a:xfrm>
-            <a:off x="749808" y="4160520"/>
-            <a:ext cx="7827264" cy="402336"/>
-          </a:xfrm>
-          <a:prstGeom prst="rect">
-            <a:avLst/>
-          </a:prstGeom>
-          <a:noFill/>
-          <a:ln/>
-        </p:spPr>
-        <p:txBody>
-          <a:bodyPr wrap="square" lIns="0" tIns="0" rIns="0" bIns="0" rtlCol="0" anchor="ctr"/>
-          <a:lstStyle/>
-          <a:p>
-            <a:pPr indent="0" marL="0">
-              <a:buNone/>
-            </a:pPr>
-            <a:r>
-              <a:rPr lang="en-US" sz="1200" b="1" dirty="0">
-                <a:solidFill>
-                  <a:srgbClr val="434A63"/>
-                </a:solidFill>
-                <a:latin typeface="Arial" pitchFamily="34" charset="0"/>
-                <a:ea typeface="Arial" pitchFamily="34" charset="-122"/>
-                <a:cs typeface="Arial" pitchFamily="34" charset="-120"/>
-              </a:rPr>
-              <a:t>Kleiner Gruß von Montag: Docker Desktop startet dafür intern eine eigene VM – Typ 2, ihr wisst Bescheid.</a:t>
-            </a:r>
-            <a:endParaRPr lang="en-US" sz="1200" dirty="0"/>
-          </a:p>
-        </p:txBody>
-      </p:sp>
-      <p:sp>
-        <p:nvSpPr>
-          <p:cNvPr id="13" name="Shape 11"/>
+          <p:cNvPr id="8" name="Shape 5"/>
           <p:cNvSpPr/>
           <p:nvPr/>
         </p:nvSpPr>
@@ -9939,7 +10592,7 @@
       </p:sp>
       <p:sp>
         <p:nvSpPr>
-          <p:cNvPr id="14" name="Text 12"/>
+          <p:cNvPr id="9" name="Text 6"/>
           <p:cNvSpPr/>
           <p:nvPr/>
         </p:nvSpPr>
@@ -9970,7 +10623,7 @@
                 <a:ea typeface="Arial" pitchFamily="34" charset="-122"/>
                 <a:cs typeface="Arial" pitchFamily="34" charset="-120"/>
               </a:rPr>
-              <a:t>Werkzeug</a:t>
+              <a:t>Warum Docker?</a:t>
             </a:r>
             <a:endParaRPr lang="en-US" sz="1050" dirty="0"/>
           </a:p>
@@ -9978,7 +10631,7 @@
       </p:sp>
       <p:sp>
         <p:nvSpPr>
-          <p:cNvPr id="15" name="Text 13"/>
+          <p:cNvPr id="10" name="Text 7"/>
           <p:cNvSpPr/>
           <p:nvPr/>
         </p:nvSpPr>
@@ -10009,7 +10662,7 @@
                 <a:ea typeface="Arial" pitchFamily="34" charset="-122"/>
                 <a:cs typeface="Arial" pitchFamily="34" charset="-120"/>
               </a:rPr>
-              <a:t>7/12</a:t>
+              <a:t>7/15</a:t>
             </a:r>
             <a:endParaRPr lang="en-US" sz="1050" dirty="0"/>
           </a:p>

--- a/folien/05-docker-einfuehrung.pptx
+++ b/folien/05-docker-einfuehrung.pptx
@@ -24,9 +24,12 @@
     <p:sldId id="272" r:id="rId18"/>
     <p:sldId id="273" r:id="rId19"/>
     <p:sldId id="274" r:id="rId20"/>
+    <p:sldId id="275" r:id="rId21"/>
+    <p:sldId id="276" r:id="rId22"/>
+    <p:sldId id="277" r:id="rId23"/>
   </p:sldIdLst>
   <p:notesMasterIdLst>
-    <p:notesMasterId r:id="rId21"/>
+    <p:notesMasterId r:id="rId24"/>
   </p:notesMasterIdLst>
   <p:sldSz cx="9144000" cy="5143500"/>
   <p:notesSz cx="5143500" cy="9144000"/>
@@ -1512,6 +1515,270 @@
             <a:fld id="{F7021451-1387-4CA6-816F-3879F97B5CBC}" type="slidenum">
               <a:rPr lang="en-US"/>
               <a:t>2</a:t>
+            </a:fld>
+            <a:endParaRPr lang="en-US"/>
+          </a:p>
+        </p:txBody>
+      </p:sp>
+    </p:spTree>
+    <p:extLst>
+      <p:ext uri="{BB962C8B-B14F-4D97-AF65-F5344CB8AC3E}">
+        <p14:creationId xmlns:p14="http://schemas.microsoft.com/office/powerpoint/2010/main" val="1024086991"/>
+      </p:ext>
+    </p:extLst>
+  </p:cSld>
+  <p:clrMapOvr>
+    <a:masterClrMapping/>
+  </p:clrMapOvr>
+</p:notes>
+</file>
+
+<file path=ppt/notesSlides/notesSlide20.xml><?xml version="1.0" encoding="utf-8"?>
+<p:notes xmlns:a="http://schemas.openxmlformats.org/drawingml/2006/main" xmlns:r="http://schemas.openxmlformats.org/officeDocument/2006/relationships" xmlns:p="http://schemas.openxmlformats.org/presentationml/2006/main">
+  <p:cSld>
+    <p:spTree>
+      <p:nvGrpSpPr>
+        <p:cNvPr id="1" name=""/>
+        <p:cNvGrpSpPr/>
+        <p:nvPr/>
+      </p:nvGrpSpPr>
+      <p:grpSpPr>
+        <a:xfrm>
+          <a:off x="0" y="0"/>
+          <a:ext cx="0" cy="0"/>
+          <a:chOff x="0" y="0"/>
+          <a:chExt cx="0" cy="0"/>
+        </a:xfrm>
+      </p:grpSpPr>
+      <p:sp>
+        <p:nvSpPr>
+          <p:cNvPr id="2" name="Slide Image Placeholder 1"/>
+          <p:cNvSpPr>
+            <a:spLocks noGrp="1" noRot="1" noChangeAspect="1"/>
+          </p:cNvSpPr>
+          <p:nvPr>
+            <p:ph type="sldImg"/>
+          </p:nvPr>
+        </p:nvSpPr>
+        <p:spPr/>
+      </p:sp>
+      <p:sp>
+        <p:nvSpPr>
+          <p:cNvPr id="3" name="Notes Placeholder 2"/>
+          <p:cNvSpPr>
+            <a:spLocks noGrp="1"/>
+          </p:cNvSpPr>
+          <p:nvPr>
+            <p:ph type="body" idx="1"/>
+          </p:nvPr>
+        </p:nvSpPr>
+        <p:spPr/>
+        <p:txBody>
+          <a:bodyPr/>
+          <a:lstStyle/>
+          <a:p>
+            <a:r>
+              <a:rPr lang="en-US" dirty="0"/>
+              <a:t/>
+            </a:r>
+            <a:endParaRPr lang="en-US" dirty="0"/>
+          </a:p>
+        </p:txBody>
+      </p:sp>
+      <p:sp>
+        <p:nvSpPr>
+          <p:cNvPr id="4" name="Slide Number Placeholder 3"/>
+          <p:cNvSpPr>
+            <a:spLocks noGrp="1"/>
+          </p:cNvSpPr>
+          <p:nvPr>
+            <p:ph type="sldNum" sz="quarter" idx="10"/>
+          </p:nvPr>
+        </p:nvSpPr>
+        <p:spPr/>
+        <p:txBody>
+          <a:bodyPr/>
+          <a:lstStyle/>
+          <a:p>
+            <a:fld id="{F7021451-1387-4CA6-816F-3879F97B5CBC}" type="slidenum">
+              <a:rPr lang="en-US"/>
+              <a:t>20</a:t>
+            </a:fld>
+            <a:endParaRPr lang="en-US"/>
+          </a:p>
+        </p:txBody>
+      </p:sp>
+    </p:spTree>
+    <p:extLst>
+      <p:ext uri="{BB962C8B-B14F-4D97-AF65-F5344CB8AC3E}">
+        <p14:creationId xmlns:p14="http://schemas.microsoft.com/office/powerpoint/2010/main" val="1024086991"/>
+      </p:ext>
+    </p:extLst>
+  </p:cSld>
+  <p:clrMapOvr>
+    <a:masterClrMapping/>
+  </p:clrMapOvr>
+</p:notes>
+</file>
+
+<file path=ppt/notesSlides/notesSlide21.xml><?xml version="1.0" encoding="utf-8"?>
+<p:notes xmlns:a="http://schemas.openxmlformats.org/drawingml/2006/main" xmlns:r="http://schemas.openxmlformats.org/officeDocument/2006/relationships" xmlns:p="http://schemas.openxmlformats.org/presentationml/2006/main">
+  <p:cSld>
+    <p:spTree>
+      <p:nvGrpSpPr>
+        <p:cNvPr id="1" name=""/>
+        <p:cNvGrpSpPr/>
+        <p:nvPr/>
+      </p:nvGrpSpPr>
+      <p:grpSpPr>
+        <a:xfrm>
+          <a:off x="0" y="0"/>
+          <a:ext cx="0" cy="0"/>
+          <a:chOff x="0" y="0"/>
+          <a:chExt cx="0" cy="0"/>
+        </a:xfrm>
+      </p:grpSpPr>
+      <p:sp>
+        <p:nvSpPr>
+          <p:cNvPr id="2" name="Slide Image Placeholder 1"/>
+          <p:cNvSpPr>
+            <a:spLocks noGrp="1" noRot="1" noChangeAspect="1"/>
+          </p:cNvSpPr>
+          <p:nvPr>
+            <p:ph type="sldImg"/>
+          </p:nvPr>
+        </p:nvSpPr>
+        <p:spPr/>
+      </p:sp>
+      <p:sp>
+        <p:nvSpPr>
+          <p:cNvPr id="3" name="Notes Placeholder 2"/>
+          <p:cNvSpPr>
+            <a:spLocks noGrp="1"/>
+          </p:cNvSpPr>
+          <p:nvPr>
+            <p:ph type="body" idx="1"/>
+          </p:nvPr>
+        </p:nvSpPr>
+        <p:spPr/>
+        <p:txBody>
+          <a:bodyPr/>
+          <a:lstStyle/>
+          <a:p>
+            <a:r>
+              <a:rPr lang="en-US" dirty="0"/>
+              <a:t/>
+            </a:r>
+            <a:endParaRPr lang="en-US" dirty="0"/>
+          </a:p>
+        </p:txBody>
+      </p:sp>
+      <p:sp>
+        <p:nvSpPr>
+          <p:cNvPr id="4" name="Slide Number Placeholder 3"/>
+          <p:cNvSpPr>
+            <a:spLocks noGrp="1"/>
+          </p:cNvSpPr>
+          <p:nvPr>
+            <p:ph type="sldNum" sz="quarter" idx="10"/>
+          </p:nvPr>
+        </p:nvSpPr>
+        <p:spPr/>
+        <p:txBody>
+          <a:bodyPr/>
+          <a:lstStyle/>
+          <a:p>
+            <a:fld id="{F7021451-1387-4CA6-816F-3879F97B5CBC}" type="slidenum">
+              <a:rPr lang="en-US"/>
+              <a:t>21</a:t>
+            </a:fld>
+            <a:endParaRPr lang="en-US"/>
+          </a:p>
+        </p:txBody>
+      </p:sp>
+    </p:spTree>
+    <p:extLst>
+      <p:ext uri="{BB962C8B-B14F-4D97-AF65-F5344CB8AC3E}">
+        <p14:creationId xmlns:p14="http://schemas.microsoft.com/office/powerpoint/2010/main" val="1024086991"/>
+      </p:ext>
+    </p:extLst>
+  </p:cSld>
+  <p:clrMapOvr>
+    <a:masterClrMapping/>
+  </p:clrMapOvr>
+</p:notes>
+</file>
+
+<file path=ppt/notesSlides/notesSlide22.xml><?xml version="1.0" encoding="utf-8"?>
+<p:notes xmlns:a="http://schemas.openxmlformats.org/drawingml/2006/main" xmlns:r="http://schemas.openxmlformats.org/officeDocument/2006/relationships" xmlns:p="http://schemas.openxmlformats.org/presentationml/2006/main">
+  <p:cSld>
+    <p:spTree>
+      <p:nvGrpSpPr>
+        <p:cNvPr id="1" name=""/>
+        <p:cNvGrpSpPr/>
+        <p:nvPr/>
+      </p:nvGrpSpPr>
+      <p:grpSpPr>
+        <a:xfrm>
+          <a:off x="0" y="0"/>
+          <a:ext cx="0" cy="0"/>
+          <a:chOff x="0" y="0"/>
+          <a:chExt cx="0" cy="0"/>
+        </a:xfrm>
+      </p:grpSpPr>
+      <p:sp>
+        <p:nvSpPr>
+          <p:cNvPr id="2" name="Slide Image Placeholder 1"/>
+          <p:cNvSpPr>
+            <a:spLocks noGrp="1" noRot="1" noChangeAspect="1"/>
+          </p:cNvSpPr>
+          <p:nvPr>
+            <p:ph type="sldImg"/>
+          </p:nvPr>
+        </p:nvSpPr>
+        <p:spPr/>
+      </p:sp>
+      <p:sp>
+        <p:nvSpPr>
+          <p:cNvPr id="3" name="Notes Placeholder 2"/>
+          <p:cNvSpPr>
+            <a:spLocks noGrp="1"/>
+          </p:cNvSpPr>
+          <p:nvPr>
+            <p:ph type="body" idx="1"/>
+          </p:nvPr>
+        </p:nvSpPr>
+        <p:spPr/>
+        <p:txBody>
+          <a:bodyPr/>
+          <a:lstStyle/>
+          <a:p>
+            <a:r>
+              <a:rPr lang="en-US" dirty="0"/>
+              <a:t/>
+            </a:r>
+            <a:endParaRPr lang="en-US" dirty="0"/>
+          </a:p>
+        </p:txBody>
+      </p:sp>
+      <p:sp>
+        <p:nvSpPr>
+          <p:cNvPr id="4" name="Slide Number Placeholder 3"/>
+          <p:cNvSpPr>
+            <a:spLocks noGrp="1"/>
+          </p:cNvSpPr>
+          <p:nvPr>
+            <p:ph type="sldNum" sz="quarter" idx="10"/>
+          </p:nvPr>
+        </p:nvSpPr>
+        <p:spPr/>
+        <p:txBody>
+          <a:bodyPr/>
+          <a:lstStyle/>
+          <a:p>
+            <a:fld id="{F7021451-1387-4CA6-816F-3879F97B5CBC}" type="slidenum">
+              <a:rPr lang="en-US"/>
+              <a:t>22</a:t>
             </a:fld>
             <a:endParaRPr lang="en-US"/>
           </a:p>
@@ -2593,7 +2860,7 @@
                 <a:ea typeface="Arial" pitchFamily="34" charset="-122"/>
                 <a:cs typeface="Arial" pitchFamily="34" charset="-120"/>
               </a:rPr>
-              <a:t>Docker – Einführung</a:t>
+              <a:t>Docker Grundlagen</a:t>
             </a:r>
             <a:endParaRPr lang="en-US" sz="4200" dirty="0"/>
           </a:p>
@@ -2632,7 +2899,7 @@
                 <a:ea typeface="Arial" pitchFamily="34" charset="-122"/>
                 <a:cs typeface="Arial" pitchFamily="34" charset="-120"/>
               </a:rPr>
-              <a:t>Montag ein ganzer Rechner aus Software – heute nur noch die Anwendung</a:t>
+              <a:t>Montag ein ganzer Rechner aus Software, heute nur noch die Anwendung</a:t>
             </a:r>
             <a:endParaRPr lang="en-US" sz="1700" dirty="0"/>
           </a:p>
@@ -2694,7 +2961,7 @@
                 <a:ea typeface="Arial" pitchFamily="34" charset="-122"/>
                 <a:cs typeface="Arial" pitchFamily="34" charset="-120"/>
               </a:rPr>
-              <a:t>Mittwoch, 9. September 2026 · 18:00–21:00 Uhr</a:t>
+              <a:t>Mittwoch, 9. September 2026 · 18:00 bis 21:00 Uhr</a:t>
             </a:r>
             <a:endParaRPr lang="en-US" sz="1100" dirty="0"/>
           </a:p>
@@ -2785,7 +3052,7 @@
                 <a:ea typeface="Arial" pitchFamily="34" charset="-122"/>
                 <a:cs typeface="Arial" pitchFamily="34" charset="-120"/>
               </a:rPr>
-              <a:t>DER LEBENSZYKLUS</a:t>
+              <a:t>DIE DREI GRUNDBEGRIFFE</a:t>
             </a:r>
             <a:endParaRPr lang="en-US" sz="1150" dirty="0"/>
           </a:p>
@@ -2824,7 +3091,7 @@
                 <a:ea typeface="Arial" pitchFamily="34" charset="-122"/>
                 <a:cs typeface="Arial" pitchFamily="34" charset="-120"/>
               </a:rPr>
-              <a:t>Wo ist mein Container hin?</a:t>
+              <a:t>Image, Container, Registry</a:t>
             </a:r>
             <a:endParaRPr lang="en-US" sz="2600" dirty="0"/>
           </a:p>
@@ -2832,7 +3099,7 @@
       </p:sp>
       <p:pic>
         <p:nvPicPr>
-          <p:cNvPr id="5" name="Image 0" descr="/Users/jacobmenge/Desktop/kurs-26.2b-orga/folienwerkstatt/assets/diagramme/container-leben.png">    </p:cNvPr>
+          <p:cNvPr id="5" name="Image 0" descr="/Users/jacobmenge/Desktop/kurs-26.2b-orga/folienwerkstatt/assets/diagramme/image-container.png">    </p:cNvPr>
           <p:cNvPicPr>
             <a:picLocks noChangeAspect="1"/>
           </p:cNvPicPr>
@@ -2846,8 +3113,8 @@
         </p:blipFill>
         <p:spPr>
           <a:xfrm>
-            <a:off x="566928" y="1554480"/>
-            <a:ext cx="8010144" cy="2194560"/>
+            <a:off x="566928" y="1481328"/>
+            <a:ext cx="8010144" cy="2340864"/>
           </a:xfrm>
           <a:prstGeom prst="rect">
             <a:avLst/>
@@ -2862,7 +3129,7 @@
         </p:nvSpPr>
         <p:spPr>
           <a:xfrm>
-            <a:off x="566928" y="4023360"/>
+            <a:off x="566928" y="4069080"/>
             <a:ext cx="32004" cy="256032"/>
           </a:xfrm>
           <a:prstGeom prst="rect">
@@ -2882,7 +3149,7 @@
         </p:nvSpPr>
         <p:spPr>
           <a:xfrm>
-            <a:off x="749808" y="3977640"/>
+            <a:off x="749808" y="4023360"/>
             <a:ext cx="7827264" cy="402336"/>
           </a:xfrm>
           <a:prstGeom prst="rect">
@@ -2907,7 +3174,7 @@
                 <a:ea typeface="Arial" pitchFamily="34" charset="-122"/>
                 <a:cs typeface="Arial" pitchFamily="34" charset="-120"/>
               </a:rPr>
-              <a:t>Diese Frage kommt gleich in der Übung garantiert – jetzt kennt ihr die Antwort schon.</a:t>
+              <a:t>Backform und Kuchen: Das Image ist der unveränderliche Bauplan, jeder Container eine laufende Instanz davon.</a:t>
             </a:r>
             <a:endParaRPr lang="en-US" sz="1200" dirty="0"/>
           </a:p>
@@ -3008,7 +3275,7 @@
                 <a:ea typeface="Arial" pitchFamily="34" charset="-122"/>
                 <a:cs typeface="Arial" pitchFamily="34" charset="-120"/>
               </a:rPr>
-              <a:t>8/15</a:t>
+              <a:t>8/18</a:t>
             </a:r>
             <a:endParaRPr lang="en-US" sz="1050" dirty="0"/>
           </a:p>
@@ -3099,7 +3366,7 @@
                 <a:ea typeface="Arial" pitchFamily="34" charset="-122"/>
                 <a:cs typeface="Arial" pitchFamily="34" charset="-120"/>
               </a:rPr>
-              <a:t>DAS DOCKERFILE</a:t>
+              <a:t>EIN BEFEHL, VIER SCHRITTE</a:t>
             </a:r>
             <a:endParaRPr lang="en-US" sz="1150" dirty="0"/>
           </a:p>
@@ -3138,7 +3405,7 @@
                 <a:ea typeface="Arial" pitchFamily="34" charset="-122"/>
                 <a:cs typeface="Arial" pitchFamily="34" charset="-120"/>
               </a:rPr>
-              <a:t>Ein eigenes Image bauen</a:t>
+              <a:t>Was bei docker run passiert</a:t>
             </a:r>
             <a:endParaRPr lang="en-US" sz="2600" dirty="0"/>
           </a:p>
@@ -3146,7 +3413,7 @@
       </p:sp>
       <p:pic>
         <p:nvPicPr>
-          <p:cNvPr id="5" name="Image 0" descr="/Users/jacobmenge/Desktop/kurs-26.2b-orga/folienwerkstatt/assets/diagramme/dockerfile-weg.png">    </p:cNvPr>
+          <p:cNvPr id="5" name="Image 0" descr="/Users/jacobmenge/Desktop/kurs-26.2b-orga/folienwerkstatt/assets/diagramme/docker-run.png">    </p:cNvPr>
           <p:cNvPicPr>
             <a:picLocks noChangeAspect="1"/>
           </p:cNvPicPr>
@@ -3161,7 +3428,7 @@
         <p:spPr>
           <a:xfrm>
             <a:off x="566928" y="1463040"/>
-            <a:ext cx="8010144" cy="2450592"/>
+            <a:ext cx="8010144" cy="2157984"/>
           </a:xfrm>
           <a:prstGeom prst="rect">
             <a:avLst/>
@@ -3176,7 +3443,7 @@
         </p:nvSpPr>
         <p:spPr>
           <a:xfrm>
-            <a:off x="566928" y="4114800"/>
+            <a:off x="566928" y="3886200"/>
             <a:ext cx="32004" cy="256032"/>
           </a:xfrm>
           <a:prstGeom prst="rect">
@@ -3196,7 +3463,7 @@
         </p:nvSpPr>
         <p:spPr>
           <a:xfrm>
-            <a:off x="749808" y="4069080"/>
+            <a:off x="749808" y="3840480"/>
             <a:ext cx="7827264" cy="402336"/>
           </a:xfrm>
           <a:prstGeom prst="rect">
@@ -3221,7 +3488,7 @@
                 <a:ea typeface="Arial" pitchFamily="34" charset="-122"/>
                 <a:cs typeface="Arial" pitchFamily="34" charset="-120"/>
               </a:rPr>
-              <a:t>Das Dockerfile ist der Bauplan für euren Bauplan – nur damit wird aus fremden Images etwas Eigenes.</a:t>
+              <a:t>Genau diesen Befehl tippt ihr nach der Pause als Erstes. Dann seht ihr alle vier Schritte live.</a:t>
             </a:r>
             <a:endParaRPr lang="en-US" sz="1200" dirty="0"/>
           </a:p>
@@ -3322,7 +3589,7 @@
                 <a:ea typeface="Arial" pitchFamily="34" charset="-122"/>
                 <a:cs typeface="Arial" pitchFamily="34" charset="-120"/>
               </a:rPr>
-              <a:t>9/15</a:t>
+              <a:t>9/18</a:t>
             </a:r>
             <a:endParaRPr lang="en-US" sz="1050" dirty="0"/>
           </a:p>
@@ -3375,7 +3642,7 @@
             <a:avLst/>
           </a:prstGeom>
           <a:solidFill>
-            <a:srgbClr val="3843AF"/>
+            <a:srgbClr val="0F7C86"/>
           </a:solidFill>
           <a:ln/>
         </p:spPr>
@@ -3407,13 +3674,13 @@
             <a:r>
               <a:rPr lang="en-US" sz="1150" b="1" spc="180" kern="0" dirty="0">
                 <a:solidFill>
-                  <a:srgbClr val="3843AF"/>
-                </a:solidFill>
-                <a:latin typeface="Arial" pitchFamily="34" charset="0"/>
-                <a:ea typeface="Arial" pitchFamily="34" charset="-122"/>
-                <a:cs typeface="Arial" pitchFamily="34" charset="-120"/>
-              </a:rPr>
-              <a:t>ALLE ZUSAMMEN, JETZT</a:t>
+                  <a:srgbClr val="0F7C86"/>
+                </a:solidFill>
+                <a:latin typeface="Arial" pitchFamily="34" charset="0"/>
+                <a:ea typeface="Arial" pitchFamily="34" charset="-122"/>
+                <a:cs typeface="Arial" pitchFamily="34" charset="-120"/>
+              </a:rPr>
+              <a:t>PORT-MAPPING</a:t>
             </a:r>
             <a:endParaRPr lang="en-US" sz="1150" dirty="0"/>
           </a:p>
@@ -3452,159 +3719,82 @@
                 <a:ea typeface="Arial" pitchFamily="34" charset="-122"/>
                 <a:cs typeface="Arial" pitchFamily="34" charset="-120"/>
               </a:rPr>
-              <a:t>Docker Desktop einrichten – gemeinsam</a:t>
+              <a:t>Wie kommt der Container in den Browser?</a:t>
             </a:r>
             <a:endParaRPr lang="en-US" sz="2600" dirty="0"/>
           </a:p>
         </p:txBody>
       </p:sp>
-      <p:sp>
-        <p:nvSpPr>
-          <p:cNvPr id="5" name="Text 3"/>
-          <p:cNvSpPr/>
-          <p:nvPr/>
-        </p:nvSpPr>
-        <p:spPr>
-          <a:xfrm>
-            <a:off x="566928" y="1444752"/>
-            <a:ext cx="8010144" cy="274320"/>
-          </a:xfrm>
-          <a:prstGeom prst="rect">
-            <a:avLst/>
-          </a:prstGeom>
-          <a:noFill/>
-          <a:ln/>
-        </p:spPr>
-        <p:txBody>
-          <a:bodyPr wrap="square" lIns="0" tIns="0" rIns="0" bIns="0" rtlCol="0" anchor="t"/>
-          <a:lstStyle/>
-          <a:p>
-            <a:pPr indent="0" marL="0">
-              <a:buNone/>
-            </a:pPr>
-            <a:r>
-              <a:rPr lang="en-US" sz="1300" dirty="0">
-                <a:solidFill>
-                  <a:srgbClr val="5C6377"/>
-                </a:solidFill>
-                <a:latin typeface="Arial" pitchFamily="34" charset="0"/>
-                <a:ea typeface="Arial" pitchFamily="34" charset="-122"/>
-                <a:cs typeface="Arial" pitchFamily="34" charset="-120"/>
-              </a:rPr>
-              <a:t>Wir installieren jetzt gemeinsam – die Anleitung führt euch je Betriebssystem durch:</a:t>
-            </a:r>
-            <a:endParaRPr lang="en-US" sz="1300" dirty="0"/>
-          </a:p>
-        </p:txBody>
-      </p:sp>
-      <p:sp>
-        <p:nvSpPr>
-          <p:cNvPr id="6" name="Shape 4"/>
-          <p:cNvSpPr/>
-          <p:nvPr/>
-        </p:nvSpPr>
-        <p:spPr>
-          <a:xfrm>
-            <a:off x="566928" y="1920240"/>
-            <a:ext cx="8010144" cy="713232"/>
+      <p:pic>
+        <p:nvPicPr>
+          <p:cNvPr id="5" name="Image 0" descr="/Users/jacobmenge/Desktop/kurs-26.2b-orga/folienwerkstatt/assets/diagramme/port-mapping.png">    </p:cNvPr>
+          <p:cNvPicPr>
+            <a:picLocks noChangeAspect="1"/>
+          </p:cNvPicPr>
+          <p:nvPr/>
+        </p:nvPicPr>
+        <p:blipFill>
+          <a:blip r:embed="rId1"/>
+          <a:stretch>
+            <a:fillRect/>
+          </a:stretch>
+        </p:blipFill>
+        <p:spPr>
+          <a:xfrm>
+            <a:off x="566928" y="1517904"/>
+            <a:ext cx="8010144" cy="2286000"/>
+          </a:xfrm>
+          <a:prstGeom prst="rect">
+            <a:avLst/>
+          </a:prstGeom>
+        </p:spPr>
+      </p:pic>
+      <p:sp>
+        <p:nvSpPr>
+          <p:cNvPr id="6" name="Shape 3"/>
+          <p:cNvSpPr/>
+          <p:nvPr/>
+        </p:nvSpPr>
+        <p:spPr>
+          <a:xfrm>
+            <a:off x="566928" y="4069080"/>
+            <a:ext cx="32004" cy="256032"/>
           </a:xfrm>
           <a:prstGeom prst="rect">
             <a:avLst/>
           </a:prstGeom>
           <a:solidFill>
-            <a:srgbClr val="EEF0FB"/>
+            <a:srgbClr val="0F7C86"/>
           </a:solidFill>
           <a:ln/>
         </p:spPr>
       </p:sp>
       <p:sp>
         <p:nvSpPr>
-          <p:cNvPr id="7" name="Shape 5"/>
-          <p:cNvSpPr/>
-          <p:nvPr/>
-        </p:nvSpPr>
-        <p:spPr>
-          <a:xfrm>
-            <a:off x="566928" y="1920240"/>
-            <a:ext cx="41148" cy="713232"/>
-          </a:xfrm>
-          <a:prstGeom prst="rect">
-            <a:avLst/>
-          </a:prstGeom>
-          <a:solidFill>
-            <a:srgbClr val="3843AF"/>
-          </a:solidFill>
-          <a:ln/>
-        </p:spPr>
-      </p:sp>
-      <p:sp>
-        <p:nvSpPr>
-          <p:cNvPr id="8" name="Text 6"/>
-          <p:cNvSpPr/>
-          <p:nvPr/>
-        </p:nvSpPr>
-        <p:spPr>
-          <a:xfrm>
-            <a:off x="804672" y="2066544"/>
-            <a:ext cx="7607808" cy="242062"/>
-          </a:xfrm>
-          <a:prstGeom prst="rect">
-            <a:avLst/>
-          </a:prstGeom>
-          <a:noFill/>
-          <a:ln/>
-        </p:spPr>
-        <p:txBody>
-          <a:bodyPr wrap="square" lIns="0" tIns="0" rIns="0" bIns="0" rtlCol="0" anchor="t"/>
-          <a:lstStyle/>
-          <a:p>
-            <a:pPr indent="0" marL="0">
-              <a:buNone/>
-            </a:pPr>
-            <a:r>
-              <a:rPr lang="en-US" sz="1300" b="1" dirty="0">
-                <a:solidFill>
-                  <a:srgbClr val="272E52"/>
-                </a:solidFill>
-                <a:latin typeface="Arial" pitchFamily="34" charset="0"/>
-                <a:ea typeface="Arial" pitchFamily="34" charset="-122"/>
-                <a:cs typeface="Arial" pitchFamily="34" charset="-120"/>
-              </a:rPr>
-              <a:t>Anleitung öffnen</a:t>
-            </a:r>
-            <a:endParaRPr lang="en-US" sz="1300" dirty="0"/>
-          </a:p>
-        </p:txBody>
-      </p:sp>
-      <p:sp>
-        <p:nvSpPr>
-          <p:cNvPr id="9" name="Text 7"/>
-          <p:cNvSpPr/>
-          <p:nvPr/>
-        </p:nvSpPr>
-        <p:spPr>
-          <a:xfrm>
-            <a:off x="804672" y="2354326"/>
-            <a:ext cx="7607808" cy="160274"/>
-          </a:xfrm>
-          <a:prstGeom prst="rect">
-            <a:avLst/>
-          </a:prstGeom>
-          <a:noFill/>
-          <a:ln/>
-        </p:spPr>
-        <p:txBody>
-          <a:bodyPr wrap="square" lIns="0" tIns="0" rIns="0" bIns="0" rtlCol="0" anchor="t"/>
-          <a:lstStyle/>
-          <a:p>
-            <a:pPr indent="0" marL="0">
-              <a:lnSpc>
-                <a:spcPct val="92000"/>
-              </a:lnSpc>
-              <a:buNone/>
-            </a:pPr>
-            <a:r>
-              <a:rPr lang="en-US" sz="1200" dirty="0">
+          <p:cNvPr id="7" name="Text 4"/>
+          <p:cNvSpPr/>
+          <p:nvPr/>
+        </p:nvSpPr>
+        <p:spPr>
+          <a:xfrm>
+            <a:off x="749808" y="4023360"/>
+            <a:ext cx="7827264" cy="402336"/>
+          </a:xfrm>
+          <a:prstGeom prst="rect">
+            <a:avLst/>
+          </a:prstGeom>
+          <a:noFill/>
+          <a:ln/>
+        </p:spPr>
+        <p:txBody>
+          <a:bodyPr wrap="square" lIns="0" tIns="0" rIns="0" bIns="0" rtlCol="0" anchor="ctr"/>
+          <a:lstStyle/>
+          <a:p>
+            <a:pPr indent="0" marL="0">
+              <a:buNone/>
+            </a:pPr>
+            <a:r>
+              <a:rPr lang="en-US" sz="1200" b="1" dirty="0">
                 <a:solidFill>
                   <a:srgbClr val="434A63"/>
                 </a:solidFill>
@@ -3612,7 +3802,7 @@
                 <a:ea typeface="Arial" pitchFamily="34" charset="-122"/>
                 <a:cs typeface="Arial" pitchFamily="34" charset="-120"/>
               </a:rPr>
-              <a:t>jacobmenge.github.io/kurs-unterlagen/docker/installation/</a:t>
+              <a:t>Ohne -p bleibt der Container für sich. Erst die Weiterleitung macht ihn von außen erreichbar.</a:t>
             </a:r>
             <a:endParaRPr lang="en-US" sz="1200" dirty="0"/>
           </a:p>
@@ -3620,248 +3810,7 @@
       </p:sp>
       <p:sp>
         <p:nvSpPr>
-          <p:cNvPr id="10" name="Text 8"/>
-          <p:cNvSpPr/>
-          <p:nvPr/>
-        </p:nvSpPr>
-        <p:spPr>
-          <a:xfrm>
-            <a:off x="566928" y="2834640"/>
-            <a:ext cx="8010144" cy="1188720"/>
-          </a:xfrm>
-          <a:prstGeom prst="rect">
-            <a:avLst/>
-          </a:prstGeom>
-          <a:noFill/>
-          <a:ln/>
-        </p:spPr>
-        <p:txBody>
-          <a:bodyPr wrap="square" lIns="0" tIns="0" rIns="0" bIns="0" rtlCol="0" anchor="t"/>
-          <a:lstStyle/>
-          <a:p>
-            <a:pPr indent="0" marL="0">
-              <a:lnSpc>
-                <a:spcPct val="92000"/>
-              </a:lnSpc>
-              <a:buNone/>
-            </a:pPr>
-            <a:r>
-              <a:rPr lang="en-US" sz="1150" b="1" dirty="0">
-                <a:solidFill>
-                  <a:srgbClr val="3843AF"/>
-                </a:solidFill>
-                <a:latin typeface="Arial" pitchFamily="34" charset="0"/>
-                <a:ea typeface="Arial" pitchFamily="34" charset="-122"/>
-                <a:cs typeface="Arial" pitchFamily="34" charset="-120"/>
-              </a:rPr>
-              <a:t>▸   </a:t>
-            </a:r>
-            <a:pPr indent="0" marL="0">
-              <a:lnSpc>
-                <a:spcPct val="92000"/>
-              </a:lnSpc>
-              <a:spcAft>
-                <a:spcPts val="900"/>
-              </a:spcAft>
-              <a:buNone/>
-            </a:pPr>
-            <a:r>
-              <a:rPr lang="en-US" sz="1150" dirty="0">
-                <a:solidFill>
-                  <a:srgbClr val="434A63"/>
-                </a:solidFill>
-                <a:latin typeface="Arial" pitchFamily="34" charset="0"/>
-                <a:ea typeface="Arial" pitchFamily="34" charset="-122"/>
-                <a:cs typeface="Arial" pitchFamily="34" charset="-120"/>
-              </a:rPr>
-              <a:t>Windows: Docker Desktop lädt WSL2 als Unterbau – ein Neustart kann dazugehören.</a:t>
-            </a:r>
-            <a:endParaRPr lang="en-US" sz="1150" dirty="0"/>
-          </a:p>
-          <a:p>
-            <a:pPr indent="0" marL="0">
-              <a:lnSpc>
-                <a:spcPct val="92000"/>
-              </a:lnSpc>
-              <a:buNone/>
-            </a:pPr>
-            <a:r>
-              <a:rPr lang="en-US" sz="1150" b="1" dirty="0">
-                <a:solidFill>
-                  <a:srgbClr val="3843AF"/>
-                </a:solidFill>
-                <a:latin typeface="Arial" pitchFamily="34" charset="0"/>
-                <a:ea typeface="Arial" pitchFamily="34" charset="-122"/>
-                <a:cs typeface="Arial" pitchFamily="34" charset="-120"/>
-              </a:rPr>
-              <a:t>▸   </a:t>
-            </a:r>
-            <a:pPr indent="0" marL="0">
-              <a:lnSpc>
-                <a:spcPct val="92000"/>
-              </a:lnSpc>
-              <a:spcAft>
-                <a:spcPts val="900"/>
-              </a:spcAft>
-              <a:buNone/>
-            </a:pPr>
-            <a:r>
-              <a:rPr lang="en-US" sz="1150" dirty="0">
-                <a:solidFill>
-                  <a:srgbClr val="434A63"/>
-                </a:solidFill>
-                <a:latin typeface="Arial" pitchFamily="34" charset="0"/>
-                <a:ea typeface="Arial" pitchFamily="34" charset="-122"/>
-                <a:cs typeface="Arial" pitchFamily="34" charset="-120"/>
-              </a:rPr>
-              <a:t>macOS: Installer ziehen, starten – fertig.</a:t>
-            </a:r>
-            <a:endParaRPr lang="en-US" sz="1150" dirty="0"/>
-          </a:p>
-          <a:p>
-            <a:pPr indent="0" marL="0">
-              <a:lnSpc>
-                <a:spcPct val="92000"/>
-              </a:lnSpc>
-              <a:buNone/>
-            </a:pPr>
-            <a:r>
-              <a:rPr lang="en-US" sz="1150" b="1" dirty="0">
-                <a:solidFill>
-                  <a:srgbClr val="3843AF"/>
-                </a:solidFill>
-                <a:latin typeface="Arial" pitchFamily="34" charset="0"/>
-                <a:ea typeface="Arial" pitchFamily="34" charset="-122"/>
-                <a:cs typeface="Arial" pitchFamily="34" charset="-120"/>
-              </a:rPr>
-              <a:t>▸   </a:t>
-            </a:r>
-            <a:pPr indent="0" marL="0">
-              <a:lnSpc>
-                <a:spcPct val="92000"/>
-              </a:lnSpc>
-              <a:spcAft>
-                <a:spcPts val="900"/>
-              </a:spcAft>
-              <a:buNone/>
-            </a:pPr>
-            <a:r>
-              <a:rPr lang="en-US" sz="1150" dirty="0">
-                <a:solidFill>
-                  <a:srgbClr val="434A63"/>
-                </a:solidFill>
-                <a:latin typeface="Arial" pitchFamily="34" charset="0"/>
-                <a:ea typeface="Arial" pitchFamily="34" charset="-122"/>
-                <a:cs typeface="Arial" pitchFamily="34" charset="-120"/>
-              </a:rPr>
-              <a:t>Linux: Docker Engine reicht („docker“ aus der Paketverwaltung).</a:t>
-            </a:r>
-            <a:endParaRPr lang="en-US" sz="1150" dirty="0"/>
-          </a:p>
-          <a:p>
-            <a:pPr indent="0" marL="0">
-              <a:lnSpc>
-                <a:spcPct val="92000"/>
-              </a:lnSpc>
-              <a:buNone/>
-            </a:pPr>
-            <a:r>
-              <a:rPr lang="en-US" sz="1150" b="1" dirty="0">
-                <a:solidFill>
-                  <a:srgbClr val="3843AF"/>
-                </a:solidFill>
-                <a:latin typeface="Arial" pitchFamily="34" charset="0"/>
-                <a:ea typeface="Arial" pitchFamily="34" charset="-122"/>
-                <a:cs typeface="Arial" pitchFamily="34" charset="-120"/>
-              </a:rPr>
-              <a:t>▸   </a:t>
-            </a:r>
-            <a:pPr indent="0" marL="0">
-              <a:lnSpc>
-                <a:spcPct val="92000"/>
-              </a:lnSpc>
-              <a:spcAft>
-                <a:spcPts val="900"/>
-              </a:spcAft>
-              <a:buNone/>
-            </a:pPr>
-            <a:r>
-              <a:rPr lang="en-US" sz="1150" dirty="0">
-                <a:solidFill>
-                  <a:srgbClr val="434A63"/>
-                </a:solidFill>
-                <a:latin typeface="Arial" pitchFamily="34" charset="0"/>
-                <a:ea typeface="Arial" pitchFamily="34" charset="-122"/>
-                <a:cs typeface="Arial" pitchFamily="34" charset="-120"/>
-              </a:rPr>
-              <a:t>Test bei allen gleich: „docker version“ meldet Client UND Server.</a:t>
-            </a:r>
-            <a:endParaRPr lang="en-US" sz="1150" dirty="0"/>
-          </a:p>
-        </p:txBody>
-      </p:sp>
-      <p:sp>
-        <p:nvSpPr>
-          <p:cNvPr id="11" name="Shape 9"/>
-          <p:cNvSpPr/>
-          <p:nvPr/>
-        </p:nvSpPr>
-        <p:spPr>
-          <a:xfrm>
-            <a:off x="566928" y="4206240"/>
-            <a:ext cx="32004" cy="256032"/>
-          </a:xfrm>
-          <a:prstGeom prst="rect">
-            <a:avLst/>
-          </a:prstGeom>
-          <a:solidFill>
-            <a:srgbClr val="3843AF"/>
-          </a:solidFill>
-          <a:ln/>
-        </p:spPr>
-      </p:sp>
-      <p:sp>
-        <p:nvSpPr>
-          <p:cNvPr id="12" name="Text 10"/>
-          <p:cNvSpPr/>
-          <p:nvPr/>
-        </p:nvSpPr>
-        <p:spPr>
-          <a:xfrm>
-            <a:off x="749808" y="4160520"/>
-            <a:ext cx="7827264" cy="402336"/>
-          </a:xfrm>
-          <a:prstGeom prst="rect">
-            <a:avLst/>
-          </a:prstGeom>
-          <a:noFill/>
-          <a:ln/>
-        </p:spPr>
-        <p:txBody>
-          <a:bodyPr wrap="square" lIns="0" tIns="0" rIns="0" bIns="0" rtlCol="0" anchor="ctr"/>
-          <a:lstStyle/>
-          <a:p>
-            <a:pPr indent="0" marL="0">
-              <a:buNone/>
-            </a:pPr>
-            <a:r>
-              <a:rPr lang="en-US" sz="1200" b="1" dirty="0">
-                <a:solidFill>
-                  <a:srgbClr val="434A63"/>
-                </a:solidFill>
-                <a:latin typeface="Arial" pitchFamily="34" charset="0"/>
-                <a:ea typeface="Arial" pitchFamily="34" charset="-122"/>
-                <a:cs typeface="Arial" pitchFamily="34" charset="-120"/>
-              </a:rPr>
-              <a:t>Kleiner Gruß von Montag: Docker Desktop startet dafür intern eine eigene VM – Typ 2, ihr wisst Bescheid.</a:t>
-            </a:r>
-            <a:endParaRPr lang="en-US" sz="1200" dirty="0"/>
-          </a:p>
-        </p:txBody>
-      </p:sp>
-      <p:sp>
-        <p:nvSpPr>
-          <p:cNvPr id="13" name="Shape 11"/>
+          <p:cNvPr id="8" name="Shape 5"/>
           <p:cNvSpPr/>
           <p:nvPr/>
         </p:nvSpPr>
@@ -3884,7 +3833,7 @@
       </p:sp>
       <p:sp>
         <p:nvSpPr>
-          <p:cNvPr id="14" name="Text 12"/>
+          <p:cNvPr id="9" name="Text 6"/>
           <p:cNvSpPr/>
           <p:nvPr/>
         </p:nvSpPr>
@@ -3915,7 +3864,7 @@
                 <a:ea typeface="Arial" pitchFamily="34" charset="-122"/>
                 <a:cs typeface="Arial" pitchFamily="34" charset="-120"/>
               </a:rPr>
-              <a:t>Werkzeug</a:t>
+              <a:t>Warum Docker?</a:t>
             </a:r>
             <a:endParaRPr lang="en-US" sz="1050" dirty="0"/>
           </a:p>
@@ -3923,7 +3872,7 @@
       </p:sp>
       <p:sp>
         <p:nvSpPr>
-          <p:cNvPr id="15" name="Text 13"/>
+          <p:cNvPr id="10" name="Text 7"/>
           <p:cNvSpPr/>
           <p:nvPr/>
         </p:nvSpPr>
@@ -3954,7 +3903,7 @@
                 <a:ea typeface="Arial" pitchFamily="34" charset="-122"/>
                 <a:cs typeface="Arial" pitchFamily="34" charset="-120"/>
               </a:rPr>
-              <a:t>10/15</a:t>
+              <a:t>10/18</a:t>
             </a:r>
             <a:endParaRPr lang="en-US" sz="1050" dirty="0"/>
           </a:p>
@@ -4000,48 +3949,150 @@
         </p:nvSpPr>
         <p:spPr>
           <a:xfrm>
-            <a:off x="6355080" y="0"/>
-            <a:ext cx="2788920" cy="5143500"/>
+            <a:off x="566928" y="201168"/>
+            <a:ext cx="475488" cy="50292"/>
           </a:xfrm>
           <a:prstGeom prst="rect">
             <a:avLst/>
           </a:prstGeom>
           <a:solidFill>
-            <a:srgbClr val="FBF2E3"/>
+            <a:srgbClr val="0F7C86"/>
           </a:solidFill>
           <a:ln/>
         </p:spPr>
       </p:sp>
       <p:sp>
         <p:nvSpPr>
-          <p:cNvPr id="3" name="Shape 1"/>
-          <p:cNvSpPr/>
-          <p:nvPr/>
-        </p:nvSpPr>
-        <p:spPr>
-          <a:xfrm>
-            <a:off x="6355080" y="0"/>
-            <a:ext cx="45720" cy="5143500"/>
+          <p:cNvPr id="3" name="Text 1"/>
+          <p:cNvSpPr/>
+          <p:nvPr/>
+        </p:nvSpPr>
+        <p:spPr>
+          <a:xfrm>
+            <a:off x="566928" y="384048"/>
+            <a:ext cx="8010144" cy="237744"/>
+          </a:xfrm>
+          <a:prstGeom prst="rect">
+            <a:avLst/>
+          </a:prstGeom>
+          <a:noFill/>
+          <a:ln/>
+        </p:spPr>
+        <p:txBody>
+          <a:bodyPr wrap="square" lIns="0" tIns="0" rIns="0" bIns="0" rtlCol="0" anchor="ctr"/>
+          <a:lstStyle/>
+          <a:p>
+            <a:pPr indent="0" marL="0">
+              <a:buNone/>
+            </a:pPr>
+            <a:r>
+              <a:rPr lang="en-US" sz="1150" b="1" spc="180" kern="0" dirty="0">
+                <a:solidFill>
+                  <a:srgbClr val="0F7C86"/>
+                </a:solidFill>
+                <a:latin typeface="Arial" pitchFamily="34" charset="0"/>
+                <a:ea typeface="Arial" pitchFamily="34" charset="-122"/>
+                <a:cs typeface="Arial" pitchFamily="34" charset="-120"/>
+              </a:rPr>
+              <a:t>DER LEBENSZYKLUS</a:t>
+            </a:r>
+            <a:endParaRPr lang="en-US" sz="1150" dirty="0"/>
+          </a:p>
+        </p:txBody>
+      </p:sp>
+      <p:sp>
+        <p:nvSpPr>
+          <p:cNvPr id="4" name="Text 2"/>
+          <p:cNvSpPr/>
+          <p:nvPr/>
+        </p:nvSpPr>
+        <p:spPr>
+          <a:xfrm>
+            <a:off x="566928" y="731520"/>
+            <a:ext cx="8010144" cy="603504"/>
+          </a:xfrm>
+          <a:prstGeom prst="rect">
+            <a:avLst/>
+          </a:prstGeom>
+          <a:noFill/>
+          <a:ln/>
+        </p:spPr>
+        <p:txBody>
+          <a:bodyPr wrap="square" lIns="0" tIns="0" rIns="0" bIns="0" rtlCol="0" anchor="t"/>
+          <a:lstStyle/>
+          <a:p>
+            <a:pPr indent="0" marL="0">
+              <a:buNone/>
+            </a:pPr>
+            <a:r>
+              <a:rPr lang="en-US" sz="2600" b="1" dirty="0">
+                <a:solidFill>
+                  <a:srgbClr val="272E52"/>
+                </a:solidFill>
+                <a:latin typeface="Arial" pitchFamily="34" charset="0"/>
+                <a:ea typeface="Arial" pitchFamily="34" charset="-122"/>
+                <a:cs typeface="Arial" pitchFamily="34" charset="-120"/>
+              </a:rPr>
+              <a:t>Wo ist mein Container hin?</a:t>
+            </a:r>
+            <a:endParaRPr lang="en-US" sz="2600" dirty="0"/>
+          </a:p>
+        </p:txBody>
+      </p:sp>
+      <p:pic>
+        <p:nvPicPr>
+          <p:cNvPr id="5" name="Image 0" descr="/Users/jacobmenge/Desktop/kurs-26.2b-orga/folienwerkstatt/assets/diagramme/container-leben.png">    </p:cNvPr>
+          <p:cNvPicPr>
+            <a:picLocks noChangeAspect="1"/>
+          </p:cNvPicPr>
+          <p:nvPr/>
+        </p:nvPicPr>
+        <p:blipFill>
+          <a:blip r:embed="rId1"/>
+          <a:stretch>
+            <a:fillRect/>
+          </a:stretch>
+        </p:blipFill>
+        <p:spPr>
+          <a:xfrm>
+            <a:off x="566928" y="1554480"/>
+            <a:ext cx="8010144" cy="2139696"/>
+          </a:xfrm>
+          <a:prstGeom prst="rect">
+            <a:avLst/>
+          </a:prstGeom>
+        </p:spPr>
+      </p:pic>
+      <p:sp>
+        <p:nvSpPr>
+          <p:cNvPr id="6" name="Shape 3"/>
+          <p:cNvSpPr/>
+          <p:nvPr/>
+        </p:nvSpPr>
+        <p:spPr>
+          <a:xfrm>
+            <a:off x="566928" y="4023360"/>
+            <a:ext cx="32004" cy="256032"/>
           </a:xfrm>
           <a:prstGeom prst="rect">
             <a:avLst/>
           </a:prstGeom>
           <a:solidFill>
-            <a:srgbClr val="9A6310"/>
+            <a:srgbClr val="0F7C86"/>
           </a:solidFill>
           <a:ln/>
         </p:spPr>
       </p:sp>
       <p:sp>
         <p:nvSpPr>
-          <p:cNvPr id="4" name="Text 2"/>
-          <p:cNvSpPr/>
-          <p:nvPr/>
-        </p:nvSpPr>
-        <p:spPr>
-          <a:xfrm>
-            <a:off x="6629400" y="1463040"/>
-            <a:ext cx="2194560" cy="1737360"/>
+          <p:cNvPr id="7" name="Text 4"/>
+          <p:cNvSpPr/>
+          <p:nvPr/>
+        </p:nvSpPr>
+        <p:spPr>
+          <a:xfrm>
+            <a:off x="749808" y="3977640"/>
+            <a:ext cx="7827264" cy="402336"/>
           </a:xfrm>
           <a:prstGeom prst="rect">
             <a:avLst/>
@@ -4053,109 +4104,73 @@
           <a:bodyPr wrap="square" lIns="0" tIns="0" rIns="0" bIns="0" rtlCol="0" anchor="ctr"/>
           <a:lstStyle/>
           <a:p>
-            <a:pPr algn="ctr" indent="0" marL="0">
-              <a:buNone/>
-            </a:pPr>
-            <a:r>
-              <a:rPr lang="en-US" sz="8400" b="1" dirty="0">
-                <a:solidFill>
-                  <a:srgbClr val="9A6310"/>
-                </a:solidFill>
-                <a:latin typeface="Arial" pitchFamily="34" charset="0"/>
-                <a:ea typeface="Arial" pitchFamily="34" charset="-122"/>
-                <a:cs typeface="Arial" pitchFamily="34" charset="-120"/>
-              </a:rPr>
-              <a:t>02</a:t>
-            </a:r>
-            <a:endParaRPr lang="en-US" sz="8400" dirty="0"/>
-          </a:p>
-        </p:txBody>
-      </p:sp>
-      <p:sp>
-        <p:nvSpPr>
-          <p:cNvPr id="5" name="Shape 3"/>
-          <p:cNvSpPr/>
-          <p:nvPr/>
-        </p:nvSpPr>
-        <p:spPr>
-          <a:xfrm>
-            <a:off x="566928" y="1883664"/>
-            <a:ext cx="475488" cy="50292"/>
-          </a:xfrm>
-          <a:prstGeom prst="rect">
-            <a:avLst/>
-          </a:prstGeom>
-          <a:solidFill>
-            <a:srgbClr val="9A6310"/>
-          </a:solidFill>
-          <a:ln/>
-        </p:spPr>
-      </p:sp>
-      <p:sp>
-        <p:nvSpPr>
-          <p:cNvPr id="6" name="Text 4"/>
-          <p:cNvSpPr/>
-          <p:nvPr/>
-        </p:nvSpPr>
-        <p:spPr>
-          <a:xfrm>
-            <a:off x="566928" y="2084832"/>
-            <a:ext cx="5394960" cy="868680"/>
-          </a:xfrm>
-          <a:prstGeom prst="rect">
-            <a:avLst/>
-          </a:prstGeom>
-          <a:noFill/>
-          <a:ln/>
-        </p:spPr>
-        <p:txBody>
-          <a:bodyPr wrap="square" lIns="0" tIns="0" rIns="0" bIns="0" rtlCol="0" anchor="t"/>
-          <a:lstStyle/>
-          <a:p>
-            <a:pPr indent="0" marL="0">
-              <a:buNone/>
-            </a:pPr>
-            <a:r>
-              <a:rPr lang="en-US" sz="3000" b="1" dirty="0">
-                <a:solidFill>
-                  <a:srgbClr val="272E52"/>
-                </a:solidFill>
-                <a:latin typeface="Arial" pitchFamily="34" charset="0"/>
-                <a:ea typeface="Arial" pitchFamily="34" charset="-122"/>
-                <a:cs typeface="Arial" pitchFamily="34" charset="-120"/>
-              </a:rPr>
-              <a:t>Der erste Container</a:t>
-            </a:r>
-            <a:endParaRPr lang="en-US" sz="3000" dirty="0"/>
-          </a:p>
-        </p:txBody>
-      </p:sp>
-      <p:sp>
-        <p:nvSpPr>
-          <p:cNvPr id="7" name="Text 5"/>
-          <p:cNvSpPr/>
-          <p:nvPr/>
-        </p:nvSpPr>
-        <p:spPr>
-          <a:xfrm>
-            <a:off x="566928" y="3017520"/>
-            <a:ext cx="5394960" cy="548640"/>
-          </a:xfrm>
-          <a:prstGeom prst="rect">
-            <a:avLst/>
-          </a:prstGeom>
-          <a:noFill/>
-          <a:ln/>
-        </p:spPr>
-        <p:txBody>
-          <a:bodyPr wrap="square" lIns="0" tIns="0" rIns="0" bIns="0" rtlCol="0" anchor="t"/>
-          <a:lstStyle/>
-          <a:p>
-            <a:pPr indent="0" marL="0">
-              <a:buNone/>
-            </a:pPr>
-            <a:r>
-              <a:rPr lang="en-US" sz="1350" dirty="0">
+            <a:pPr indent="0" marL="0">
+              <a:buNone/>
+            </a:pPr>
+            <a:r>
+              <a:rPr lang="en-US" sz="1200" b="1" dirty="0">
+                <a:solidFill>
+                  <a:srgbClr val="434A63"/>
+                </a:solidFill>
+                <a:latin typeface="Arial" pitchFamily="34" charset="0"/>
+                <a:ea typeface="Arial" pitchFamily="34" charset="-122"/>
+                <a:cs typeface="Arial" pitchFamily="34" charset="-120"/>
+              </a:rPr>
+              <a:t>Diese Frage kommt gleich in der Übung garantiert. Jetzt kennt ihr die Antwort schon.</a:t>
+            </a:r>
+            <a:endParaRPr lang="en-US" sz="1200" dirty="0"/>
+          </a:p>
+        </p:txBody>
+      </p:sp>
+      <p:sp>
+        <p:nvSpPr>
+          <p:cNvPr id="8" name="Shape 5"/>
+          <p:cNvSpPr/>
+          <p:nvPr/>
+        </p:nvSpPr>
+        <p:spPr>
+          <a:xfrm>
+            <a:off x="566928" y="4631436"/>
+            <a:ext cx="8010144" cy="0"/>
+          </a:xfrm>
+          <a:prstGeom prst="line">
+            <a:avLst/>
+          </a:prstGeom>
+          <a:noFill/>
+          <a:ln w="9525">
+            <a:solidFill>
+              <a:srgbClr val="DFE3F0"/>
+            </a:solidFill>
+            <a:prstDash val="solid"/>
+          </a:ln>
+        </p:spPr>
+      </p:sp>
+      <p:sp>
+        <p:nvSpPr>
+          <p:cNvPr id="9" name="Text 6"/>
+          <p:cNvSpPr/>
+          <p:nvPr/>
+        </p:nvSpPr>
+        <p:spPr>
+          <a:xfrm>
+            <a:off x="566928" y="4722876"/>
+            <a:ext cx="5029200" cy="237744"/>
+          </a:xfrm>
+          <a:prstGeom prst="rect">
+            <a:avLst/>
+          </a:prstGeom>
+          <a:noFill/>
+          <a:ln/>
+        </p:spPr>
+        <p:txBody>
+          <a:bodyPr wrap="square" lIns="0" tIns="0" rIns="0" bIns="0" rtlCol="0" anchor="ctr"/>
+          <a:lstStyle/>
+          <a:p>
+            <a:pPr indent="0" marL="0">
+              <a:buNone/>
+            </a:pPr>
+            <a:r>
+              <a:rPr lang="en-US" sz="1050" spc="30" kern="0" dirty="0">
                 <a:solidFill>
                   <a:srgbClr val="5C6377"/>
                 </a:solidFill>
@@ -4163,9 +4178,48 @@
                 <a:ea typeface="Arial" pitchFamily="34" charset="-122"/>
                 <a:cs typeface="Arial" pitchFamily="34" charset="-120"/>
               </a:rPr>
-              <a:t>50 Minuten in Gruppen – und als Kür ein eigenes Image</a:t>
-            </a:r>
-            <a:endParaRPr lang="en-US" sz="1350" dirty="0"/>
+              <a:t>Warum Docker?</a:t>
+            </a:r>
+            <a:endParaRPr lang="en-US" sz="1050" dirty="0"/>
+          </a:p>
+        </p:txBody>
+      </p:sp>
+      <p:sp>
+        <p:nvSpPr>
+          <p:cNvPr id="10" name="Text 7"/>
+          <p:cNvSpPr/>
+          <p:nvPr/>
+        </p:nvSpPr>
+        <p:spPr>
+          <a:xfrm>
+            <a:off x="8028432" y="4722876"/>
+            <a:ext cx="548640" cy="237744"/>
+          </a:xfrm>
+          <a:prstGeom prst="rect">
+            <a:avLst/>
+          </a:prstGeom>
+          <a:noFill/>
+          <a:ln/>
+        </p:spPr>
+        <p:txBody>
+          <a:bodyPr wrap="square" lIns="0" tIns="0" rIns="0" bIns="0" rtlCol="0" anchor="ctr"/>
+          <a:lstStyle/>
+          <a:p>
+            <a:pPr algn="r" indent="0" marL="0">
+              <a:buNone/>
+            </a:pPr>
+            <a:r>
+              <a:rPr lang="en-US" sz="1050" dirty="0">
+                <a:solidFill>
+                  <a:srgbClr val="5C6377"/>
+                </a:solidFill>
+                <a:latin typeface="Arial" pitchFamily="34" charset="0"/>
+                <a:ea typeface="Arial" pitchFamily="34" charset="-122"/>
+                <a:cs typeface="Arial" pitchFamily="34" charset="-120"/>
+              </a:rPr>
+              <a:t>11/18</a:t>
+            </a:r>
+            <a:endParaRPr lang="en-US" sz="1050" dirty="0"/>
           </a:p>
         </p:txBody>
       </p:sp>
@@ -4216,7 +4270,7 @@
             <a:avLst/>
           </a:prstGeom>
           <a:solidFill>
-            <a:srgbClr val="9A6310"/>
+            <a:srgbClr val="0F7C86"/>
           </a:solidFill>
           <a:ln/>
         </p:spPr>
@@ -4248,13 +4302,13 @@
             <a:r>
               <a:rPr lang="en-US" sz="1150" b="1" spc="180" kern="0" dirty="0">
                 <a:solidFill>
-                  <a:srgbClr val="9A6310"/>
-                </a:solidFill>
-                <a:latin typeface="Arial" pitchFamily="34" charset="0"/>
-                <a:ea typeface="Arial" pitchFamily="34" charset="-122"/>
-                <a:cs typeface="Arial" pitchFamily="34" charset="-120"/>
-              </a:rPr>
-              <a:t>BREAKOUT · 50 MINUTEN</a:t>
+                  <a:srgbClr val="0F7C86"/>
+                </a:solidFill>
+                <a:latin typeface="Arial" pitchFamily="34" charset="0"/>
+                <a:ea typeface="Arial" pitchFamily="34" charset="-122"/>
+                <a:cs typeface="Arial" pitchFamily="34" charset="-120"/>
+              </a:rPr>
+              <a:t>DAS DOCKERFILE</a:t>
             </a:r>
             <a:endParaRPr lang="en-US" sz="1150" dirty="0"/>
           </a:p>
@@ -4293,42 +4347,66 @@
                 <a:ea typeface="Arial" pitchFamily="34" charset="-122"/>
                 <a:cs typeface="Arial" pitchFamily="34" charset="-120"/>
               </a:rPr>
-              <a:t>Der Auftrag</a:t>
+              <a:t>Ein eigenes Image bauen</a:t>
             </a:r>
             <a:endParaRPr lang="en-US" sz="2600" dirty="0"/>
           </a:p>
         </p:txBody>
       </p:sp>
-      <p:sp>
-        <p:nvSpPr>
-          <p:cNvPr id="5" name="Shape 3"/>
-          <p:cNvSpPr/>
-          <p:nvPr/>
-        </p:nvSpPr>
-        <p:spPr>
-          <a:xfrm>
-            <a:off x="438912" y="1792224"/>
-            <a:ext cx="8266176" cy="329184"/>
+      <p:pic>
+        <p:nvPicPr>
+          <p:cNvPr id="5" name="Image 0" descr="/Users/jacobmenge/Desktop/kurs-26.2b-orga/folienwerkstatt/assets/diagramme/dockerfile-weg.png">    </p:cNvPr>
+          <p:cNvPicPr>
+            <a:picLocks noChangeAspect="1"/>
+          </p:cNvPicPr>
+          <p:nvPr/>
+        </p:nvPicPr>
+        <p:blipFill>
+          <a:blip r:embed="rId1"/>
+          <a:stretch>
+            <a:fillRect/>
+          </a:stretch>
+        </p:blipFill>
+        <p:spPr>
+          <a:xfrm>
+            <a:off x="566928" y="1554480"/>
+            <a:ext cx="8010144" cy="2103120"/>
+          </a:xfrm>
+          <a:prstGeom prst="rect">
+            <a:avLst/>
+          </a:prstGeom>
+        </p:spPr>
+      </p:pic>
+      <p:sp>
+        <p:nvSpPr>
+          <p:cNvPr id="6" name="Shape 3"/>
+          <p:cNvSpPr/>
+          <p:nvPr/>
+        </p:nvSpPr>
+        <p:spPr>
+          <a:xfrm>
+            <a:off x="566928" y="4114800"/>
+            <a:ext cx="32004" cy="256032"/>
           </a:xfrm>
           <a:prstGeom prst="rect">
             <a:avLst/>
           </a:prstGeom>
           <a:solidFill>
-            <a:srgbClr val="F5F6FC"/>
+            <a:srgbClr val="0F7C86"/>
           </a:solidFill>
           <a:ln/>
         </p:spPr>
       </p:sp>
       <p:sp>
         <p:nvSpPr>
-          <p:cNvPr id="6" name="Text 4"/>
-          <p:cNvSpPr/>
-          <p:nvPr/>
-        </p:nvSpPr>
-        <p:spPr>
-          <a:xfrm>
-            <a:off x="566928" y="1792224"/>
-            <a:ext cx="914400" cy="329184"/>
+          <p:cNvPr id="7" name="Text 4"/>
+          <p:cNvSpPr/>
+          <p:nvPr/>
+        </p:nvSpPr>
+        <p:spPr>
+          <a:xfrm>
+            <a:off x="749808" y="4069080"/>
+            <a:ext cx="7827264" cy="402336"/>
           </a:xfrm>
           <a:prstGeom prst="rect">
             <a:avLst/>
@@ -4344,46 +4422,7 @@
               <a:buNone/>
             </a:pPr>
             <a:r>
-              <a:rPr lang="en-US" sz="1100" b="1" dirty="0">
-                <a:solidFill>
-                  <a:srgbClr val="9A6310"/>
-                </a:solidFill>
-                <a:latin typeface="Courier New" pitchFamily="34" charset="0"/>
-                <a:ea typeface="Courier New" pitchFamily="34" charset="-122"/>
-                <a:cs typeface="Courier New" pitchFamily="34" charset="-120"/>
-              </a:rPr>
-              <a:t>Teil 1</a:t>
-            </a:r>
-            <a:endParaRPr lang="en-US" sz="1100" dirty="0"/>
-          </a:p>
-        </p:txBody>
-      </p:sp>
-      <p:sp>
-        <p:nvSpPr>
-          <p:cNvPr id="7" name="Text 5"/>
-          <p:cNvSpPr/>
-          <p:nvPr/>
-        </p:nvSpPr>
-        <p:spPr>
-          <a:xfrm>
-            <a:off x="1481328" y="1792224"/>
-            <a:ext cx="7095744" cy="329184"/>
-          </a:xfrm>
-          <a:prstGeom prst="rect">
-            <a:avLst/>
-          </a:prstGeom>
-          <a:noFill/>
-          <a:ln/>
-        </p:spPr>
-        <p:txBody>
-          <a:bodyPr wrap="square" lIns="0" tIns="0" rIns="0" bIns="0" rtlCol="0" anchor="ctr"/>
-          <a:lstStyle/>
-          <a:p>
-            <a:pPr indent="0" marL="0">
-              <a:buNone/>
-            </a:pPr>
-            <a:r>
-              <a:rPr lang="en-US" sz="1100" dirty="0">
+              <a:rPr lang="en-US" sz="1200" b="1" dirty="0">
                 <a:solidFill>
                   <a:srgbClr val="434A63"/>
                 </a:solidFill>
@@ -4391,439 +4430,15 @@
                 <a:ea typeface="Arial" pitchFamily="34" charset="-122"/>
                 <a:cs typeface="Arial" pitchFamily="34" charset="-120"/>
               </a:rPr>
-              <a:t>Erste Schritte: hello-world, dann nginx mit Port – Container starten, ansehen, aufräumen</a:t>
-            </a:r>
-            <a:endParaRPr lang="en-US" sz="1100" dirty="0"/>
-          </a:p>
-        </p:txBody>
-      </p:sp>
-      <p:sp>
-        <p:nvSpPr>
-          <p:cNvPr id="8" name="Text 6"/>
-          <p:cNvSpPr/>
-          <p:nvPr/>
-        </p:nvSpPr>
-        <p:spPr>
-          <a:xfrm>
-            <a:off x="566928" y="2121408"/>
-            <a:ext cx="914400" cy="329184"/>
-          </a:xfrm>
-          <a:prstGeom prst="rect">
-            <a:avLst/>
-          </a:prstGeom>
-          <a:noFill/>
-          <a:ln/>
-        </p:spPr>
-        <p:txBody>
-          <a:bodyPr wrap="square" lIns="0" tIns="0" rIns="0" bIns="0" rtlCol="0" anchor="ctr"/>
-          <a:lstStyle/>
-          <a:p>
-            <a:pPr indent="0" marL="0">
-              <a:buNone/>
-            </a:pPr>
-            <a:r>
-              <a:rPr lang="en-US" sz="1100" b="1" dirty="0">
-                <a:solidFill>
-                  <a:srgbClr val="9A6310"/>
-                </a:solidFill>
-                <a:latin typeface="Courier New" pitchFamily="34" charset="0"/>
-                <a:ea typeface="Courier New" pitchFamily="34" charset="-122"/>
-                <a:cs typeface="Courier New" pitchFamily="34" charset="-120"/>
-              </a:rPr>
-              <a:t>Teil 2</a:t>
-            </a:r>
-            <a:endParaRPr lang="en-US" sz="1100" dirty="0"/>
-          </a:p>
-        </p:txBody>
-      </p:sp>
-      <p:sp>
-        <p:nvSpPr>
-          <p:cNvPr id="9" name="Text 7"/>
-          <p:cNvSpPr/>
-          <p:nvPr/>
-        </p:nvSpPr>
-        <p:spPr>
-          <a:xfrm>
-            <a:off x="1481328" y="2121408"/>
-            <a:ext cx="7095744" cy="329184"/>
-          </a:xfrm>
-          <a:prstGeom prst="rect">
-            <a:avLst/>
-          </a:prstGeom>
-          <a:noFill/>
-          <a:ln/>
-        </p:spPr>
-        <p:txBody>
-          <a:bodyPr wrap="square" lIns="0" tIns="0" rIns="0" bIns="0" rtlCol="0" anchor="ctr"/>
-          <a:lstStyle/>
-          <a:p>
-            <a:pPr indent="0" marL="0">
-              <a:buNone/>
-            </a:pPr>
-            <a:r>
-              <a:rPr lang="en-US" sz="1100" dirty="0">
-                <a:solidFill>
-                  <a:srgbClr val="434A63"/>
-                </a:solidFill>
-                <a:latin typeface="Arial" pitchFamily="34" charset="0"/>
-                <a:ea typeface="Arial" pitchFamily="34" charset="-122"/>
-                <a:cs typeface="Arial" pitchFamily="34" charset="-120"/>
-              </a:rPr>
-              <a:t>Kür: ein eigenes Image – kleine Webseite, Dockerfile, bauen, starten</a:t>
-            </a:r>
-            <a:endParaRPr lang="en-US" sz="1100" dirty="0"/>
-          </a:p>
-        </p:txBody>
-      </p:sp>
-      <p:sp>
-        <p:nvSpPr>
-          <p:cNvPr id="10" name="Shape 8"/>
-          <p:cNvSpPr/>
-          <p:nvPr/>
-        </p:nvSpPr>
-        <p:spPr>
-          <a:xfrm>
-            <a:off x="438912" y="2450592"/>
-            <a:ext cx="8266176" cy="329184"/>
-          </a:xfrm>
-          <a:prstGeom prst="rect">
-            <a:avLst/>
-          </a:prstGeom>
-          <a:solidFill>
-            <a:srgbClr val="F5F6FC"/>
-          </a:solidFill>
-          <a:ln/>
-        </p:spPr>
-      </p:sp>
-      <p:sp>
-        <p:nvSpPr>
-          <p:cNvPr id="11" name="Text 9"/>
-          <p:cNvSpPr/>
-          <p:nvPr/>
-        </p:nvSpPr>
-        <p:spPr>
-          <a:xfrm>
-            <a:off x="566928" y="2450592"/>
-            <a:ext cx="914400" cy="329184"/>
-          </a:xfrm>
-          <a:prstGeom prst="rect">
-            <a:avLst/>
-          </a:prstGeom>
-          <a:noFill/>
-          <a:ln/>
-        </p:spPr>
-        <p:txBody>
-          <a:bodyPr wrap="square" lIns="0" tIns="0" rIns="0" bIns="0" rtlCol="0" anchor="ctr"/>
-          <a:lstStyle/>
-          <a:p>
-            <a:pPr indent="0" marL="0">
-              <a:buNone/>
-            </a:pPr>
-            <a:r>
-              <a:rPr lang="en-US" sz="1100" b="1" dirty="0">
-                <a:solidFill>
-                  <a:srgbClr val="9A6310"/>
-                </a:solidFill>
-                <a:latin typeface="Courier New" pitchFamily="34" charset="0"/>
-                <a:ea typeface="Courier New" pitchFamily="34" charset="-122"/>
-                <a:cs typeface="Courier New" pitchFamily="34" charset="-120"/>
-              </a:rPr>
-              <a:t>Bonus</a:t>
-            </a:r>
-            <a:endParaRPr lang="en-US" sz="1100" dirty="0"/>
-          </a:p>
-        </p:txBody>
-      </p:sp>
-      <p:sp>
-        <p:nvSpPr>
-          <p:cNvPr id="12" name="Text 10"/>
-          <p:cNvSpPr/>
-          <p:nvPr/>
-        </p:nvSpPr>
-        <p:spPr>
-          <a:xfrm>
-            <a:off x="1481328" y="2450592"/>
-            <a:ext cx="7095744" cy="329184"/>
-          </a:xfrm>
-          <a:prstGeom prst="rect">
-            <a:avLst/>
-          </a:prstGeom>
-          <a:noFill/>
-          <a:ln/>
-        </p:spPr>
-        <p:txBody>
-          <a:bodyPr wrap="square" lIns="0" tIns="0" rIns="0" bIns="0" rtlCol="0" anchor="ctr"/>
-          <a:lstStyle/>
-          <a:p>
-            <a:pPr indent="0" marL="0">
-              <a:buNone/>
-            </a:pPr>
-            <a:r>
-              <a:rPr lang="en-US" sz="1100" dirty="0">
-                <a:solidFill>
-                  <a:srgbClr val="434A63"/>
-                </a:solidFill>
-                <a:latin typeface="Arial" pitchFamily="34" charset="0"/>
-                <a:ea typeface="Arial" pitchFamily="34" charset="-122"/>
-                <a:cs typeface="Arial" pitchFamily="34" charset="-120"/>
-              </a:rPr>
-              <a:t>Vier Experimente: in den Container schauen, Wegwerf-Test, zwei Versionen, Platzverbrauch</a:t>
-            </a:r>
-            <a:endParaRPr lang="en-US" sz="1100" dirty="0"/>
-          </a:p>
-        </p:txBody>
-      </p:sp>
-      <p:sp>
-        <p:nvSpPr>
-          <p:cNvPr id="13" name="Text 11"/>
-          <p:cNvSpPr/>
-          <p:nvPr/>
-        </p:nvSpPr>
-        <p:spPr>
-          <a:xfrm>
-            <a:off x="566928" y="2779776"/>
-            <a:ext cx="914400" cy="329184"/>
-          </a:xfrm>
-          <a:prstGeom prst="rect">
-            <a:avLst/>
-          </a:prstGeom>
-          <a:noFill/>
-          <a:ln/>
-        </p:spPr>
-        <p:txBody>
-          <a:bodyPr wrap="square" lIns="0" tIns="0" rIns="0" bIns="0" rtlCol="0" anchor="ctr"/>
-          <a:lstStyle/>
-          <a:p>
-            <a:pPr indent="0" marL="0">
-              <a:buNone/>
-            </a:pPr>
-            <a:r>
-              <a:rPr lang="en-US" sz="1100" b="1" dirty="0">
-                <a:solidFill>
-                  <a:srgbClr val="9A6310"/>
-                </a:solidFill>
-                <a:latin typeface="Courier New" pitchFamily="34" charset="0"/>
-                <a:ea typeface="Courier New" pitchFamily="34" charset="-122"/>
-                <a:cs typeface="Courier New" pitchFamily="34" charset="-120"/>
-              </a:rPr>
-              <a:t>Notieren</a:t>
-            </a:r>
-            <a:endParaRPr lang="en-US" sz="1100" dirty="0"/>
-          </a:p>
-        </p:txBody>
-      </p:sp>
-      <p:sp>
-        <p:nvSpPr>
-          <p:cNvPr id="14" name="Text 12"/>
-          <p:cNvSpPr/>
-          <p:nvPr/>
-        </p:nvSpPr>
-        <p:spPr>
-          <a:xfrm>
-            <a:off x="1481328" y="2779776"/>
-            <a:ext cx="7095744" cy="329184"/>
-          </a:xfrm>
-          <a:prstGeom prst="rect">
-            <a:avLst/>
-          </a:prstGeom>
-          <a:noFill/>
-          <a:ln/>
-        </p:spPr>
-        <p:txBody>
-          <a:bodyPr wrap="square" lIns="0" tIns="0" rIns="0" bIns="0" rtlCol="0" anchor="ctr"/>
-          <a:lstStyle/>
-          <a:p>
-            <a:pPr indent="0" marL="0">
-              <a:buNone/>
-            </a:pPr>
-            <a:r>
-              <a:rPr lang="en-US" sz="1100" dirty="0">
-                <a:solidFill>
-                  <a:srgbClr val="434A63"/>
-                </a:solidFill>
-                <a:latin typeface="Arial" pitchFamily="34" charset="0"/>
-                <a:ea typeface="Arial" pitchFamily="34" charset="-122"/>
-                <a:cs typeface="Arial" pitchFamily="34" charset="-120"/>
-              </a:rPr>
-              <a:t>Euren docker-ps-Stand nach Teil 1 – und aus der Kür: eure Image-Größe</a:t>
-            </a:r>
-            <a:endParaRPr lang="en-US" sz="1100" dirty="0"/>
-          </a:p>
-        </p:txBody>
-      </p:sp>
-      <p:sp>
-        <p:nvSpPr>
-          <p:cNvPr id="15" name="Shape 13"/>
-          <p:cNvSpPr/>
-          <p:nvPr/>
-        </p:nvSpPr>
-        <p:spPr>
-          <a:xfrm>
-            <a:off x="566928" y="3401568"/>
-            <a:ext cx="8010144" cy="1097280"/>
-          </a:xfrm>
-          <a:prstGeom prst="rect">
-            <a:avLst/>
-          </a:prstGeom>
-          <a:solidFill>
-            <a:srgbClr val="EEF0FB"/>
-          </a:solidFill>
-          <a:ln/>
-        </p:spPr>
-      </p:sp>
-      <p:sp>
-        <p:nvSpPr>
-          <p:cNvPr id="16" name="Shape 14"/>
-          <p:cNvSpPr/>
-          <p:nvPr/>
-        </p:nvSpPr>
-        <p:spPr>
-          <a:xfrm>
-            <a:off x="566928" y="3401568"/>
-            <a:ext cx="41148" cy="1097280"/>
-          </a:xfrm>
-          <a:prstGeom prst="rect">
-            <a:avLst/>
-          </a:prstGeom>
-          <a:solidFill>
-            <a:srgbClr val="9A6310"/>
-          </a:solidFill>
-          <a:ln/>
-        </p:spPr>
-      </p:sp>
-      <p:sp>
-        <p:nvSpPr>
-          <p:cNvPr id="17" name="Text 15"/>
-          <p:cNvSpPr/>
-          <p:nvPr/>
-        </p:nvSpPr>
-        <p:spPr>
-          <a:xfrm>
-            <a:off x="804672" y="3547872"/>
-            <a:ext cx="7607808" cy="242062"/>
-          </a:xfrm>
-          <a:prstGeom prst="rect">
-            <a:avLst/>
-          </a:prstGeom>
-          <a:noFill/>
-          <a:ln/>
-        </p:spPr>
-        <p:txBody>
-          <a:bodyPr wrap="square" lIns="0" tIns="0" rIns="0" bIns="0" rtlCol="0" anchor="t"/>
-          <a:lstStyle/>
-          <a:p>
-            <a:pPr indent="0" marL="0">
-              <a:buNone/>
-            </a:pPr>
-            <a:r>
-              <a:rPr lang="en-US" sz="1300" b="1" dirty="0">
-                <a:solidFill>
-                  <a:srgbClr val="272E52"/>
-                </a:solidFill>
-                <a:latin typeface="Arial" pitchFamily="34" charset="0"/>
-                <a:ea typeface="Arial" pitchFamily="34" charset="-122"/>
-                <a:cs typeface="Arial" pitchFamily="34" charset="-120"/>
-              </a:rPr>
-              <a:t>Jetzt öffnen – alles braucht ihr gleich im Raum</a:t>
-            </a:r>
-            <a:endParaRPr lang="en-US" sz="1300" dirty="0"/>
-          </a:p>
-        </p:txBody>
-      </p:sp>
-      <p:sp>
-        <p:nvSpPr>
-          <p:cNvPr id="18" name="Text 16"/>
-          <p:cNvSpPr/>
-          <p:nvPr/>
-        </p:nvSpPr>
-        <p:spPr>
-          <a:xfrm>
-            <a:off x="804672" y="3835654"/>
-            <a:ext cx="7607808" cy="544322"/>
-          </a:xfrm>
-          <a:prstGeom prst="rect">
-            <a:avLst/>
-          </a:prstGeom>
-          <a:noFill/>
-          <a:ln/>
-        </p:spPr>
-        <p:txBody>
-          <a:bodyPr wrap="square" lIns="0" tIns="0" rIns="0" bIns="0" rtlCol="0" anchor="t"/>
-          <a:lstStyle/>
-          <a:p>
-            <a:pPr indent="0" marL="0">
-              <a:lnSpc>
-                <a:spcPct val="92000"/>
-              </a:lnSpc>
-              <a:spcAft>
-                <a:spcPts val="500"/>
-              </a:spcAft>
-              <a:buNone/>
-            </a:pPr>
-            <a:r>
-              <a:rPr lang="en-US" sz="1000" dirty="0">
-                <a:solidFill>
-                  <a:srgbClr val="434A63"/>
-                </a:solidFill>
-                <a:latin typeface="Arial" pitchFamily="34" charset="0"/>
-                <a:ea typeface="Arial" pitchFamily="34" charset="-122"/>
-                <a:cs typeface="Arial" pitchFamily="34" charset="-120"/>
-              </a:rPr>
-              <a:t>Teil 1:  jacobmenge.github.io/kurs-unterlagen/docker/erste-schritte/</a:t>
-            </a:r>
-            <a:endParaRPr lang="en-US" sz="1000" dirty="0"/>
-          </a:p>
-          <a:p>
-            <a:pPr indent="0" marL="0">
-              <a:lnSpc>
-                <a:spcPct val="92000"/>
-              </a:lnSpc>
-              <a:spcAft>
-                <a:spcPts val="500"/>
-              </a:spcAft>
-              <a:buNone/>
-            </a:pPr>
-            <a:r>
-              <a:rPr lang="en-US" sz="1000" dirty="0">
-                <a:solidFill>
-                  <a:srgbClr val="434A63"/>
-                </a:solidFill>
-                <a:latin typeface="Arial" pitchFamily="34" charset="0"/>
-                <a:ea typeface="Arial" pitchFamily="34" charset="-122"/>
-                <a:cs typeface="Arial" pitchFamily="34" charset="-120"/>
-              </a:rPr>
-              <a:t>Teil 2 (Kür):  jacobmenge.github.io/kurs-unterlagen/docker/praxis-eigenes-image/</a:t>
-            </a:r>
-            <a:endParaRPr lang="en-US" sz="1000" dirty="0"/>
-          </a:p>
-          <a:p>
-            <a:pPr indent="0" marL="0">
-              <a:lnSpc>
-                <a:spcPct val="92000"/>
-              </a:lnSpc>
-              <a:spcAft>
-                <a:spcPts val="500"/>
-              </a:spcAft>
-              <a:buNone/>
-            </a:pPr>
-            <a:r>
-              <a:rPr lang="en-US" sz="1000" dirty="0">
-                <a:solidFill>
-                  <a:srgbClr val="434A63"/>
-                </a:solidFill>
-                <a:latin typeface="Arial" pitchFamily="34" charset="0"/>
-                <a:ea typeface="Arial" pitchFamily="34" charset="-122"/>
-                <a:cs typeface="Arial" pitchFamily="34" charset="-120"/>
-              </a:rPr>
-              <a:t>Ergebnisse eintragen:  &lt;Link zum Ergebnis-Dokument hier eintragen&gt;</a:t>
-            </a:r>
-            <a:endParaRPr lang="en-US" sz="1000" dirty="0"/>
-          </a:p>
-        </p:txBody>
-      </p:sp>
-      <p:sp>
-        <p:nvSpPr>
-          <p:cNvPr id="19" name="Shape 17"/>
+              <a:t>Das Dockerfile ist der Bauplan für euren Bauplan. Nur damit wird aus fremden Images etwas Eigenes.</a:t>
+            </a:r>
+            <a:endParaRPr lang="en-US" sz="1200" dirty="0"/>
+          </a:p>
+        </p:txBody>
+      </p:sp>
+      <p:sp>
+        <p:nvSpPr>
+          <p:cNvPr id="8" name="Shape 5"/>
           <p:cNvSpPr/>
           <p:nvPr/>
         </p:nvSpPr>
@@ -4846,7 +4461,7 @@
       </p:sp>
       <p:sp>
         <p:nvSpPr>
-          <p:cNvPr id="20" name="Text 18"/>
+          <p:cNvPr id="9" name="Text 6"/>
           <p:cNvSpPr/>
           <p:nvPr/>
         </p:nvSpPr>
@@ -4877,7 +4492,7 @@
                 <a:ea typeface="Arial" pitchFamily="34" charset="-122"/>
                 <a:cs typeface="Arial" pitchFamily="34" charset="-120"/>
               </a:rPr>
-              <a:t>Breakout</a:t>
+              <a:t>Warum Docker?</a:t>
             </a:r>
             <a:endParaRPr lang="en-US" sz="1050" dirty="0"/>
           </a:p>
@@ -4885,7 +4500,7 @@
       </p:sp>
       <p:sp>
         <p:nvSpPr>
-          <p:cNvPr id="21" name="Text 19"/>
+          <p:cNvPr id="10" name="Text 7"/>
           <p:cNvSpPr/>
           <p:nvPr/>
         </p:nvSpPr>
@@ -4916,7 +4531,7 @@
                 <a:ea typeface="Arial" pitchFamily="34" charset="-122"/>
                 <a:cs typeface="Arial" pitchFamily="34" charset="-120"/>
               </a:rPr>
-              <a:t>11/15</a:t>
+              <a:t>12/18</a:t>
             </a:r>
             <a:endParaRPr lang="en-US" sz="1050" dirty="0"/>
           </a:p>
@@ -4969,7 +4584,7 @@
             <a:avLst/>
           </a:prstGeom>
           <a:solidFill>
-            <a:srgbClr val="9A6310"/>
+            <a:srgbClr val="3843AF"/>
           </a:solidFill>
           <a:ln/>
         </p:spPr>
@@ -5001,13 +4616,13 @@
             <a:r>
               <a:rPr lang="en-US" sz="1150" b="1" spc="180" kern="0" dirty="0">
                 <a:solidFill>
-                  <a:srgbClr val="9A6310"/>
-                </a:solidFill>
-                <a:latin typeface="Arial" pitchFamily="34" charset="0"/>
-                <a:ea typeface="Arial" pitchFamily="34" charset="-122"/>
-                <a:cs typeface="Arial" pitchFamily="34" charset="-120"/>
-              </a:rPr>
-              <a:t>SPIELREGELN</a:t>
+                  <a:srgbClr val="3843AF"/>
+                </a:solidFill>
+                <a:latin typeface="Arial" pitchFamily="34" charset="0"/>
+                <a:ea typeface="Arial" pitchFamily="34" charset="-122"/>
+                <a:cs typeface="Arial" pitchFamily="34" charset="-120"/>
+              </a:rPr>
+              <a:t>ALLE ZUSAMMEN, JETZT</a:t>
             </a:r>
             <a:endParaRPr lang="en-US" sz="1150" dirty="0"/>
           </a:p>
@@ -5046,7 +4661,7 @@
                 <a:ea typeface="Arial" pitchFamily="34" charset="-122"/>
                 <a:cs typeface="Arial" pitchFamily="34" charset="-120"/>
               </a:rPr>
-              <a:t>So arbeitet ihr</a:t>
+              <a:t>Docker Desktop einrichten</a:t>
             </a:r>
             <a:endParaRPr lang="en-US" sz="2600" dirty="0"/>
           </a:p>
@@ -5060,8 +4675,126 @@
         </p:nvSpPr>
         <p:spPr>
           <a:xfrm>
-            <a:off x="566928" y="1700784"/>
-            <a:ext cx="8010144" cy="2011680"/>
+            <a:off x="566928" y="1444752"/>
+            <a:ext cx="8010144" cy="274320"/>
+          </a:xfrm>
+          <a:prstGeom prst="rect">
+            <a:avLst/>
+          </a:prstGeom>
+          <a:noFill/>
+          <a:ln/>
+        </p:spPr>
+        <p:txBody>
+          <a:bodyPr wrap="square" lIns="0" tIns="0" rIns="0" bIns="0" rtlCol="0" anchor="t"/>
+          <a:lstStyle/>
+          <a:p>
+            <a:pPr indent="0" marL="0">
+              <a:buNone/>
+            </a:pPr>
+            <a:r>
+              <a:rPr lang="en-US" sz="1300" dirty="0">
+                <a:solidFill>
+                  <a:srgbClr val="5C6377"/>
+                </a:solidFill>
+                <a:latin typeface="Arial" pitchFamily="34" charset="0"/>
+                <a:ea typeface="Arial" pitchFamily="34" charset="-122"/>
+                <a:cs typeface="Arial" pitchFamily="34" charset="-120"/>
+              </a:rPr>
+              <a:t>Wir installieren jetzt gemeinsam. Die Anleitung führt euch je Betriebssystem durch:</a:t>
+            </a:r>
+            <a:endParaRPr lang="en-US" sz="1300" dirty="0"/>
+          </a:p>
+        </p:txBody>
+      </p:sp>
+      <p:sp>
+        <p:nvSpPr>
+          <p:cNvPr id="6" name="Shape 4"/>
+          <p:cNvSpPr/>
+          <p:nvPr/>
+        </p:nvSpPr>
+        <p:spPr>
+          <a:xfrm>
+            <a:off x="566928" y="1920240"/>
+            <a:ext cx="8010144" cy="713232"/>
+          </a:xfrm>
+          <a:prstGeom prst="rect">
+            <a:avLst/>
+          </a:prstGeom>
+          <a:solidFill>
+            <a:srgbClr val="EEF0FB"/>
+          </a:solidFill>
+          <a:ln/>
+        </p:spPr>
+      </p:sp>
+      <p:sp>
+        <p:nvSpPr>
+          <p:cNvPr id="7" name="Shape 5"/>
+          <p:cNvSpPr/>
+          <p:nvPr/>
+        </p:nvSpPr>
+        <p:spPr>
+          <a:xfrm>
+            <a:off x="566928" y="1920240"/>
+            <a:ext cx="41148" cy="713232"/>
+          </a:xfrm>
+          <a:prstGeom prst="rect">
+            <a:avLst/>
+          </a:prstGeom>
+          <a:solidFill>
+            <a:srgbClr val="3843AF"/>
+          </a:solidFill>
+          <a:ln/>
+        </p:spPr>
+      </p:sp>
+      <p:sp>
+        <p:nvSpPr>
+          <p:cNvPr id="8" name="Text 6"/>
+          <p:cNvSpPr/>
+          <p:nvPr/>
+        </p:nvSpPr>
+        <p:spPr>
+          <a:xfrm>
+            <a:off x="804672" y="2066544"/>
+            <a:ext cx="7607808" cy="242062"/>
+          </a:xfrm>
+          <a:prstGeom prst="rect">
+            <a:avLst/>
+          </a:prstGeom>
+          <a:noFill/>
+          <a:ln/>
+        </p:spPr>
+        <p:txBody>
+          <a:bodyPr wrap="square" lIns="0" tIns="0" rIns="0" bIns="0" rtlCol="0" anchor="t"/>
+          <a:lstStyle/>
+          <a:p>
+            <a:pPr indent="0" marL="0">
+              <a:buNone/>
+            </a:pPr>
+            <a:r>
+              <a:rPr lang="en-US" sz="1300" b="1" dirty="0">
+                <a:solidFill>
+                  <a:srgbClr val="272E52"/>
+                </a:solidFill>
+                <a:latin typeface="Arial" pitchFamily="34" charset="0"/>
+                <a:ea typeface="Arial" pitchFamily="34" charset="-122"/>
+                <a:cs typeface="Arial" pitchFamily="34" charset="-120"/>
+              </a:rPr>
+              <a:t>Anleitung öffnen</a:t>
+            </a:r>
+            <a:endParaRPr lang="en-US" sz="1300" dirty="0"/>
+          </a:p>
+        </p:txBody>
+      </p:sp>
+      <p:sp>
+        <p:nvSpPr>
+          <p:cNvPr id="9" name="Text 7"/>
+          <p:cNvSpPr/>
+          <p:nvPr/>
+        </p:nvSpPr>
+        <p:spPr>
+          <a:xfrm>
+            <a:off x="804672" y="2354326"/>
+            <a:ext cx="7607808" cy="160274"/>
           </a:xfrm>
           <a:prstGeom prst="rect">
             <a:avLst/>
@@ -5080,9 +4813,51 @@
               <a:buNone/>
             </a:pPr>
             <a:r>
-              <a:rPr lang="en-US" sz="1250" b="1" dirty="0">
-                <a:solidFill>
-                  <a:srgbClr val="9A6310"/>
+              <a:rPr lang="en-US" sz="1200" dirty="0">
+                <a:solidFill>
+                  <a:srgbClr val="434A63"/>
+                </a:solidFill>
+                <a:latin typeface="Arial" pitchFamily="34" charset="0"/>
+                <a:ea typeface="Arial" pitchFamily="34" charset="-122"/>
+                <a:cs typeface="Arial" pitchFamily="34" charset="-120"/>
+              </a:rPr>
+              <a:t>jacobmenge.github.io/kurs-unterlagen/docker/installation/</a:t>
+            </a:r>
+            <a:endParaRPr lang="en-US" sz="1200" dirty="0"/>
+          </a:p>
+        </p:txBody>
+      </p:sp>
+      <p:sp>
+        <p:nvSpPr>
+          <p:cNvPr id="10" name="Text 8"/>
+          <p:cNvSpPr/>
+          <p:nvPr/>
+        </p:nvSpPr>
+        <p:spPr>
+          <a:xfrm>
+            <a:off x="566928" y="2834640"/>
+            <a:ext cx="8010144" cy="1188720"/>
+          </a:xfrm>
+          <a:prstGeom prst="rect">
+            <a:avLst/>
+          </a:prstGeom>
+          <a:noFill/>
+          <a:ln/>
+        </p:spPr>
+        <p:txBody>
+          <a:bodyPr wrap="square" lIns="0" tIns="0" rIns="0" bIns="0" rtlCol="0" anchor="t"/>
+          <a:lstStyle/>
+          <a:p>
+            <a:pPr indent="0" marL="0">
+              <a:lnSpc>
+                <a:spcPct val="92000"/>
+              </a:lnSpc>
+              <a:buNone/>
+            </a:pPr>
+            <a:r>
+              <a:rPr lang="en-US" sz="1150" b="1" dirty="0">
+                <a:solidFill>
+                  <a:srgbClr val="3843AF"/>
                 </a:solidFill>
                 <a:latin typeface="Arial" pitchFamily="34" charset="0"/>
                 <a:ea typeface="Arial" pitchFamily="34" charset="-122"/>
@@ -5100,7 +4875,7 @@
               <a:buNone/>
             </a:pPr>
             <a:r>
-              <a:rPr lang="en-US" sz="1250" dirty="0">
+              <a:rPr lang="en-US" sz="1150" dirty="0">
                 <a:solidFill>
                   <a:srgbClr val="434A63"/>
                 </a:solidFill>
@@ -5108,9 +4883,9 @@
                 <a:ea typeface="Arial" pitchFamily="34" charset="-122"/>
                 <a:cs typeface="Arial" pitchFamily="34" charset="-120"/>
               </a:rPr>
-              <a:t>Gleiche Gruppen, eine Person teilt den Bildschirm – alle tippen auf dem eigenen Rechner mit.</a:t>
-            </a:r>
-            <a:endParaRPr lang="en-US" sz="1250" dirty="0"/>
+              <a:t>Windows: Docker Desktop lädt WSL2 als Unterbau, ein Neustart kann dazugehören.</a:t>
+            </a:r>
+            <a:endParaRPr lang="en-US" sz="1150" dirty="0"/>
           </a:p>
           <a:p>
             <a:pPr indent="0" marL="0">
@@ -5120,9 +4895,9 @@
               <a:buNone/>
             </a:pPr>
             <a:r>
-              <a:rPr lang="en-US" sz="1250" b="1" dirty="0">
-                <a:solidFill>
-                  <a:srgbClr val="9A6310"/>
+              <a:rPr lang="en-US" sz="1150" b="1" dirty="0">
+                <a:solidFill>
+                  <a:srgbClr val="3843AF"/>
                 </a:solidFill>
                 <a:latin typeface="Arial" pitchFamily="34" charset="0"/>
                 <a:ea typeface="Arial" pitchFamily="34" charset="-122"/>
@@ -5140,7 +4915,7 @@
               <a:buNone/>
             </a:pPr>
             <a:r>
-              <a:rPr lang="en-US" sz="1250" dirty="0">
+              <a:rPr lang="en-US" sz="1150" dirty="0">
                 <a:solidFill>
                   <a:srgbClr val="434A63"/>
                 </a:solidFill>
@@ -5148,9 +4923,9 @@
                 <a:ea typeface="Arial" pitchFamily="34" charset="-122"/>
                 <a:cs typeface="Arial" pitchFamily="34" charset="-120"/>
               </a:rPr>
-              <a:t>Die Anleitung zeigt jeden Befehl mit erwarteter Ausgabe – vergleicht, was bei euch anders aussieht.</a:t>
-            </a:r>
-            <a:endParaRPr lang="en-US" sz="1250" dirty="0"/>
+              <a:t>macOS: Installer ziehen, starten, fertig.</a:t>
+            </a:r>
+            <a:endParaRPr lang="en-US" sz="1150" dirty="0"/>
           </a:p>
           <a:p>
             <a:pPr indent="0" marL="0">
@@ -5160,9 +4935,9 @@
               <a:buNone/>
             </a:pPr>
             <a:r>
-              <a:rPr lang="en-US" sz="1250" b="1" dirty="0">
-                <a:solidFill>
-                  <a:srgbClr val="9A6310"/>
+              <a:rPr lang="en-US" sz="1150" b="1" dirty="0">
+                <a:solidFill>
+                  <a:srgbClr val="3843AF"/>
                 </a:solidFill>
                 <a:latin typeface="Arial" pitchFamily="34" charset="0"/>
                 <a:ea typeface="Arial" pitchFamily="34" charset="-122"/>
@@ -5180,7 +4955,7 @@
               <a:buNone/>
             </a:pPr>
             <a:r>
-              <a:rPr lang="en-US" sz="1250" dirty="0">
+              <a:rPr lang="en-US" sz="1150" dirty="0">
                 <a:solidFill>
                   <a:srgbClr val="434A63"/>
                 </a:solidFill>
@@ -5188,9 +4963,9 @@
                 <a:ea typeface="Arial" pitchFamily="34" charset="-122"/>
                 <a:cs typeface="Arial" pitchFamily="34" charset="-120"/>
               </a:rPr>
-              <a:t>Teil 1 ist Pflicht bis einschließlich Aufräumen. Die Kür beginnt erst, wenn Teil 1 sauber durch ist.</a:t>
-            </a:r>
-            <a:endParaRPr lang="en-US" sz="1250" dirty="0"/>
+              <a:t>Linux: Docker Engine reicht („docker“ aus der Paketverwaltung).</a:t>
+            </a:r>
+            <a:endParaRPr lang="en-US" sz="1150" dirty="0"/>
           </a:p>
           <a:p>
             <a:pPr indent="0" marL="0">
@@ -5200,9 +4975,9 @@
               <a:buNone/>
             </a:pPr>
             <a:r>
-              <a:rPr lang="en-US" sz="1250" b="1" dirty="0">
-                <a:solidFill>
-                  <a:srgbClr val="9A6310"/>
+              <a:rPr lang="en-US" sz="1150" b="1" dirty="0">
+                <a:solidFill>
+                  <a:srgbClr val="3843AF"/>
                 </a:solidFill>
                 <a:latin typeface="Arial" pitchFamily="34" charset="0"/>
                 <a:ea typeface="Arial" pitchFamily="34" charset="-122"/>
@@ -5220,7 +4995,7 @@
               <a:buNone/>
             </a:pPr>
             <a:r>
-              <a:rPr lang="en-US" sz="1250" dirty="0">
+              <a:rPr lang="en-US" sz="1150" dirty="0">
                 <a:solidFill>
                   <a:srgbClr val="434A63"/>
                 </a:solidFill>
@@ -5228,39 +5003,58 @@
                 <a:ea typeface="Arial" pitchFamily="34" charset="-122"/>
                 <a:cs typeface="Arial" pitchFamily="34" charset="-120"/>
               </a:rPr>
-              <a:t>Schnell durch? Am Ende der Kür-Seite warten vier Bonus-Experimente – eines davon erklärt schon Montag.</a:t>
-            </a:r>
-            <a:endParaRPr lang="en-US" sz="1250" dirty="0"/>
-          </a:p>
-          <a:p>
-            <a:pPr indent="0" marL="0">
-              <a:lnSpc>
-                <a:spcPct val="92000"/>
-              </a:lnSpc>
-              <a:buNone/>
-            </a:pPr>
-            <a:r>
-              <a:rPr lang="en-US" sz="1250" b="1" dirty="0">
-                <a:solidFill>
-                  <a:srgbClr val="9A6310"/>
-                </a:solidFill>
-                <a:latin typeface="Arial" pitchFamily="34" charset="0"/>
-                <a:ea typeface="Arial" pitchFamily="34" charset="-122"/>
-                <a:cs typeface="Arial" pitchFamily="34" charset="-120"/>
-              </a:rPr>
-              <a:t>▸   </a:t>
-            </a:r>
-            <a:pPr indent="0" marL="0">
-              <a:lnSpc>
-                <a:spcPct val="92000"/>
-              </a:lnSpc>
-              <a:spcAft>
-                <a:spcPts val="900"/>
-              </a:spcAft>
-              <a:buNone/>
-            </a:pPr>
-            <a:r>
-              <a:rPr lang="en-US" sz="1250" dirty="0">
+              <a:t>Test bei allen gleich: „docker version“ meldet Client UND Server.</a:t>
+            </a:r>
+            <a:endParaRPr lang="en-US" sz="1150" dirty="0"/>
+          </a:p>
+        </p:txBody>
+      </p:sp>
+      <p:sp>
+        <p:nvSpPr>
+          <p:cNvPr id="11" name="Shape 9"/>
+          <p:cNvSpPr/>
+          <p:nvPr/>
+        </p:nvSpPr>
+        <p:spPr>
+          <a:xfrm>
+            <a:off x="566928" y="4206240"/>
+            <a:ext cx="32004" cy="256032"/>
+          </a:xfrm>
+          <a:prstGeom prst="rect">
+            <a:avLst/>
+          </a:prstGeom>
+          <a:solidFill>
+            <a:srgbClr val="3843AF"/>
+          </a:solidFill>
+          <a:ln/>
+        </p:spPr>
+      </p:sp>
+      <p:sp>
+        <p:nvSpPr>
+          <p:cNvPr id="12" name="Text 10"/>
+          <p:cNvSpPr/>
+          <p:nvPr/>
+        </p:nvSpPr>
+        <p:spPr>
+          <a:xfrm>
+            <a:off x="749808" y="4160520"/>
+            <a:ext cx="7827264" cy="402336"/>
+          </a:xfrm>
+          <a:prstGeom prst="rect">
+            <a:avLst/>
+          </a:prstGeom>
+          <a:noFill/>
+          <a:ln/>
+        </p:spPr>
+        <p:txBody>
+          <a:bodyPr wrap="square" lIns="0" tIns="0" rIns="0" bIns="0" rtlCol="0" anchor="ctr"/>
+          <a:lstStyle/>
+          <a:p>
+            <a:pPr indent="0" marL="0">
+              <a:buNone/>
+            </a:pPr>
+            <a:r>
+              <a:rPr lang="en-US" sz="1200" b="1" dirty="0">
                 <a:solidFill>
                   <a:srgbClr val="434A63"/>
                 </a:solidFill>
@@ -5268,176 +5062,15 @@
                 <a:ea typeface="Arial" pitchFamily="34" charset="-122"/>
                 <a:cs typeface="Arial" pitchFamily="34" charset="-120"/>
               </a:rPr>
-              <a:t>Wer ohne Docker dasteht: in der Gruppe mitarbeiten und zu Hause nachziehen – Installation läuft notfalls nebenher.</a:t>
-            </a:r>
-            <a:endParaRPr lang="en-US" sz="1250" dirty="0"/>
-          </a:p>
-          <a:p>
-            <a:pPr indent="0" marL="0">
-              <a:lnSpc>
-                <a:spcPct val="92000"/>
-              </a:lnSpc>
-              <a:buNone/>
-            </a:pPr>
-            <a:r>
-              <a:rPr lang="en-US" sz="1250" b="1" dirty="0">
-                <a:solidFill>
-                  <a:srgbClr val="9A6310"/>
-                </a:solidFill>
-                <a:latin typeface="Arial" pitchFamily="34" charset="0"/>
-                <a:ea typeface="Arial" pitchFamily="34" charset="-122"/>
-                <a:cs typeface="Arial" pitchFamily="34" charset="-120"/>
-              </a:rPr>
-              <a:t>▸   </a:t>
-            </a:r>
-            <a:pPr indent="0" marL="0">
-              <a:lnSpc>
-                <a:spcPct val="92000"/>
-              </a:lnSpc>
-              <a:spcAft>
-                <a:spcPts val="900"/>
-              </a:spcAft>
-              <a:buNone/>
-            </a:pPr>
-            <a:r>
-              <a:rPr lang="en-US" sz="1250" dirty="0">
-                <a:solidFill>
-                  <a:srgbClr val="434A63"/>
-                </a:solidFill>
-                <a:latin typeface="Arial" pitchFamily="34" charset="0"/>
-                <a:ea typeface="Arial" pitchFamily="34" charset="-122"/>
-                <a:cs typeface="Arial" pitchFamily="34" charset="-120"/>
-              </a:rPr>
-              <a:t>Wenn es klemmt: Stolpersteine-Seite, dann „Um Hilfe bitten“.</a:t>
-            </a:r>
-            <a:endParaRPr lang="en-US" sz="1250" dirty="0"/>
-          </a:p>
-        </p:txBody>
-      </p:sp>
-      <p:sp>
-        <p:nvSpPr>
-          <p:cNvPr id="6" name="Shape 4"/>
-          <p:cNvSpPr/>
-          <p:nvPr/>
-        </p:nvSpPr>
-        <p:spPr>
-          <a:xfrm>
-            <a:off x="566928" y="3602736"/>
-            <a:ext cx="8010144" cy="822960"/>
-          </a:xfrm>
-          <a:prstGeom prst="rect">
-            <a:avLst/>
-          </a:prstGeom>
-          <a:solidFill>
-            <a:srgbClr val="F5F6FC"/>
-          </a:solidFill>
-          <a:ln/>
-        </p:spPr>
-      </p:sp>
-      <p:sp>
-        <p:nvSpPr>
-          <p:cNvPr id="7" name="Shape 5"/>
-          <p:cNvSpPr/>
-          <p:nvPr/>
-        </p:nvSpPr>
-        <p:spPr>
-          <a:xfrm>
-            <a:off x="566928" y="3602736"/>
-            <a:ext cx="41148" cy="822960"/>
-          </a:xfrm>
-          <a:prstGeom prst="rect">
-            <a:avLst/>
-          </a:prstGeom>
-          <a:solidFill>
-            <a:srgbClr val="9A6310"/>
-          </a:solidFill>
-          <a:ln/>
-        </p:spPr>
-      </p:sp>
-      <p:sp>
-        <p:nvSpPr>
-          <p:cNvPr id="8" name="Text 6"/>
-          <p:cNvSpPr/>
-          <p:nvPr/>
-        </p:nvSpPr>
-        <p:spPr>
-          <a:xfrm>
-            <a:off x="804672" y="3749040"/>
-            <a:ext cx="7607808" cy="242062"/>
-          </a:xfrm>
-          <a:prstGeom prst="rect">
-            <a:avLst/>
-          </a:prstGeom>
-          <a:noFill/>
-          <a:ln/>
-        </p:spPr>
-        <p:txBody>
-          <a:bodyPr wrap="square" lIns="0" tIns="0" rIns="0" bIns="0" rtlCol="0" anchor="t"/>
-          <a:lstStyle/>
-          <a:p>
-            <a:pPr indent="0" marL="0">
-              <a:buNone/>
-            </a:pPr>
-            <a:r>
-              <a:rPr lang="en-US" sz="1300" b="1" dirty="0">
-                <a:solidFill>
-                  <a:srgbClr val="272E52"/>
-                </a:solidFill>
-                <a:latin typeface="Arial" pitchFamily="34" charset="0"/>
-                <a:ea typeface="Arial" pitchFamily="34" charset="-122"/>
-                <a:cs typeface="Arial" pitchFamily="34" charset="-120"/>
-              </a:rPr>
-              <a:t>Um 20:15 sind alle wieder hier</a:t>
-            </a:r>
-            <a:endParaRPr lang="en-US" sz="1300" dirty="0"/>
-          </a:p>
-        </p:txBody>
-      </p:sp>
-      <p:sp>
-        <p:nvSpPr>
-          <p:cNvPr id="9" name="Text 7"/>
-          <p:cNvSpPr/>
-          <p:nvPr/>
-        </p:nvSpPr>
-        <p:spPr>
-          <a:xfrm>
-            <a:off x="804672" y="4036822"/>
-            <a:ext cx="7607808" cy="270002"/>
-          </a:xfrm>
-          <a:prstGeom prst="rect">
-            <a:avLst/>
-          </a:prstGeom>
-          <a:noFill/>
-          <a:ln/>
-        </p:spPr>
-        <p:txBody>
-          <a:bodyPr wrap="square" lIns="0" tIns="0" rIns="0" bIns="0" rtlCol="0" anchor="t"/>
-          <a:lstStyle/>
-          <a:p>
-            <a:pPr indent="0" marL="0">
-              <a:lnSpc>
-                <a:spcPct val="92000"/>
-              </a:lnSpc>
-              <a:buNone/>
-            </a:pPr>
-            <a:r>
-              <a:rPr lang="en-US" sz="1150" dirty="0">
-                <a:solidFill>
-                  <a:srgbClr val="434A63"/>
-                </a:solidFill>
-                <a:latin typeface="Arial" pitchFamily="34" charset="0"/>
-                <a:ea typeface="Arial" pitchFamily="34" charset="-122"/>
-                <a:cs typeface="Arial" pitchFamily="34" charset="-120"/>
-              </a:rPr>
-              <a:t>Jede Gruppe zeigt kurz ihr docker ps – und wer die Kür geschafft hat, seine eigene Seite im Browser.</a:t>
-            </a:r>
-            <a:endParaRPr lang="en-US" sz="1150" dirty="0"/>
-          </a:p>
-        </p:txBody>
-      </p:sp>
-      <p:sp>
-        <p:nvSpPr>
-          <p:cNvPr id="10" name="Shape 8"/>
+              <a:t>Kleiner Gruß von Montag: Docker Desktop startet dafür intern eine eigene VM vom Typ 2, ihr wisst Bescheid.</a:t>
+            </a:r>
+            <a:endParaRPr lang="en-US" sz="1200" dirty="0"/>
+          </a:p>
+        </p:txBody>
+      </p:sp>
+      <p:sp>
+        <p:nvSpPr>
+          <p:cNvPr id="13" name="Shape 11"/>
           <p:cNvSpPr/>
           <p:nvPr/>
         </p:nvSpPr>
@@ -5460,7 +5093,7 @@
       </p:sp>
       <p:sp>
         <p:nvSpPr>
-          <p:cNvPr id="11" name="Text 9"/>
+          <p:cNvPr id="14" name="Text 12"/>
           <p:cNvSpPr/>
           <p:nvPr/>
         </p:nvSpPr>
@@ -5491,7 +5124,7 @@
                 <a:ea typeface="Arial" pitchFamily="34" charset="-122"/>
                 <a:cs typeface="Arial" pitchFamily="34" charset="-120"/>
               </a:rPr>
-              <a:t>Breakout</a:t>
+              <a:t>Werkzeug</a:t>
             </a:r>
             <a:endParaRPr lang="en-US" sz="1050" dirty="0"/>
           </a:p>
@@ -5499,7 +5132,7 @@
       </p:sp>
       <p:sp>
         <p:nvSpPr>
-          <p:cNvPr id="12" name="Text 10"/>
+          <p:cNvPr id="15" name="Text 13"/>
           <p:cNvSpPr/>
           <p:nvPr/>
         </p:nvSpPr>
@@ -5530,7 +5163,7 @@
                 <a:ea typeface="Arial" pitchFamily="34" charset="-122"/>
                 <a:cs typeface="Arial" pitchFamily="34" charset="-120"/>
               </a:rPr>
-              <a:t>12/15</a:t>
+              <a:t>13/18</a:t>
             </a:r>
             <a:endParaRPr lang="en-US" sz="1050" dirty="0"/>
           </a:p>
@@ -5576,67 +5209,107 @@
         </p:nvSpPr>
         <p:spPr>
           <a:xfrm>
-            <a:off x="566928" y="201168"/>
+            <a:off x="6355080" y="0"/>
+            <a:ext cx="2788920" cy="5143500"/>
+          </a:xfrm>
+          <a:prstGeom prst="rect">
+            <a:avLst/>
+          </a:prstGeom>
+          <a:solidFill>
+            <a:srgbClr val="FBF2E3"/>
+          </a:solidFill>
+          <a:ln/>
+        </p:spPr>
+      </p:sp>
+      <p:sp>
+        <p:nvSpPr>
+          <p:cNvPr id="3" name="Shape 1"/>
+          <p:cNvSpPr/>
+          <p:nvPr/>
+        </p:nvSpPr>
+        <p:spPr>
+          <a:xfrm>
+            <a:off x="6355080" y="0"/>
+            <a:ext cx="45720" cy="5143500"/>
+          </a:xfrm>
+          <a:prstGeom prst="rect">
+            <a:avLst/>
+          </a:prstGeom>
+          <a:solidFill>
+            <a:srgbClr val="9A6310"/>
+          </a:solidFill>
+          <a:ln/>
+        </p:spPr>
+      </p:sp>
+      <p:sp>
+        <p:nvSpPr>
+          <p:cNvPr id="4" name="Text 2"/>
+          <p:cNvSpPr/>
+          <p:nvPr/>
+        </p:nvSpPr>
+        <p:spPr>
+          <a:xfrm>
+            <a:off x="6629400" y="1463040"/>
+            <a:ext cx="2194560" cy="1737360"/>
+          </a:xfrm>
+          <a:prstGeom prst="rect">
+            <a:avLst/>
+          </a:prstGeom>
+          <a:noFill/>
+          <a:ln/>
+        </p:spPr>
+        <p:txBody>
+          <a:bodyPr wrap="square" lIns="0" tIns="0" rIns="0" bIns="0" rtlCol="0" anchor="ctr"/>
+          <a:lstStyle/>
+          <a:p>
+            <a:pPr algn="ctr" indent="0" marL="0">
+              <a:buNone/>
+            </a:pPr>
+            <a:r>
+              <a:rPr lang="en-US" sz="8400" b="1" dirty="0">
+                <a:solidFill>
+                  <a:srgbClr val="9A6310"/>
+                </a:solidFill>
+                <a:latin typeface="Arial" pitchFamily="34" charset="0"/>
+                <a:ea typeface="Arial" pitchFamily="34" charset="-122"/>
+                <a:cs typeface="Arial" pitchFamily="34" charset="-120"/>
+              </a:rPr>
+              <a:t>02</a:t>
+            </a:r>
+            <a:endParaRPr lang="en-US" sz="8400" dirty="0"/>
+          </a:p>
+        </p:txBody>
+      </p:sp>
+      <p:sp>
+        <p:nvSpPr>
+          <p:cNvPr id="5" name="Shape 3"/>
+          <p:cNvSpPr/>
+          <p:nvPr/>
+        </p:nvSpPr>
+        <p:spPr>
+          <a:xfrm>
+            <a:off x="566928" y="1883664"/>
             <a:ext cx="475488" cy="50292"/>
           </a:xfrm>
           <a:prstGeom prst="rect">
             <a:avLst/>
           </a:prstGeom>
           <a:solidFill>
-            <a:srgbClr val="0F7C86"/>
+            <a:srgbClr val="9A6310"/>
           </a:solidFill>
           <a:ln/>
         </p:spPr>
       </p:sp>
       <p:sp>
         <p:nvSpPr>
-          <p:cNvPr id="3" name="Text 1"/>
-          <p:cNvSpPr/>
-          <p:nvPr/>
-        </p:nvSpPr>
-        <p:spPr>
-          <a:xfrm>
-            <a:off x="566928" y="384048"/>
-            <a:ext cx="8010144" cy="237744"/>
-          </a:xfrm>
-          <a:prstGeom prst="rect">
-            <a:avLst/>
-          </a:prstGeom>
-          <a:noFill/>
-          <a:ln/>
-        </p:spPr>
-        <p:txBody>
-          <a:bodyPr wrap="square" lIns="0" tIns="0" rIns="0" bIns="0" rtlCol="0" anchor="ctr"/>
-          <a:lstStyle/>
-          <a:p>
-            <a:pPr indent="0" marL="0">
-              <a:buNone/>
-            </a:pPr>
-            <a:r>
-              <a:rPr lang="en-US" sz="1150" b="1" spc="180" kern="0" dirty="0">
-                <a:solidFill>
-                  <a:srgbClr val="0F7C86"/>
-                </a:solidFill>
-                <a:latin typeface="Arial" pitchFamily="34" charset="0"/>
-                <a:ea typeface="Arial" pitchFamily="34" charset="-122"/>
-                <a:cs typeface="Arial" pitchFamily="34" charset="-120"/>
-              </a:rPr>
-              <a:t>AUSWERTUNG · 25 MINUTEN</a:t>
-            </a:r>
-            <a:endParaRPr lang="en-US" sz="1150" dirty="0"/>
-          </a:p>
-        </p:txBody>
-      </p:sp>
-      <p:sp>
-        <p:nvSpPr>
-          <p:cNvPr id="4" name="Text 2"/>
-          <p:cNvSpPr/>
-          <p:nvPr/>
-        </p:nvSpPr>
-        <p:spPr>
-          <a:xfrm>
-            <a:off x="566928" y="731520"/>
-            <a:ext cx="8010144" cy="603504"/>
+          <p:cNvPr id="6" name="Text 4"/>
+          <p:cNvSpPr/>
+          <p:nvPr/>
+        </p:nvSpPr>
+        <p:spPr>
+          <a:xfrm>
+            <a:off x="566928" y="2084832"/>
+            <a:ext cx="5394960" cy="868680"/>
           </a:xfrm>
           <a:prstGeom prst="rect">
             <a:avLst/>
@@ -5652,7 +5325,7 @@
               <a:buNone/>
             </a:pPr>
             <a:r>
-              <a:rPr lang="en-US" sz="2600" b="1" dirty="0">
+              <a:rPr lang="en-US" sz="3000" b="1" dirty="0">
                 <a:solidFill>
                   <a:srgbClr val="272E52"/>
                 </a:solidFill>
@@ -5660,68 +5333,9 @@
                 <a:ea typeface="Arial" pitchFamily="34" charset="-122"/>
                 <a:cs typeface="Arial" pitchFamily="34" charset="-120"/>
               </a:rPr>
-              <a:t>Eure Container</a:t>
-            </a:r>
-            <a:endParaRPr lang="en-US" sz="2600" dirty="0"/>
-          </a:p>
-        </p:txBody>
-      </p:sp>
-      <p:sp>
-        <p:nvSpPr>
-          <p:cNvPr id="5" name="Shape 3"/>
-          <p:cNvSpPr/>
-          <p:nvPr/>
-        </p:nvSpPr>
-        <p:spPr>
-          <a:xfrm>
-            <a:off x="438912" y="1810512"/>
-            <a:ext cx="8266176" cy="365760"/>
-          </a:xfrm>
-          <a:prstGeom prst="rect">
-            <a:avLst/>
-          </a:prstGeom>
-          <a:solidFill>
-            <a:srgbClr val="F5F6FC"/>
-          </a:solidFill>
-          <a:ln/>
-        </p:spPr>
-      </p:sp>
-      <p:sp>
-        <p:nvSpPr>
-          <p:cNvPr id="6" name="Text 4"/>
-          <p:cNvSpPr/>
-          <p:nvPr/>
-        </p:nvSpPr>
-        <p:spPr>
-          <a:xfrm>
-            <a:off x="566928" y="1810512"/>
-            <a:ext cx="548640" cy="365760"/>
-          </a:xfrm>
-          <a:prstGeom prst="rect">
-            <a:avLst/>
-          </a:prstGeom>
-          <a:noFill/>
-          <a:ln/>
-        </p:spPr>
-        <p:txBody>
-          <a:bodyPr wrap="square" lIns="0" tIns="0" rIns="0" bIns="0" rtlCol="0" anchor="ctr"/>
-          <a:lstStyle/>
-          <a:p>
-            <a:pPr indent="0" marL="0">
-              <a:buNone/>
-            </a:pPr>
-            <a:r>
-              <a:rPr lang="en-US" sz="1200" b="1" dirty="0">
-                <a:solidFill>
-                  <a:srgbClr val="0F7C86"/>
-                </a:solidFill>
-                <a:latin typeface="Courier New" pitchFamily="34" charset="0"/>
-                <a:ea typeface="Courier New" pitchFamily="34" charset="-122"/>
-                <a:cs typeface="Courier New" pitchFamily="34" charset="-120"/>
-              </a:rPr>
-              <a:t>1</a:t>
-            </a:r>
-            <a:endParaRPr lang="en-US" sz="1200" dirty="0"/>
+              <a:t>Der erste Container</a:t>
+            </a:r>
+            <a:endParaRPr lang="en-US" sz="3000" dirty="0"/>
           </a:p>
         </p:txBody>
       </p:sp>
@@ -5733,497 +5347,24 @@
         </p:nvSpPr>
         <p:spPr>
           <a:xfrm>
-            <a:off x="1115568" y="1810512"/>
-            <a:ext cx="7461504" cy="365760"/>
-          </a:xfrm>
-          <a:prstGeom prst="rect">
-            <a:avLst/>
-          </a:prstGeom>
-          <a:noFill/>
-          <a:ln/>
-        </p:spPr>
-        <p:txBody>
-          <a:bodyPr wrap="square" lIns="0" tIns="0" rIns="0" bIns="0" rtlCol="0" anchor="ctr"/>
-          <a:lstStyle/>
-          <a:p>
-            <a:pPr indent="0" marL="0">
-              <a:buNone/>
-            </a:pPr>
-            <a:r>
-              <a:rPr lang="en-US" sz="1200" dirty="0">
-                <a:solidFill>
-                  <a:srgbClr val="434A63"/>
-                </a:solidFill>
-                <a:latin typeface="Arial" pitchFamily="34" charset="0"/>
-                <a:ea typeface="Arial" pitchFamily="34" charset="-122"/>
-                <a:cs typeface="Arial" pitchFamily="34" charset="-120"/>
-              </a:rPr>
-              <a:t>Jede Gruppe: docker ps zeigen – was läuft, was ist gestoppt, was wurde aufgeräumt?</a:t>
-            </a:r>
-            <a:endParaRPr lang="en-US" sz="1200" dirty="0"/>
-          </a:p>
-        </p:txBody>
-      </p:sp>
-      <p:sp>
-        <p:nvSpPr>
-          <p:cNvPr id="8" name="Text 6"/>
-          <p:cNvSpPr/>
-          <p:nvPr/>
-        </p:nvSpPr>
-        <p:spPr>
-          <a:xfrm>
-            <a:off x="566928" y="2176272"/>
-            <a:ext cx="548640" cy="365760"/>
-          </a:xfrm>
-          <a:prstGeom prst="rect">
-            <a:avLst/>
-          </a:prstGeom>
-          <a:noFill/>
-          <a:ln/>
-        </p:spPr>
-        <p:txBody>
-          <a:bodyPr wrap="square" lIns="0" tIns="0" rIns="0" bIns="0" rtlCol="0" anchor="ctr"/>
-          <a:lstStyle/>
-          <a:p>
-            <a:pPr indent="0" marL="0">
-              <a:buNone/>
-            </a:pPr>
-            <a:r>
-              <a:rPr lang="en-US" sz="1200" b="1" dirty="0">
-                <a:solidFill>
-                  <a:srgbClr val="0F7C86"/>
-                </a:solidFill>
-                <a:latin typeface="Courier New" pitchFamily="34" charset="0"/>
-                <a:ea typeface="Courier New" pitchFamily="34" charset="-122"/>
-                <a:cs typeface="Courier New" pitchFamily="34" charset="-120"/>
-              </a:rPr>
-              <a:t>2</a:t>
-            </a:r>
-            <a:endParaRPr lang="en-US" sz="1200" dirty="0"/>
-          </a:p>
-        </p:txBody>
-      </p:sp>
-      <p:sp>
-        <p:nvSpPr>
-          <p:cNvPr id="9" name="Text 7"/>
-          <p:cNvSpPr/>
-          <p:nvPr/>
-        </p:nvSpPr>
-        <p:spPr>
-          <a:xfrm>
-            <a:off x="1115568" y="2176272"/>
-            <a:ext cx="7461504" cy="365760"/>
-          </a:xfrm>
-          <a:prstGeom prst="rect">
-            <a:avLst/>
-          </a:prstGeom>
-          <a:noFill/>
-          <a:ln/>
-        </p:spPr>
-        <p:txBody>
-          <a:bodyPr wrap="square" lIns="0" tIns="0" rIns="0" bIns="0" rtlCol="0" anchor="ctr"/>
-          <a:lstStyle/>
-          <a:p>
-            <a:pPr indent="0" marL="0">
-              <a:buNone/>
-            </a:pPr>
-            <a:r>
-              <a:rPr lang="en-US" sz="1200" dirty="0">
-                <a:solidFill>
-                  <a:srgbClr val="434A63"/>
-                </a:solidFill>
-                <a:latin typeface="Arial" pitchFamily="34" charset="0"/>
-                <a:ea typeface="Arial" pitchFamily="34" charset="-122"/>
-                <a:cs typeface="Arial" pitchFamily="34" charset="-120"/>
-              </a:rPr>
-              <a:t>Die Port-Frage: Wie kam nginx in euren Browser – wer hat da worauf weitergeleitet?</a:t>
-            </a:r>
-            <a:endParaRPr lang="en-US" sz="1200" dirty="0"/>
-          </a:p>
-        </p:txBody>
-      </p:sp>
-      <p:sp>
-        <p:nvSpPr>
-          <p:cNvPr id="10" name="Shape 8"/>
-          <p:cNvSpPr/>
-          <p:nvPr/>
-        </p:nvSpPr>
-        <p:spPr>
-          <a:xfrm>
-            <a:off x="438912" y="2542032"/>
-            <a:ext cx="8266176" cy="365760"/>
-          </a:xfrm>
-          <a:prstGeom prst="rect">
-            <a:avLst/>
-          </a:prstGeom>
-          <a:solidFill>
-            <a:srgbClr val="F5F6FC"/>
-          </a:solidFill>
-          <a:ln/>
-        </p:spPr>
-      </p:sp>
-      <p:sp>
-        <p:nvSpPr>
-          <p:cNvPr id="11" name="Text 9"/>
-          <p:cNvSpPr/>
-          <p:nvPr/>
-        </p:nvSpPr>
-        <p:spPr>
-          <a:xfrm>
-            <a:off x="566928" y="2542032"/>
-            <a:ext cx="548640" cy="365760"/>
-          </a:xfrm>
-          <a:prstGeom prst="rect">
-            <a:avLst/>
-          </a:prstGeom>
-          <a:noFill/>
-          <a:ln/>
-        </p:spPr>
-        <p:txBody>
-          <a:bodyPr wrap="square" lIns="0" tIns="0" rIns="0" bIns="0" rtlCol="0" anchor="ctr"/>
-          <a:lstStyle/>
-          <a:p>
-            <a:pPr indent="0" marL="0">
-              <a:buNone/>
-            </a:pPr>
-            <a:r>
-              <a:rPr lang="en-US" sz="1200" b="1" dirty="0">
-                <a:solidFill>
-                  <a:srgbClr val="0F7C86"/>
-                </a:solidFill>
-                <a:latin typeface="Courier New" pitchFamily="34" charset="0"/>
-                <a:ea typeface="Courier New" pitchFamily="34" charset="-122"/>
-                <a:cs typeface="Courier New" pitchFamily="34" charset="-120"/>
-              </a:rPr>
-              <a:t>3</a:t>
-            </a:r>
-            <a:endParaRPr lang="en-US" sz="1200" dirty="0"/>
-          </a:p>
-        </p:txBody>
-      </p:sp>
-      <p:sp>
-        <p:nvSpPr>
-          <p:cNvPr id="12" name="Text 10"/>
-          <p:cNvSpPr/>
-          <p:nvPr/>
-        </p:nvSpPr>
-        <p:spPr>
-          <a:xfrm>
-            <a:off x="1115568" y="2542032"/>
-            <a:ext cx="7461504" cy="365760"/>
-          </a:xfrm>
-          <a:prstGeom prst="rect">
-            <a:avLst/>
-          </a:prstGeom>
-          <a:noFill/>
-          <a:ln/>
-        </p:spPr>
-        <p:txBody>
-          <a:bodyPr wrap="square" lIns="0" tIns="0" rIns="0" bIns="0" rtlCol="0" anchor="ctr"/>
-          <a:lstStyle/>
-          <a:p>
-            <a:pPr indent="0" marL="0">
-              <a:buNone/>
-            </a:pPr>
-            <a:r>
-              <a:rPr lang="en-US" sz="1200" dirty="0">
-                <a:solidFill>
-                  <a:srgbClr val="434A63"/>
-                </a:solidFill>
-                <a:latin typeface="Arial" pitchFamily="34" charset="0"/>
-                <a:ea typeface="Arial" pitchFamily="34" charset="-122"/>
-                <a:cs typeface="Arial" pitchFamily="34" charset="-120"/>
-              </a:rPr>
-              <a:t>Kür-Runde: eigene Seiten im Browser zeigen – und die Image-Größen vergleichen</a:t>
-            </a:r>
-            <a:endParaRPr lang="en-US" sz="1200" dirty="0"/>
-          </a:p>
-        </p:txBody>
-      </p:sp>
-      <p:sp>
-        <p:nvSpPr>
-          <p:cNvPr id="13" name="Text 11"/>
-          <p:cNvSpPr/>
-          <p:nvPr/>
-        </p:nvSpPr>
-        <p:spPr>
-          <a:xfrm>
-            <a:off x="566928" y="2907792"/>
-            <a:ext cx="548640" cy="365760"/>
-          </a:xfrm>
-          <a:prstGeom prst="rect">
-            <a:avLst/>
-          </a:prstGeom>
-          <a:noFill/>
-          <a:ln/>
-        </p:spPr>
-        <p:txBody>
-          <a:bodyPr wrap="square" lIns="0" tIns="0" rIns="0" bIns="0" rtlCol="0" anchor="ctr"/>
-          <a:lstStyle/>
-          <a:p>
-            <a:pPr indent="0" marL="0">
-              <a:buNone/>
-            </a:pPr>
-            <a:r>
-              <a:rPr lang="en-US" sz="1200" b="1" dirty="0">
-                <a:solidFill>
-                  <a:srgbClr val="0F7C86"/>
-                </a:solidFill>
-                <a:latin typeface="Courier New" pitchFamily="34" charset="0"/>
-                <a:ea typeface="Courier New" pitchFamily="34" charset="-122"/>
-                <a:cs typeface="Courier New" pitchFamily="34" charset="-120"/>
-              </a:rPr>
-              <a:t>4</a:t>
-            </a:r>
-            <a:endParaRPr lang="en-US" sz="1200" dirty="0"/>
-          </a:p>
-        </p:txBody>
-      </p:sp>
-      <p:sp>
-        <p:nvSpPr>
-          <p:cNvPr id="14" name="Text 12"/>
-          <p:cNvSpPr/>
-          <p:nvPr/>
-        </p:nvSpPr>
-        <p:spPr>
-          <a:xfrm>
-            <a:off x="1115568" y="2907792"/>
-            <a:ext cx="7461504" cy="365760"/>
-          </a:xfrm>
-          <a:prstGeom prst="rect">
-            <a:avLst/>
-          </a:prstGeom>
-          <a:noFill/>
-          <a:ln/>
-        </p:spPr>
-        <p:txBody>
-          <a:bodyPr wrap="square" lIns="0" tIns="0" rIns="0" bIns="0" rtlCol="0" anchor="ctr"/>
-          <a:lstStyle/>
-          <a:p>
-            <a:pPr indent="0" marL="0">
-              <a:buNone/>
-            </a:pPr>
-            <a:r>
-              <a:rPr lang="en-US" sz="1200" dirty="0">
-                <a:solidFill>
-                  <a:srgbClr val="434A63"/>
-                </a:solidFill>
-                <a:latin typeface="Arial" pitchFamily="34" charset="0"/>
-                <a:ea typeface="Arial" pitchFamily="34" charset="-122"/>
-                <a:cs typeface="Arial" pitchFamily="34" charset="-120"/>
-              </a:rPr>
-              <a:t>Wer im Bonus war: Was ist mit der Änderung im Container passiert? (Cliffhanger für Montag)</a:t>
-            </a:r>
-            <a:endParaRPr lang="en-US" sz="1200" dirty="0"/>
-          </a:p>
-        </p:txBody>
-      </p:sp>
-      <p:sp>
-        <p:nvSpPr>
-          <p:cNvPr id="15" name="Shape 13"/>
-          <p:cNvSpPr/>
-          <p:nvPr/>
-        </p:nvSpPr>
-        <p:spPr>
-          <a:xfrm>
-            <a:off x="438912" y="3273552"/>
-            <a:ext cx="8266176" cy="365760"/>
-          </a:xfrm>
-          <a:prstGeom prst="rect">
-            <a:avLst/>
-          </a:prstGeom>
-          <a:solidFill>
-            <a:srgbClr val="F5F6FC"/>
-          </a:solidFill>
-          <a:ln/>
-        </p:spPr>
-      </p:sp>
-      <p:sp>
-        <p:nvSpPr>
-          <p:cNvPr id="16" name="Text 14"/>
-          <p:cNvSpPr/>
-          <p:nvPr/>
-        </p:nvSpPr>
-        <p:spPr>
-          <a:xfrm>
-            <a:off x="566928" y="3273552"/>
-            <a:ext cx="548640" cy="365760"/>
-          </a:xfrm>
-          <a:prstGeom prst="rect">
-            <a:avLst/>
-          </a:prstGeom>
-          <a:noFill/>
-          <a:ln/>
-        </p:spPr>
-        <p:txBody>
-          <a:bodyPr wrap="square" lIns="0" tIns="0" rIns="0" bIns="0" rtlCol="0" anchor="ctr"/>
-          <a:lstStyle/>
-          <a:p>
-            <a:pPr indent="0" marL="0">
-              <a:buNone/>
-            </a:pPr>
-            <a:r>
-              <a:rPr lang="en-US" sz="1200" b="1" dirty="0">
-                <a:solidFill>
-                  <a:srgbClr val="0F7C86"/>
-                </a:solidFill>
-                <a:latin typeface="Courier New" pitchFamily="34" charset="0"/>
-                <a:ea typeface="Courier New" pitchFamily="34" charset="-122"/>
-                <a:cs typeface="Courier New" pitchFamily="34" charset="-120"/>
-              </a:rPr>
-              <a:t>5</a:t>
-            </a:r>
-            <a:endParaRPr lang="en-US" sz="1200" dirty="0"/>
-          </a:p>
-        </p:txBody>
-      </p:sp>
-      <p:sp>
-        <p:nvSpPr>
-          <p:cNvPr id="17" name="Text 15"/>
-          <p:cNvSpPr/>
-          <p:nvPr/>
-        </p:nvSpPr>
-        <p:spPr>
-          <a:xfrm>
-            <a:off x="1115568" y="3273552"/>
-            <a:ext cx="7461504" cy="365760"/>
-          </a:xfrm>
-          <a:prstGeom prst="rect">
-            <a:avLst/>
-          </a:prstGeom>
-          <a:noFill/>
-          <a:ln/>
-        </p:spPr>
-        <p:txBody>
-          <a:bodyPr wrap="square" lIns="0" tIns="0" rIns="0" bIns="0" rtlCol="0" anchor="ctr"/>
-          <a:lstStyle/>
-          <a:p>
-            <a:pPr indent="0" marL="0">
-              <a:buNone/>
-            </a:pPr>
-            <a:r>
-              <a:rPr lang="en-US" sz="1200" dirty="0">
-                <a:solidFill>
-                  <a:srgbClr val="434A63"/>
-                </a:solidFill>
-                <a:latin typeface="Arial" pitchFamily="34" charset="0"/>
-                <a:ea typeface="Arial" pitchFamily="34" charset="-122"/>
-                <a:cs typeface="Arial" pitchFamily="34" charset="-120"/>
-              </a:rPr>
-              <a:t>Der Montags-Vergleich: Die Cloud-VM brauchte ~7 Minuten bis „Ready“ – wie lange lief euer Container?</a:t>
-            </a:r>
-            <a:endParaRPr lang="en-US" sz="1200" dirty="0"/>
-          </a:p>
-        </p:txBody>
-      </p:sp>
-      <p:sp>
-        <p:nvSpPr>
-          <p:cNvPr id="18" name="Shape 16"/>
-          <p:cNvSpPr/>
-          <p:nvPr/>
-        </p:nvSpPr>
-        <p:spPr>
-          <a:xfrm>
-            <a:off x="566928" y="4069080"/>
-            <a:ext cx="32004" cy="256032"/>
-          </a:xfrm>
-          <a:prstGeom prst="rect">
-            <a:avLst/>
-          </a:prstGeom>
-          <a:solidFill>
-            <a:srgbClr val="0F7C86"/>
-          </a:solidFill>
-          <a:ln/>
-        </p:spPr>
-      </p:sp>
-      <p:sp>
-        <p:nvSpPr>
-          <p:cNvPr id="19" name="Text 17"/>
-          <p:cNvSpPr/>
-          <p:nvPr/>
-        </p:nvSpPr>
-        <p:spPr>
-          <a:xfrm>
-            <a:off x="749808" y="4023360"/>
-            <a:ext cx="7827264" cy="402336"/>
-          </a:xfrm>
-          <a:prstGeom prst="rect">
-            <a:avLst/>
-          </a:prstGeom>
-          <a:noFill/>
-          <a:ln/>
-        </p:spPr>
-        <p:txBody>
-          <a:bodyPr wrap="square" lIns="0" tIns="0" rIns="0" bIns="0" rtlCol="0" anchor="ctr"/>
-          <a:lstStyle/>
-          <a:p>
-            <a:pPr indent="0" marL="0">
-              <a:buNone/>
-            </a:pPr>
-            <a:r>
-              <a:rPr lang="en-US" sz="1200" b="1" dirty="0">
-                <a:solidFill>
-                  <a:srgbClr val="434A63"/>
-                </a:solidFill>
-                <a:latin typeface="Arial" pitchFamily="34" charset="0"/>
-                <a:ea typeface="Arial" pitchFamily="34" charset="-122"/>
-                <a:cs typeface="Arial" pitchFamily="34" charset="-120"/>
-              </a:rPr>
-              <a:t>Die Port-Frage ist euer Netzwerkblock in Aktion: -p 8080:80 ist nichts anderes als eine kleine NAT-Regel.</a:t>
-            </a:r>
-            <a:endParaRPr lang="en-US" sz="1200" dirty="0"/>
-          </a:p>
-        </p:txBody>
-      </p:sp>
-      <p:sp>
-        <p:nvSpPr>
-          <p:cNvPr id="20" name="Shape 18"/>
-          <p:cNvSpPr/>
-          <p:nvPr/>
-        </p:nvSpPr>
-        <p:spPr>
-          <a:xfrm>
-            <a:off x="566928" y="4631436"/>
-            <a:ext cx="8010144" cy="0"/>
-          </a:xfrm>
-          <a:prstGeom prst="line">
-            <a:avLst/>
-          </a:prstGeom>
-          <a:noFill/>
-          <a:ln w="9525">
-            <a:solidFill>
-              <a:srgbClr val="DFE3F0"/>
-            </a:solidFill>
-            <a:prstDash val="solid"/>
-          </a:ln>
-        </p:spPr>
-      </p:sp>
-      <p:sp>
-        <p:nvSpPr>
-          <p:cNvPr id="21" name="Text 19"/>
-          <p:cNvSpPr/>
-          <p:nvPr/>
-        </p:nvSpPr>
-        <p:spPr>
-          <a:xfrm>
-            <a:off x="566928" y="4722876"/>
-            <a:ext cx="5029200" cy="237744"/>
-          </a:xfrm>
-          <a:prstGeom prst="rect">
-            <a:avLst/>
-          </a:prstGeom>
-          <a:noFill/>
-          <a:ln/>
-        </p:spPr>
-        <p:txBody>
-          <a:bodyPr wrap="square" lIns="0" tIns="0" rIns="0" bIns="0" rtlCol="0" anchor="ctr"/>
-          <a:lstStyle/>
-          <a:p>
-            <a:pPr indent="0" marL="0">
-              <a:buNone/>
-            </a:pPr>
-            <a:r>
-              <a:rPr lang="en-US" sz="1050" spc="30" kern="0" dirty="0">
+            <a:off x="566928" y="3017520"/>
+            <a:ext cx="5394960" cy="548640"/>
+          </a:xfrm>
+          <a:prstGeom prst="rect">
+            <a:avLst/>
+          </a:prstGeom>
+          <a:noFill/>
+          <a:ln/>
+        </p:spPr>
+        <p:txBody>
+          <a:bodyPr wrap="square" lIns="0" tIns="0" rIns="0" bIns="0" rtlCol="0" anchor="t"/>
+          <a:lstStyle/>
+          <a:p>
+            <a:pPr indent="0" marL="0">
+              <a:buNone/>
+            </a:pPr>
+            <a:r>
+              <a:rPr lang="en-US" sz="1350" dirty="0">
                 <a:solidFill>
                   <a:srgbClr val="5C6377"/>
                 </a:solidFill>
@@ -6231,48 +5372,9 @@
                 <a:ea typeface="Arial" pitchFamily="34" charset="-122"/>
                 <a:cs typeface="Arial" pitchFamily="34" charset="-120"/>
               </a:rPr>
-              <a:t>Auswertung</a:t>
-            </a:r>
-            <a:endParaRPr lang="en-US" sz="1050" dirty="0"/>
-          </a:p>
-        </p:txBody>
-      </p:sp>
-      <p:sp>
-        <p:nvSpPr>
-          <p:cNvPr id="22" name="Text 20"/>
-          <p:cNvSpPr/>
-          <p:nvPr/>
-        </p:nvSpPr>
-        <p:spPr>
-          <a:xfrm>
-            <a:off x="8028432" y="4722876"/>
-            <a:ext cx="548640" cy="237744"/>
-          </a:xfrm>
-          <a:prstGeom prst="rect">
-            <a:avLst/>
-          </a:prstGeom>
-          <a:noFill/>
-          <a:ln/>
-        </p:spPr>
-        <p:txBody>
-          <a:bodyPr wrap="square" lIns="0" tIns="0" rIns="0" bIns="0" rtlCol="0" anchor="ctr"/>
-          <a:lstStyle/>
-          <a:p>
-            <a:pPr algn="r" indent="0" marL="0">
-              <a:buNone/>
-            </a:pPr>
-            <a:r>
-              <a:rPr lang="en-US" sz="1050" dirty="0">
-                <a:solidFill>
-                  <a:srgbClr val="5C6377"/>
-                </a:solidFill>
-                <a:latin typeface="Arial" pitchFamily="34" charset="0"/>
-                <a:ea typeface="Arial" pitchFamily="34" charset="-122"/>
-                <a:cs typeface="Arial" pitchFamily="34" charset="-120"/>
-              </a:rPr>
-              <a:t>13/15</a:t>
-            </a:r>
-            <a:endParaRPr lang="en-US" sz="1050" dirty="0"/>
+              <a:t>50 Minuten in Gruppen und als Vertiefung ein eigenes Image</a:t>
+            </a:r>
+            <a:endParaRPr lang="en-US" sz="1350" dirty="0"/>
           </a:p>
         </p:txBody>
       </p:sp>
@@ -6323,7 +5425,7 @@
             <a:avLst/>
           </a:prstGeom>
           <a:solidFill>
-            <a:srgbClr val="0F7C86"/>
+            <a:srgbClr val="9A6310"/>
           </a:solidFill>
           <a:ln/>
         </p:spPr>
@@ -6355,13 +5457,13 @@
             <a:r>
               <a:rPr lang="en-US" sz="1150" b="1" spc="180" kern="0" dirty="0">
                 <a:solidFill>
-                  <a:srgbClr val="0F7C86"/>
-                </a:solidFill>
-                <a:latin typeface="Arial" pitchFamily="34" charset="0"/>
-                <a:ea typeface="Arial" pitchFamily="34" charset="-122"/>
-                <a:cs typeface="Arial" pitchFamily="34" charset="-120"/>
-              </a:rPr>
-              <a:t>DER BLICK NACH VORN</a:t>
+                  <a:srgbClr val="9A6310"/>
+                </a:solidFill>
+                <a:latin typeface="Arial" pitchFamily="34" charset="0"/>
+                <a:ea typeface="Arial" pitchFamily="34" charset="-122"/>
+                <a:cs typeface="Arial" pitchFamily="34" charset="-120"/>
+              </a:rPr>
+              <a:t>BREAKOUT · 50 MINUTEN</a:t>
             </a:r>
             <a:endParaRPr lang="en-US" sz="1150" dirty="0"/>
           </a:p>
@@ -6400,66 +5502,42 @@
                 <a:ea typeface="Arial" pitchFamily="34" charset="-122"/>
                 <a:cs typeface="Arial" pitchFamily="34" charset="-120"/>
               </a:rPr>
-              <a:t>Wo Container überall stecken</a:t>
+              <a:t>Der Auftrag</a:t>
             </a:r>
             <a:endParaRPr lang="en-US" sz="2600" dirty="0"/>
           </a:p>
         </p:txBody>
       </p:sp>
-      <p:pic>
-        <p:nvPicPr>
-          <p:cNvPr id="5" name="Image 0" descr="/Users/jacobmenge/Desktop/kurs-26.2b-orga/folienwerkstatt/assets/diagramme/container-orte.png">    </p:cNvPr>
-          <p:cNvPicPr>
-            <a:picLocks noChangeAspect="1"/>
-          </p:cNvPicPr>
-          <p:nvPr/>
-        </p:nvPicPr>
-        <p:blipFill>
-          <a:blip r:embed="rId1"/>
-          <a:stretch>
-            <a:fillRect/>
-          </a:stretch>
-        </p:blipFill>
-        <p:spPr>
-          <a:xfrm>
-            <a:off x="566928" y="1481328"/>
-            <a:ext cx="8010144" cy="2395728"/>
-          </a:xfrm>
-          <a:prstGeom prst="rect">
-            <a:avLst/>
-          </a:prstGeom>
-        </p:spPr>
-      </p:pic>
-      <p:sp>
-        <p:nvSpPr>
-          <p:cNvPr id="6" name="Shape 3"/>
-          <p:cNvSpPr/>
-          <p:nvPr/>
-        </p:nvSpPr>
-        <p:spPr>
-          <a:xfrm>
-            <a:off x="566928" y="4087368"/>
-            <a:ext cx="32004" cy="256032"/>
+      <p:sp>
+        <p:nvSpPr>
+          <p:cNvPr id="5" name="Shape 3"/>
+          <p:cNvSpPr/>
+          <p:nvPr/>
+        </p:nvSpPr>
+        <p:spPr>
+          <a:xfrm>
+            <a:off x="438912" y="1792224"/>
+            <a:ext cx="8266176" cy="329184"/>
           </a:xfrm>
           <a:prstGeom prst="rect">
             <a:avLst/>
           </a:prstGeom>
           <a:solidFill>
-            <a:srgbClr val="0F7C86"/>
+            <a:srgbClr val="F5F6FC"/>
           </a:solidFill>
           <a:ln/>
         </p:spPr>
       </p:sp>
       <p:sp>
         <p:nvSpPr>
-          <p:cNvPr id="7" name="Text 4"/>
-          <p:cNvSpPr/>
-          <p:nvPr/>
-        </p:nvSpPr>
-        <p:spPr>
-          <a:xfrm>
-            <a:off x="749808" y="4041648"/>
-            <a:ext cx="7827264" cy="402336"/>
+          <p:cNvPr id="6" name="Text 4"/>
+          <p:cNvSpPr/>
+          <p:nvPr/>
+        </p:nvSpPr>
+        <p:spPr>
+          <a:xfrm>
+            <a:off x="566928" y="1792224"/>
+            <a:ext cx="914400" cy="329184"/>
           </a:xfrm>
           <a:prstGeom prst="rect">
             <a:avLst/>
@@ -6475,7 +5553,46 @@
               <a:buNone/>
             </a:pPr>
             <a:r>
-              <a:rPr lang="en-US" sz="1200" b="1" dirty="0">
+              <a:rPr lang="en-US" sz="1100" b="1" dirty="0">
+                <a:solidFill>
+                  <a:srgbClr val="9A6310"/>
+                </a:solidFill>
+                <a:latin typeface="Courier New" pitchFamily="34" charset="0"/>
+                <a:ea typeface="Courier New" pitchFamily="34" charset="-122"/>
+                <a:cs typeface="Courier New" pitchFamily="34" charset="-120"/>
+              </a:rPr>
+              <a:t>Teil 1</a:t>
+            </a:r>
+            <a:endParaRPr lang="en-US" sz="1100" dirty="0"/>
+          </a:p>
+        </p:txBody>
+      </p:sp>
+      <p:sp>
+        <p:nvSpPr>
+          <p:cNvPr id="7" name="Text 5"/>
+          <p:cNvSpPr/>
+          <p:nvPr/>
+        </p:nvSpPr>
+        <p:spPr>
+          <a:xfrm>
+            <a:off x="1481328" y="1792224"/>
+            <a:ext cx="7095744" cy="329184"/>
+          </a:xfrm>
+          <a:prstGeom prst="rect">
+            <a:avLst/>
+          </a:prstGeom>
+          <a:noFill/>
+          <a:ln/>
+        </p:spPr>
+        <p:txBody>
+          <a:bodyPr wrap="square" lIns="0" tIns="0" rIns="0" bIns="0" rtlCol="0" anchor="ctr"/>
+          <a:lstStyle/>
+          <a:p>
+            <a:pPr indent="0" marL="0">
+              <a:buNone/>
+            </a:pPr>
+            <a:r>
+              <a:rPr lang="en-US" sz="1100" dirty="0">
                 <a:solidFill>
                   <a:srgbClr val="434A63"/>
                 </a:solidFill>
@@ -6483,15 +5600,439 @@
                 <a:ea typeface="Arial" pitchFamily="34" charset="-122"/>
                 <a:cs typeface="Arial" pitchFamily="34" charset="-120"/>
               </a:rPr>
-              <a:t>Merksatz des Abends: Image = Bauplan, Container = laufende Instanz – und Wegwerfen ist wieder erlaubt.</a:t>
-            </a:r>
-            <a:endParaRPr lang="en-US" sz="1200" dirty="0"/>
-          </a:p>
-        </p:txBody>
-      </p:sp>
-      <p:sp>
-        <p:nvSpPr>
-          <p:cNvPr id="8" name="Shape 5"/>
+              <a:t>Erste Schritte: hello-world, dann nginx mit Port. Container starten, ansehen, aufräumen</a:t>
+            </a:r>
+            <a:endParaRPr lang="en-US" sz="1100" dirty="0"/>
+          </a:p>
+        </p:txBody>
+      </p:sp>
+      <p:sp>
+        <p:nvSpPr>
+          <p:cNvPr id="8" name="Text 6"/>
+          <p:cNvSpPr/>
+          <p:nvPr/>
+        </p:nvSpPr>
+        <p:spPr>
+          <a:xfrm>
+            <a:off x="566928" y="2121408"/>
+            <a:ext cx="914400" cy="329184"/>
+          </a:xfrm>
+          <a:prstGeom prst="rect">
+            <a:avLst/>
+          </a:prstGeom>
+          <a:noFill/>
+          <a:ln/>
+        </p:spPr>
+        <p:txBody>
+          <a:bodyPr wrap="square" lIns="0" tIns="0" rIns="0" bIns="0" rtlCol="0" anchor="ctr"/>
+          <a:lstStyle/>
+          <a:p>
+            <a:pPr indent="0" marL="0">
+              <a:buNone/>
+            </a:pPr>
+            <a:r>
+              <a:rPr lang="en-US" sz="1100" b="1" dirty="0">
+                <a:solidFill>
+                  <a:srgbClr val="9A6310"/>
+                </a:solidFill>
+                <a:latin typeface="Courier New" pitchFamily="34" charset="0"/>
+                <a:ea typeface="Courier New" pitchFamily="34" charset="-122"/>
+                <a:cs typeface="Courier New" pitchFamily="34" charset="-120"/>
+              </a:rPr>
+              <a:t>Teil 2</a:t>
+            </a:r>
+            <a:endParaRPr lang="en-US" sz="1100" dirty="0"/>
+          </a:p>
+        </p:txBody>
+      </p:sp>
+      <p:sp>
+        <p:nvSpPr>
+          <p:cNvPr id="9" name="Text 7"/>
+          <p:cNvSpPr/>
+          <p:nvPr/>
+        </p:nvSpPr>
+        <p:spPr>
+          <a:xfrm>
+            <a:off x="1481328" y="2121408"/>
+            <a:ext cx="7095744" cy="329184"/>
+          </a:xfrm>
+          <a:prstGeom prst="rect">
+            <a:avLst/>
+          </a:prstGeom>
+          <a:noFill/>
+          <a:ln/>
+        </p:spPr>
+        <p:txBody>
+          <a:bodyPr wrap="square" lIns="0" tIns="0" rIns="0" bIns="0" rtlCol="0" anchor="ctr"/>
+          <a:lstStyle/>
+          <a:p>
+            <a:pPr indent="0" marL="0">
+              <a:buNone/>
+            </a:pPr>
+            <a:r>
+              <a:rPr lang="en-US" sz="1100" dirty="0">
+                <a:solidFill>
+                  <a:srgbClr val="434A63"/>
+                </a:solidFill>
+                <a:latin typeface="Arial" pitchFamily="34" charset="0"/>
+                <a:ea typeface="Arial" pitchFamily="34" charset="-122"/>
+                <a:cs typeface="Arial" pitchFamily="34" charset="-120"/>
+              </a:rPr>
+              <a:t>Vertiefung: ein eigenes Image mit kleiner Webseite. Dockerfile schreiben, bauen, starten</a:t>
+            </a:r>
+            <a:endParaRPr lang="en-US" sz="1100" dirty="0"/>
+          </a:p>
+        </p:txBody>
+      </p:sp>
+      <p:sp>
+        <p:nvSpPr>
+          <p:cNvPr id="10" name="Shape 8"/>
+          <p:cNvSpPr/>
+          <p:nvPr/>
+        </p:nvSpPr>
+        <p:spPr>
+          <a:xfrm>
+            <a:off x="438912" y="2450592"/>
+            <a:ext cx="8266176" cy="329184"/>
+          </a:xfrm>
+          <a:prstGeom prst="rect">
+            <a:avLst/>
+          </a:prstGeom>
+          <a:solidFill>
+            <a:srgbClr val="F5F6FC"/>
+          </a:solidFill>
+          <a:ln/>
+        </p:spPr>
+      </p:sp>
+      <p:sp>
+        <p:nvSpPr>
+          <p:cNvPr id="11" name="Text 9"/>
+          <p:cNvSpPr/>
+          <p:nvPr/>
+        </p:nvSpPr>
+        <p:spPr>
+          <a:xfrm>
+            <a:off x="566928" y="2450592"/>
+            <a:ext cx="914400" cy="329184"/>
+          </a:xfrm>
+          <a:prstGeom prst="rect">
+            <a:avLst/>
+          </a:prstGeom>
+          <a:noFill/>
+          <a:ln/>
+        </p:spPr>
+        <p:txBody>
+          <a:bodyPr wrap="square" lIns="0" tIns="0" rIns="0" bIns="0" rtlCol="0" anchor="ctr"/>
+          <a:lstStyle/>
+          <a:p>
+            <a:pPr indent="0" marL="0">
+              <a:buNone/>
+            </a:pPr>
+            <a:r>
+              <a:rPr lang="en-US" sz="1100" b="1" dirty="0">
+                <a:solidFill>
+                  <a:srgbClr val="9A6310"/>
+                </a:solidFill>
+                <a:latin typeface="Courier New" pitchFamily="34" charset="0"/>
+                <a:ea typeface="Courier New" pitchFamily="34" charset="-122"/>
+                <a:cs typeface="Courier New" pitchFamily="34" charset="-120"/>
+              </a:rPr>
+              <a:t>Bonus</a:t>
+            </a:r>
+            <a:endParaRPr lang="en-US" sz="1100" dirty="0"/>
+          </a:p>
+        </p:txBody>
+      </p:sp>
+      <p:sp>
+        <p:nvSpPr>
+          <p:cNvPr id="12" name="Text 10"/>
+          <p:cNvSpPr/>
+          <p:nvPr/>
+        </p:nvSpPr>
+        <p:spPr>
+          <a:xfrm>
+            <a:off x="1481328" y="2450592"/>
+            <a:ext cx="7095744" cy="329184"/>
+          </a:xfrm>
+          <a:prstGeom prst="rect">
+            <a:avLst/>
+          </a:prstGeom>
+          <a:noFill/>
+          <a:ln/>
+        </p:spPr>
+        <p:txBody>
+          <a:bodyPr wrap="square" lIns="0" tIns="0" rIns="0" bIns="0" rtlCol="0" anchor="ctr"/>
+          <a:lstStyle/>
+          <a:p>
+            <a:pPr indent="0" marL="0">
+              <a:buNone/>
+            </a:pPr>
+            <a:r>
+              <a:rPr lang="en-US" sz="1100" dirty="0">
+                <a:solidFill>
+                  <a:srgbClr val="434A63"/>
+                </a:solidFill>
+                <a:latin typeface="Arial" pitchFamily="34" charset="0"/>
+                <a:ea typeface="Arial" pitchFamily="34" charset="-122"/>
+                <a:cs typeface="Arial" pitchFamily="34" charset="-120"/>
+              </a:rPr>
+              <a:t>Vier Experimente: in den Container schauen, Wegwerf-Test, zwei Versionen, Platzverbrauch</a:t>
+            </a:r>
+            <a:endParaRPr lang="en-US" sz="1100" dirty="0"/>
+          </a:p>
+        </p:txBody>
+      </p:sp>
+      <p:sp>
+        <p:nvSpPr>
+          <p:cNvPr id="13" name="Text 11"/>
+          <p:cNvSpPr/>
+          <p:nvPr/>
+        </p:nvSpPr>
+        <p:spPr>
+          <a:xfrm>
+            <a:off x="566928" y="2779776"/>
+            <a:ext cx="914400" cy="329184"/>
+          </a:xfrm>
+          <a:prstGeom prst="rect">
+            <a:avLst/>
+          </a:prstGeom>
+          <a:noFill/>
+          <a:ln/>
+        </p:spPr>
+        <p:txBody>
+          <a:bodyPr wrap="square" lIns="0" tIns="0" rIns="0" bIns="0" rtlCol="0" anchor="ctr"/>
+          <a:lstStyle/>
+          <a:p>
+            <a:pPr indent="0" marL="0">
+              <a:buNone/>
+            </a:pPr>
+            <a:r>
+              <a:rPr lang="en-US" sz="1100" b="1" dirty="0">
+                <a:solidFill>
+                  <a:srgbClr val="9A6310"/>
+                </a:solidFill>
+                <a:latin typeface="Courier New" pitchFamily="34" charset="0"/>
+                <a:ea typeface="Courier New" pitchFamily="34" charset="-122"/>
+                <a:cs typeface="Courier New" pitchFamily="34" charset="-120"/>
+              </a:rPr>
+              <a:t>Notieren</a:t>
+            </a:r>
+            <a:endParaRPr lang="en-US" sz="1100" dirty="0"/>
+          </a:p>
+        </p:txBody>
+      </p:sp>
+      <p:sp>
+        <p:nvSpPr>
+          <p:cNvPr id="14" name="Text 12"/>
+          <p:cNvSpPr/>
+          <p:nvPr/>
+        </p:nvSpPr>
+        <p:spPr>
+          <a:xfrm>
+            <a:off x="1481328" y="2779776"/>
+            <a:ext cx="7095744" cy="329184"/>
+          </a:xfrm>
+          <a:prstGeom prst="rect">
+            <a:avLst/>
+          </a:prstGeom>
+          <a:noFill/>
+          <a:ln/>
+        </p:spPr>
+        <p:txBody>
+          <a:bodyPr wrap="square" lIns="0" tIns="0" rIns="0" bIns="0" rtlCol="0" anchor="ctr"/>
+          <a:lstStyle/>
+          <a:p>
+            <a:pPr indent="0" marL="0">
+              <a:buNone/>
+            </a:pPr>
+            <a:r>
+              <a:rPr lang="en-US" sz="1100" dirty="0">
+                <a:solidFill>
+                  <a:srgbClr val="434A63"/>
+                </a:solidFill>
+                <a:latin typeface="Arial" pitchFamily="34" charset="0"/>
+                <a:ea typeface="Arial" pitchFamily="34" charset="-122"/>
+                <a:cs typeface="Arial" pitchFamily="34" charset="-120"/>
+              </a:rPr>
+              <a:t>Euren docker-ps-Stand nach Teil 1 und aus der Vertiefung eure Image-Größe</a:t>
+            </a:r>
+            <a:endParaRPr lang="en-US" sz="1100" dirty="0"/>
+          </a:p>
+        </p:txBody>
+      </p:sp>
+      <p:sp>
+        <p:nvSpPr>
+          <p:cNvPr id="15" name="Shape 13"/>
+          <p:cNvSpPr/>
+          <p:nvPr/>
+        </p:nvSpPr>
+        <p:spPr>
+          <a:xfrm>
+            <a:off x="566928" y="3401568"/>
+            <a:ext cx="8010144" cy="1097280"/>
+          </a:xfrm>
+          <a:prstGeom prst="rect">
+            <a:avLst/>
+          </a:prstGeom>
+          <a:solidFill>
+            <a:srgbClr val="EEF0FB"/>
+          </a:solidFill>
+          <a:ln/>
+        </p:spPr>
+      </p:sp>
+      <p:sp>
+        <p:nvSpPr>
+          <p:cNvPr id="16" name="Shape 14"/>
+          <p:cNvSpPr/>
+          <p:nvPr/>
+        </p:nvSpPr>
+        <p:spPr>
+          <a:xfrm>
+            <a:off x="566928" y="3401568"/>
+            <a:ext cx="41148" cy="1097280"/>
+          </a:xfrm>
+          <a:prstGeom prst="rect">
+            <a:avLst/>
+          </a:prstGeom>
+          <a:solidFill>
+            <a:srgbClr val="9A6310"/>
+          </a:solidFill>
+          <a:ln/>
+        </p:spPr>
+      </p:sp>
+      <p:sp>
+        <p:nvSpPr>
+          <p:cNvPr id="17" name="Text 15"/>
+          <p:cNvSpPr/>
+          <p:nvPr/>
+        </p:nvSpPr>
+        <p:spPr>
+          <a:xfrm>
+            <a:off x="804672" y="3547872"/>
+            <a:ext cx="7607808" cy="242062"/>
+          </a:xfrm>
+          <a:prstGeom prst="rect">
+            <a:avLst/>
+          </a:prstGeom>
+          <a:noFill/>
+          <a:ln/>
+        </p:spPr>
+        <p:txBody>
+          <a:bodyPr wrap="square" lIns="0" tIns="0" rIns="0" bIns="0" rtlCol="0" anchor="t"/>
+          <a:lstStyle/>
+          <a:p>
+            <a:pPr indent="0" marL="0">
+              <a:buNone/>
+            </a:pPr>
+            <a:r>
+              <a:rPr lang="en-US" sz="1300" b="1" dirty="0">
+                <a:solidFill>
+                  <a:srgbClr val="272E52"/>
+                </a:solidFill>
+                <a:latin typeface="Arial" pitchFamily="34" charset="0"/>
+                <a:ea typeface="Arial" pitchFamily="34" charset="-122"/>
+                <a:cs typeface="Arial" pitchFamily="34" charset="-120"/>
+              </a:rPr>
+              <a:t>Jetzt öffnen, alles braucht ihr gleich im Raum</a:t>
+            </a:r>
+            <a:endParaRPr lang="en-US" sz="1300" dirty="0"/>
+          </a:p>
+        </p:txBody>
+      </p:sp>
+      <p:sp>
+        <p:nvSpPr>
+          <p:cNvPr id="18" name="Text 16"/>
+          <p:cNvSpPr/>
+          <p:nvPr/>
+        </p:nvSpPr>
+        <p:spPr>
+          <a:xfrm>
+            <a:off x="804672" y="3835654"/>
+            <a:ext cx="7607808" cy="544322"/>
+          </a:xfrm>
+          <a:prstGeom prst="rect">
+            <a:avLst/>
+          </a:prstGeom>
+          <a:noFill/>
+          <a:ln/>
+        </p:spPr>
+        <p:txBody>
+          <a:bodyPr wrap="square" lIns="0" tIns="0" rIns="0" bIns="0" rtlCol="0" anchor="t"/>
+          <a:lstStyle/>
+          <a:p>
+            <a:pPr indent="0" marL="0">
+              <a:lnSpc>
+                <a:spcPct val="92000"/>
+              </a:lnSpc>
+              <a:spcAft>
+                <a:spcPts val="500"/>
+              </a:spcAft>
+              <a:buNone/>
+            </a:pPr>
+            <a:r>
+              <a:rPr lang="en-US" sz="1000" dirty="0">
+                <a:solidFill>
+                  <a:srgbClr val="434A63"/>
+                </a:solidFill>
+                <a:latin typeface="Arial" pitchFamily="34" charset="0"/>
+                <a:ea typeface="Arial" pitchFamily="34" charset="-122"/>
+                <a:cs typeface="Arial" pitchFamily="34" charset="-120"/>
+              </a:rPr>
+              <a:t>Teil 1:  jacobmenge.github.io/kurs-unterlagen/docker/erste-schritte/</a:t>
+            </a:r>
+            <a:endParaRPr lang="en-US" sz="1000" dirty="0"/>
+          </a:p>
+          <a:p>
+            <a:pPr indent="0" marL="0">
+              <a:lnSpc>
+                <a:spcPct val="92000"/>
+              </a:lnSpc>
+              <a:spcAft>
+                <a:spcPts val="500"/>
+              </a:spcAft>
+              <a:buNone/>
+            </a:pPr>
+            <a:r>
+              <a:rPr lang="en-US" sz="1000" dirty="0">
+                <a:solidFill>
+                  <a:srgbClr val="434A63"/>
+                </a:solidFill>
+                <a:latin typeface="Arial" pitchFamily="34" charset="0"/>
+                <a:ea typeface="Arial" pitchFamily="34" charset="-122"/>
+                <a:cs typeface="Arial" pitchFamily="34" charset="-120"/>
+              </a:rPr>
+              <a:t>Teil 2 (Vertiefung):  jacobmenge.github.io/kurs-unterlagen/docker/praxis-eigenes-image/</a:t>
+            </a:r>
+            <a:endParaRPr lang="en-US" sz="1000" dirty="0"/>
+          </a:p>
+          <a:p>
+            <a:pPr indent="0" marL="0">
+              <a:lnSpc>
+                <a:spcPct val="92000"/>
+              </a:lnSpc>
+              <a:spcAft>
+                <a:spcPts val="500"/>
+              </a:spcAft>
+              <a:buNone/>
+            </a:pPr>
+            <a:r>
+              <a:rPr lang="en-US" sz="1000" dirty="0">
+                <a:solidFill>
+                  <a:srgbClr val="434A63"/>
+                </a:solidFill>
+                <a:latin typeface="Arial" pitchFamily="34" charset="0"/>
+                <a:ea typeface="Arial" pitchFamily="34" charset="-122"/>
+                <a:cs typeface="Arial" pitchFamily="34" charset="-120"/>
+              </a:rPr>
+              <a:t>Ergebnisse eintragen:  &lt;Link zum Ergebnis-Dokument hier eintragen&gt;</a:t>
+            </a:r>
+            <a:endParaRPr lang="en-US" sz="1000" dirty="0"/>
+          </a:p>
+        </p:txBody>
+      </p:sp>
+      <p:sp>
+        <p:nvSpPr>
+          <p:cNvPr id="19" name="Shape 17"/>
           <p:cNvSpPr/>
           <p:nvPr/>
         </p:nvSpPr>
@@ -6514,7 +6055,7 @@
       </p:sp>
       <p:sp>
         <p:nvSpPr>
-          <p:cNvPr id="9" name="Text 6"/>
+          <p:cNvPr id="20" name="Text 18"/>
           <p:cNvSpPr/>
           <p:nvPr/>
         </p:nvSpPr>
@@ -6545,7 +6086,7 @@
                 <a:ea typeface="Arial" pitchFamily="34" charset="-122"/>
                 <a:cs typeface="Arial" pitchFamily="34" charset="-120"/>
               </a:rPr>
-              <a:t>Auswertung</a:t>
+              <a:t>Breakout</a:t>
             </a:r>
             <a:endParaRPr lang="en-US" sz="1050" dirty="0"/>
           </a:p>
@@ -6553,7 +6094,7 @@
       </p:sp>
       <p:sp>
         <p:nvSpPr>
-          <p:cNvPr id="10" name="Text 7"/>
+          <p:cNvPr id="21" name="Text 19"/>
           <p:cNvSpPr/>
           <p:nvPr/>
         </p:nvSpPr>
@@ -6584,7 +6125,7 @@
                 <a:ea typeface="Arial" pitchFamily="34" charset="-122"/>
                 <a:cs typeface="Arial" pitchFamily="34" charset="-120"/>
               </a:rPr>
-              <a:t>14/15</a:t>
+              <a:t>14/18</a:t>
             </a:r>
             <a:endParaRPr lang="en-US" sz="1050" dirty="0"/>
           </a:p>
@@ -6637,7 +6178,7 @@
             <a:avLst/>
           </a:prstGeom>
           <a:solidFill>
-            <a:srgbClr val="0F7C86"/>
+            <a:srgbClr val="9A6310"/>
           </a:solidFill>
           <a:ln/>
         </p:spPr>
@@ -6669,13 +6210,13 @@
             <a:r>
               <a:rPr lang="en-US" sz="1150" b="1" spc="180" kern="0" dirty="0">
                 <a:solidFill>
-                  <a:srgbClr val="0F7C86"/>
-                </a:solidFill>
-                <a:latin typeface="Arial" pitchFamily="34" charset="0"/>
-                <a:ea typeface="Arial" pitchFamily="34" charset="-122"/>
-                <a:cs typeface="Arial" pitchFamily="34" charset="-120"/>
-              </a:rPr>
-              <a:t>AUSBLICK</a:t>
+                  <a:srgbClr val="9A6310"/>
+                </a:solidFill>
+                <a:latin typeface="Arial" pitchFamily="34" charset="0"/>
+                <a:ea typeface="Arial" pitchFamily="34" charset="-122"/>
+                <a:cs typeface="Arial" pitchFamily="34" charset="-120"/>
+              </a:rPr>
+              <a:t>SPIELREGELN</a:t>
             </a:r>
             <a:endParaRPr lang="en-US" sz="1150" dirty="0"/>
           </a:p>
@@ -6714,7 +6255,7 @@
                 <a:ea typeface="Arial" pitchFamily="34" charset="-122"/>
                 <a:cs typeface="Arial" pitchFamily="34" charset="-120"/>
               </a:rPr>
-              <a:t>Bis Montag</a:t>
+              <a:t>So arbeitet ihr</a:t>
             </a:r>
             <a:endParaRPr lang="en-US" sz="2600" dirty="0"/>
           </a:p>
@@ -6728,8 +6269,8 @@
         </p:nvSpPr>
         <p:spPr>
           <a:xfrm>
-            <a:off x="566928" y="1444752"/>
-            <a:ext cx="8010144" cy="438912"/>
+            <a:off x="566928" y="1700784"/>
+            <a:ext cx="8010144" cy="2011680"/>
           </a:xfrm>
           <a:prstGeom prst="rect">
             <a:avLst/>
@@ -6742,20 +6283,243 @@
           <a:lstStyle/>
           <a:p>
             <a:pPr indent="0" marL="0">
-              <a:buNone/>
-            </a:pPr>
-            <a:r>
-              <a:rPr lang="en-US" sz="1300" dirty="0">
-                <a:solidFill>
-                  <a:srgbClr val="5C6377"/>
-                </a:solidFill>
-                <a:latin typeface="Arial" pitchFamily="34" charset="0"/>
-                <a:ea typeface="Arial" pitchFamily="34" charset="-122"/>
-                <a:cs typeface="Arial" pitchFamily="34" charset="-120"/>
-              </a:rPr>
-              <a:t>Montag geht es in die Tiefe: Was passiert mit Daten, wenn der Container stirbt?</a:t>
-            </a:r>
-            <a:endParaRPr lang="en-US" sz="1300" dirty="0"/>
+              <a:lnSpc>
+                <a:spcPct val="92000"/>
+              </a:lnSpc>
+              <a:buNone/>
+            </a:pPr>
+            <a:r>
+              <a:rPr lang="en-US" sz="1250" b="1" dirty="0">
+                <a:solidFill>
+                  <a:srgbClr val="9A6310"/>
+                </a:solidFill>
+                <a:latin typeface="Arial" pitchFamily="34" charset="0"/>
+                <a:ea typeface="Arial" pitchFamily="34" charset="-122"/>
+                <a:cs typeface="Arial" pitchFamily="34" charset="-120"/>
+              </a:rPr>
+              <a:t>▸   </a:t>
+            </a:r>
+            <a:pPr indent="0" marL="0">
+              <a:lnSpc>
+                <a:spcPct val="92000"/>
+              </a:lnSpc>
+              <a:spcAft>
+                <a:spcPts val="900"/>
+              </a:spcAft>
+              <a:buNone/>
+            </a:pPr>
+            <a:r>
+              <a:rPr lang="en-US" sz="1250" dirty="0">
+                <a:solidFill>
+                  <a:srgbClr val="434A63"/>
+                </a:solidFill>
+                <a:latin typeface="Arial" pitchFamily="34" charset="0"/>
+                <a:ea typeface="Arial" pitchFamily="34" charset="-122"/>
+                <a:cs typeface="Arial" pitchFamily="34" charset="-120"/>
+              </a:rPr>
+              <a:t>Gleiche Gruppen, eine Person teilt den Bildschirm und alle tippen auf dem eigenen Rechner mit.</a:t>
+            </a:r>
+            <a:endParaRPr lang="en-US" sz="1250" dirty="0"/>
+          </a:p>
+          <a:p>
+            <a:pPr indent="0" marL="0">
+              <a:lnSpc>
+                <a:spcPct val="92000"/>
+              </a:lnSpc>
+              <a:buNone/>
+            </a:pPr>
+            <a:r>
+              <a:rPr lang="en-US" sz="1250" b="1" dirty="0">
+                <a:solidFill>
+                  <a:srgbClr val="9A6310"/>
+                </a:solidFill>
+                <a:latin typeface="Arial" pitchFamily="34" charset="0"/>
+                <a:ea typeface="Arial" pitchFamily="34" charset="-122"/>
+                <a:cs typeface="Arial" pitchFamily="34" charset="-120"/>
+              </a:rPr>
+              <a:t>▸   </a:t>
+            </a:r>
+            <a:pPr indent="0" marL="0">
+              <a:lnSpc>
+                <a:spcPct val="92000"/>
+              </a:lnSpc>
+              <a:spcAft>
+                <a:spcPts val="900"/>
+              </a:spcAft>
+              <a:buNone/>
+            </a:pPr>
+            <a:r>
+              <a:rPr lang="en-US" sz="1250" dirty="0">
+                <a:solidFill>
+                  <a:srgbClr val="434A63"/>
+                </a:solidFill>
+                <a:latin typeface="Arial" pitchFamily="34" charset="0"/>
+                <a:ea typeface="Arial" pitchFamily="34" charset="-122"/>
+                <a:cs typeface="Arial" pitchFamily="34" charset="-120"/>
+              </a:rPr>
+              <a:t>Die Anleitung zeigt jeden Befehl mit erwarteter Ausgabe. Vergleicht, was bei euch anders aussieht.</a:t>
+            </a:r>
+            <a:endParaRPr lang="en-US" sz="1250" dirty="0"/>
+          </a:p>
+          <a:p>
+            <a:pPr indent="0" marL="0">
+              <a:lnSpc>
+                <a:spcPct val="92000"/>
+              </a:lnSpc>
+              <a:buNone/>
+            </a:pPr>
+            <a:r>
+              <a:rPr lang="en-US" sz="1250" b="1" dirty="0">
+                <a:solidFill>
+                  <a:srgbClr val="9A6310"/>
+                </a:solidFill>
+                <a:latin typeface="Arial" pitchFamily="34" charset="0"/>
+                <a:ea typeface="Arial" pitchFamily="34" charset="-122"/>
+                <a:cs typeface="Arial" pitchFamily="34" charset="-120"/>
+              </a:rPr>
+              <a:t>▸   </a:t>
+            </a:r>
+            <a:pPr indent="0" marL="0">
+              <a:lnSpc>
+                <a:spcPct val="92000"/>
+              </a:lnSpc>
+              <a:spcAft>
+                <a:spcPts val="900"/>
+              </a:spcAft>
+              <a:buNone/>
+            </a:pPr>
+            <a:r>
+              <a:rPr lang="en-US" sz="1250" dirty="0">
+                <a:solidFill>
+                  <a:srgbClr val="434A63"/>
+                </a:solidFill>
+                <a:latin typeface="Arial" pitchFamily="34" charset="0"/>
+                <a:ea typeface="Arial" pitchFamily="34" charset="-122"/>
+                <a:cs typeface="Arial" pitchFamily="34" charset="-120"/>
+              </a:rPr>
+              <a:t>Teil 1 ist Pflicht bis einschließlich Aufräumen. Die Vertiefung beginnt erst, wenn Teil 1 sauber durch ist.</a:t>
+            </a:r>
+            <a:endParaRPr lang="en-US" sz="1250" dirty="0"/>
+          </a:p>
+          <a:p>
+            <a:pPr indent="0" marL="0">
+              <a:lnSpc>
+                <a:spcPct val="92000"/>
+              </a:lnSpc>
+              <a:buNone/>
+            </a:pPr>
+            <a:r>
+              <a:rPr lang="en-US" sz="1250" b="1" dirty="0">
+                <a:solidFill>
+                  <a:srgbClr val="9A6310"/>
+                </a:solidFill>
+                <a:latin typeface="Arial" pitchFamily="34" charset="0"/>
+                <a:ea typeface="Arial" pitchFamily="34" charset="-122"/>
+                <a:cs typeface="Arial" pitchFamily="34" charset="-120"/>
+              </a:rPr>
+              <a:t>▸   </a:t>
+            </a:r>
+            <a:pPr indent="0" marL="0">
+              <a:lnSpc>
+                <a:spcPct val="92000"/>
+              </a:lnSpc>
+              <a:spcAft>
+                <a:spcPts val="900"/>
+              </a:spcAft>
+              <a:buNone/>
+            </a:pPr>
+            <a:r>
+              <a:rPr lang="en-US" sz="1250" dirty="0">
+                <a:solidFill>
+                  <a:srgbClr val="434A63"/>
+                </a:solidFill>
+                <a:latin typeface="Arial" pitchFamily="34" charset="0"/>
+                <a:ea typeface="Arial" pitchFamily="34" charset="-122"/>
+                <a:cs typeface="Arial" pitchFamily="34" charset="-120"/>
+              </a:rPr>
+              <a:t>Schnell durch? Am Ende der Vertiefungs-Seite warten vier Bonus-Experimente, eines davon erklärt schon Montag.</a:t>
+            </a:r>
+            <a:endParaRPr lang="en-US" sz="1250" dirty="0"/>
+          </a:p>
+          <a:p>
+            <a:pPr indent="0" marL="0">
+              <a:lnSpc>
+                <a:spcPct val="92000"/>
+              </a:lnSpc>
+              <a:buNone/>
+            </a:pPr>
+            <a:r>
+              <a:rPr lang="en-US" sz="1250" b="1" dirty="0">
+                <a:solidFill>
+                  <a:srgbClr val="9A6310"/>
+                </a:solidFill>
+                <a:latin typeface="Arial" pitchFamily="34" charset="0"/>
+                <a:ea typeface="Arial" pitchFamily="34" charset="-122"/>
+                <a:cs typeface="Arial" pitchFamily="34" charset="-120"/>
+              </a:rPr>
+              <a:t>▸   </a:t>
+            </a:r>
+            <a:pPr indent="0" marL="0">
+              <a:lnSpc>
+                <a:spcPct val="92000"/>
+              </a:lnSpc>
+              <a:spcAft>
+                <a:spcPts val="900"/>
+              </a:spcAft>
+              <a:buNone/>
+            </a:pPr>
+            <a:r>
+              <a:rPr lang="en-US" sz="1250" dirty="0">
+                <a:solidFill>
+                  <a:srgbClr val="434A63"/>
+                </a:solidFill>
+                <a:latin typeface="Arial" pitchFamily="34" charset="0"/>
+                <a:ea typeface="Arial" pitchFamily="34" charset="-122"/>
+                <a:cs typeface="Arial" pitchFamily="34" charset="-120"/>
+              </a:rPr>
+              <a:t>Wer ohne Docker dasteht: in der Gruppe mitarbeiten und zu Hause nachziehen. Die Installation läuft notfalls nebenher.</a:t>
+            </a:r>
+            <a:endParaRPr lang="en-US" sz="1250" dirty="0"/>
+          </a:p>
+          <a:p>
+            <a:pPr indent="0" marL="0">
+              <a:lnSpc>
+                <a:spcPct val="92000"/>
+              </a:lnSpc>
+              <a:buNone/>
+            </a:pPr>
+            <a:r>
+              <a:rPr lang="en-US" sz="1250" b="1" dirty="0">
+                <a:solidFill>
+                  <a:srgbClr val="9A6310"/>
+                </a:solidFill>
+                <a:latin typeface="Arial" pitchFamily="34" charset="0"/>
+                <a:ea typeface="Arial" pitchFamily="34" charset="-122"/>
+                <a:cs typeface="Arial" pitchFamily="34" charset="-120"/>
+              </a:rPr>
+              <a:t>▸   </a:t>
+            </a:r>
+            <a:pPr indent="0" marL="0">
+              <a:lnSpc>
+                <a:spcPct val="92000"/>
+              </a:lnSpc>
+              <a:spcAft>
+                <a:spcPts val="900"/>
+              </a:spcAft>
+              <a:buNone/>
+            </a:pPr>
+            <a:r>
+              <a:rPr lang="en-US" sz="1250" dirty="0">
+                <a:solidFill>
+                  <a:srgbClr val="434A63"/>
+                </a:solidFill>
+                <a:latin typeface="Arial" pitchFamily="34" charset="0"/>
+                <a:ea typeface="Arial" pitchFamily="34" charset="-122"/>
+                <a:cs typeface="Arial" pitchFamily="34" charset="-120"/>
+              </a:rPr>
+              <a:t>Wenn es klemmt: Stolpersteine-Seite, dann „Um Hilfe bitten“.</a:t>
+            </a:r>
+            <a:endParaRPr lang="en-US" sz="1250" dirty="0"/>
           </a:p>
         </p:txBody>
       </p:sp>
@@ -6767,8 +6531,8 @@
         </p:nvSpPr>
         <p:spPr>
           <a:xfrm>
-            <a:off x="566928" y="1975104"/>
-            <a:ext cx="2523744" cy="1920240"/>
+            <a:off x="566928" y="3602736"/>
+            <a:ext cx="8010144" cy="822960"/>
           </a:xfrm>
           <a:prstGeom prst="rect">
             <a:avLst/>
@@ -6787,14 +6551,14 @@
         </p:nvSpPr>
         <p:spPr>
           <a:xfrm>
-            <a:off x="566928" y="1975104"/>
-            <a:ext cx="41148" cy="1920240"/>
+            <a:off x="566928" y="3602736"/>
+            <a:ext cx="41148" cy="822960"/>
           </a:xfrm>
           <a:prstGeom prst="rect">
             <a:avLst/>
           </a:prstGeom>
           <a:solidFill>
-            <a:srgbClr val="0F7C86"/>
+            <a:srgbClr val="9A6310"/>
           </a:solidFill>
           <a:ln/>
         </p:spPr>
@@ -6807,8 +6571,8 @@
         </p:nvSpPr>
         <p:spPr>
           <a:xfrm>
-            <a:off x="804672" y="2121408"/>
-            <a:ext cx="2121408" cy="256032"/>
+            <a:off x="804672" y="3749040"/>
+            <a:ext cx="7607808" cy="242062"/>
           </a:xfrm>
           <a:prstGeom prst="rect">
             <a:avLst/>
@@ -6832,7 +6596,7 @@
                 <a:ea typeface="Arial" pitchFamily="34" charset="-122"/>
                 <a:cs typeface="Arial" pitchFamily="34" charset="-120"/>
               </a:rPr>
-              <a:t>Volumes</a:t>
+              <a:t>Um 20:15 sind alle wieder hier</a:t>
             </a:r>
             <a:endParaRPr lang="en-US" sz="1300" dirty="0"/>
           </a:p>
@@ -6846,8 +6610,8 @@
         </p:nvSpPr>
         <p:spPr>
           <a:xfrm>
-            <a:off x="804672" y="2423160"/>
-            <a:ext cx="2121408" cy="1353312"/>
+            <a:off x="804672" y="4036822"/>
+            <a:ext cx="7607808" cy="270002"/>
           </a:xfrm>
           <a:prstGeom prst="rect">
             <a:avLst/>
@@ -6874,7 +6638,7 @@
                 <a:ea typeface="Arial" pitchFamily="34" charset="-122"/>
                 <a:cs typeface="Arial" pitchFamily="34" charset="-120"/>
               </a:rPr>
-              <a:t>Container weg heißt Daten weg – außer man gibt ihnen ein Zuhause. Genau dafür sind Volumes da.</a:t>
+              <a:t>Jede Gruppe zeigt kurz ihr docker ps. Wer die Vertiefung geschafft hat, zeigt seine eigene Seite im Browser.</a:t>
             </a:r>
             <a:endParaRPr lang="en-US" sz="1150" dirty="0"/>
           </a:p>
@@ -6883,307 +6647,6 @@
       <p:sp>
         <p:nvSpPr>
           <p:cNvPr id="10" name="Shape 8"/>
-          <p:cNvSpPr/>
-          <p:nvPr/>
-        </p:nvSpPr>
-        <p:spPr>
-          <a:xfrm>
-            <a:off x="3310128" y="1975104"/>
-            <a:ext cx="2523744" cy="1920240"/>
-          </a:xfrm>
-          <a:prstGeom prst="rect">
-            <a:avLst/>
-          </a:prstGeom>
-          <a:solidFill>
-            <a:srgbClr val="F5F6FC"/>
-          </a:solidFill>
-          <a:ln/>
-        </p:spPr>
-      </p:sp>
-      <p:sp>
-        <p:nvSpPr>
-          <p:cNvPr id="11" name="Shape 9"/>
-          <p:cNvSpPr/>
-          <p:nvPr/>
-        </p:nvSpPr>
-        <p:spPr>
-          <a:xfrm>
-            <a:off x="3310128" y="1975104"/>
-            <a:ext cx="41148" cy="1920240"/>
-          </a:xfrm>
-          <a:prstGeom prst="rect">
-            <a:avLst/>
-          </a:prstGeom>
-          <a:solidFill>
-            <a:srgbClr val="0F7C86"/>
-          </a:solidFill>
-          <a:ln/>
-        </p:spPr>
-      </p:sp>
-      <p:sp>
-        <p:nvSpPr>
-          <p:cNvPr id="12" name="Text 10"/>
-          <p:cNvSpPr/>
-          <p:nvPr/>
-        </p:nvSpPr>
-        <p:spPr>
-          <a:xfrm>
-            <a:off x="3547872" y="2121408"/>
-            <a:ext cx="2121408" cy="256032"/>
-          </a:xfrm>
-          <a:prstGeom prst="rect">
-            <a:avLst/>
-          </a:prstGeom>
-          <a:noFill/>
-          <a:ln/>
-        </p:spPr>
-        <p:txBody>
-          <a:bodyPr wrap="square" lIns="0" tIns="0" rIns="0" bIns="0" rtlCol="0" anchor="t"/>
-          <a:lstStyle/>
-          <a:p>
-            <a:pPr indent="0" marL="0">
-              <a:buNone/>
-            </a:pPr>
-            <a:r>
-              <a:rPr lang="en-US" sz="1300" b="1" dirty="0">
-                <a:solidFill>
-                  <a:srgbClr val="272E52"/>
-                </a:solidFill>
-                <a:latin typeface="Arial" pitchFamily="34" charset="0"/>
-                <a:ea typeface="Arial" pitchFamily="34" charset="-122"/>
-                <a:cs typeface="Arial" pitchFamily="34" charset="-120"/>
-              </a:rPr>
-              <a:t>Container-Netze</a:t>
-            </a:r>
-            <a:endParaRPr lang="en-US" sz="1300" dirty="0"/>
-          </a:p>
-        </p:txBody>
-      </p:sp>
-      <p:sp>
-        <p:nvSpPr>
-          <p:cNvPr id="13" name="Text 11"/>
-          <p:cNvSpPr/>
-          <p:nvPr/>
-        </p:nvSpPr>
-        <p:spPr>
-          <a:xfrm>
-            <a:off x="3547872" y="2423160"/>
-            <a:ext cx="2121408" cy="1353312"/>
-          </a:xfrm>
-          <a:prstGeom prst="rect">
-            <a:avLst/>
-          </a:prstGeom>
-          <a:noFill/>
-          <a:ln/>
-        </p:spPr>
-        <p:txBody>
-          <a:bodyPr wrap="square" lIns="0" tIns="0" rIns="0" bIns="0" rtlCol="0" anchor="t"/>
-          <a:lstStyle/>
-          <a:p>
-            <a:pPr indent="0" marL="0">
-              <a:lnSpc>
-                <a:spcPct val="92000"/>
-              </a:lnSpc>
-              <a:buNone/>
-            </a:pPr>
-            <a:r>
-              <a:rPr lang="en-US" sz="1150" dirty="0">
-                <a:solidFill>
-                  <a:srgbClr val="434A63"/>
-                </a:solidFill>
-                <a:latin typeface="Arial" pitchFamily="34" charset="0"/>
-                <a:ea typeface="Arial" pitchFamily="34" charset="-122"/>
-                <a:cs typeface="Arial" pitchFamily="34" charset="-120"/>
-              </a:rPr>
-              <a:t>Mehrere Container sprechen miteinander – euer VLAN-Wissen kommt wieder, nur in klein.</a:t>
-            </a:r>
-            <a:endParaRPr lang="en-US" sz="1150" dirty="0"/>
-          </a:p>
-        </p:txBody>
-      </p:sp>
-      <p:sp>
-        <p:nvSpPr>
-          <p:cNvPr id="14" name="Shape 12"/>
-          <p:cNvSpPr/>
-          <p:nvPr/>
-        </p:nvSpPr>
-        <p:spPr>
-          <a:xfrm>
-            <a:off x="6053328" y="1975104"/>
-            <a:ext cx="2523744" cy="1920240"/>
-          </a:xfrm>
-          <a:prstGeom prst="rect">
-            <a:avLst/>
-          </a:prstGeom>
-          <a:solidFill>
-            <a:srgbClr val="F5F6FC"/>
-          </a:solidFill>
-          <a:ln/>
-        </p:spPr>
-      </p:sp>
-      <p:sp>
-        <p:nvSpPr>
-          <p:cNvPr id="15" name="Shape 13"/>
-          <p:cNvSpPr/>
-          <p:nvPr/>
-        </p:nvSpPr>
-        <p:spPr>
-          <a:xfrm>
-            <a:off x="6053328" y="1975104"/>
-            <a:ext cx="41148" cy="1920240"/>
-          </a:xfrm>
-          <a:prstGeom prst="rect">
-            <a:avLst/>
-          </a:prstGeom>
-          <a:solidFill>
-            <a:srgbClr val="0F7C86"/>
-          </a:solidFill>
-          <a:ln/>
-        </p:spPr>
-      </p:sp>
-      <p:sp>
-        <p:nvSpPr>
-          <p:cNvPr id="16" name="Text 14"/>
-          <p:cNvSpPr/>
-          <p:nvPr/>
-        </p:nvSpPr>
-        <p:spPr>
-          <a:xfrm>
-            <a:off x="6291072" y="2121408"/>
-            <a:ext cx="2121408" cy="256032"/>
-          </a:xfrm>
-          <a:prstGeom prst="rect">
-            <a:avLst/>
-          </a:prstGeom>
-          <a:noFill/>
-          <a:ln/>
-        </p:spPr>
-        <p:txBody>
-          <a:bodyPr wrap="square" lIns="0" tIns="0" rIns="0" bIns="0" rtlCol="0" anchor="t"/>
-          <a:lstStyle/>
-          <a:p>
-            <a:pPr indent="0" marL="0">
-              <a:buNone/>
-            </a:pPr>
-            <a:r>
-              <a:rPr lang="en-US" sz="1300" b="1" dirty="0">
-                <a:solidFill>
-                  <a:srgbClr val="272E52"/>
-                </a:solidFill>
-                <a:latin typeface="Arial" pitchFamily="34" charset="0"/>
-                <a:ea typeface="Arial" pitchFamily="34" charset="-122"/>
-                <a:cs typeface="Arial" pitchFamily="34" charset="-120"/>
-              </a:rPr>
-              <a:t>Nichts vorbereiten</a:t>
-            </a:r>
-            <a:endParaRPr lang="en-US" sz="1300" dirty="0"/>
-          </a:p>
-        </p:txBody>
-      </p:sp>
-      <p:sp>
-        <p:nvSpPr>
-          <p:cNvPr id="17" name="Text 15"/>
-          <p:cNvSpPr/>
-          <p:nvPr/>
-        </p:nvSpPr>
-        <p:spPr>
-          <a:xfrm>
-            <a:off x="6291072" y="2423160"/>
-            <a:ext cx="2121408" cy="1353312"/>
-          </a:xfrm>
-          <a:prstGeom prst="rect">
-            <a:avLst/>
-          </a:prstGeom>
-          <a:noFill/>
-          <a:ln/>
-        </p:spPr>
-        <p:txBody>
-          <a:bodyPr wrap="square" lIns="0" tIns="0" rIns="0" bIns="0" rtlCol="0" anchor="t"/>
-          <a:lstStyle/>
-          <a:p>
-            <a:pPr indent="0" marL="0">
-              <a:lnSpc>
-                <a:spcPct val="92000"/>
-              </a:lnSpc>
-              <a:buNone/>
-            </a:pPr>
-            <a:r>
-              <a:rPr lang="en-US" sz="1150" dirty="0">
-                <a:solidFill>
-                  <a:srgbClr val="434A63"/>
-                </a:solidFill>
-                <a:latin typeface="Arial" pitchFamily="34" charset="0"/>
-                <a:ea typeface="Arial" pitchFamily="34" charset="-122"/>
-                <a:cs typeface="Arial" pitchFamily="34" charset="-120"/>
-              </a:rPr>
-              <a:t>Docker läuft jetzt bei euch – mehr braucht es nicht. Wer mag, spielt die Kür zu Ende.</a:t>
-            </a:r>
-            <a:endParaRPr lang="en-US" sz="1150" dirty="0"/>
-          </a:p>
-        </p:txBody>
-      </p:sp>
-      <p:sp>
-        <p:nvSpPr>
-          <p:cNvPr id="18" name="Shape 16"/>
-          <p:cNvSpPr/>
-          <p:nvPr/>
-        </p:nvSpPr>
-        <p:spPr>
-          <a:xfrm>
-            <a:off x="566928" y="4160520"/>
-            <a:ext cx="32004" cy="256032"/>
-          </a:xfrm>
-          <a:prstGeom prst="rect">
-            <a:avLst/>
-          </a:prstGeom>
-          <a:solidFill>
-            <a:srgbClr val="0F7C86"/>
-          </a:solidFill>
-          <a:ln/>
-        </p:spPr>
-      </p:sp>
-      <p:sp>
-        <p:nvSpPr>
-          <p:cNvPr id="19" name="Text 17"/>
-          <p:cNvSpPr/>
-          <p:nvPr/>
-        </p:nvSpPr>
-        <p:spPr>
-          <a:xfrm>
-            <a:off x="749808" y="4114800"/>
-            <a:ext cx="7827264" cy="402336"/>
-          </a:xfrm>
-          <a:prstGeom prst="rect">
-            <a:avLst/>
-          </a:prstGeom>
-          <a:noFill/>
-          <a:ln/>
-        </p:spPr>
-        <p:txBody>
-          <a:bodyPr wrap="square" lIns="0" tIns="0" rIns="0" bIns="0" rtlCol="0" anchor="ctr"/>
-          <a:lstStyle/>
-          <a:p>
-            <a:pPr indent="0" marL="0">
-              <a:buNone/>
-            </a:pPr>
-            <a:r>
-              <a:rPr lang="en-US" sz="1200" b="1" dirty="0">
-                <a:solidFill>
-                  <a:srgbClr val="434A63"/>
-                </a:solidFill>
-                <a:latin typeface="Arial" pitchFamily="34" charset="0"/>
-                <a:ea typeface="Arial" pitchFamily="34" charset="-122"/>
-                <a:cs typeface="Arial" pitchFamily="34" charset="-120"/>
-              </a:rPr>
-              <a:t>Nächster Termin: Montag, 14. September, 18:00 Uhr – Docker: Volumes, Netze, Umgebungsvariablen.</a:t>
-            </a:r>
-            <a:endParaRPr lang="en-US" sz="1200" dirty="0"/>
-          </a:p>
-        </p:txBody>
-      </p:sp>
-      <p:sp>
-        <p:nvSpPr>
-          <p:cNvPr id="20" name="Shape 18"/>
           <p:cNvSpPr/>
           <p:nvPr/>
         </p:nvSpPr>
@@ -7206,7 +6669,7 @@
       </p:sp>
       <p:sp>
         <p:nvSpPr>
-          <p:cNvPr id="21" name="Text 19"/>
+          <p:cNvPr id="11" name="Text 9"/>
           <p:cNvSpPr/>
           <p:nvPr/>
         </p:nvSpPr>
@@ -7237,7 +6700,7 @@
                 <a:ea typeface="Arial" pitchFamily="34" charset="-122"/>
                 <a:cs typeface="Arial" pitchFamily="34" charset="-120"/>
               </a:rPr>
-              <a:t>Abschluss</a:t>
+              <a:t>Breakout</a:t>
             </a:r>
             <a:endParaRPr lang="en-US" sz="1050" dirty="0"/>
           </a:p>
@@ -7245,7 +6708,7 @@
       </p:sp>
       <p:sp>
         <p:nvSpPr>
-          <p:cNvPr id="22" name="Text 20"/>
+          <p:cNvPr id="12" name="Text 10"/>
           <p:cNvSpPr/>
           <p:nvPr/>
         </p:nvSpPr>
@@ -7276,7 +6739,7 @@
                 <a:ea typeface="Arial" pitchFamily="34" charset="-122"/>
                 <a:cs typeface="Arial" pitchFamily="34" charset="-120"/>
               </a:rPr>
-              <a:t>15/15</a:t>
+              <a:t>15/18</a:t>
             </a:r>
             <a:endParaRPr lang="en-US" sz="1050" dirty="0"/>
           </a:p>
@@ -7296,7 +6759,7 @@
     <p:bg>
       <p:bgPr>
         <a:solidFill>
-          <a:srgbClr val="F5F6FC"/>
+          <a:srgbClr val="FFFFFF"/>
         </a:solidFill>
       </p:bgPr>
     </p:bg>
@@ -7322,8 +6785,8 @@
         </p:nvSpPr>
         <p:spPr>
           <a:xfrm>
-            <a:off x="0" y="5015484"/>
-            <a:ext cx="9144000" cy="128016"/>
+            <a:off x="566928" y="201168"/>
+            <a:ext cx="475488" cy="50292"/>
           </a:xfrm>
           <a:prstGeom prst="rect">
             <a:avLst/>
@@ -7342,8 +6805,8 @@
         </p:nvSpPr>
         <p:spPr>
           <a:xfrm>
-            <a:off x="566928" y="1828800"/>
-            <a:ext cx="8010144" cy="914400"/>
+            <a:off x="566928" y="384048"/>
+            <a:ext cx="8010144" cy="237744"/>
           </a:xfrm>
           <a:prstGeom prst="rect">
             <a:avLst/>
@@ -7355,11 +6818,50 @@
           <a:bodyPr wrap="square" lIns="0" tIns="0" rIns="0" bIns="0" rtlCol="0" anchor="ctr"/>
           <a:lstStyle/>
           <a:p>
-            <a:pPr algn="ctr" indent="0" marL="0">
-              <a:buNone/>
-            </a:pPr>
-            <a:r>
-              <a:rPr lang="en-US" sz="3200" b="1" dirty="0">
+            <a:pPr indent="0" marL="0">
+              <a:buNone/>
+            </a:pPr>
+            <a:r>
+              <a:rPr lang="en-US" sz="1150" b="1" spc="180" kern="0" dirty="0">
+                <a:solidFill>
+                  <a:srgbClr val="0F7C86"/>
+                </a:solidFill>
+                <a:latin typeface="Arial" pitchFamily="34" charset="0"/>
+                <a:ea typeface="Arial" pitchFamily="34" charset="-122"/>
+                <a:cs typeface="Arial" pitchFamily="34" charset="-120"/>
+              </a:rPr>
+              <a:t>AUSWERTUNG · 25 MINUTEN</a:t>
+            </a:r>
+            <a:endParaRPr lang="en-US" sz="1150" dirty="0"/>
+          </a:p>
+        </p:txBody>
+      </p:sp>
+      <p:sp>
+        <p:nvSpPr>
+          <p:cNvPr id="4" name="Text 2"/>
+          <p:cNvSpPr/>
+          <p:nvPr/>
+        </p:nvSpPr>
+        <p:spPr>
+          <a:xfrm>
+            <a:off x="566928" y="731520"/>
+            <a:ext cx="8010144" cy="603504"/>
+          </a:xfrm>
+          <a:prstGeom prst="rect">
+            <a:avLst/>
+          </a:prstGeom>
+          <a:noFill/>
+          <a:ln/>
+        </p:spPr>
+        <p:txBody>
+          <a:bodyPr wrap="square" lIns="0" tIns="0" rIns="0" bIns="0" rtlCol="0" anchor="t"/>
+          <a:lstStyle/>
+          <a:p>
+            <a:pPr indent="0" marL="0">
+              <a:buNone/>
+            </a:pPr>
+            <a:r>
+              <a:rPr lang="en-US" sz="2600" b="1" dirty="0">
                 <a:solidFill>
                   <a:srgbClr val="272E52"/>
                 </a:solidFill>
@@ -7367,38 +6869,570 @@
                 <a:ea typeface="Arial" pitchFamily="34" charset="-122"/>
                 <a:cs typeface="Arial" pitchFamily="34" charset="-120"/>
               </a:rPr>
-              <a:t>Euer erster Container: lief.</a:t>
-            </a:r>
-            <a:endParaRPr lang="en-US" sz="3200" dirty="0"/>
-          </a:p>
-        </p:txBody>
-      </p:sp>
-      <p:sp>
-        <p:nvSpPr>
-          <p:cNvPr id="4" name="Text 2"/>
-          <p:cNvSpPr/>
-          <p:nvPr/>
-        </p:nvSpPr>
-        <p:spPr>
-          <a:xfrm>
-            <a:off x="566928" y="2788920"/>
-            <a:ext cx="8010144" cy="457200"/>
-          </a:xfrm>
-          <a:prstGeom prst="rect">
-            <a:avLst/>
-          </a:prstGeom>
-          <a:noFill/>
-          <a:ln/>
-        </p:spPr>
-        <p:txBody>
-          <a:bodyPr wrap="square" lIns="0" tIns="0" rIns="0" bIns="0" rtlCol="0" anchor="t"/>
-          <a:lstStyle/>
-          <a:p>
-            <a:pPr algn="ctr" indent="0" marL="0">
-              <a:buNone/>
-            </a:pPr>
-            <a:r>
-              <a:rPr lang="en-US" sz="1400" dirty="0">
+              <a:t>Eure Container</a:t>
+            </a:r>
+            <a:endParaRPr lang="en-US" sz="2600" dirty="0"/>
+          </a:p>
+        </p:txBody>
+      </p:sp>
+      <p:sp>
+        <p:nvSpPr>
+          <p:cNvPr id="5" name="Shape 3"/>
+          <p:cNvSpPr/>
+          <p:nvPr/>
+        </p:nvSpPr>
+        <p:spPr>
+          <a:xfrm>
+            <a:off x="438912" y="1810512"/>
+            <a:ext cx="8266176" cy="365760"/>
+          </a:xfrm>
+          <a:prstGeom prst="rect">
+            <a:avLst/>
+          </a:prstGeom>
+          <a:solidFill>
+            <a:srgbClr val="F5F6FC"/>
+          </a:solidFill>
+          <a:ln/>
+        </p:spPr>
+      </p:sp>
+      <p:sp>
+        <p:nvSpPr>
+          <p:cNvPr id="6" name="Text 4"/>
+          <p:cNvSpPr/>
+          <p:nvPr/>
+        </p:nvSpPr>
+        <p:spPr>
+          <a:xfrm>
+            <a:off x="566928" y="1810512"/>
+            <a:ext cx="548640" cy="365760"/>
+          </a:xfrm>
+          <a:prstGeom prst="rect">
+            <a:avLst/>
+          </a:prstGeom>
+          <a:noFill/>
+          <a:ln/>
+        </p:spPr>
+        <p:txBody>
+          <a:bodyPr wrap="square" lIns="0" tIns="0" rIns="0" bIns="0" rtlCol="0" anchor="ctr"/>
+          <a:lstStyle/>
+          <a:p>
+            <a:pPr indent="0" marL="0">
+              <a:buNone/>
+            </a:pPr>
+            <a:r>
+              <a:rPr lang="en-US" sz="1200" b="1" dirty="0">
+                <a:solidFill>
+                  <a:srgbClr val="0F7C86"/>
+                </a:solidFill>
+                <a:latin typeface="Courier New" pitchFamily="34" charset="0"/>
+                <a:ea typeface="Courier New" pitchFamily="34" charset="-122"/>
+                <a:cs typeface="Courier New" pitchFamily="34" charset="-120"/>
+              </a:rPr>
+              <a:t>1</a:t>
+            </a:r>
+            <a:endParaRPr lang="en-US" sz="1200" dirty="0"/>
+          </a:p>
+        </p:txBody>
+      </p:sp>
+      <p:sp>
+        <p:nvSpPr>
+          <p:cNvPr id="7" name="Text 5"/>
+          <p:cNvSpPr/>
+          <p:nvPr/>
+        </p:nvSpPr>
+        <p:spPr>
+          <a:xfrm>
+            <a:off x="1115568" y="1810512"/>
+            <a:ext cx="7461504" cy="365760"/>
+          </a:xfrm>
+          <a:prstGeom prst="rect">
+            <a:avLst/>
+          </a:prstGeom>
+          <a:noFill/>
+          <a:ln/>
+        </p:spPr>
+        <p:txBody>
+          <a:bodyPr wrap="square" lIns="0" tIns="0" rIns="0" bIns="0" rtlCol="0" anchor="ctr"/>
+          <a:lstStyle/>
+          <a:p>
+            <a:pPr indent="0" marL="0">
+              <a:buNone/>
+            </a:pPr>
+            <a:r>
+              <a:rPr lang="en-US" sz="1200" dirty="0">
+                <a:solidFill>
+                  <a:srgbClr val="434A63"/>
+                </a:solidFill>
+                <a:latin typeface="Arial" pitchFamily="34" charset="0"/>
+                <a:ea typeface="Arial" pitchFamily="34" charset="-122"/>
+                <a:cs typeface="Arial" pitchFamily="34" charset="-120"/>
+              </a:rPr>
+              <a:t>Jede Gruppe zeigt ihr docker ps: Was läuft, was ist gestoppt, was wurde aufgeräumt?</a:t>
+            </a:r>
+            <a:endParaRPr lang="en-US" sz="1200" dirty="0"/>
+          </a:p>
+        </p:txBody>
+      </p:sp>
+      <p:sp>
+        <p:nvSpPr>
+          <p:cNvPr id="8" name="Text 6"/>
+          <p:cNvSpPr/>
+          <p:nvPr/>
+        </p:nvSpPr>
+        <p:spPr>
+          <a:xfrm>
+            <a:off x="566928" y="2176272"/>
+            <a:ext cx="548640" cy="365760"/>
+          </a:xfrm>
+          <a:prstGeom prst="rect">
+            <a:avLst/>
+          </a:prstGeom>
+          <a:noFill/>
+          <a:ln/>
+        </p:spPr>
+        <p:txBody>
+          <a:bodyPr wrap="square" lIns="0" tIns="0" rIns="0" bIns="0" rtlCol="0" anchor="ctr"/>
+          <a:lstStyle/>
+          <a:p>
+            <a:pPr indent="0" marL="0">
+              <a:buNone/>
+            </a:pPr>
+            <a:r>
+              <a:rPr lang="en-US" sz="1200" b="1" dirty="0">
+                <a:solidFill>
+                  <a:srgbClr val="0F7C86"/>
+                </a:solidFill>
+                <a:latin typeface="Courier New" pitchFamily="34" charset="0"/>
+                <a:ea typeface="Courier New" pitchFamily="34" charset="-122"/>
+                <a:cs typeface="Courier New" pitchFamily="34" charset="-120"/>
+              </a:rPr>
+              <a:t>2</a:t>
+            </a:r>
+            <a:endParaRPr lang="en-US" sz="1200" dirty="0"/>
+          </a:p>
+        </p:txBody>
+      </p:sp>
+      <p:sp>
+        <p:nvSpPr>
+          <p:cNvPr id="9" name="Text 7"/>
+          <p:cNvSpPr/>
+          <p:nvPr/>
+        </p:nvSpPr>
+        <p:spPr>
+          <a:xfrm>
+            <a:off x="1115568" y="2176272"/>
+            <a:ext cx="7461504" cy="365760"/>
+          </a:xfrm>
+          <a:prstGeom prst="rect">
+            <a:avLst/>
+          </a:prstGeom>
+          <a:noFill/>
+          <a:ln/>
+        </p:spPr>
+        <p:txBody>
+          <a:bodyPr wrap="square" lIns="0" tIns="0" rIns="0" bIns="0" rtlCol="0" anchor="ctr"/>
+          <a:lstStyle/>
+          <a:p>
+            <a:pPr indent="0" marL="0">
+              <a:buNone/>
+            </a:pPr>
+            <a:r>
+              <a:rPr lang="en-US" sz="1200" dirty="0">
+                <a:solidFill>
+                  <a:srgbClr val="434A63"/>
+                </a:solidFill>
+                <a:latin typeface="Arial" pitchFamily="34" charset="0"/>
+                <a:ea typeface="Arial" pitchFamily="34" charset="-122"/>
+                <a:cs typeface="Arial" pitchFamily="34" charset="-120"/>
+              </a:rPr>
+              <a:t>Die Port-Frage: Wie kam nginx in euren Browser und wer hat da worauf weitergeleitet?</a:t>
+            </a:r>
+            <a:endParaRPr lang="en-US" sz="1200" dirty="0"/>
+          </a:p>
+        </p:txBody>
+      </p:sp>
+      <p:sp>
+        <p:nvSpPr>
+          <p:cNvPr id="10" name="Shape 8"/>
+          <p:cNvSpPr/>
+          <p:nvPr/>
+        </p:nvSpPr>
+        <p:spPr>
+          <a:xfrm>
+            <a:off x="438912" y="2542032"/>
+            <a:ext cx="8266176" cy="365760"/>
+          </a:xfrm>
+          <a:prstGeom prst="rect">
+            <a:avLst/>
+          </a:prstGeom>
+          <a:solidFill>
+            <a:srgbClr val="F5F6FC"/>
+          </a:solidFill>
+          <a:ln/>
+        </p:spPr>
+      </p:sp>
+      <p:sp>
+        <p:nvSpPr>
+          <p:cNvPr id="11" name="Text 9"/>
+          <p:cNvSpPr/>
+          <p:nvPr/>
+        </p:nvSpPr>
+        <p:spPr>
+          <a:xfrm>
+            <a:off x="566928" y="2542032"/>
+            <a:ext cx="548640" cy="365760"/>
+          </a:xfrm>
+          <a:prstGeom prst="rect">
+            <a:avLst/>
+          </a:prstGeom>
+          <a:noFill/>
+          <a:ln/>
+        </p:spPr>
+        <p:txBody>
+          <a:bodyPr wrap="square" lIns="0" tIns="0" rIns="0" bIns="0" rtlCol="0" anchor="ctr"/>
+          <a:lstStyle/>
+          <a:p>
+            <a:pPr indent="0" marL="0">
+              <a:buNone/>
+            </a:pPr>
+            <a:r>
+              <a:rPr lang="en-US" sz="1200" b="1" dirty="0">
+                <a:solidFill>
+                  <a:srgbClr val="0F7C86"/>
+                </a:solidFill>
+                <a:latin typeface="Courier New" pitchFamily="34" charset="0"/>
+                <a:ea typeface="Courier New" pitchFamily="34" charset="-122"/>
+                <a:cs typeface="Courier New" pitchFamily="34" charset="-120"/>
+              </a:rPr>
+              <a:t>3</a:t>
+            </a:r>
+            <a:endParaRPr lang="en-US" sz="1200" dirty="0"/>
+          </a:p>
+        </p:txBody>
+      </p:sp>
+      <p:sp>
+        <p:nvSpPr>
+          <p:cNvPr id="12" name="Text 10"/>
+          <p:cNvSpPr/>
+          <p:nvPr/>
+        </p:nvSpPr>
+        <p:spPr>
+          <a:xfrm>
+            <a:off x="1115568" y="2542032"/>
+            <a:ext cx="7461504" cy="365760"/>
+          </a:xfrm>
+          <a:prstGeom prst="rect">
+            <a:avLst/>
+          </a:prstGeom>
+          <a:noFill/>
+          <a:ln/>
+        </p:spPr>
+        <p:txBody>
+          <a:bodyPr wrap="square" lIns="0" tIns="0" rIns="0" bIns="0" rtlCol="0" anchor="ctr"/>
+          <a:lstStyle/>
+          <a:p>
+            <a:pPr indent="0" marL="0">
+              <a:buNone/>
+            </a:pPr>
+            <a:r>
+              <a:rPr lang="en-US" sz="1200" dirty="0">
+                <a:solidFill>
+                  <a:srgbClr val="434A63"/>
+                </a:solidFill>
+                <a:latin typeface="Arial" pitchFamily="34" charset="0"/>
+                <a:ea typeface="Arial" pitchFamily="34" charset="-122"/>
+                <a:cs typeface="Arial" pitchFamily="34" charset="-120"/>
+              </a:rPr>
+              <a:t>Vertiefungs-Runde: eigene Seiten im Browser zeigen und die Image-Größen vergleichen</a:t>
+            </a:r>
+            <a:endParaRPr lang="en-US" sz="1200" dirty="0"/>
+          </a:p>
+        </p:txBody>
+      </p:sp>
+      <p:sp>
+        <p:nvSpPr>
+          <p:cNvPr id="13" name="Text 11"/>
+          <p:cNvSpPr/>
+          <p:nvPr/>
+        </p:nvSpPr>
+        <p:spPr>
+          <a:xfrm>
+            <a:off x="566928" y="2907792"/>
+            <a:ext cx="548640" cy="365760"/>
+          </a:xfrm>
+          <a:prstGeom prst="rect">
+            <a:avLst/>
+          </a:prstGeom>
+          <a:noFill/>
+          <a:ln/>
+        </p:spPr>
+        <p:txBody>
+          <a:bodyPr wrap="square" lIns="0" tIns="0" rIns="0" bIns="0" rtlCol="0" anchor="ctr"/>
+          <a:lstStyle/>
+          <a:p>
+            <a:pPr indent="0" marL="0">
+              <a:buNone/>
+            </a:pPr>
+            <a:r>
+              <a:rPr lang="en-US" sz="1200" b="1" dirty="0">
+                <a:solidFill>
+                  <a:srgbClr val="0F7C86"/>
+                </a:solidFill>
+                <a:latin typeface="Courier New" pitchFamily="34" charset="0"/>
+                <a:ea typeface="Courier New" pitchFamily="34" charset="-122"/>
+                <a:cs typeface="Courier New" pitchFamily="34" charset="-120"/>
+              </a:rPr>
+              <a:t>4</a:t>
+            </a:r>
+            <a:endParaRPr lang="en-US" sz="1200" dirty="0"/>
+          </a:p>
+        </p:txBody>
+      </p:sp>
+      <p:sp>
+        <p:nvSpPr>
+          <p:cNvPr id="14" name="Text 12"/>
+          <p:cNvSpPr/>
+          <p:nvPr/>
+        </p:nvSpPr>
+        <p:spPr>
+          <a:xfrm>
+            <a:off x="1115568" y="2907792"/>
+            <a:ext cx="7461504" cy="365760"/>
+          </a:xfrm>
+          <a:prstGeom prst="rect">
+            <a:avLst/>
+          </a:prstGeom>
+          <a:noFill/>
+          <a:ln/>
+        </p:spPr>
+        <p:txBody>
+          <a:bodyPr wrap="square" lIns="0" tIns="0" rIns="0" bIns="0" rtlCol="0" anchor="ctr"/>
+          <a:lstStyle/>
+          <a:p>
+            <a:pPr indent="0" marL="0">
+              <a:buNone/>
+            </a:pPr>
+            <a:r>
+              <a:rPr lang="en-US" sz="1200" dirty="0">
+                <a:solidFill>
+                  <a:srgbClr val="434A63"/>
+                </a:solidFill>
+                <a:latin typeface="Arial" pitchFamily="34" charset="0"/>
+                <a:ea typeface="Arial" pitchFamily="34" charset="-122"/>
+                <a:cs typeface="Arial" pitchFamily="34" charset="-120"/>
+              </a:rPr>
+              <a:t>Wer im Bonus war: Was ist mit der Änderung im Container passiert? (Cliffhanger für Montag)</a:t>
+            </a:r>
+            <a:endParaRPr lang="en-US" sz="1200" dirty="0"/>
+          </a:p>
+        </p:txBody>
+      </p:sp>
+      <p:sp>
+        <p:nvSpPr>
+          <p:cNvPr id="15" name="Shape 13"/>
+          <p:cNvSpPr/>
+          <p:nvPr/>
+        </p:nvSpPr>
+        <p:spPr>
+          <a:xfrm>
+            <a:off x="438912" y="3273552"/>
+            <a:ext cx="8266176" cy="365760"/>
+          </a:xfrm>
+          <a:prstGeom prst="rect">
+            <a:avLst/>
+          </a:prstGeom>
+          <a:solidFill>
+            <a:srgbClr val="F5F6FC"/>
+          </a:solidFill>
+          <a:ln/>
+        </p:spPr>
+      </p:sp>
+      <p:sp>
+        <p:nvSpPr>
+          <p:cNvPr id="16" name="Text 14"/>
+          <p:cNvSpPr/>
+          <p:nvPr/>
+        </p:nvSpPr>
+        <p:spPr>
+          <a:xfrm>
+            <a:off x="566928" y="3273552"/>
+            <a:ext cx="548640" cy="365760"/>
+          </a:xfrm>
+          <a:prstGeom prst="rect">
+            <a:avLst/>
+          </a:prstGeom>
+          <a:noFill/>
+          <a:ln/>
+        </p:spPr>
+        <p:txBody>
+          <a:bodyPr wrap="square" lIns="0" tIns="0" rIns="0" bIns="0" rtlCol="0" anchor="ctr"/>
+          <a:lstStyle/>
+          <a:p>
+            <a:pPr indent="0" marL="0">
+              <a:buNone/>
+            </a:pPr>
+            <a:r>
+              <a:rPr lang="en-US" sz="1200" b="1" dirty="0">
+                <a:solidFill>
+                  <a:srgbClr val="0F7C86"/>
+                </a:solidFill>
+                <a:latin typeface="Courier New" pitchFamily="34" charset="0"/>
+                <a:ea typeface="Courier New" pitchFamily="34" charset="-122"/>
+                <a:cs typeface="Courier New" pitchFamily="34" charset="-120"/>
+              </a:rPr>
+              <a:t>5</a:t>
+            </a:r>
+            <a:endParaRPr lang="en-US" sz="1200" dirty="0"/>
+          </a:p>
+        </p:txBody>
+      </p:sp>
+      <p:sp>
+        <p:nvSpPr>
+          <p:cNvPr id="17" name="Text 15"/>
+          <p:cNvSpPr/>
+          <p:nvPr/>
+        </p:nvSpPr>
+        <p:spPr>
+          <a:xfrm>
+            <a:off x="1115568" y="3273552"/>
+            <a:ext cx="7461504" cy="365760"/>
+          </a:xfrm>
+          <a:prstGeom prst="rect">
+            <a:avLst/>
+          </a:prstGeom>
+          <a:noFill/>
+          <a:ln/>
+        </p:spPr>
+        <p:txBody>
+          <a:bodyPr wrap="square" lIns="0" tIns="0" rIns="0" bIns="0" rtlCol="0" anchor="ctr"/>
+          <a:lstStyle/>
+          <a:p>
+            <a:pPr indent="0" marL="0">
+              <a:buNone/>
+            </a:pPr>
+            <a:r>
+              <a:rPr lang="en-US" sz="1200" dirty="0">
+                <a:solidFill>
+                  <a:srgbClr val="434A63"/>
+                </a:solidFill>
+                <a:latin typeface="Arial" pitchFamily="34" charset="0"/>
+                <a:ea typeface="Arial" pitchFamily="34" charset="-122"/>
+                <a:cs typeface="Arial" pitchFamily="34" charset="-120"/>
+              </a:rPr>
+              <a:t>Der Montags-Vergleich: Die Cloud-VM brauchte rund 7 Minuten bis „Ready“. Wie lange brauchte euer Container?</a:t>
+            </a:r>
+            <a:endParaRPr lang="en-US" sz="1200" dirty="0"/>
+          </a:p>
+        </p:txBody>
+      </p:sp>
+      <p:sp>
+        <p:nvSpPr>
+          <p:cNvPr id="18" name="Shape 16"/>
+          <p:cNvSpPr/>
+          <p:nvPr/>
+        </p:nvSpPr>
+        <p:spPr>
+          <a:xfrm>
+            <a:off x="566928" y="4069080"/>
+            <a:ext cx="32004" cy="256032"/>
+          </a:xfrm>
+          <a:prstGeom prst="rect">
+            <a:avLst/>
+          </a:prstGeom>
+          <a:solidFill>
+            <a:srgbClr val="0F7C86"/>
+          </a:solidFill>
+          <a:ln/>
+        </p:spPr>
+      </p:sp>
+      <p:sp>
+        <p:nvSpPr>
+          <p:cNvPr id="19" name="Text 17"/>
+          <p:cNvSpPr/>
+          <p:nvPr/>
+        </p:nvSpPr>
+        <p:spPr>
+          <a:xfrm>
+            <a:off x="749808" y="4023360"/>
+            <a:ext cx="7827264" cy="402336"/>
+          </a:xfrm>
+          <a:prstGeom prst="rect">
+            <a:avLst/>
+          </a:prstGeom>
+          <a:noFill/>
+          <a:ln/>
+        </p:spPr>
+        <p:txBody>
+          <a:bodyPr wrap="square" lIns="0" tIns="0" rIns="0" bIns="0" rtlCol="0" anchor="ctr"/>
+          <a:lstStyle/>
+          <a:p>
+            <a:pPr indent="0" marL="0">
+              <a:buNone/>
+            </a:pPr>
+            <a:r>
+              <a:rPr lang="en-US" sz="1200" b="1" dirty="0">
+                <a:solidFill>
+                  <a:srgbClr val="434A63"/>
+                </a:solidFill>
+                <a:latin typeface="Arial" pitchFamily="34" charset="0"/>
+                <a:ea typeface="Arial" pitchFamily="34" charset="-122"/>
+                <a:cs typeface="Arial" pitchFamily="34" charset="-120"/>
+              </a:rPr>
+              <a:t>Die Port-Frage ist euer Netzwerkblock in Aktion: -p 8080:80 ist nichts anderes als eine kleine NAT-Regel.</a:t>
+            </a:r>
+            <a:endParaRPr lang="en-US" sz="1200" dirty="0"/>
+          </a:p>
+        </p:txBody>
+      </p:sp>
+      <p:sp>
+        <p:nvSpPr>
+          <p:cNvPr id="20" name="Shape 18"/>
+          <p:cNvSpPr/>
+          <p:nvPr/>
+        </p:nvSpPr>
+        <p:spPr>
+          <a:xfrm>
+            <a:off x="566928" y="4631436"/>
+            <a:ext cx="8010144" cy="0"/>
+          </a:xfrm>
+          <a:prstGeom prst="line">
+            <a:avLst/>
+          </a:prstGeom>
+          <a:noFill/>
+          <a:ln w="9525">
+            <a:solidFill>
+              <a:srgbClr val="DFE3F0"/>
+            </a:solidFill>
+            <a:prstDash val="solid"/>
+          </a:ln>
+        </p:spPr>
+      </p:sp>
+      <p:sp>
+        <p:nvSpPr>
+          <p:cNvPr id="21" name="Text 19"/>
+          <p:cNvSpPr/>
+          <p:nvPr/>
+        </p:nvSpPr>
+        <p:spPr>
+          <a:xfrm>
+            <a:off x="566928" y="4722876"/>
+            <a:ext cx="5029200" cy="237744"/>
+          </a:xfrm>
+          <a:prstGeom prst="rect">
+            <a:avLst/>
+          </a:prstGeom>
+          <a:noFill/>
+          <a:ln/>
+        </p:spPr>
+        <p:txBody>
+          <a:bodyPr wrap="square" lIns="0" tIns="0" rIns="0" bIns="0" rtlCol="0" anchor="ctr"/>
+          <a:lstStyle/>
+          <a:p>
+            <a:pPr indent="0" marL="0">
+              <a:buNone/>
+            </a:pPr>
+            <a:r>
+              <a:rPr lang="en-US" sz="1050" spc="30" kern="0" dirty="0">
                 <a:solidFill>
                   <a:srgbClr val="5C6377"/>
                 </a:solidFill>
@@ -7406,48 +7440,48 @@
                 <a:ea typeface="Arial" pitchFamily="34" charset="-122"/>
                 <a:cs typeface="Arial" pitchFamily="34" charset="-120"/>
               </a:rPr>
-              <a:t>Alle Befehle, die Anleitungen und die Stolpersteine stehen zum Nachlesen auf der Kursseite.</a:t>
-            </a:r>
-            <a:endParaRPr lang="en-US" sz="1400" dirty="0"/>
-          </a:p>
-        </p:txBody>
-      </p:sp>
-      <p:sp>
-        <p:nvSpPr>
-          <p:cNvPr id="5" name="Text 3"/>
-          <p:cNvSpPr/>
-          <p:nvPr/>
-        </p:nvSpPr>
-        <p:spPr>
-          <a:xfrm>
-            <a:off x="566928" y="3401568"/>
-            <a:ext cx="8010144" cy="457200"/>
-          </a:xfrm>
-          <a:prstGeom prst="rect">
-            <a:avLst/>
-          </a:prstGeom>
-          <a:noFill/>
-          <a:ln/>
-        </p:spPr>
-        <p:txBody>
-          <a:bodyPr wrap="square" lIns="0" tIns="0" rIns="0" bIns="0" rtlCol="0" anchor="t"/>
-          <a:lstStyle/>
-          <a:p>
-            <a:pPr algn="ctr" indent="0" marL="0">
-              <a:buNone/>
-            </a:pPr>
-            <a:r>
-              <a:rPr lang="en-US" sz="1600" b="1" dirty="0">
-                <a:solidFill>
-                  <a:srgbClr val="0F7C86"/>
-                </a:solidFill>
-                <a:latin typeface="Arial" pitchFamily="34" charset="0"/>
-                <a:ea typeface="Arial" pitchFamily="34" charset="-122"/>
-                <a:cs typeface="Arial" pitchFamily="34" charset="-120"/>
-              </a:rPr>
-              <a:t>Montag, 14. September · Docker – Aufbau</a:t>
-            </a:r>
-            <a:endParaRPr lang="en-US" sz="1600" dirty="0"/>
+              <a:t>Auswertung</a:t>
+            </a:r>
+            <a:endParaRPr lang="en-US" sz="1050" dirty="0"/>
+          </a:p>
+        </p:txBody>
+      </p:sp>
+      <p:sp>
+        <p:nvSpPr>
+          <p:cNvPr id="22" name="Text 20"/>
+          <p:cNvSpPr/>
+          <p:nvPr/>
+        </p:nvSpPr>
+        <p:spPr>
+          <a:xfrm>
+            <a:off x="8028432" y="4722876"/>
+            <a:ext cx="548640" cy="237744"/>
+          </a:xfrm>
+          <a:prstGeom prst="rect">
+            <a:avLst/>
+          </a:prstGeom>
+          <a:noFill/>
+          <a:ln/>
+        </p:spPr>
+        <p:txBody>
+          <a:bodyPr wrap="square" lIns="0" tIns="0" rIns="0" bIns="0" rtlCol="0" anchor="ctr"/>
+          <a:lstStyle/>
+          <a:p>
+            <a:pPr algn="r" indent="0" marL="0">
+              <a:buNone/>
+            </a:pPr>
+            <a:r>
+              <a:rPr lang="en-US" sz="1050" dirty="0">
+                <a:solidFill>
+                  <a:srgbClr val="5C6377"/>
+                </a:solidFill>
+                <a:latin typeface="Arial" pitchFamily="34" charset="0"/>
+                <a:ea typeface="Arial" pitchFamily="34" charset="-122"/>
+                <a:cs typeface="Arial" pitchFamily="34" charset="-120"/>
+              </a:rPr>
+              <a:t>16/18</a:t>
+            </a:r>
+            <a:endParaRPr lang="en-US" sz="1050" dirty="0"/>
           </a:p>
         </p:txBody>
       </p:sp>
@@ -7751,7 +7785,7 @@
                 <a:ea typeface="Arial" pitchFamily="34" charset="-122"/>
                 <a:cs typeface="Arial" pitchFamily="34" charset="-120"/>
               </a:rPr>
-              <a:t>VM gegen Container – warum Docker das Kapseln schlanker macht</a:t>
+              <a:t>Warum Docker: das Transportproblem, der Frachtcontainer, VM gegen Container</a:t>
             </a:r>
             <a:endParaRPr lang="en-US" sz="1050" dirty="0"/>
           </a:p>
@@ -7849,7 +7883,7 @@
                 <a:ea typeface="Arial" pitchFamily="34" charset="-122"/>
                 <a:cs typeface="Arial" pitchFamily="34" charset="-120"/>
               </a:rPr>
-              <a:t>Image, Container, Registry · docker run · Ports · Lebenszyklus · Dockerfile</a:t>
+              <a:t>Docker Engine · Grundbegriffe · docker run · Ports · Lebenszyklus · Dockerfile</a:t>
             </a:r>
             <a:endParaRPr lang="en-US" sz="1050" dirty="0"/>
           </a:p>
@@ -8025,7 +8059,7 @@
                 <a:ea typeface="Arial" pitchFamily="34" charset="-122"/>
                 <a:cs typeface="Arial" pitchFamily="34" charset="-120"/>
               </a:rPr>
-              <a:t>Werkzeug einrichten: Docker Desktop – gemeinsam, Schritt für Schritt</a:t>
+              <a:t>Werkzeug einrichten: Docker Desktop gemeinsam, Schritt für Schritt</a:t>
             </a:r>
             <a:endParaRPr lang="en-US" sz="1050" dirty="0"/>
           </a:p>
@@ -8201,7 +8235,7 @@
                 <a:ea typeface="Arial" pitchFamily="34" charset="-122"/>
                 <a:cs typeface="Arial" pitchFamily="34" charset="-120"/>
               </a:rPr>
-              <a:t>Breakout: erster Container, dann ein eigenes Image</a:t>
+              <a:t>Breakout: erster Container, als Vertiefung ein eigenes Image</a:t>
             </a:r>
             <a:endParaRPr lang="en-US" sz="1050" dirty="0"/>
           </a:p>
@@ -8279,7 +8313,7 @@
                 <a:ea typeface="Arial" pitchFamily="34" charset="-122"/>
                 <a:cs typeface="Arial" pitchFamily="34" charset="-120"/>
               </a:rPr>
-              <a:t>Auswertung: eure Container und die Kür-Images</a:t>
+              <a:t>Auswertung: eure Container und die selbst gebauten Images</a:t>
             </a:r>
             <a:endParaRPr lang="en-US" sz="1050" dirty="0"/>
           </a:p>
@@ -8377,7 +8411,7 @@
                 <a:ea typeface="Arial" pitchFamily="34" charset="-122"/>
                 <a:cs typeface="Arial" pitchFamily="34" charset="-120"/>
               </a:rPr>
-              <a:t>Wo Container überall stecken – und der Ausblick</a:t>
+              <a:t>Wo Container überall stecken und der Ausblick</a:t>
             </a:r>
             <a:endParaRPr lang="en-US" sz="1050" dirty="0"/>
           </a:p>
@@ -8436,7 +8470,7 @@
                 <a:ea typeface="Arial" pitchFamily="34" charset="-122"/>
                 <a:cs typeface="Arial" pitchFamily="34" charset="-120"/>
               </a:rPr>
-              <a:t>Der Netzwerk- und der Virtualisierungs-Blick zahlen sich heute doppelt aus – Docker baut auf beidem auf.</a:t>
+              <a:t>Der Netzwerkblick und der Virtualisierungsblick zahlen sich heute doppelt aus, denn Docker baut auf beidem auf.</a:t>
             </a:r>
             <a:endParaRPr lang="en-US" sz="1200" dirty="0"/>
           </a:p>
@@ -8537,9 +8571,1184 @@
                 <a:ea typeface="Arial" pitchFamily="34" charset="-122"/>
                 <a:cs typeface="Arial" pitchFamily="34" charset="-120"/>
               </a:rPr>
-              <a:t>1/15</a:t>
+              <a:t>1/18</a:t>
             </a:r>
             <a:endParaRPr lang="en-US" sz="1050" dirty="0"/>
+          </a:p>
+        </p:txBody>
+      </p:sp>
+    </p:spTree>
+  </p:cSld>
+  <p:clrMapOvr>
+    <a:masterClrMapping/>
+  </p:clrMapOvr>
+</p:sld>
+</file>
+
+<file path=ppt/slides/slide20.xml><?xml version="1.0" encoding="utf-8"?>
+<p:sld xmlns:a="http://schemas.openxmlformats.org/drawingml/2006/main" xmlns:r="http://schemas.openxmlformats.org/officeDocument/2006/relationships" xmlns:p="http://schemas.openxmlformats.org/presentationml/2006/main">
+  <p:cSld name="Slide 20">
+    <p:bg>
+      <p:bgPr>
+        <a:solidFill>
+          <a:srgbClr val="FFFFFF"/>
+        </a:solidFill>
+      </p:bgPr>
+    </p:bg>
+    <p:spTree>
+      <p:nvGrpSpPr>
+        <p:cNvPr id="1" name=""/>
+        <p:cNvGrpSpPr/>
+        <p:nvPr/>
+      </p:nvGrpSpPr>
+      <p:grpSpPr>
+        <a:xfrm>
+          <a:off x="0" y="0"/>
+          <a:ext cx="0" cy="0"/>
+          <a:chOff x="0" y="0"/>
+          <a:chExt cx="0" cy="0"/>
+        </a:xfrm>
+      </p:grpSpPr>
+      <p:sp>
+        <p:nvSpPr>
+          <p:cNvPr id="2" name="Shape 0"/>
+          <p:cNvSpPr/>
+          <p:nvPr/>
+        </p:nvSpPr>
+        <p:spPr>
+          <a:xfrm>
+            <a:off x="566928" y="201168"/>
+            <a:ext cx="475488" cy="50292"/>
+          </a:xfrm>
+          <a:prstGeom prst="rect">
+            <a:avLst/>
+          </a:prstGeom>
+          <a:solidFill>
+            <a:srgbClr val="0F7C86"/>
+          </a:solidFill>
+          <a:ln/>
+        </p:spPr>
+      </p:sp>
+      <p:sp>
+        <p:nvSpPr>
+          <p:cNvPr id="3" name="Text 1"/>
+          <p:cNvSpPr/>
+          <p:nvPr/>
+        </p:nvSpPr>
+        <p:spPr>
+          <a:xfrm>
+            <a:off x="566928" y="384048"/>
+            <a:ext cx="8010144" cy="237744"/>
+          </a:xfrm>
+          <a:prstGeom prst="rect">
+            <a:avLst/>
+          </a:prstGeom>
+          <a:noFill/>
+          <a:ln/>
+        </p:spPr>
+        <p:txBody>
+          <a:bodyPr wrap="square" lIns="0" tIns="0" rIns="0" bIns="0" rtlCol="0" anchor="ctr"/>
+          <a:lstStyle/>
+          <a:p>
+            <a:pPr indent="0" marL="0">
+              <a:buNone/>
+            </a:pPr>
+            <a:r>
+              <a:rPr lang="en-US" sz="1150" b="1" spc="180" kern="0" dirty="0">
+                <a:solidFill>
+                  <a:srgbClr val="0F7C86"/>
+                </a:solidFill>
+                <a:latin typeface="Arial" pitchFamily="34" charset="0"/>
+                <a:ea typeface="Arial" pitchFamily="34" charset="-122"/>
+                <a:cs typeface="Arial" pitchFamily="34" charset="-120"/>
+              </a:rPr>
+              <a:t>DER BLICK NACH VORN</a:t>
+            </a:r>
+            <a:endParaRPr lang="en-US" sz="1150" dirty="0"/>
+          </a:p>
+        </p:txBody>
+      </p:sp>
+      <p:sp>
+        <p:nvSpPr>
+          <p:cNvPr id="4" name="Text 2"/>
+          <p:cNvSpPr/>
+          <p:nvPr/>
+        </p:nvSpPr>
+        <p:spPr>
+          <a:xfrm>
+            <a:off x="566928" y="731520"/>
+            <a:ext cx="8010144" cy="603504"/>
+          </a:xfrm>
+          <a:prstGeom prst="rect">
+            <a:avLst/>
+          </a:prstGeom>
+          <a:noFill/>
+          <a:ln/>
+        </p:spPr>
+        <p:txBody>
+          <a:bodyPr wrap="square" lIns="0" tIns="0" rIns="0" bIns="0" rtlCol="0" anchor="t"/>
+          <a:lstStyle/>
+          <a:p>
+            <a:pPr indent="0" marL="0">
+              <a:buNone/>
+            </a:pPr>
+            <a:r>
+              <a:rPr lang="en-US" sz="2600" b="1" dirty="0">
+                <a:solidFill>
+                  <a:srgbClr val="272E52"/>
+                </a:solidFill>
+                <a:latin typeface="Arial" pitchFamily="34" charset="0"/>
+                <a:ea typeface="Arial" pitchFamily="34" charset="-122"/>
+                <a:cs typeface="Arial" pitchFamily="34" charset="-120"/>
+              </a:rPr>
+              <a:t>Wo Container überall stecken</a:t>
+            </a:r>
+            <a:endParaRPr lang="en-US" sz="2600" dirty="0"/>
+          </a:p>
+        </p:txBody>
+      </p:sp>
+      <p:pic>
+        <p:nvPicPr>
+          <p:cNvPr id="5" name="Image 0" descr="/Users/jacobmenge/Desktop/kurs-26.2b-orga/folienwerkstatt/assets/diagramme/container-orte.png">    </p:cNvPr>
+          <p:cNvPicPr>
+            <a:picLocks noChangeAspect="1"/>
+          </p:cNvPicPr>
+          <p:nvPr/>
+        </p:nvPicPr>
+        <p:blipFill>
+          <a:blip r:embed="rId1"/>
+          <a:stretch>
+            <a:fillRect/>
+          </a:stretch>
+        </p:blipFill>
+        <p:spPr>
+          <a:xfrm>
+            <a:off x="566928" y="1444752"/>
+            <a:ext cx="8010144" cy="2432304"/>
+          </a:xfrm>
+          <a:prstGeom prst="rect">
+            <a:avLst/>
+          </a:prstGeom>
+        </p:spPr>
+      </p:pic>
+      <p:sp>
+        <p:nvSpPr>
+          <p:cNvPr id="6" name="Shape 3"/>
+          <p:cNvSpPr/>
+          <p:nvPr/>
+        </p:nvSpPr>
+        <p:spPr>
+          <a:xfrm>
+            <a:off x="566928" y="4087368"/>
+            <a:ext cx="32004" cy="256032"/>
+          </a:xfrm>
+          <a:prstGeom prst="rect">
+            <a:avLst/>
+          </a:prstGeom>
+          <a:solidFill>
+            <a:srgbClr val="0F7C86"/>
+          </a:solidFill>
+          <a:ln/>
+        </p:spPr>
+      </p:sp>
+      <p:sp>
+        <p:nvSpPr>
+          <p:cNvPr id="7" name="Text 4"/>
+          <p:cNvSpPr/>
+          <p:nvPr/>
+        </p:nvSpPr>
+        <p:spPr>
+          <a:xfrm>
+            <a:off x="749808" y="4041648"/>
+            <a:ext cx="7827264" cy="402336"/>
+          </a:xfrm>
+          <a:prstGeom prst="rect">
+            <a:avLst/>
+          </a:prstGeom>
+          <a:noFill/>
+          <a:ln/>
+        </p:spPr>
+        <p:txBody>
+          <a:bodyPr wrap="square" lIns="0" tIns="0" rIns="0" bIns="0" rtlCol="0" anchor="ctr"/>
+          <a:lstStyle/>
+          <a:p>
+            <a:pPr indent="0" marL="0">
+              <a:buNone/>
+            </a:pPr>
+            <a:r>
+              <a:rPr lang="en-US" sz="1200" b="1" dirty="0">
+                <a:solidFill>
+                  <a:srgbClr val="434A63"/>
+                </a:solidFill>
+                <a:latin typeface="Arial" pitchFamily="34" charset="0"/>
+                <a:ea typeface="Arial" pitchFamily="34" charset="-122"/>
+                <a:cs typeface="Arial" pitchFamily="34" charset="-120"/>
+              </a:rPr>
+              <a:t>Merksatz des Abends: Image = Bauplan, Container = laufende Instanz und Wegwerfen ist wieder erlaubt.</a:t>
+            </a:r>
+            <a:endParaRPr lang="en-US" sz="1200" dirty="0"/>
+          </a:p>
+        </p:txBody>
+      </p:sp>
+      <p:sp>
+        <p:nvSpPr>
+          <p:cNvPr id="8" name="Shape 5"/>
+          <p:cNvSpPr/>
+          <p:nvPr/>
+        </p:nvSpPr>
+        <p:spPr>
+          <a:xfrm>
+            <a:off x="566928" y="4631436"/>
+            <a:ext cx="8010144" cy="0"/>
+          </a:xfrm>
+          <a:prstGeom prst="line">
+            <a:avLst/>
+          </a:prstGeom>
+          <a:noFill/>
+          <a:ln w="9525">
+            <a:solidFill>
+              <a:srgbClr val="DFE3F0"/>
+            </a:solidFill>
+            <a:prstDash val="solid"/>
+          </a:ln>
+        </p:spPr>
+      </p:sp>
+      <p:sp>
+        <p:nvSpPr>
+          <p:cNvPr id="9" name="Text 6"/>
+          <p:cNvSpPr/>
+          <p:nvPr/>
+        </p:nvSpPr>
+        <p:spPr>
+          <a:xfrm>
+            <a:off x="566928" y="4722876"/>
+            <a:ext cx="5029200" cy="237744"/>
+          </a:xfrm>
+          <a:prstGeom prst="rect">
+            <a:avLst/>
+          </a:prstGeom>
+          <a:noFill/>
+          <a:ln/>
+        </p:spPr>
+        <p:txBody>
+          <a:bodyPr wrap="square" lIns="0" tIns="0" rIns="0" bIns="0" rtlCol="0" anchor="ctr"/>
+          <a:lstStyle/>
+          <a:p>
+            <a:pPr indent="0" marL="0">
+              <a:buNone/>
+            </a:pPr>
+            <a:r>
+              <a:rPr lang="en-US" sz="1050" spc="30" kern="0" dirty="0">
+                <a:solidFill>
+                  <a:srgbClr val="5C6377"/>
+                </a:solidFill>
+                <a:latin typeface="Arial" pitchFamily="34" charset="0"/>
+                <a:ea typeface="Arial" pitchFamily="34" charset="-122"/>
+                <a:cs typeface="Arial" pitchFamily="34" charset="-120"/>
+              </a:rPr>
+              <a:t>Auswertung</a:t>
+            </a:r>
+            <a:endParaRPr lang="en-US" sz="1050" dirty="0"/>
+          </a:p>
+        </p:txBody>
+      </p:sp>
+      <p:sp>
+        <p:nvSpPr>
+          <p:cNvPr id="10" name="Text 7"/>
+          <p:cNvSpPr/>
+          <p:nvPr/>
+        </p:nvSpPr>
+        <p:spPr>
+          <a:xfrm>
+            <a:off x="8028432" y="4722876"/>
+            <a:ext cx="548640" cy="237744"/>
+          </a:xfrm>
+          <a:prstGeom prst="rect">
+            <a:avLst/>
+          </a:prstGeom>
+          <a:noFill/>
+          <a:ln/>
+        </p:spPr>
+        <p:txBody>
+          <a:bodyPr wrap="square" lIns="0" tIns="0" rIns="0" bIns="0" rtlCol="0" anchor="ctr"/>
+          <a:lstStyle/>
+          <a:p>
+            <a:pPr algn="r" indent="0" marL="0">
+              <a:buNone/>
+            </a:pPr>
+            <a:r>
+              <a:rPr lang="en-US" sz="1050" dirty="0">
+                <a:solidFill>
+                  <a:srgbClr val="5C6377"/>
+                </a:solidFill>
+                <a:latin typeface="Arial" pitchFamily="34" charset="0"/>
+                <a:ea typeface="Arial" pitchFamily="34" charset="-122"/>
+                <a:cs typeface="Arial" pitchFamily="34" charset="-120"/>
+              </a:rPr>
+              <a:t>17/18</a:t>
+            </a:r>
+            <a:endParaRPr lang="en-US" sz="1050" dirty="0"/>
+          </a:p>
+        </p:txBody>
+      </p:sp>
+    </p:spTree>
+  </p:cSld>
+  <p:clrMapOvr>
+    <a:masterClrMapping/>
+  </p:clrMapOvr>
+</p:sld>
+</file>
+
+<file path=ppt/slides/slide21.xml><?xml version="1.0" encoding="utf-8"?>
+<p:sld xmlns:a="http://schemas.openxmlformats.org/drawingml/2006/main" xmlns:r="http://schemas.openxmlformats.org/officeDocument/2006/relationships" xmlns:p="http://schemas.openxmlformats.org/presentationml/2006/main">
+  <p:cSld name="Slide 21">
+    <p:bg>
+      <p:bgPr>
+        <a:solidFill>
+          <a:srgbClr val="FFFFFF"/>
+        </a:solidFill>
+      </p:bgPr>
+    </p:bg>
+    <p:spTree>
+      <p:nvGrpSpPr>
+        <p:cNvPr id="1" name=""/>
+        <p:cNvGrpSpPr/>
+        <p:nvPr/>
+      </p:nvGrpSpPr>
+      <p:grpSpPr>
+        <a:xfrm>
+          <a:off x="0" y="0"/>
+          <a:ext cx="0" cy="0"/>
+          <a:chOff x="0" y="0"/>
+          <a:chExt cx="0" cy="0"/>
+        </a:xfrm>
+      </p:grpSpPr>
+      <p:sp>
+        <p:nvSpPr>
+          <p:cNvPr id="2" name="Shape 0"/>
+          <p:cNvSpPr/>
+          <p:nvPr/>
+        </p:nvSpPr>
+        <p:spPr>
+          <a:xfrm>
+            <a:off x="566928" y="201168"/>
+            <a:ext cx="475488" cy="50292"/>
+          </a:xfrm>
+          <a:prstGeom prst="rect">
+            <a:avLst/>
+          </a:prstGeom>
+          <a:solidFill>
+            <a:srgbClr val="0F7C86"/>
+          </a:solidFill>
+          <a:ln/>
+        </p:spPr>
+      </p:sp>
+      <p:sp>
+        <p:nvSpPr>
+          <p:cNvPr id="3" name="Text 1"/>
+          <p:cNvSpPr/>
+          <p:nvPr/>
+        </p:nvSpPr>
+        <p:spPr>
+          <a:xfrm>
+            <a:off x="566928" y="384048"/>
+            <a:ext cx="8010144" cy="237744"/>
+          </a:xfrm>
+          <a:prstGeom prst="rect">
+            <a:avLst/>
+          </a:prstGeom>
+          <a:noFill/>
+          <a:ln/>
+        </p:spPr>
+        <p:txBody>
+          <a:bodyPr wrap="square" lIns="0" tIns="0" rIns="0" bIns="0" rtlCol="0" anchor="ctr"/>
+          <a:lstStyle/>
+          <a:p>
+            <a:pPr indent="0" marL="0">
+              <a:buNone/>
+            </a:pPr>
+            <a:r>
+              <a:rPr lang="en-US" sz="1150" b="1" spc="180" kern="0" dirty="0">
+                <a:solidFill>
+                  <a:srgbClr val="0F7C86"/>
+                </a:solidFill>
+                <a:latin typeface="Arial" pitchFamily="34" charset="0"/>
+                <a:ea typeface="Arial" pitchFamily="34" charset="-122"/>
+                <a:cs typeface="Arial" pitchFamily="34" charset="-120"/>
+              </a:rPr>
+              <a:t>AUSBLICK</a:t>
+            </a:r>
+            <a:endParaRPr lang="en-US" sz="1150" dirty="0"/>
+          </a:p>
+        </p:txBody>
+      </p:sp>
+      <p:sp>
+        <p:nvSpPr>
+          <p:cNvPr id="4" name="Text 2"/>
+          <p:cNvSpPr/>
+          <p:nvPr/>
+        </p:nvSpPr>
+        <p:spPr>
+          <a:xfrm>
+            <a:off x="566928" y="731520"/>
+            <a:ext cx="8010144" cy="603504"/>
+          </a:xfrm>
+          <a:prstGeom prst="rect">
+            <a:avLst/>
+          </a:prstGeom>
+          <a:noFill/>
+          <a:ln/>
+        </p:spPr>
+        <p:txBody>
+          <a:bodyPr wrap="square" lIns="0" tIns="0" rIns="0" bIns="0" rtlCol="0" anchor="t"/>
+          <a:lstStyle/>
+          <a:p>
+            <a:pPr indent="0" marL="0">
+              <a:buNone/>
+            </a:pPr>
+            <a:r>
+              <a:rPr lang="en-US" sz="2600" b="1" dirty="0">
+                <a:solidFill>
+                  <a:srgbClr val="272E52"/>
+                </a:solidFill>
+                <a:latin typeface="Arial" pitchFamily="34" charset="0"/>
+                <a:ea typeface="Arial" pitchFamily="34" charset="-122"/>
+                <a:cs typeface="Arial" pitchFamily="34" charset="-120"/>
+              </a:rPr>
+              <a:t>Bis Montag</a:t>
+            </a:r>
+            <a:endParaRPr lang="en-US" sz="2600" dirty="0"/>
+          </a:p>
+        </p:txBody>
+      </p:sp>
+      <p:sp>
+        <p:nvSpPr>
+          <p:cNvPr id="5" name="Text 3"/>
+          <p:cNvSpPr/>
+          <p:nvPr/>
+        </p:nvSpPr>
+        <p:spPr>
+          <a:xfrm>
+            <a:off x="566928" y="1444752"/>
+            <a:ext cx="8010144" cy="438912"/>
+          </a:xfrm>
+          <a:prstGeom prst="rect">
+            <a:avLst/>
+          </a:prstGeom>
+          <a:noFill/>
+          <a:ln/>
+        </p:spPr>
+        <p:txBody>
+          <a:bodyPr wrap="square" lIns="0" tIns="0" rIns="0" bIns="0" rtlCol="0" anchor="t"/>
+          <a:lstStyle/>
+          <a:p>
+            <a:pPr indent="0" marL="0">
+              <a:buNone/>
+            </a:pPr>
+            <a:r>
+              <a:rPr lang="en-US" sz="1300" dirty="0">
+                <a:solidFill>
+                  <a:srgbClr val="5C6377"/>
+                </a:solidFill>
+                <a:latin typeface="Arial" pitchFamily="34" charset="0"/>
+                <a:ea typeface="Arial" pitchFamily="34" charset="-122"/>
+                <a:cs typeface="Arial" pitchFamily="34" charset="-120"/>
+              </a:rPr>
+              <a:t>Montag geht es in die Tiefe: Was passiert mit Daten, wenn der Container stirbt?</a:t>
+            </a:r>
+            <a:endParaRPr lang="en-US" sz="1300" dirty="0"/>
+          </a:p>
+        </p:txBody>
+      </p:sp>
+      <p:sp>
+        <p:nvSpPr>
+          <p:cNvPr id="6" name="Shape 4"/>
+          <p:cNvSpPr/>
+          <p:nvPr/>
+        </p:nvSpPr>
+        <p:spPr>
+          <a:xfrm>
+            <a:off x="566928" y="1975104"/>
+            <a:ext cx="2523744" cy="1920240"/>
+          </a:xfrm>
+          <a:prstGeom prst="rect">
+            <a:avLst/>
+          </a:prstGeom>
+          <a:solidFill>
+            <a:srgbClr val="F5F6FC"/>
+          </a:solidFill>
+          <a:ln/>
+        </p:spPr>
+      </p:sp>
+      <p:sp>
+        <p:nvSpPr>
+          <p:cNvPr id="7" name="Shape 5"/>
+          <p:cNvSpPr/>
+          <p:nvPr/>
+        </p:nvSpPr>
+        <p:spPr>
+          <a:xfrm>
+            <a:off x="566928" y="1975104"/>
+            <a:ext cx="41148" cy="1920240"/>
+          </a:xfrm>
+          <a:prstGeom prst="rect">
+            <a:avLst/>
+          </a:prstGeom>
+          <a:solidFill>
+            <a:srgbClr val="0F7C86"/>
+          </a:solidFill>
+          <a:ln/>
+        </p:spPr>
+      </p:sp>
+      <p:sp>
+        <p:nvSpPr>
+          <p:cNvPr id="8" name="Text 6"/>
+          <p:cNvSpPr/>
+          <p:nvPr/>
+        </p:nvSpPr>
+        <p:spPr>
+          <a:xfrm>
+            <a:off x="804672" y="2121408"/>
+            <a:ext cx="2121408" cy="256032"/>
+          </a:xfrm>
+          <a:prstGeom prst="rect">
+            <a:avLst/>
+          </a:prstGeom>
+          <a:noFill/>
+          <a:ln/>
+        </p:spPr>
+        <p:txBody>
+          <a:bodyPr wrap="square" lIns="0" tIns="0" rIns="0" bIns="0" rtlCol="0" anchor="t"/>
+          <a:lstStyle/>
+          <a:p>
+            <a:pPr indent="0" marL="0">
+              <a:buNone/>
+            </a:pPr>
+            <a:r>
+              <a:rPr lang="en-US" sz="1300" b="1" dirty="0">
+                <a:solidFill>
+                  <a:srgbClr val="272E52"/>
+                </a:solidFill>
+                <a:latin typeface="Arial" pitchFamily="34" charset="0"/>
+                <a:ea typeface="Arial" pitchFamily="34" charset="-122"/>
+                <a:cs typeface="Arial" pitchFamily="34" charset="-120"/>
+              </a:rPr>
+              <a:t>Volumes</a:t>
+            </a:r>
+            <a:endParaRPr lang="en-US" sz="1300" dirty="0"/>
+          </a:p>
+        </p:txBody>
+      </p:sp>
+      <p:sp>
+        <p:nvSpPr>
+          <p:cNvPr id="9" name="Text 7"/>
+          <p:cNvSpPr/>
+          <p:nvPr/>
+        </p:nvSpPr>
+        <p:spPr>
+          <a:xfrm>
+            <a:off x="804672" y="2423160"/>
+            <a:ext cx="2121408" cy="1353312"/>
+          </a:xfrm>
+          <a:prstGeom prst="rect">
+            <a:avLst/>
+          </a:prstGeom>
+          <a:noFill/>
+          <a:ln/>
+        </p:spPr>
+        <p:txBody>
+          <a:bodyPr wrap="square" lIns="0" tIns="0" rIns="0" bIns="0" rtlCol="0" anchor="t"/>
+          <a:lstStyle/>
+          <a:p>
+            <a:pPr indent="0" marL="0">
+              <a:lnSpc>
+                <a:spcPct val="92000"/>
+              </a:lnSpc>
+              <a:buNone/>
+            </a:pPr>
+            <a:r>
+              <a:rPr lang="en-US" sz="1150" dirty="0">
+                <a:solidFill>
+                  <a:srgbClr val="434A63"/>
+                </a:solidFill>
+                <a:latin typeface="Arial" pitchFamily="34" charset="0"/>
+                <a:ea typeface="Arial" pitchFamily="34" charset="-122"/>
+                <a:cs typeface="Arial" pitchFamily="34" charset="-120"/>
+              </a:rPr>
+              <a:t>Container weg heißt Daten weg, außer man gibt ihnen ein Zuhause. Genau dafür sind Volumes da.</a:t>
+            </a:r>
+            <a:endParaRPr lang="en-US" sz="1150" dirty="0"/>
+          </a:p>
+        </p:txBody>
+      </p:sp>
+      <p:sp>
+        <p:nvSpPr>
+          <p:cNvPr id="10" name="Shape 8"/>
+          <p:cNvSpPr/>
+          <p:nvPr/>
+        </p:nvSpPr>
+        <p:spPr>
+          <a:xfrm>
+            <a:off x="3310128" y="1975104"/>
+            <a:ext cx="2523744" cy="1920240"/>
+          </a:xfrm>
+          <a:prstGeom prst="rect">
+            <a:avLst/>
+          </a:prstGeom>
+          <a:solidFill>
+            <a:srgbClr val="F5F6FC"/>
+          </a:solidFill>
+          <a:ln/>
+        </p:spPr>
+      </p:sp>
+      <p:sp>
+        <p:nvSpPr>
+          <p:cNvPr id="11" name="Shape 9"/>
+          <p:cNvSpPr/>
+          <p:nvPr/>
+        </p:nvSpPr>
+        <p:spPr>
+          <a:xfrm>
+            <a:off x="3310128" y="1975104"/>
+            <a:ext cx="41148" cy="1920240"/>
+          </a:xfrm>
+          <a:prstGeom prst="rect">
+            <a:avLst/>
+          </a:prstGeom>
+          <a:solidFill>
+            <a:srgbClr val="0F7C86"/>
+          </a:solidFill>
+          <a:ln/>
+        </p:spPr>
+      </p:sp>
+      <p:sp>
+        <p:nvSpPr>
+          <p:cNvPr id="12" name="Text 10"/>
+          <p:cNvSpPr/>
+          <p:nvPr/>
+        </p:nvSpPr>
+        <p:spPr>
+          <a:xfrm>
+            <a:off x="3547872" y="2121408"/>
+            <a:ext cx="2121408" cy="256032"/>
+          </a:xfrm>
+          <a:prstGeom prst="rect">
+            <a:avLst/>
+          </a:prstGeom>
+          <a:noFill/>
+          <a:ln/>
+        </p:spPr>
+        <p:txBody>
+          <a:bodyPr wrap="square" lIns="0" tIns="0" rIns="0" bIns="0" rtlCol="0" anchor="t"/>
+          <a:lstStyle/>
+          <a:p>
+            <a:pPr indent="0" marL="0">
+              <a:buNone/>
+            </a:pPr>
+            <a:r>
+              <a:rPr lang="en-US" sz="1300" b="1" dirty="0">
+                <a:solidFill>
+                  <a:srgbClr val="272E52"/>
+                </a:solidFill>
+                <a:latin typeface="Arial" pitchFamily="34" charset="0"/>
+                <a:ea typeface="Arial" pitchFamily="34" charset="-122"/>
+                <a:cs typeface="Arial" pitchFamily="34" charset="-120"/>
+              </a:rPr>
+              <a:t>Container-Netze</a:t>
+            </a:r>
+            <a:endParaRPr lang="en-US" sz="1300" dirty="0"/>
+          </a:p>
+        </p:txBody>
+      </p:sp>
+      <p:sp>
+        <p:nvSpPr>
+          <p:cNvPr id="13" name="Text 11"/>
+          <p:cNvSpPr/>
+          <p:nvPr/>
+        </p:nvSpPr>
+        <p:spPr>
+          <a:xfrm>
+            <a:off x="3547872" y="2423160"/>
+            <a:ext cx="2121408" cy="1353312"/>
+          </a:xfrm>
+          <a:prstGeom prst="rect">
+            <a:avLst/>
+          </a:prstGeom>
+          <a:noFill/>
+          <a:ln/>
+        </p:spPr>
+        <p:txBody>
+          <a:bodyPr wrap="square" lIns="0" tIns="0" rIns="0" bIns="0" rtlCol="0" anchor="t"/>
+          <a:lstStyle/>
+          <a:p>
+            <a:pPr indent="0" marL="0">
+              <a:lnSpc>
+                <a:spcPct val="92000"/>
+              </a:lnSpc>
+              <a:buNone/>
+            </a:pPr>
+            <a:r>
+              <a:rPr lang="en-US" sz="1150" dirty="0">
+                <a:solidFill>
+                  <a:srgbClr val="434A63"/>
+                </a:solidFill>
+                <a:latin typeface="Arial" pitchFamily="34" charset="0"/>
+                <a:ea typeface="Arial" pitchFamily="34" charset="-122"/>
+                <a:cs typeface="Arial" pitchFamily="34" charset="-120"/>
+              </a:rPr>
+              <a:t>Mehrere Container sprechen miteinander. Euer VLAN-Wissen kommt wieder, nur in klein.</a:t>
+            </a:r>
+            <a:endParaRPr lang="en-US" sz="1150" dirty="0"/>
+          </a:p>
+        </p:txBody>
+      </p:sp>
+      <p:sp>
+        <p:nvSpPr>
+          <p:cNvPr id="14" name="Shape 12"/>
+          <p:cNvSpPr/>
+          <p:nvPr/>
+        </p:nvSpPr>
+        <p:spPr>
+          <a:xfrm>
+            <a:off x="6053328" y="1975104"/>
+            <a:ext cx="2523744" cy="1920240"/>
+          </a:xfrm>
+          <a:prstGeom prst="rect">
+            <a:avLst/>
+          </a:prstGeom>
+          <a:solidFill>
+            <a:srgbClr val="F5F6FC"/>
+          </a:solidFill>
+          <a:ln/>
+        </p:spPr>
+      </p:sp>
+      <p:sp>
+        <p:nvSpPr>
+          <p:cNvPr id="15" name="Shape 13"/>
+          <p:cNvSpPr/>
+          <p:nvPr/>
+        </p:nvSpPr>
+        <p:spPr>
+          <a:xfrm>
+            <a:off x="6053328" y="1975104"/>
+            <a:ext cx="41148" cy="1920240"/>
+          </a:xfrm>
+          <a:prstGeom prst="rect">
+            <a:avLst/>
+          </a:prstGeom>
+          <a:solidFill>
+            <a:srgbClr val="0F7C86"/>
+          </a:solidFill>
+          <a:ln/>
+        </p:spPr>
+      </p:sp>
+      <p:sp>
+        <p:nvSpPr>
+          <p:cNvPr id="16" name="Text 14"/>
+          <p:cNvSpPr/>
+          <p:nvPr/>
+        </p:nvSpPr>
+        <p:spPr>
+          <a:xfrm>
+            <a:off x="6291072" y="2121408"/>
+            <a:ext cx="2121408" cy="256032"/>
+          </a:xfrm>
+          <a:prstGeom prst="rect">
+            <a:avLst/>
+          </a:prstGeom>
+          <a:noFill/>
+          <a:ln/>
+        </p:spPr>
+        <p:txBody>
+          <a:bodyPr wrap="square" lIns="0" tIns="0" rIns="0" bIns="0" rtlCol="0" anchor="t"/>
+          <a:lstStyle/>
+          <a:p>
+            <a:pPr indent="0" marL="0">
+              <a:buNone/>
+            </a:pPr>
+            <a:r>
+              <a:rPr lang="en-US" sz="1300" b="1" dirty="0">
+                <a:solidFill>
+                  <a:srgbClr val="272E52"/>
+                </a:solidFill>
+                <a:latin typeface="Arial" pitchFamily="34" charset="0"/>
+                <a:ea typeface="Arial" pitchFamily="34" charset="-122"/>
+                <a:cs typeface="Arial" pitchFamily="34" charset="-120"/>
+              </a:rPr>
+              <a:t>Nichts vorbereiten</a:t>
+            </a:r>
+            <a:endParaRPr lang="en-US" sz="1300" dirty="0"/>
+          </a:p>
+        </p:txBody>
+      </p:sp>
+      <p:sp>
+        <p:nvSpPr>
+          <p:cNvPr id="17" name="Text 15"/>
+          <p:cNvSpPr/>
+          <p:nvPr/>
+        </p:nvSpPr>
+        <p:spPr>
+          <a:xfrm>
+            <a:off x="6291072" y="2423160"/>
+            <a:ext cx="2121408" cy="1353312"/>
+          </a:xfrm>
+          <a:prstGeom prst="rect">
+            <a:avLst/>
+          </a:prstGeom>
+          <a:noFill/>
+          <a:ln/>
+        </p:spPr>
+        <p:txBody>
+          <a:bodyPr wrap="square" lIns="0" tIns="0" rIns="0" bIns="0" rtlCol="0" anchor="t"/>
+          <a:lstStyle/>
+          <a:p>
+            <a:pPr indent="0" marL="0">
+              <a:lnSpc>
+                <a:spcPct val="92000"/>
+              </a:lnSpc>
+              <a:buNone/>
+            </a:pPr>
+            <a:r>
+              <a:rPr lang="en-US" sz="1150" dirty="0">
+                <a:solidFill>
+                  <a:srgbClr val="434A63"/>
+                </a:solidFill>
+                <a:latin typeface="Arial" pitchFamily="34" charset="0"/>
+                <a:ea typeface="Arial" pitchFamily="34" charset="-122"/>
+                <a:cs typeface="Arial" pitchFamily="34" charset="-120"/>
+              </a:rPr>
+              <a:t>Docker läuft jetzt bei euch, mehr braucht es nicht. Wer mag, baut die Vertiefung zu Ende.</a:t>
+            </a:r>
+            <a:endParaRPr lang="en-US" sz="1150" dirty="0"/>
+          </a:p>
+        </p:txBody>
+      </p:sp>
+      <p:sp>
+        <p:nvSpPr>
+          <p:cNvPr id="18" name="Shape 16"/>
+          <p:cNvSpPr/>
+          <p:nvPr/>
+        </p:nvSpPr>
+        <p:spPr>
+          <a:xfrm>
+            <a:off x="566928" y="4160520"/>
+            <a:ext cx="32004" cy="256032"/>
+          </a:xfrm>
+          <a:prstGeom prst="rect">
+            <a:avLst/>
+          </a:prstGeom>
+          <a:solidFill>
+            <a:srgbClr val="0F7C86"/>
+          </a:solidFill>
+          <a:ln/>
+        </p:spPr>
+      </p:sp>
+      <p:sp>
+        <p:nvSpPr>
+          <p:cNvPr id="19" name="Text 17"/>
+          <p:cNvSpPr/>
+          <p:nvPr/>
+        </p:nvSpPr>
+        <p:spPr>
+          <a:xfrm>
+            <a:off x="749808" y="4114800"/>
+            <a:ext cx="7827264" cy="402336"/>
+          </a:xfrm>
+          <a:prstGeom prst="rect">
+            <a:avLst/>
+          </a:prstGeom>
+          <a:noFill/>
+          <a:ln/>
+        </p:spPr>
+        <p:txBody>
+          <a:bodyPr wrap="square" lIns="0" tIns="0" rIns="0" bIns="0" rtlCol="0" anchor="ctr"/>
+          <a:lstStyle/>
+          <a:p>
+            <a:pPr indent="0" marL="0">
+              <a:buNone/>
+            </a:pPr>
+            <a:r>
+              <a:rPr lang="en-US" sz="1200" b="1" dirty="0">
+                <a:solidFill>
+                  <a:srgbClr val="434A63"/>
+                </a:solidFill>
+                <a:latin typeface="Arial" pitchFamily="34" charset="0"/>
+                <a:ea typeface="Arial" pitchFamily="34" charset="-122"/>
+                <a:cs typeface="Arial" pitchFamily="34" charset="-120"/>
+              </a:rPr>
+              <a:t>Nächster Termin: Montag, 14. September um 18:00 Uhr mit Volumes, Netzen und Umgebungsvariablen.</a:t>
+            </a:r>
+            <a:endParaRPr lang="en-US" sz="1200" dirty="0"/>
+          </a:p>
+        </p:txBody>
+      </p:sp>
+      <p:sp>
+        <p:nvSpPr>
+          <p:cNvPr id="20" name="Shape 18"/>
+          <p:cNvSpPr/>
+          <p:nvPr/>
+        </p:nvSpPr>
+        <p:spPr>
+          <a:xfrm>
+            <a:off x="566928" y="4631436"/>
+            <a:ext cx="8010144" cy="0"/>
+          </a:xfrm>
+          <a:prstGeom prst="line">
+            <a:avLst/>
+          </a:prstGeom>
+          <a:noFill/>
+          <a:ln w="9525">
+            <a:solidFill>
+              <a:srgbClr val="DFE3F0"/>
+            </a:solidFill>
+            <a:prstDash val="solid"/>
+          </a:ln>
+        </p:spPr>
+      </p:sp>
+      <p:sp>
+        <p:nvSpPr>
+          <p:cNvPr id="21" name="Text 19"/>
+          <p:cNvSpPr/>
+          <p:nvPr/>
+        </p:nvSpPr>
+        <p:spPr>
+          <a:xfrm>
+            <a:off x="566928" y="4722876"/>
+            <a:ext cx="5029200" cy="237744"/>
+          </a:xfrm>
+          <a:prstGeom prst="rect">
+            <a:avLst/>
+          </a:prstGeom>
+          <a:noFill/>
+          <a:ln/>
+        </p:spPr>
+        <p:txBody>
+          <a:bodyPr wrap="square" lIns="0" tIns="0" rIns="0" bIns="0" rtlCol="0" anchor="ctr"/>
+          <a:lstStyle/>
+          <a:p>
+            <a:pPr indent="0" marL="0">
+              <a:buNone/>
+            </a:pPr>
+            <a:r>
+              <a:rPr lang="en-US" sz="1050" spc="30" kern="0" dirty="0">
+                <a:solidFill>
+                  <a:srgbClr val="5C6377"/>
+                </a:solidFill>
+                <a:latin typeface="Arial" pitchFamily="34" charset="0"/>
+                <a:ea typeface="Arial" pitchFamily="34" charset="-122"/>
+                <a:cs typeface="Arial" pitchFamily="34" charset="-120"/>
+              </a:rPr>
+              <a:t>Abschluss</a:t>
+            </a:r>
+            <a:endParaRPr lang="en-US" sz="1050" dirty="0"/>
+          </a:p>
+        </p:txBody>
+      </p:sp>
+      <p:sp>
+        <p:nvSpPr>
+          <p:cNvPr id="22" name="Text 20"/>
+          <p:cNvSpPr/>
+          <p:nvPr/>
+        </p:nvSpPr>
+        <p:spPr>
+          <a:xfrm>
+            <a:off x="8028432" y="4722876"/>
+            <a:ext cx="548640" cy="237744"/>
+          </a:xfrm>
+          <a:prstGeom prst="rect">
+            <a:avLst/>
+          </a:prstGeom>
+          <a:noFill/>
+          <a:ln/>
+        </p:spPr>
+        <p:txBody>
+          <a:bodyPr wrap="square" lIns="0" tIns="0" rIns="0" bIns="0" rtlCol="0" anchor="ctr"/>
+          <a:lstStyle/>
+          <a:p>
+            <a:pPr algn="r" indent="0" marL="0">
+              <a:buNone/>
+            </a:pPr>
+            <a:r>
+              <a:rPr lang="en-US" sz="1050" dirty="0">
+                <a:solidFill>
+                  <a:srgbClr val="5C6377"/>
+                </a:solidFill>
+                <a:latin typeface="Arial" pitchFamily="34" charset="0"/>
+                <a:ea typeface="Arial" pitchFamily="34" charset="-122"/>
+                <a:cs typeface="Arial" pitchFamily="34" charset="-120"/>
+              </a:rPr>
+              <a:t>18/18</a:t>
+            </a:r>
+            <a:endParaRPr lang="en-US" sz="1050" dirty="0"/>
+          </a:p>
+        </p:txBody>
+      </p:sp>
+    </p:spTree>
+  </p:cSld>
+  <p:clrMapOvr>
+    <a:masterClrMapping/>
+  </p:clrMapOvr>
+</p:sld>
+</file>
+
+<file path=ppt/slides/slide22.xml><?xml version="1.0" encoding="utf-8"?>
+<p:sld xmlns:a="http://schemas.openxmlformats.org/drawingml/2006/main" xmlns:r="http://schemas.openxmlformats.org/officeDocument/2006/relationships" xmlns:p="http://schemas.openxmlformats.org/presentationml/2006/main">
+  <p:cSld name="Slide 22">
+    <p:bg>
+      <p:bgPr>
+        <a:solidFill>
+          <a:srgbClr val="F5F6FC"/>
+        </a:solidFill>
+      </p:bgPr>
+    </p:bg>
+    <p:spTree>
+      <p:nvGrpSpPr>
+        <p:cNvPr id="1" name=""/>
+        <p:cNvGrpSpPr/>
+        <p:nvPr/>
+      </p:nvGrpSpPr>
+      <p:grpSpPr>
+        <a:xfrm>
+          <a:off x="0" y="0"/>
+          <a:ext cx="0" cy="0"/>
+          <a:chOff x="0" y="0"/>
+          <a:chExt cx="0" cy="0"/>
+        </a:xfrm>
+      </p:grpSpPr>
+      <p:sp>
+        <p:nvSpPr>
+          <p:cNvPr id="2" name="Shape 0"/>
+          <p:cNvSpPr/>
+          <p:nvPr/>
+        </p:nvSpPr>
+        <p:spPr>
+          <a:xfrm>
+            <a:off x="0" y="5015484"/>
+            <a:ext cx="9144000" cy="128016"/>
+          </a:xfrm>
+          <a:prstGeom prst="rect">
+            <a:avLst/>
+          </a:prstGeom>
+          <a:solidFill>
+            <a:srgbClr val="0F7C86"/>
+          </a:solidFill>
+          <a:ln/>
+        </p:spPr>
+      </p:sp>
+      <p:sp>
+        <p:nvSpPr>
+          <p:cNvPr id="3" name="Text 1"/>
+          <p:cNvSpPr/>
+          <p:nvPr/>
+        </p:nvSpPr>
+        <p:spPr>
+          <a:xfrm>
+            <a:off x="566928" y="1828800"/>
+            <a:ext cx="8010144" cy="914400"/>
+          </a:xfrm>
+          <a:prstGeom prst="rect">
+            <a:avLst/>
+          </a:prstGeom>
+          <a:noFill/>
+          <a:ln/>
+        </p:spPr>
+        <p:txBody>
+          <a:bodyPr wrap="square" lIns="0" tIns="0" rIns="0" bIns="0" rtlCol="0" anchor="ctr"/>
+          <a:lstStyle/>
+          <a:p>
+            <a:pPr algn="ctr" indent="0" marL="0">
+              <a:buNone/>
+            </a:pPr>
+            <a:r>
+              <a:rPr lang="en-US" sz="3200" b="1" dirty="0">
+                <a:solidFill>
+                  <a:srgbClr val="272E52"/>
+                </a:solidFill>
+                <a:latin typeface="Arial" pitchFamily="34" charset="0"/>
+                <a:ea typeface="Arial" pitchFamily="34" charset="-122"/>
+                <a:cs typeface="Arial" pitchFamily="34" charset="-120"/>
+              </a:rPr>
+              <a:t>Euer erster Container: lief.</a:t>
+            </a:r>
+            <a:endParaRPr lang="en-US" sz="3200" dirty="0"/>
+          </a:p>
+        </p:txBody>
+      </p:sp>
+      <p:sp>
+        <p:nvSpPr>
+          <p:cNvPr id="4" name="Text 2"/>
+          <p:cNvSpPr/>
+          <p:nvPr/>
+        </p:nvSpPr>
+        <p:spPr>
+          <a:xfrm>
+            <a:off x="566928" y="2788920"/>
+            <a:ext cx="8010144" cy="457200"/>
+          </a:xfrm>
+          <a:prstGeom prst="rect">
+            <a:avLst/>
+          </a:prstGeom>
+          <a:noFill/>
+          <a:ln/>
+        </p:spPr>
+        <p:txBody>
+          <a:bodyPr wrap="square" lIns="0" tIns="0" rIns="0" bIns="0" rtlCol="0" anchor="t"/>
+          <a:lstStyle/>
+          <a:p>
+            <a:pPr algn="ctr" indent="0" marL="0">
+              <a:buNone/>
+            </a:pPr>
+            <a:r>
+              <a:rPr lang="en-US" sz="1400" dirty="0">
+                <a:solidFill>
+                  <a:srgbClr val="5C6377"/>
+                </a:solidFill>
+                <a:latin typeface="Arial" pitchFamily="34" charset="0"/>
+                <a:ea typeface="Arial" pitchFamily="34" charset="-122"/>
+                <a:cs typeface="Arial" pitchFamily="34" charset="-120"/>
+              </a:rPr>
+              <a:t>Alle Befehle, die Anleitungen und die Stolpersteine stehen zum Nachlesen auf der Kursseite.</a:t>
+            </a:r>
+            <a:endParaRPr lang="en-US" sz="1400" dirty="0"/>
+          </a:p>
+        </p:txBody>
+      </p:sp>
+      <p:sp>
+        <p:nvSpPr>
+          <p:cNvPr id="5" name="Text 3"/>
+          <p:cNvSpPr/>
+          <p:nvPr/>
+        </p:nvSpPr>
+        <p:spPr>
+          <a:xfrm>
+            <a:off x="566928" y="3401568"/>
+            <a:ext cx="8010144" cy="457200"/>
+          </a:xfrm>
+          <a:prstGeom prst="rect">
+            <a:avLst/>
+          </a:prstGeom>
+          <a:noFill/>
+          <a:ln/>
+        </p:spPr>
+        <p:txBody>
+          <a:bodyPr wrap="square" lIns="0" tIns="0" rIns="0" bIns="0" rtlCol="0" anchor="t"/>
+          <a:lstStyle/>
+          <a:p>
+            <a:pPr algn="ctr" indent="0" marL="0">
+              <a:buNone/>
+            </a:pPr>
+            <a:r>
+              <a:rPr lang="en-US" sz="1600" b="1" dirty="0">
+                <a:solidFill>
+                  <a:srgbClr val="0F7C86"/>
+                </a:solidFill>
+                <a:latin typeface="Arial" pitchFamily="34" charset="0"/>
+                <a:ea typeface="Arial" pitchFamily="34" charset="-122"/>
+                <a:cs typeface="Arial" pitchFamily="34" charset="-120"/>
+              </a:rPr>
+              <a:t>Montag, 14. September · Docker Aufbau</a:t>
+            </a:r>
+            <a:endParaRPr lang="en-US" sz="1600" dirty="0"/>
           </a:p>
         </p:txBody>
       </p:sp>
@@ -8628,7 +9837,7 @@
                 <a:ea typeface="Arial" pitchFamily="34" charset="-122"/>
                 <a:cs typeface="Arial" pitchFamily="34" charset="-120"/>
               </a:rPr>
-              <a:t>ANTWORT IN DEN CHAT – 60 SEKUNDEN</a:t>
+              <a:t>ANTWORT IN DEN CHAT, 60 SEKUNDEN</a:t>
             </a:r>
             <a:endParaRPr lang="en-US" sz="1150" dirty="0"/>
           </a:p>
@@ -8723,7 +9932,7 @@
                 <a:ea typeface="Arial" pitchFamily="34" charset="-122"/>
                 <a:cs typeface="Arial" pitchFamily="34" charset="-120"/>
               </a:rPr>
-              <a:t>Host · Gast · Hypervisor – wer ist wer?</a:t>
+              <a:t>Host · Gast · Hypervisor: Wer ist wer?</a:t>
             </a:r>
             <a:endParaRPr lang="en-US" sz="2400" dirty="0"/>
           </a:p>
@@ -8782,7 +9991,7 @@
                 <a:ea typeface="Arial" pitchFamily="34" charset="-122"/>
                 <a:cs typeface="Arial" pitchFamily="34" charset="-120"/>
               </a:rPr>
-              <a:t>Aus dem Kopf – die drei tragen gleich den Vergleich mit Docker.</a:t>
+              <a:t>Aus dem Kopf bitte. Die drei tragen gleich den Vergleich mit Docker.</a:t>
             </a:r>
             <a:endParaRPr lang="en-US" sz="1200" dirty="0"/>
           </a:p>
@@ -8883,7 +10092,7 @@
                 <a:ea typeface="Arial" pitchFamily="34" charset="-122"/>
                 <a:cs typeface="Arial" pitchFamily="34" charset="-120"/>
               </a:rPr>
-              <a:t>2/15</a:t>
+              <a:t>2/18</a:t>
             </a:r>
             <a:endParaRPr lang="en-US" sz="1050" dirty="0"/>
           </a:p>
@@ -9096,7 +10305,7 @@
                 <a:ea typeface="Arial" pitchFamily="34" charset="-122"/>
                 <a:cs typeface="Arial" pitchFamily="34" charset="-120"/>
               </a:rPr>
-              <a:t>Genau das Bild von Montag. Merkt euch den Gast mit eigenem Betriebssystem – da setzt Docker gleich den Hebel an.</a:t>
+              <a:t>Genau das Bild von Montag. Merkt euch den Gast mit eigenem Betriebssystem, denn da setzt Docker gleich den Hebel an.</a:t>
             </a:r>
             <a:endParaRPr lang="en-US" sz="1200" dirty="0"/>
           </a:p>
@@ -9197,7 +10406,7 @@
                 <a:ea typeface="Arial" pitchFamily="34" charset="-122"/>
                 <a:cs typeface="Arial" pitchFamily="34" charset="-120"/>
               </a:rPr>
-              <a:t>3/15</a:t>
+              <a:t>3/18</a:t>
             </a:r>
             <a:endParaRPr lang="en-US" sz="1050" dirty="0"/>
           </a:p>
@@ -9367,7 +10576,7 @@
                 <a:ea typeface="Arial" pitchFamily="34" charset="-122"/>
                 <a:cs typeface="Arial" pitchFamily="34" charset="-120"/>
               </a:rPr>
-              <a:t>Kapseln ohne Ballast</a:t>
+              <a:t>Die Idee dahinter</a:t>
             </a:r>
             <a:endParaRPr lang="en-US" sz="3000" dirty="0"/>
           </a:p>
@@ -9406,7 +10615,7 @@
                 <a:ea typeface="Arial" pitchFamily="34" charset="-122"/>
                 <a:cs typeface="Arial" pitchFamily="34" charset="-120"/>
               </a:rPr>
-              <a:t>VM gegen Container</a:t>
+              <a:t>Vom Frachtcontainer zum Docker-Container</a:t>
             </a:r>
             <a:endParaRPr lang="en-US" sz="1350" dirty="0"/>
           </a:p>
@@ -9497,7 +10706,7 @@
                 <a:ea typeface="Arial" pitchFamily="34" charset="-122"/>
                 <a:cs typeface="Arial" pitchFamily="34" charset="-120"/>
               </a:rPr>
-              <a:t>DER UNTERSCHIED AUF EINEN BLICK</a:t>
+              <a:t>DAS PROBLEM</a:t>
             </a:r>
             <a:endParaRPr lang="en-US" sz="1150" dirty="0"/>
           </a:p>
@@ -9536,7 +10745,7 @@
                 <a:ea typeface="Arial" pitchFamily="34" charset="-122"/>
                 <a:cs typeface="Arial" pitchFamily="34" charset="-120"/>
               </a:rPr>
-              <a:t>VM und Container im Vergleich</a:t>
+              <a:t>„Bei mir läuft es aber!“</a:t>
             </a:r>
             <a:endParaRPr lang="en-US" sz="2600" dirty="0"/>
           </a:p>
@@ -9544,7 +10753,7 @@
       </p:sp>
       <p:pic>
         <p:nvPicPr>
-          <p:cNvPr id="5" name="Image 0" descr="/Users/jacobmenge/Desktop/kurs-26.2b-orga/folienwerkstatt/assets/diagramme/vm-vs-container.png">    </p:cNvPr>
+          <p:cNvPr id="5" name="Image 0" descr="/Users/jacobmenge/Desktop/kurs-26.2b-orga/folienwerkstatt/assets/diagramme/bei-mir-laeufts.png">    </p:cNvPr>
           <p:cNvPicPr>
             <a:picLocks noChangeAspect="1"/>
           </p:cNvPicPr>
@@ -9558,8 +10767,8 @@
         </p:blipFill>
         <p:spPr>
           <a:xfrm>
-            <a:off x="566928" y="1444752"/>
-            <a:ext cx="8010144" cy="2487168"/>
+            <a:off x="566928" y="1517904"/>
+            <a:ext cx="8010144" cy="2157984"/>
           </a:xfrm>
           <a:prstGeom prst="rect">
             <a:avLst/>
@@ -9574,7 +10783,7 @@
         </p:nvSpPr>
         <p:spPr>
           <a:xfrm>
-            <a:off x="566928" y="4142232"/>
+            <a:off x="566928" y="3977640"/>
             <a:ext cx="32004" cy="256032"/>
           </a:xfrm>
           <a:prstGeom prst="rect">
@@ -9594,7 +10803,7 @@
         </p:nvSpPr>
         <p:spPr>
           <a:xfrm>
-            <a:off x="749808" y="4096512"/>
+            <a:off x="749808" y="3931920"/>
             <a:ext cx="7827264" cy="402336"/>
           </a:xfrm>
           <a:prstGeom prst="rect">
@@ -9619,7 +10828,7 @@
                 <a:ea typeface="Arial" pitchFamily="34" charset="-122"/>
                 <a:cs typeface="Arial" pitchFamily="34" charset="-120"/>
               </a:rPr>
-              <a:t>Beides kapselt. Die VM ein ganzes System – der Container nur die Anwendung. Das spart Gigabytes und Minuten.</a:t>
+              <a:t>Den Satz kennt ihr aus jedem Deployment. Der Code ist derselbe, die Umgebung nicht.</a:t>
             </a:r>
             <a:endParaRPr lang="en-US" sz="1200" dirty="0"/>
           </a:p>
@@ -9720,7 +10929,7 @@
                 <a:ea typeface="Arial" pitchFamily="34" charset="-122"/>
                 <a:cs typeface="Arial" pitchFamily="34" charset="-120"/>
               </a:rPr>
-              <a:t>4/15</a:t>
+              <a:t>4/18</a:t>
             </a:r>
             <a:endParaRPr lang="en-US" sz="1050" dirty="0"/>
           </a:p>
@@ -9811,7 +11020,7 @@
                 <a:ea typeface="Arial" pitchFamily="34" charset="-122"/>
                 <a:cs typeface="Arial" pitchFamily="34" charset="-120"/>
               </a:rPr>
-              <a:t>DIE DREI GRUNDBEGRIFFE</a:t>
+              <a:t>DER FRACHTCONTAINER</a:t>
             </a:r>
             <a:endParaRPr lang="en-US" sz="1150" dirty="0"/>
           </a:p>
@@ -9850,7 +11059,7 @@
                 <a:ea typeface="Arial" pitchFamily="34" charset="-122"/>
                 <a:cs typeface="Arial" pitchFamily="34" charset="-120"/>
               </a:rPr>
-              <a:t>Image, Container, Registry</a:t>
+              <a:t>Die Lösung ist 70 Jahre alt</a:t>
             </a:r>
             <a:endParaRPr lang="en-US" sz="2600" dirty="0"/>
           </a:p>
@@ -9858,7 +11067,7 @@
       </p:sp>
       <p:pic>
         <p:nvPicPr>
-          <p:cNvPr id="5" name="Image 0" descr="/Users/jacobmenge/Desktop/kurs-26.2b-orga/folienwerkstatt/assets/diagramme/image-container.png">    </p:cNvPr>
+          <p:cNvPr id="5" name="Image 0" descr="/Users/jacobmenge/Desktop/kurs-26.2b-orga/folienwerkstatt/assets/diagramme/schiff-parallele.png">    </p:cNvPr>
           <p:cNvPicPr>
             <a:picLocks noChangeAspect="1"/>
           </p:cNvPicPr>
@@ -9872,8 +11081,8 @@
         </p:blipFill>
         <p:spPr>
           <a:xfrm>
-            <a:off x="566928" y="1481328"/>
-            <a:ext cx="8010144" cy="2414016"/>
+            <a:off x="566928" y="1426464"/>
+            <a:ext cx="8010144" cy="2487168"/>
           </a:xfrm>
           <a:prstGeom prst="rect">
             <a:avLst/>
@@ -9888,7 +11097,7 @@
         </p:nvSpPr>
         <p:spPr>
           <a:xfrm>
-            <a:off x="566928" y="4069080"/>
+            <a:off x="566928" y="4087368"/>
             <a:ext cx="32004" cy="256032"/>
           </a:xfrm>
           <a:prstGeom prst="rect">
@@ -9908,7 +11117,7 @@
         </p:nvSpPr>
         <p:spPr>
           <a:xfrm>
-            <a:off x="749808" y="4023360"/>
+            <a:off x="749808" y="4041648"/>
             <a:ext cx="7827264" cy="402336"/>
           </a:xfrm>
           <a:prstGeom prst="rect">
@@ -9933,7 +11142,7 @@
                 <a:ea typeface="Arial" pitchFamily="34" charset="-122"/>
                 <a:cs typeface="Arial" pitchFamily="34" charset="-120"/>
               </a:rPr>
-              <a:t>Backform und Kuchen: Das Image ist der unveränderliche Bauplan, jeder Container eine laufende Instanz davon.</a:t>
+              <a:t>Daher der Name: Docker packt Software in genormte Container. Was drin ist, muss den Rechner nicht mehr kümmern.</a:t>
             </a:r>
             <a:endParaRPr lang="en-US" sz="1200" dirty="0"/>
           </a:p>
@@ -10034,7 +11243,7 @@
                 <a:ea typeface="Arial" pitchFamily="34" charset="-122"/>
                 <a:cs typeface="Arial" pitchFamily="34" charset="-120"/>
               </a:rPr>
-              <a:t>5/15</a:t>
+              <a:t>5/18</a:t>
             </a:r>
             <a:endParaRPr lang="en-US" sz="1050" dirty="0"/>
           </a:p>
@@ -10125,7 +11334,7 @@
                 <a:ea typeface="Arial" pitchFamily="34" charset="-122"/>
                 <a:cs typeface="Arial" pitchFamily="34" charset="-120"/>
               </a:rPr>
-              <a:t>EIN BEFEHL, VIER SCHRITTE</a:t>
+              <a:t>DER UNTERSCHIED AUF EINEN BLICK</a:t>
             </a:r>
             <a:endParaRPr lang="en-US" sz="1150" dirty="0"/>
           </a:p>
@@ -10164,7 +11373,7 @@
                 <a:ea typeface="Arial" pitchFamily="34" charset="-122"/>
                 <a:cs typeface="Arial" pitchFamily="34" charset="-120"/>
               </a:rPr>
-              <a:t>Was bei docker run passiert</a:t>
+              <a:t>VM und Container im Vergleich</a:t>
             </a:r>
             <a:endParaRPr lang="en-US" sz="2600" dirty="0"/>
           </a:p>
@@ -10172,7 +11381,7 @@
       </p:sp>
       <p:pic>
         <p:nvPicPr>
-          <p:cNvPr id="5" name="Image 0" descr="/Users/jacobmenge/Desktop/kurs-26.2b-orga/folienwerkstatt/assets/diagramme/docker-run.png">    </p:cNvPr>
+          <p:cNvPr id="5" name="Image 0" descr="/Users/jacobmenge/Desktop/kurs-26.2b-orga/folienwerkstatt/assets/diagramme/vm-vs-container.png">    </p:cNvPr>
           <p:cNvPicPr>
             <a:picLocks noChangeAspect="1"/>
           </p:cNvPicPr>
@@ -10186,8 +11395,8 @@
         </p:blipFill>
         <p:spPr>
           <a:xfrm>
-            <a:off x="566928" y="1600200"/>
-            <a:ext cx="8010144" cy="1920240"/>
+            <a:off x="566928" y="1444752"/>
+            <a:ext cx="8010144" cy="2487168"/>
           </a:xfrm>
           <a:prstGeom prst="rect">
             <a:avLst/>
@@ -10202,7 +11411,7 @@
         </p:nvSpPr>
         <p:spPr>
           <a:xfrm>
-            <a:off x="566928" y="3886200"/>
+            <a:off x="566928" y="4142232"/>
             <a:ext cx="32004" cy="256032"/>
           </a:xfrm>
           <a:prstGeom prst="rect">
@@ -10222,7 +11431,7 @@
         </p:nvSpPr>
         <p:spPr>
           <a:xfrm>
-            <a:off x="749808" y="3840480"/>
+            <a:off x="749808" y="4096512"/>
             <a:ext cx="7827264" cy="402336"/>
           </a:xfrm>
           <a:prstGeom prst="rect">
@@ -10247,7 +11456,7 @@
                 <a:ea typeface="Arial" pitchFamily="34" charset="-122"/>
                 <a:cs typeface="Arial" pitchFamily="34" charset="-120"/>
               </a:rPr>
-              <a:t>Genau diesen Befehl tippt ihr nach der Pause als Erstes – dann seht ihr alle vier Schritte live.</a:t>
+              <a:t>Beides kapselt: die VM ein ganzes System, der Container nur die Anwendung. Das spart Gigabytes und Minuten.</a:t>
             </a:r>
             <a:endParaRPr lang="en-US" sz="1200" dirty="0"/>
           </a:p>
@@ -10348,7 +11557,7 @@
                 <a:ea typeface="Arial" pitchFamily="34" charset="-122"/>
                 <a:cs typeface="Arial" pitchFamily="34" charset="-120"/>
               </a:rPr>
-              <a:t>6/15</a:t>
+              <a:t>6/18</a:t>
             </a:r>
             <a:endParaRPr lang="en-US" sz="1050" dirty="0"/>
           </a:p>
@@ -10439,7 +11648,7 @@
                 <a:ea typeface="Arial" pitchFamily="34" charset="-122"/>
                 <a:cs typeface="Arial" pitchFamily="34" charset="-120"/>
               </a:rPr>
-              <a:t>PORT-MAPPING</a:t>
+              <a:t>DIE DOCKER ENGINE</a:t>
             </a:r>
             <a:endParaRPr lang="en-US" sz="1150" dirty="0"/>
           </a:p>
@@ -10478,7 +11687,7 @@
                 <a:ea typeface="Arial" pitchFamily="34" charset="-122"/>
                 <a:cs typeface="Arial" pitchFamily="34" charset="-120"/>
               </a:rPr>
-              <a:t>Wie kommt der Container in den Browser?</a:t>
+              <a:t>Wie Docker ohne Hypervisor isoliert</a:t>
             </a:r>
             <a:endParaRPr lang="en-US" sz="2600" dirty="0"/>
           </a:p>
@@ -10486,7 +11695,7 @@
       </p:sp>
       <p:pic>
         <p:nvPicPr>
-          <p:cNvPr id="5" name="Image 0" descr="/Users/jacobmenge/Desktop/kurs-26.2b-orga/folienwerkstatt/assets/diagramme/port-mapping.png">    </p:cNvPr>
+          <p:cNvPr id="5" name="Image 0" descr="/Users/jacobmenge/Desktop/kurs-26.2b-orga/folienwerkstatt/assets/diagramme/docker-engine.png">    </p:cNvPr>
           <p:cNvPicPr>
             <a:picLocks noChangeAspect="1"/>
           </p:cNvPicPr>
@@ -10500,8 +11709,8 @@
         </p:blipFill>
         <p:spPr>
           <a:xfrm>
-            <a:off x="566928" y="1517904"/>
-            <a:ext cx="8010144" cy="2286000"/>
+            <a:off x="566928" y="1463040"/>
+            <a:ext cx="8010144" cy="2395728"/>
           </a:xfrm>
           <a:prstGeom prst="rect">
             <a:avLst/>
@@ -10516,7 +11725,7 @@
         </p:nvSpPr>
         <p:spPr>
           <a:xfrm>
-            <a:off x="566928" y="4069080"/>
+            <a:off x="566928" y="4087368"/>
             <a:ext cx="32004" cy="256032"/>
           </a:xfrm>
           <a:prstGeom prst="rect">
@@ -10536,7 +11745,7 @@
         </p:nvSpPr>
         <p:spPr>
           <a:xfrm>
-            <a:off x="749808" y="4023360"/>
+            <a:off x="749808" y="4041648"/>
             <a:ext cx="7827264" cy="402336"/>
           </a:xfrm>
           <a:prstGeom prst="rect">
@@ -10561,7 +11770,7 @@
                 <a:ea typeface="Arial" pitchFamily="34" charset="-122"/>
                 <a:cs typeface="Arial" pitchFamily="34" charset="-120"/>
               </a:rPr>
-              <a:t>Ohne -p bleibt der Container für sich. Erst die Weiterleitung macht ihn von außen erreichbar.</a:t>
+              <a:t>Der Kernel ist der Kern des Betriebssystems, der Prozesse und Ressourcen verwaltet. Isolation kann er von Haus aus.</a:t>
             </a:r>
             <a:endParaRPr lang="en-US" sz="1200" dirty="0"/>
           </a:p>
@@ -10662,7 +11871,7 @@
                 <a:ea typeface="Arial" pitchFamily="34" charset="-122"/>
                 <a:cs typeface="Arial" pitchFamily="34" charset="-120"/>
               </a:rPr>
-              <a:t>7/15</a:t>
+              <a:t>7/18</a:t>
             </a:r>
             <a:endParaRPr lang="en-US" sz="1050" dirty="0"/>
           </a:p>
